--- a/files/damumed-band-prezentaciya.pptx
+++ b/files/damumed-band-prezentaciya.pptx
@@ -2229,6 +2229,10 @@
           </a:solidFill>
           <a:ln/>
         </p:spPr>
+        <p:txBody>
+          <a:bodyPr/>
+          <a:p/>
+        </p:txBody>
       </p:sp>
       <p:sp>
         <p:nvSpPr>
@@ -2380,6 +2384,10 @@
           </a:solidFill>
           <a:ln/>
         </p:spPr>
+        <p:txBody>
+          <a:bodyPr/>
+          <a:p/>
+        </p:txBody>
       </p:sp>
       <p:sp>
         <p:nvSpPr>
@@ -2501,6 +2509,10 @@
           </a:solidFill>
           <a:ln/>
         </p:spPr>
+        <p:txBody>
+          <a:bodyPr/>
+          <a:p/>
+        </p:txBody>
       </p:sp>
       <p:sp>
         <p:nvSpPr>
@@ -2537,7 +2549,7 @@
                 <a:ea typeface="Arial" pitchFamily="34" charset="-122"/>
                 <a:cs typeface="Arial" pitchFamily="34" charset="-120"/>
               </a:rPr>
-              <a:t>Раздел 05 · Кому продаём</a:t>
+              <a:t>Раздел 05 · Целевые группы</a:t>
             </a:r>
             <a:endParaRPr lang="en-US" sz="1800" dirty="0"/>
           </a:p>
@@ -2649,6 +2661,10 @@
           </a:solidFill>
           <a:ln/>
         </p:spPr>
+        <p:txBody>
+          <a:bodyPr/>
+          <a:p/>
+        </p:txBody>
       </p:sp>
       <p:sp>
         <p:nvSpPr>
@@ -2753,6 +2769,10 @@
           </a:solidFill>
           <a:ln/>
         </p:spPr>
+        <p:txBody>
+          <a:bodyPr/>
+          <a:p/>
+        </p:txBody>
       </p:sp>
       <p:sp>
         <p:nvSpPr>
@@ -2857,6 +2877,10 @@
           </a:solidFill>
           <a:ln/>
         </p:spPr>
+        <p:txBody>
+          <a:bodyPr/>
+          <a:p/>
+        </p:txBody>
       </p:sp>
       <p:sp>
         <p:nvSpPr>
@@ -2961,6 +2985,10 @@
           </a:solidFill>
           <a:ln/>
         </p:spPr>
+        <p:txBody>
+          <a:bodyPr/>
+          <a:p/>
+        </p:txBody>
       </p:sp>
       <p:sp>
         <p:nvSpPr>
@@ -3065,6 +3093,10 @@
           </a:solidFill>
           <a:ln/>
         </p:spPr>
+        <p:txBody>
+          <a:bodyPr/>
+          <a:p/>
+        </p:txBody>
       </p:sp>
       <p:sp>
         <p:nvSpPr>
@@ -3203,6 +3235,10 @@
           </a:solidFill>
           <a:ln/>
         </p:spPr>
+        <p:txBody>
+          <a:bodyPr/>
+          <a:p/>
+        </p:txBody>
       </p:sp>
       <p:sp>
         <p:nvSpPr>
@@ -3239,7 +3275,7 @@
                 <a:ea typeface="Arial" pitchFamily="34" charset="-122"/>
                 <a:cs typeface="Arial" pitchFamily="34" charset="-120"/>
               </a:rPr>
-              <a:t>Раздел 06 · Приложение</a:t>
+              <a:t>Раздел 06 · Мобильное приложение</a:t>
             </a:r>
             <a:endParaRPr lang="en-US" sz="1800" dirty="0"/>
           </a:p>
@@ -3569,6 +3605,10 @@
             </a:outerShdw>
           </a:effectLst>
         </p:spPr>
+        <p:txBody>
+          <a:bodyPr/>
+          <a:p/>
+        </p:txBody>
       </p:sp>
       <p:pic>
         <p:nvPicPr>
@@ -3702,6 +3742,10 @@
             </a:outerShdw>
           </a:effectLst>
         </p:spPr>
+        <p:txBody>
+          <a:bodyPr/>
+          <a:p/>
+        </p:txBody>
       </p:sp>
       <p:sp>
         <p:nvSpPr>
@@ -3722,6 +3766,10 @@
           </a:solidFill>
           <a:ln/>
         </p:spPr>
+        <p:txBody>
+          <a:bodyPr/>
+          <a:p/>
+        </p:txBody>
       </p:sp>
       <p:sp>
         <p:nvSpPr>
@@ -3824,6 +3872,10 @@
           </a:solidFill>
           <a:ln/>
         </p:spPr>
+        <p:txBody>
+          <a:bodyPr/>
+          <a:p/>
+        </p:txBody>
       </p:sp>
       <p:sp>
         <p:nvSpPr>
@@ -3844,6 +3896,10 @@
           </a:solidFill>
           <a:ln/>
         </p:spPr>
+        <p:txBody>
+          <a:bodyPr/>
+          <a:p/>
+        </p:txBody>
       </p:sp>
       <p:sp>
         <p:nvSpPr>
@@ -4028,6 +4084,10 @@
           </a:solidFill>
           <a:ln/>
         </p:spPr>
+        <p:txBody>
+          <a:bodyPr/>
+          <a:p/>
+        </p:txBody>
       </p:sp>
       <p:sp>
         <p:nvSpPr>
@@ -4048,6 +4108,10 @@
           </a:solidFill>
           <a:ln/>
         </p:spPr>
+        <p:txBody>
+          <a:bodyPr/>
+          <a:p/>
+        </p:txBody>
       </p:sp>
       <p:sp>
         <p:nvSpPr>
@@ -4152,6 +4216,10 @@
           </a:solidFill>
           <a:ln/>
         </p:spPr>
+        <p:txBody>
+          <a:bodyPr/>
+          <a:p/>
+        </p:txBody>
       </p:sp>
       <p:sp>
         <p:nvSpPr>
@@ -4257,6 +4325,10 @@
           </a:solidFill>
           <a:ln/>
         </p:spPr>
+        <p:txBody>
+          <a:bodyPr/>
+          <a:p/>
+        </p:txBody>
       </p:sp>
       <p:sp>
         <p:nvSpPr>
@@ -4361,6 +4433,10 @@
           </a:solidFill>
           <a:ln/>
         </p:spPr>
+        <p:txBody>
+          <a:bodyPr/>
+          <a:p/>
+        </p:txBody>
       </p:sp>
       <p:sp>
         <p:nvSpPr>
@@ -4550,6 +4626,10 @@
           </a:solidFill>
           <a:ln/>
         </p:spPr>
+        <p:txBody>
+          <a:bodyPr/>
+          <a:p/>
+        </p:txBody>
       </p:sp>
       <p:sp>
         <p:nvSpPr>
@@ -4686,6 +4766,10 @@
           </a:solidFill>
           <a:ln/>
         </p:spPr>
+        <p:txBody>
+          <a:bodyPr/>
+          <a:p/>
+        </p:txBody>
       </p:sp>
       <p:sp>
         <p:nvSpPr>
@@ -4793,6 +4877,10 @@
           </a:solidFill>
           <a:ln/>
         </p:spPr>
+        <p:txBody>
+          <a:bodyPr/>
+          <a:p/>
+        </p:txBody>
       </p:sp>
       <p:sp>
         <p:nvSpPr>
@@ -5048,6 +5136,10 @@
           </a:solidFill>
           <a:ln/>
         </p:spPr>
+        <p:txBody>
+          <a:bodyPr/>
+          <a:p/>
+        </p:txBody>
       </p:sp>
       <p:sp>
         <p:nvSpPr>
@@ -5116,6 +5208,10 @@
             <a:prstDash val="solid"/>
           </a:ln>
         </p:spPr>
+        <p:txBody>
+          <a:bodyPr/>
+          <a:p/>
+        </p:txBody>
       </p:sp>
       <p:sp>
         <p:nvSpPr>
@@ -5362,6 +5458,10 @@
             <a:prstDash val="solid"/>
           </a:ln>
         </p:spPr>
+        <p:txBody>
+          <a:bodyPr/>
+          <a:p/>
+        </p:txBody>
       </p:sp>
       <p:sp>
         <p:nvSpPr>
@@ -5640,6 +5740,10 @@
           </a:solidFill>
           <a:ln/>
         </p:spPr>
+        <p:txBody>
+          <a:bodyPr/>
+          <a:p/>
+        </p:txBody>
       </p:sp>
       <p:sp>
         <p:nvSpPr>
@@ -6389,6 +6493,10 @@
           </a:gradFill>
           <a:ln/>
         </p:spPr>
+        <p:txBody>
+          <a:bodyPr/>
+          <a:p/>
+        </p:txBody>
       </p:sp>
       <p:sp>
         <p:nvSpPr>
@@ -6416,6 +6524,10 @@
             <a:prstDash val="solid"/>
           </a:ln>
         </p:spPr>
+        <p:txBody>
+          <a:bodyPr/>
+          <a:p/>
+        </p:txBody>
       </p:sp>
       <p:sp>
         <p:nvSpPr>
@@ -6528,6 +6640,10 @@
             <a:prstDash val="solid"/>
           </a:ln>
         </p:spPr>
+        <p:txBody>
+          <a:bodyPr/>
+          <a:p/>
+        </p:txBody>
       </p:sp>
       <p:sp>
         <p:nvSpPr>
@@ -6667,6 +6783,10 @@
           </a:solidFill>
           <a:ln/>
         </p:spPr>
+        <p:txBody>
+          <a:bodyPr/>
+          <a:p/>
+        </p:txBody>
       </p:sp>
       <p:sp>
         <p:nvSpPr>
@@ -6779,6 +6899,10 @@
             <a:prstDash val="solid"/>
           </a:ln>
         </p:spPr>
+        <p:txBody>
+          <a:bodyPr/>
+          <a:p/>
+        </p:txBody>
       </p:sp>
       <p:sp>
         <p:nvSpPr>
@@ -6894,6 +7018,10 @@
             <a:prstDash val="solid"/>
           </a:ln>
         </p:spPr>
+        <p:txBody>
+          <a:bodyPr/>
+          <a:p/>
+        </p:txBody>
       </p:sp>
       <p:sp>
         <p:nvSpPr>
@@ -7009,6 +7137,10 @@
             <a:prstDash val="solid"/>
           </a:ln>
         </p:spPr>
+        <p:txBody>
+          <a:bodyPr/>
+          <a:p/>
+        </p:txBody>
       </p:sp>
       <p:sp>
         <p:nvSpPr>
@@ -7124,6 +7256,10 @@
             <a:prstDash val="solid"/>
           </a:ln>
         </p:spPr>
+        <p:txBody>
+          <a:bodyPr/>
+          <a:p/>
+        </p:txBody>
       </p:sp>
       <p:sp>
         <p:nvSpPr>
@@ -7565,6 +7701,10 @@
           </a:solidFill>
           <a:ln/>
         </p:spPr>
+        <p:txBody>
+          <a:bodyPr/>
+          <a:p/>
+        </p:txBody>
       </p:sp>
       <p:sp>
         <p:nvSpPr>
@@ -7663,6 +7803,10 @@
           </a:solidFill>
           <a:ln/>
         </p:spPr>
+        <p:txBody>
+          <a:bodyPr/>
+          <a:p/>
+        </p:txBody>
       </p:sp>
       <p:sp>
         <p:nvSpPr>
@@ -7699,7 +7843,7 @@
                 <a:ea typeface="Arial" pitchFamily="34" charset="-122"/>
                 <a:cs typeface="Arial" pitchFamily="34" charset="-120"/>
               </a:rPr>
-              <a:t>Раздел 01 · Замысел</a:t>
+              <a:t>Раздел 01 · Идея</a:t>
             </a:r>
             <a:endParaRPr lang="en-US" sz="1800" dirty="0"/>
           </a:p>
@@ -7812,6 +7956,10 @@
           </a:solidFill>
           <a:ln/>
         </p:spPr>
+        <p:txBody>
+          <a:bodyPr/>
+          <a:p/>
+        </p:txBody>
       </p:sp>
       <p:sp>
         <p:nvSpPr>
@@ -7876,6 +8024,10 @@
           </a:solidFill>
           <a:ln/>
         </p:spPr>
+        <p:txBody>
+          <a:bodyPr/>
+          <a:p/>
+        </p:txBody>
       </p:sp>
       <p:sp>
         <p:nvSpPr>
@@ -7974,6 +8126,10 @@
           </a:solidFill>
           <a:ln/>
         </p:spPr>
+        <p:txBody>
+          <a:bodyPr/>
+          <a:p/>
+        </p:txBody>
       </p:sp>
       <p:sp>
         <p:nvSpPr>
@@ -8044,6 +8200,10 @@
             </a:outerShdw>
           </a:effectLst>
         </p:spPr>
+        <p:txBody>
+          <a:bodyPr/>
+          <a:p/>
+        </p:txBody>
       </p:sp>
       <p:pic>
         <p:nvPicPr>
@@ -8123,6 +8283,10 @@
           </a:solidFill>
           <a:ln/>
         </p:spPr>
+        <p:txBody>
+          <a:bodyPr/>
+          <a:p/>
+        </p:txBody>
       </p:sp>
       <p:sp>
         <p:nvSpPr>
@@ -8235,6 +8399,10 @@
             <a:prstDash val="solid"/>
           </a:ln>
         </p:spPr>
+        <p:txBody>
+          <a:bodyPr/>
+          <a:p/>
+        </p:txBody>
       </p:sp>
       <p:sp>
         <p:nvSpPr>
@@ -8347,6 +8515,10 @@
             <a:prstDash val="solid"/>
           </a:ln>
         </p:spPr>
+        <p:txBody>
+          <a:bodyPr/>
+          <a:p/>
+        </p:txBody>
       </p:sp>
       <p:sp>
         <p:nvSpPr>
@@ -8486,6 +8658,10 @@
           </a:solidFill>
           <a:ln/>
         </p:spPr>
+        <p:txBody>
+          <a:bodyPr/>
+          <a:p/>
+        </p:txBody>
       </p:sp>
       <p:sp>
         <p:nvSpPr>
@@ -8644,6 +8820,10 @@
             <a:prstDash val="solid"/>
           </a:ln>
         </p:spPr>
+        <p:txBody>
+          <a:bodyPr/>
+          <a:p/>
+        </p:txBody>
       </p:sp>
       <p:sp>
         <p:nvSpPr>
@@ -8756,6 +8936,10 @@
             <a:prstDash val="solid"/>
           </a:ln>
         </p:spPr>
+        <p:txBody>
+          <a:bodyPr/>
+          <a:p/>
+        </p:txBody>
       </p:sp>
       <p:sp>
         <p:nvSpPr>
@@ -8868,6 +9052,10 @@
             <a:prstDash val="solid"/>
           </a:ln>
         </p:spPr>
+        <p:txBody>
+          <a:bodyPr/>
+          <a:p/>
+        </p:txBody>
       </p:sp>
       <p:sp>
         <p:nvSpPr>
@@ -8980,6 +9168,10 @@
             <a:prstDash val="solid"/>
           </a:ln>
         </p:spPr>
+        <p:txBody>
+          <a:bodyPr/>
+          <a:p/>
+        </p:txBody>
       </p:sp>
       <p:sp>
         <p:nvSpPr>
@@ -9119,6 +9311,10 @@
           </a:solidFill>
           <a:ln/>
         </p:spPr>
+        <p:txBody>
+          <a:bodyPr/>
+          <a:p/>
+        </p:txBody>
       </p:sp>
       <p:sp>
         <p:nvSpPr>
@@ -9267,6 +9463,10 @@
           </a:solidFill>
           <a:ln/>
         </p:spPr>
+        <p:txBody>
+          <a:bodyPr/>
+          <a:p/>
+        </p:txBody>
       </p:sp>
       <p:sp>
         <p:nvSpPr>
@@ -9371,6 +9571,10 @@
           </a:solidFill>
           <a:ln/>
         </p:spPr>
+        <p:txBody>
+          <a:bodyPr/>
+          <a:p/>
+        </p:txBody>
       </p:sp>
       <p:sp>
         <p:nvSpPr>
@@ -9475,6 +9679,10 @@
           </a:solidFill>
           <a:ln/>
         </p:spPr>
+        <p:txBody>
+          <a:bodyPr/>
+          <a:p/>
+        </p:txBody>
       </p:sp>
       <p:sp>
         <p:nvSpPr>
@@ -9579,6 +9787,10 @@
           </a:solidFill>
           <a:ln/>
         </p:spPr>
+        <p:txBody>
+          <a:bodyPr/>
+          <a:p/>
+        </p:txBody>
       </p:sp>
       <p:sp>
         <p:nvSpPr>
@@ -9683,6 +9895,10 @@
           </a:solidFill>
           <a:ln/>
         </p:spPr>
+        <p:txBody>
+          <a:bodyPr/>
+          <a:p/>
+        </p:txBody>
       </p:sp>
       <p:sp>
         <p:nvSpPr>
@@ -9868,6 +10084,10 @@
             <a:prstDash val="solid"/>
           </a:ln>
         </p:spPr>
+        <p:txBody>
+          <a:bodyPr/>
+          <a:p/>
+        </p:txBody>
       </p:sp>
       <p:sp>
         <p:nvSpPr>
@@ -10018,6 +10238,10 @@
             <a:prstDash val="solid"/>
           </a:ln>
         </p:spPr>
+        <p:txBody>
+          <a:bodyPr/>
+          <a:p/>
+        </p:txBody>
       </p:sp>
       <p:sp>
         <p:nvSpPr>
@@ -10182,6 +10406,10 @@
             <a:prstDash val="solid"/>
           </a:ln>
         </p:spPr>
+        <p:txBody>
+          <a:bodyPr/>
+          <a:p/>
+        </p:txBody>
       </p:sp>
       <p:sp>
         <p:nvSpPr>
@@ -10332,6 +10560,10 @@
             <a:prstDash val="solid"/>
           </a:ln>
         </p:spPr>
+        <p:txBody>
+          <a:bodyPr/>
+          <a:p/>
+        </p:txBody>
       </p:sp>
       <p:sp>
         <p:nvSpPr>
@@ -10523,6 +10755,10 @@
           </a:solidFill>
           <a:ln/>
         </p:spPr>
+        <p:txBody>
+          <a:bodyPr/>
+          <a:p/>
+        </p:txBody>
       </p:sp>
       <p:sp>
         <p:nvSpPr>
@@ -10635,6 +10871,10 @@
             <a:prstDash val="solid"/>
           </a:ln>
         </p:spPr>
+        <p:txBody>
+          <a:bodyPr/>
+          <a:p/>
+        </p:txBody>
       </p:sp>
       <p:sp>
         <p:nvSpPr>
@@ -10655,6 +10895,10 @@
           </a:solidFill>
           <a:ln/>
         </p:spPr>
+        <p:txBody>
+          <a:bodyPr/>
+          <a:p/>
+        </p:txBody>
       </p:sp>
       <p:sp>
         <p:nvSpPr>
@@ -10880,6 +11124,10 @@
           </a:solidFill>
           <a:ln/>
         </p:spPr>
+        <p:txBody>
+          <a:bodyPr/>
+          <a:p/>
+        </p:txBody>
       </p:sp>
       <p:sp>
         <p:nvSpPr>
@@ -10900,6 +11148,10 @@
           </a:solidFill>
           <a:ln/>
         </p:spPr>
+        <p:txBody>
+          <a:bodyPr/>
+          <a:p/>
+        </p:txBody>
       </p:sp>
       <p:sp>
         <p:nvSpPr>
@@ -11125,6 +11377,10 @@
           </a:solidFill>
           <a:ln/>
         </p:spPr>
+        <p:txBody>
+          <a:bodyPr/>
+          <a:p/>
+        </p:txBody>
       </p:sp>
       <p:sp>
         <p:nvSpPr>
@@ -11650,6 +11906,10 @@
           </a:solidFill>
           <a:ln/>
         </p:spPr>
+        <p:txBody>
+          <a:bodyPr/>
+          <a:p/>
+        </p:txBody>
       </p:sp>
       <p:sp>
         <p:nvSpPr>
@@ -11762,6 +12022,10 @@
             <a:prstDash val="solid"/>
           </a:ln>
         </p:spPr>
+        <p:txBody>
+          <a:bodyPr/>
+          <a:p/>
+        </p:txBody>
       </p:sp>
       <p:sp>
         <p:nvSpPr>
@@ -11871,6 +12135,10 @@
             <a:prstDash val="solid"/>
           </a:ln>
         </p:spPr>
+        <p:txBody>
+          <a:bodyPr/>
+          <a:p/>
+        </p:txBody>
       </p:sp>
       <p:sp>
         <p:nvSpPr>
@@ -12035,6 +12303,10 @@
             <a:prstDash val="solid"/>
           </a:ln>
         </p:spPr>
+        <p:txBody>
+          <a:bodyPr/>
+          <a:p/>
+        </p:txBody>
       </p:sp>
       <p:sp>
         <p:nvSpPr>
@@ -12180,6 +12452,10 @@
           </a:solidFill>
           <a:ln/>
         </p:spPr>
+        <p:txBody>
+          <a:bodyPr/>
+          <a:p/>
+        </p:txBody>
       </p:sp>
       <p:sp>
         <p:nvSpPr>
@@ -12344,6 +12620,10 @@
             <a:prstDash val="solid"/>
           </a:ln>
         </p:spPr>
+        <p:txBody>
+          <a:bodyPr/>
+          <a:p/>
+        </p:txBody>
       </p:sp>
       <p:sp>
         <p:nvSpPr>
@@ -12405,6 +12685,10 @@
           </a:solidFill>
           <a:ln/>
         </p:spPr>
+        <p:txBody>
+          <a:bodyPr/>
+          <a:p/>
+        </p:txBody>
       </p:sp>
       <p:sp>
         <p:nvSpPr>
@@ -12466,6 +12750,10 @@
           </a:solidFill>
           <a:ln/>
         </p:spPr>
+        <p:txBody>
+          <a:bodyPr/>
+          <a:p/>
+        </p:txBody>
       </p:sp>
       <p:sp>
         <p:nvSpPr>
@@ -12486,6 +12774,10 @@
           </a:solidFill>
           <a:ln/>
         </p:spPr>
+        <p:txBody>
+          <a:bodyPr/>
+          <a:p/>
+        </p:txBody>
       </p:sp>
       <p:sp>
         <p:nvSpPr>
@@ -12506,6 +12798,10 @@
           </a:solidFill>
           <a:ln/>
         </p:spPr>
+        <p:txBody>
+          <a:bodyPr/>
+          <a:p/>
+        </p:txBody>
       </p:sp>
       <p:sp>
         <p:nvSpPr>
@@ -12650,6 +12946,10 @@
             <a:prstDash val="solid"/>
           </a:ln>
         </p:spPr>
+        <p:txBody>
+          <a:bodyPr/>
+          <a:p/>
+        </p:txBody>
       </p:sp>
       <p:sp>
         <p:nvSpPr>
@@ -12762,6 +13062,10 @@
             <a:prstDash val="solid"/>
           </a:ln>
         </p:spPr>
+        <p:txBody>
+          <a:bodyPr/>
+          <a:p/>
+        </p:txBody>
       </p:sp>
       <p:sp>
         <p:nvSpPr>
@@ -12874,6 +13178,10 @@
             <a:prstDash val="solid"/>
           </a:ln>
         </p:spPr>
+        <p:txBody>
+          <a:bodyPr/>
+          <a:p/>
+        </p:txBody>
       </p:sp>
       <p:sp>
         <p:nvSpPr>
@@ -12981,6 +13289,10 @@
           </a:solidFill>
           <a:ln/>
         </p:spPr>
+        <p:txBody>
+          <a:bodyPr/>
+          <a:p/>
+        </p:txBody>
       </p:sp>
       <p:sp>
         <p:nvSpPr>
@@ -13027,6 +13339,10 @@
           </a:solidFill>
           <a:ln/>
         </p:spPr>
+        <p:txBody>
+          <a:bodyPr/>
+          <a:p/>
+        </p:txBody>
       </p:sp>
       <p:sp>
         <p:nvSpPr>
@@ -13073,6 +13389,10 @@
           </a:solidFill>
           <a:ln/>
         </p:spPr>
+        <p:txBody>
+          <a:bodyPr/>
+          <a:p/>
+        </p:txBody>
       </p:sp>
       <p:sp>
         <p:nvSpPr>
@@ -13119,6 +13439,10 @@
           </a:solidFill>
           <a:ln/>
         </p:spPr>
+        <p:txBody>
+          <a:bodyPr/>
+          <a:p/>
+        </p:txBody>
       </p:sp>
       <p:sp>
         <p:nvSpPr>
@@ -13165,6 +13489,10 @@
           </a:solidFill>
           <a:ln/>
         </p:spPr>
+        <p:txBody>
+          <a:bodyPr/>
+          <a:p/>
+        </p:txBody>
       </p:sp>
       <p:sp>
         <p:nvSpPr>
@@ -13211,6 +13539,10 @@
           </a:solidFill>
           <a:ln/>
         </p:spPr>
+        <p:txBody>
+          <a:bodyPr/>
+          <a:p/>
+        </p:txBody>
       </p:sp>
       <p:sp>
         <p:nvSpPr>
@@ -13257,6 +13589,10 @@
           </a:solidFill>
           <a:ln/>
         </p:spPr>
+        <p:txBody>
+          <a:bodyPr/>
+          <a:p/>
+        </p:txBody>
       </p:sp>
       <p:sp>
         <p:nvSpPr>
@@ -13303,6 +13639,10 @@
           </a:solidFill>
           <a:ln/>
         </p:spPr>
+        <p:txBody>
+          <a:bodyPr/>
+          <a:p/>
+        </p:txBody>
       </p:sp>
       <p:sp>
         <p:nvSpPr>
@@ -13349,6 +13689,10 @@
           </a:solidFill>
           <a:ln/>
         </p:spPr>
+        <p:txBody>
+          <a:bodyPr/>
+          <a:p/>
+        </p:txBody>
       </p:sp>
       <p:sp>
         <p:nvSpPr>
@@ -13395,6 +13739,10 @@
           </a:solidFill>
           <a:ln/>
         </p:spPr>
+        <p:txBody>
+          <a:bodyPr/>
+          <a:p/>
+        </p:txBody>
       </p:sp>
       <p:sp>
         <p:nvSpPr>
@@ -13441,6 +13789,10 @@
           </a:solidFill>
           <a:ln/>
         </p:spPr>
+        <p:txBody>
+          <a:bodyPr/>
+          <a:p/>
+        </p:txBody>
       </p:sp>
       <p:sp>
         <p:nvSpPr>
@@ -13487,6 +13839,10 @@
           </a:solidFill>
           <a:ln/>
         </p:spPr>
+        <p:txBody>
+          <a:bodyPr/>
+          <a:p/>
+        </p:txBody>
       </p:sp>
       <p:sp>
         <p:nvSpPr>
@@ -13533,6 +13889,10 @@
           </a:solidFill>
           <a:ln/>
         </p:spPr>
+        <p:txBody>
+          <a:bodyPr/>
+          <a:p/>
+        </p:txBody>
       </p:sp>
       <p:sp>
         <p:nvSpPr>
@@ -13579,6 +13939,10 @@
           </a:solidFill>
           <a:ln/>
         </p:spPr>
+        <p:txBody>
+          <a:bodyPr/>
+          <a:p/>
+        </p:txBody>
       </p:sp>
       <p:sp>
         <p:nvSpPr>
@@ -13625,6 +13989,10 @@
           </a:solidFill>
           <a:ln/>
         </p:spPr>
+        <p:txBody>
+          <a:bodyPr/>
+          <a:p/>
+        </p:txBody>
       </p:sp>
       <p:sp>
         <p:nvSpPr>
@@ -13671,6 +14039,10 @@
           </a:solidFill>
           <a:ln/>
         </p:spPr>
+        <p:txBody>
+          <a:bodyPr/>
+          <a:p/>
+        </p:txBody>
       </p:sp>
       <p:sp>
         <p:nvSpPr>

--- a/files/damumed-band-prezentaciya.pptx
+++ b/files/damumed-band-prezentaciya.pptx
@@ -11188,7 +11188,7 @@
                 <a:ea typeface="Arial" pitchFamily="34" charset="-122"/>
                 <a:cs typeface="Arial" pitchFamily="34" charset="-120"/>
               </a:rPr>
-              <a:t>I. Текущий</a:t>
+              <a:t>I. Базовый</a:t>
             </a:r>
             <a:endParaRPr lang="en-US" sz="2100" dirty="0"/>
           </a:p>
@@ -11417,7 +11417,7 @@
                 <a:ea typeface="Arial" pitchFamily="34" charset="-122"/>
                 <a:cs typeface="Arial" pitchFamily="34" charset="-120"/>
               </a:rPr>
-              <a:t>II. Ниже</a:t>
+              <a:t>II. Массовый</a:t>
             </a:r>
             <a:endParaRPr lang="en-US" sz="2100" dirty="0"/>
           </a:p>
@@ -11622,7 +11622,7 @@
                 <a:ea typeface="Arial" pitchFamily="34" charset="-122"/>
                 <a:cs typeface="Arial" pitchFamily="34" charset="-120"/>
               </a:rPr>
-              <a:t>III. Ещё ниже</a:t>
+              <a:t>III. Тендерный</a:t>
             </a:r>
             <a:endParaRPr lang="en-US" sz="2100" dirty="0"/>
           </a:p>

--- a/files/damumed-band-prezentaciya.pptx
+++ b/files/damumed-band-prezentaciya.pptx
@@ -11622,7 +11622,7 @@
                 <a:ea typeface="Arial" pitchFamily="34" charset="-122"/>
                 <a:cs typeface="Arial" pitchFamily="34" charset="-120"/>
               </a:rPr>
-              <a:t>III. Тендерный</a:t>
+              <a:t>III. Национальный</a:t>
             </a:r>
             <a:endParaRPr lang="en-US" sz="2100" dirty="0"/>
           </a:p>

--- a/files/damumed-band-prezentaciya.pptx
+++ b/files/damumed-band-prezentaciya.pptx
@@ -11622,7 +11622,7 @@
                 <a:ea typeface="Arial" pitchFamily="34" charset="-122"/>
                 <a:cs typeface="Arial" pitchFamily="34" charset="-120"/>
               </a:rPr>
-              <a:t>III. Национальный</a:t>
+              <a:t>III. Доступный</a:t>
             </a:r>
             <a:endParaRPr lang="en-US" sz="2100" dirty="0"/>
           </a:p>

--- a/files/damumed-band-prezentaciya.pptx
+++ b/files/damumed-band-prezentaciya.pptx
@@ -7744,7 +7744,7 @@
                 <a:ea typeface="Arial" pitchFamily="34" charset="-122"/>
                 <a:cs typeface="Arial" pitchFamily="34" charset="-120"/>
               </a:rPr>
-              <a:t>Damumed Band — медицинский надзор за цену, которая не требует раздумий, и повторная выручка, которая не заканчивается вместе с партией.</a:t>
+              <a:t>Damumed Band — дистанционное наблюдение за цену, которая не требует раздумий, и повторная выручка, которая не заканчивается вместе с партией.</a:t>
             </a:r>
             <a:endParaRPr lang="en-US" sz="2250" dirty="0"/>
           </a:p>
@@ -7887,7 +7887,7 @@
                 <a:ea typeface="Arial" pitchFamily="34" charset="-122"/>
                 <a:cs typeface="Arial" pitchFamily="34" charset="-120"/>
               </a:rPr>
-              <a:t>Продаём не браслет, а медицинский надзор</a:t>
+              <a:t>Продаём не браслет, а дистанционное наблюдение врача</a:t>
             </a:r>
             <a:endParaRPr lang="en-US" sz="5100" dirty="0"/>
           </a:p>
@@ -7999,7 +7999,7 @@
                 <a:ea typeface="Arial" pitchFamily="34" charset="-122"/>
                 <a:cs typeface="Arial" pitchFamily="34" charset="-120"/>
               </a:rPr>
-              <a:t>Контрактное производство без экрана — по образцу Whoop</a:t>
+              <a:t>Контрактное производство браслета без экрана</a:t>
             </a:r>
             <a:endParaRPr lang="en-US" sz="1875" dirty="0"/>
           </a:p>
@@ -10278,7 +10278,7 @@
                 <a:ea typeface="Arial" pitchFamily="34" charset="-122"/>
                 <a:cs typeface="Arial" pitchFamily="34" charset="-120"/>
               </a:rPr>
-              <a:t>Подписка «медицинский надзор»</a:t>
+              <a:t>Подписка в приложении</a:t>
             </a:r>
             <a:endParaRPr lang="en-US" sz="1800" dirty="0"/>
           </a:p>
@@ -10600,7 +10600,7 @@
                 <a:ea typeface="Arial" pitchFamily="34" charset="-122"/>
                 <a:cs typeface="Arial" pitchFamily="34" charset="-120"/>
               </a:rPr>
-              <a:t>Мониторинг для поликлиники</a:t>
+              <a:t>Модуль наблюдения — в аренде МИС</a:t>
             </a:r>
             <a:endParaRPr lang="en-US" sz="1800" dirty="0"/>
           </a:p>
@@ -11540,7 +11540,7 @@
                 <a:ea typeface="Courier New" pitchFamily="34" charset="-122"/>
                 <a:cs typeface="Courier New" pitchFamily="34" charset="-120"/>
               </a:rPr>
-              <a:t>−3,4 млн</a:t>
+              <a:t>+1,2 млн</a:t>
             </a:r>
             <a:endParaRPr lang="en-US" sz="1950" dirty="0"/>
           </a:p>
@@ -11581,7 +11581,7 @@
                 <a:ea typeface="Courier New" pitchFamily="34" charset="-122"/>
                 <a:cs typeface="Courier New" pitchFamily="34" charset="-120"/>
               </a:rPr>
-              <a:t>+47,2 млн</a:t>
+              <a:t>+56,3 млн</a:t>
             </a:r>
             <a:endParaRPr lang="en-US" sz="1950" dirty="0"/>
           </a:p>
@@ -11745,7 +11745,7 @@
                 <a:ea typeface="Courier New" pitchFamily="34" charset="-122"/>
                 <a:cs typeface="Courier New" pitchFamily="34" charset="-120"/>
               </a:rPr>
-              <a:t>−20,8 млн</a:t>
+              <a:t>−11,7 млн</a:t>
             </a:r>
             <a:endParaRPr lang="en-US" sz="1950" dirty="0"/>
           </a:p>
@@ -11786,7 +11786,7 @@
                 <a:ea typeface="Courier New" pitchFamily="34" charset="-122"/>
                 <a:cs typeface="Courier New" pitchFamily="34" charset="-120"/>
               </a:rPr>
-              <a:t>+12,5 млн</a:t>
+              <a:t>+30,7 млн</a:t>
             </a:r>
             <a:endParaRPr lang="en-US" sz="1950" dirty="0"/>
           </a:p>

--- a/files/damumed-band-prezentaciya.pptx
+++ b/files/damumed-band-prezentaciya.pptx
@@ -10641,7 +10641,7 @@
                 <a:ea typeface="Arial" pitchFamily="34" charset="-122"/>
                 <a:cs typeface="Arial" pitchFamily="34" charset="-120"/>
               </a:rPr>
-              <a:t>500 ₸</a:t>
+              <a:t>0 ₸ — доплаты нет</a:t>
             </a:r>
             <a:pPr algn="l" indent="0" marL="0">
               <a:buNone/>
@@ -10655,7 +10655,7 @@
                 <a:ea typeface="Arial" pitchFamily="34" charset="-122"/>
                 <a:cs typeface="Arial" pitchFamily="34" charset="-120"/>
               </a:rPr>
-              <a:t>/пациент/мес</a:t>
+              <a:t/>
             </a:r>
             <a:endParaRPr lang="en-US" sz="4500" dirty="0"/>
           </a:p>

--- a/files/damumed-band-prezentaciya.pptx
+++ b/files/damumed-band-prezentaciya.pptx
@@ -957,7 +957,7 @@
           <a:p>
             <a:r>
               <a:rPr lang="en-US" dirty="0"/>
-              <a:t>Класс 2а, национальная процедура, держатель — Damumed. Без ЭКГ и без ИИ, чтобы не поднять класс.</a:t>
+              <a:t>Класс 2а, держатель — Damumed. Без ЭКГ в первой версии; ИИ — поэтапно, чтобы не поднять класс.</a:t>
             </a:r>
             <a:endParaRPr lang="en-US" dirty="0"/>
           </a:p>
@@ -1221,7 +1221,7 @@
           <a:p>
             <a:r>
               <a:rPr lang="en-US" dirty="0"/>
-              <a:t>Продаём не браслет, а медицинский надзор. Деньги — от мониторинга и подписок.</a:t>
+              <a:t>Врач видит пациента 15 минут в месяц, а болезнь работает круглосуточно. Датчик закрывает разрыв.</a:t>
             </a:r>
             <a:endParaRPr lang="en-US" dirty="0"/>
           </a:p>
@@ -1573,7 +1573,7 @@
           <a:p>
             <a:r>
               <a:rPr lang="en-US" dirty="0"/>
-              <a:t>Четыре цены. Не зарабатываем на железе — зарабатываем на надзоре.</a:t>
+              <a:t>Две линии дохода. Человек платит за себя; поликлинике наблюдение бесплатно — входит в аренду МИС, платит только за браслеты.</a:t>
             </a:r>
             <a:endParaRPr lang="en-US" dirty="0"/>
           </a:p>
@@ -2212,78 +2212,13 @@
       </p:grpSpPr>
       <p:sp>
         <p:nvSpPr>
-          <p:cNvPr id="2" name="Shape 0"/>
-          <p:cNvSpPr/>
-          <p:nvPr/>
-        </p:nvSpPr>
-        <p:spPr>
-          <a:xfrm>
-            <a:off x="857250" y="1133475"/>
-            <a:ext cx="104775" cy="104775"/>
-          </a:xfrm>
-          <a:prstGeom prst="ellipse">
-            <a:avLst/>
-          </a:prstGeom>
-          <a:solidFill>
-            <a:srgbClr val="3ECF8E"/>
-          </a:solidFill>
-          <a:ln/>
-        </p:spPr>
-        <p:txBody>
-          <a:bodyPr/>
-          <a:p/>
-        </p:txBody>
-      </p:sp>
-      <p:sp>
-        <p:nvSpPr>
-          <p:cNvPr id="3" name="Text 1"/>
-          <p:cNvSpPr/>
-          <p:nvPr/>
-        </p:nvSpPr>
-        <p:spPr>
-          <a:xfrm>
-            <a:off x="1076325" y="1047750"/>
-            <a:ext cx="4241846" cy="314325"/>
-          </a:xfrm>
-          <a:prstGeom prst="rect">
-            <a:avLst/>
-          </a:prstGeom>
-          <a:noFill/>
-          <a:ln/>
-        </p:spPr>
-        <p:txBody>
-          <a:bodyPr wrap="square" lIns="0" tIns="0" rIns="0" bIns="0" rtlCol="0" anchor="t">
-            <a:normAutofit/>
-          </a:bodyPr>
-          <a:lstStyle/>
-          <a:p>
-            <a:pPr algn="l" indent="0" marL="0">
-              <a:buNone/>
-            </a:pPr>
-            <a:r>
-              <a:rPr lang="en-US" sz="1800" spc="36" kern="0" dirty="0">
-                <a:solidFill>
-                  <a:srgbClr val="BEDCCB"/>
-                </a:solidFill>
-                <a:latin typeface="Arial" pitchFamily="34" charset="0"/>
-                <a:ea typeface="Arial" pitchFamily="34" charset="-122"/>
-                <a:cs typeface="Arial" pitchFamily="34" charset="-120"/>
-              </a:rPr>
-              <a:t>Аналитический отчёт · август 2026</a:t>
-            </a:r>
-            <a:endParaRPr lang="en-US" sz="1800" dirty="0"/>
-          </a:p>
-        </p:txBody>
-      </p:sp>
-      <p:sp>
-        <p:nvSpPr>
-          <p:cNvPr id="4" name="Text 2"/>
-          <p:cNvSpPr/>
-          <p:nvPr/>
-        </p:nvSpPr>
-        <p:spPr>
-          <a:xfrm>
-            <a:off x="857250" y="2434754"/>
+          <p:cNvPr id="2" name="Text 0"/>
+          <p:cNvSpPr/>
+          <p:nvPr/>
+        </p:nvSpPr>
+        <p:spPr>
+          <a:xfrm>
+            <a:off x="857250" y="1047750"/>
             <a:ext cx="8123224" cy="2427684"/>
           </a:xfrm>
           <a:prstGeom prst="rect">
@@ -2321,13 +2256,13 @@
       </p:sp>
       <p:sp>
         <p:nvSpPr>
-          <p:cNvPr id="5" name="Text 3"/>
-          <p:cNvSpPr/>
-          <p:nvPr/>
-        </p:nvSpPr>
-        <p:spPr>
-          <a:xfrm>
-            <a:off x="857250" y="5129138"/>
+          <p:cNvPr id="3" name="Text 1"/>
+          <p:cNvSpPr/>
+          <p:nvPr/>
+        </p:nvSpPr>
+        <p:spPr>
+          <a:xfrm>
+            <a:off x="857250" y="3742134"/>
             <a:ext cx="4549812" cy="1446758"/>
           </a:xfrm>
           <a:prstGeom prst="rect">
@@ -2365,7 +2300,7 @@
       </p:sp>
       <p:sp>
         <p:nvSpPr>
-          <p:cNvPr id="6" name="Shape 4"/>
+          <p:cNvPr id="4" name="Shape 2"/>
           <p:cNvSpPr/>
           <p:nvPr/>
         </p:nvSpPr>
@@ -2391,7 +2326,7 @@
       </p:sp>
       <p:sp>
         <p:nvSpPr>
-          <p:cNvPr id="7" name="Text 5"/>
+          <p:cNvPr id="5" name="Text 3"/>
           <p:cNvSpPr/>
           <p:nvPr/>
         </p:nvSpPr>
@@ -2427,7 +2362,7 @@
                 <a:ea typeface="Arial" pitchFamily="34" charset="-122"/>
                 <a:cs typeface="Arial" pitchFamily="34" charset="-120"/>
               </a:rPr>
-              <a:t>Медицинское изделие дешевле массового фитнес-трекера — производство, регистрация и экономика первой партии</a:t>
+              <a:t>Первое в Казахстане носимое медицинское изделие, встроенное в медкарту и рабочее место врача — по цене ниже фитнес-браслета</a:t>
             </a:r>
             <a:endParaRPr lang="en-US" sz="1950" dirty="0"/>
           </a:p>
@@ -2435,7 +2370,7 @@
       </p:sp>
       <p:pic>
         <p:nvPicPr>
-          <p:cNvPr id="8" name="Image 0" descr="preencoded.png">    </p:cNvPr>
+          <p:cNvPr id="6" name="Image 0" descr="preencoded.png">    </p:cNvPr>
           <p:cNvPicPr>
             <a:picLocks noChangeAspect="1"/>
           </p:cNvPicPr>
@@ -2496,8 +2431,8 @@
         </p:nvSpPr>
         <p:spPr>
           <a:xfrm>
-            <a:off x="1047750" y="2209354"/>
-            <a:ext cx="3135139" cy="414338"/>
+            <a:off x="1047750" y="2202210"/>
+            <a:ext cx="3379143" cy="414338"/>
           </a:xfrm>
           <a:prstGeom prst="roundRect">
             <a:avLst>
@@ -2522,8 +2457,8 @@
         </p:nvSpPr>
         <p:spPr>
           <a:xfrm>
-            <a:off x="1219200" y="2285554"/>
-            <a:ext cx="2886293" cy="300038"/>
+            <a:off x="1219200" y="2278410"/>
+            <a:ext cx="3137617" cy="300038"/>
           </a:xfrm>
           <a:prstGeom prst="rect">
             <a:avLst/>
@@ -2563,7 +2498,7 @@
         </p:nvSpPr>
         <p:spPr>
           <a:xfrm>
-            <a:off x="1047750" y="2852291"/>
+            <a:off x="1047750" y="2845147"/>
             <a:ext cx="17811750" cy="658118"/>
           </a:xfrm>
           <a:prstGeom prst="rect">
@@ -2607,7 +2542,7 @@
         </p:nvSpPr>
         <p:spPr>
           <a:xfrm>
-            <a:off x="1047750" y="4086671"/>
+            <a:off x="1047750" y="4079528"/>
             <a:ext cx="4400550" cy="333375"/>
           </a:xfrm>
           <a:prstGeom prst="rect">
@@ -2648,7 +2583,7 @@
         </p:nvSpPr>
         <p:spPr>
           <a:xfrm>
-            <a:off x="5295900" y="3967609"/>
+            <a:off x="5295900" y="3960465"/>
             <a:ext cx="7600950" cy="533400"/>
           </a:xfrm>
           <a:prstGeom prst="roundRect">
@@ -2674,7 +2609,7 @@
         </p:nvSpPr>
         <p:spPr>
           <a:xfrm>
-            <a:off x="13144500" y="4081909"/>
+            <a:off x="13144500" y="4074765"/>
             <a:ext cx="2409825" cy="342900"/>
           </a:xfrm>
           <a:prstGeom prst="rect">
@@ -2715,7 +2650,7 @@
         </p:nvSpPr>
         <p:spPr>
           <a:xfrm>
-            <a:off x="1047750" y="4822478"/>
+            <a:off x="1047750" y="4815334"/>
             <a:ext cx="4400550" cy="347663"/>
           </a:xfrm>
           <a:prstGeom prst="rect">
@@ -2756,7 +2691,7 @@
         </p:nvSpPr>
         <p:spPr>
           <a:xfrm>
-            <a:off x="5295900" y="4710559"/>
+            <a:off x="5295900" y="4703415"/>
             <a:ext cx="2128242" cy="533400"/>
           </a:xfrm>
           <a:prstGeom prst="roundRect">
@@ -2782,7 +2717,7 @@
         </p:nvSpPr>
         <p:spPr>
           <a:xfrm>
-            <a:off x="13144500" y="4817715"/>
+            <a:off x="13144500" y="4810571"/>
             <a:ext cx="2409825" cy="357188"/>
           </a:xfrm>
           <a:prstGeom prst="rect">
@@ -2823,7 +2758,7 @@
         </p:nvSpPr>
         <p:spPr>
           <a:xfrm>
-            <a:off x="1047750" y="5565428"/>
+            <a:off x="1047750" y="5558284"/>
             <a:ext cx="4400550" cy="347663"/>
           </a:xfrm>
           <a:prstGeom prst="rect">
@@ -2864,7 +2799,7 @@
         </p:nvSpPr>
         <p:spPr>
           <a:xfrm>
-            <a:off x="5295900" y="5453509"/>
+            <a:off x="5295900" y="5446365"/>
             <a:ext cx="532061" cy="533400"/>
           </a:xfrm>
           <a:prstGeom prst="roundRect">
@@ -2890,7 +2825,7 @@
         </p:nvSpPr>
         <p:spPr>
           <a:xfrm>
-            <a:off x="13144500" y="5560665"/>
+            <a:off x="13144500" y="5553521"/>
             <a:ext cx="2409825" cy="357188"/>
           </a:xfrm>
           <a:prstGeom prst="rect">
@@ -2931,7 +2866,7 @@
         </p:nvSpPr>
         <p:spPr>
           <a:xfrm>
-            <a:off x="1047750" y="6308378"/>
+            <a:off x="1047750" y="6301234"/>
             <a:ext cx="4400550" cy="347663"/>
           </a:xfrm>
           <a:prstGeom prst="rect">
@@ -2972,7 +2907,7 @@
         </p:nvSpPr>
         <p:spPr>
           <a:xfrm>
-            <a:off x="5295900" y="6196459"/>
+            <a:off x="5295900" y="6189315"/>
             <a:ext cx="380033" cy="533400"/>
           </a:xfrm>
           <a:prstGeom prst="roundRect">
@@ -2998,7 +2933,7 @@
         </p:nvSpPr>
         <p:spPr>
           <a:xfrm>
-            <a:off x="13144500" y="6303615"/>
+            <a:off x="13144500" y="6296471"/>
             <a:ext cx="2409825" cy="357188"/>
           </a:xfrm>
           <a:prstGeom prst="rect">
@@ -3039,7 +2974,7 @@
         </p:nvSpPr>
         <p:spPr>
           <a:xfrm>
-            <a:off x="1047750" y="7051328"/>
+            <a:off x="1047750" y="7044184"/>
             <a:ext cx="4400550" cy="347663"/>
           </a:xfrm>
           <a:prstGeom prst="rect">
@@ -3080,7 +3015,7 @@
         </p:nvSpPr>
         <p:spPr>
           <a:xfrm>
-            <a:off x="5295900" y="6939409"/>
+            <a:off x="5295900" y="6932265"/>
             <a:ext cx="228005" cy="533400"/>
           </a:xfrm>
           <a:prstGeom prst="roundRect">
@@ -3106,7 +3041,7 @@
         </p:nvSpPr>
         <p:spPr>
           <a:xfrm>
-            <a:off x="13144500" y="7046565"/>
+            <a:off x="13144500" y="7039421"/>
             <a:ext cx="2409825" cy="357188"/>
           </a:xfrm>
           <a:prstGeom prst="rect">
@@ -3147,26 +3082,26 @@
         </p:nvSpPr>
         <p:spPr>
           <a:xfrm>
-            <a:off x="1047750" y="7815709"/>
-            <a:ext cx="17811750" cy="300038"/>
-          </a:xfrm>
-          <a:prstGeom prst="rect">
-            <a:avLst/>
-          </a:prstGeom>
-          <a:noFill/>
-          <a:ln/>
-        </p:spPr>
-        <p:txBody>
-          <a:bodyPr wrap="square" lIns="25400" tIns="25400" rIns="25400" bIns="25400" rtlCol="0" anchor="t">
-            <a:normAutofit/>
-          </a:bodyPr>
-          <a:lstStyle/>
-          <a:p>
-            <a:pPr algn="l" indent="0" marL="0">
-              <a:buNone/>
-            </a:pPr>
-            <a:r>
-              <a:rPr lang="en-US" sz="1725" dirty="0">
+            <a:off x="1047750" y="7808565"/>
+            <a:ext cx="17811750" cy="314325"/>
+          </a:xfrm>
+          <a:prstGeom prst="rect">
+            <a:avLst/>
+          </a:prstGeom>
+          <a:noFill/>
+          <a:ln/>
+        </p:spPr>
+        <p:txBody>
+          <a:bodyPr wrap="square" lIns="25400" tIns="25400" rIns="25400" bIns="25400" rtlCol="0" anchor="t">
+            <a:normAutofit/>
+          </a:bodyPr>
+          <a:lstStyle/>
+          <a:p>
+            <a:pPr algn="l" indent="0" marL="0">
+              <a:buNone/>
+            </a:pPr>
+            <a:r>
+              <a:rPr lang="en-US" sz="1800" dirty="0">
                 <a:solidFill>
                   <a:srgbClr val="7B8C82"/>
                 </a:solidFill>
@@ -3176,7 +3111,7 @@
               </a:rPr>
               <a:t>Данные Минздрава и НЦОЗ · численность целевых групп, человек</a:t>
             </a:r>
-            <a:endParaRPr lang="en-US" sz="1725" dirty="0"/>
+            <a:endParaRPr lang="en-US" sz="1800" dirty="0"/>
           </a:p>
         </p:txBody>
       </p:sp>
@@ -3574,7 +3509,7 @@
                 <a:ea typeface="Arial" pitchFamily="34" charset="-122"/>
                 <a:cs typeface="Arial" pitchFamily="34" charset="-120"/>
               </a:rPr>
-              <a:t>пишем, сколько ночей осталось; без ИИ-советника и оценки давления по браслету</a:t>
+              <a:t>пишем, сколько ночей осталось; ИИ следит за качеством сигнала и готовит врачу черновик заключения</a:t>
             </a:r>
             <a:endParaRPr lang="en-US" sz="1800" dirty="0"/>
           </a:p>
@@ -3673,7 +3608,7 @@
         </p:nvSpPr>
         <p:spPr>
           <a:xfrm>
-            <a:off x="1047750" y="2485132"/>
+            <a:off x="1047750" y="2461320"/>
             <a:ext cx="17811750" cy="618158"/>
           </a:xfrm>
           <a:prstGeom prst="rect">
@@ -3717,12 +3652,12 @@
         </p:nvSpPr>
         <p:spPr>
           <a:xfrm>
-            <a:off x="1047750" y="3522390"/>
-            <a:ext cx="16192500" cy="4279404"/>
+            <a:off x="1047750" y="3498577"/>
+            <a:ext cx="16192500" cy="4327029"/>
           </a:xfrm>
           <a:prstGeom prst="roundRect">
             <a:avLst>
-              <a:gd name="adj" fmla="val 4452"/>
+              <a:gd name="adj" fmla="val 4403"/>
             </a:avLst>
           </a:prstGeom>
           <a:solidFill>
@@ -3755,7 +3690,7 @@
         </p:nvSpPr>
         <p:spPr>
           <a:xfrm>
-            <a:off x="1057275" y="3531915"/>
+            <a:off x="1057275" y="3508102"/>
             <a:ext cx="16173450" cy="742950"/>
           </a:xfrm>
           <a:prstGeom prst="rect">
@@ -3779,7 +3714,7 @@
         </p:nvSpPr>
         <p:spPr>
           <a:xfrm>
-            <a:off x="1400175" y="3760515"/>
+            <a:off x="1400175" y="3736702"/>
             <a:ext cx="1502785" cy="323850"/>
           </a:xfrm>
           <a:prstGeom prst="rect">
@@ -3820,26 +3755,26 @@
         </p:nvSpPr>
         <p:spPr>
           <a:xfrm>
-            <a:off x="2956843" y="3777183"/>
-            <a:ext cx="7161862" cy="290513"/>
-          </a:xfrm>
-          <a:prstGeom prst="rect">
-            <a:avLst/>
-          </a:prstGeom>
-          <a:noFill/>
-          <a:ln/>
-        </p:spPr>
-        <p:txBody>
-          <a:bodyPr wrap="square" lIns="25400" tIns="25400" rIns="25400" bIns="25400" rtlCol="0" anchor="t">
-            <a:normAutofit/>
-          </a:bodyPr>
-          <a:lstStyle/>
-          <a:p>
-            <a:pPr algn="l" indent="0" marL="0">
-              <a:buNone/>
-            </a:pPr>
-            <a:r>
-              <a:rPr lang="en-US" sz="1650" dirty="0">
+            <a:off x="2956843" y="3741465"/>
+            <a:ext cx="7812941" cy="314325"/>
+          </a:xfrm>
+          <a:prstGeom prst="rect">
+            <a:avLst/>
+          </a:prstGeom>
+          <a:noFill/>
+          <a:ln/>
+        </p:spPr>
+        <p:txBody>
+          <a:bodyPr wrap="square" lIns="25400" tIns="25400" rIns="25400" bIns="25400" rtlCol="0" anchor="t">
+            <a:normAutofit/>
+          </a:bodyPr>
+          <a:lstStyle/>
+          <a:p>
+            <a:pPr algn="l" indent="0" marL="0">
+              <a:buNone/>
+            </a:pPr>
+            <a:r>
+              <a:rPr lang="en-US" sz="1800" dirty="0">
                 <a:solidFill>
                   <a:srgbClr val="CFE7DB"/>
                 </a:solidFill>
@@ -3849,7 +3784,7 @@
               </a:rPr>
               <a:t>Дистанционное наблюдение · 143 пациента · тревог за сутки: 3</a:t>
             </a:r>
-            <a:endParaRPr lang="en-US" sz="1650" dirty="0"/>
+            <a:endParaRPr lang="en-US" sz="1800" dirty="0"/>
           </a:p>
         </p:txBody>
       </p:sp>
@@ -3861,8 +3796,8 @@
         </p:nvSpPr>
         <p:spPr>
           <a:xfrm>
-            <a:off x="1057275" y="4274865"/>
-            <a:ext cx="16173450" cy="604838"/>
+            <a:off x="1057275" y="4251052"/>
+            <a:ext cx="16173450" cy="652463"/>
           </a:xfrm>
           <a:prstGeom prst="rect">
             <a:avLst/>
@@ -3885,7 +3820,7 @@
         </p:nvSpPr>
         <p:spPr>
           <a:xfrm>
-            <a:off x="1057275" y="4870177"/>
+            <a:off x="1057275" y="4893990"/>
             <a:ext cx="16173450" cy="9525"/>
           </a:xfrm>
           <a:prstGeom prst="rect">
@@ -3909,26 +3844,26 @@
         </p:nvSpPr>
         <p:spPr>
           <a:xfrm>
-            <a:off x="1400175" y="4465365"/>
-            <a:ext cx="4439934" cy="252412"/>
-          </a:xfrm>
-          <a:prstGeom prst="rect">
-            <a:avLst/>
-          </a:prstGeom>
-          <a:noFill/>
-          <a:ln/>
-        </p:spPr>
-        <p:txBody>
-          <a:bodyPr wrap="square" lIns="25400" tIns="25400" rIns="25400" bIns="25400" rtlCol="0" anchor="t">
-            <a:normAutofit/>
-          </a:bodyPr>
-          <a:lstStyle/>
-          <a:p>
-            <a:pPr algn="l" indent="0" marL="0">
-              <a:buNone/>
-            </a:pPr>
-            <a:r>
-              <a:rPr lang="en-US" sz="1500" b="1" dirty="0">
+            <a:off x="1400175" y="4441552"/>
+            <a:ext cx="4439934" cy="300038"/>
+          </a:xfrm>
+          <a:prstGeom prst="rect">
+            <a:avLst/>
+          </a:prstGeom>
+          <a:noFill/>
+          <a:ln/>
+        </p:spPr>
+        <p:txBody>
+          <a:bodyPr wrap="square" lIns="25400" tIns="25400" rIns="25400" bIns="25400" rtlCol="0" anchor="t">
+            <a:normAutofit/>
+          </a:bodyPr>
+          <a:lstStyle/>
+          <a:p>
+            <a:pPr algn="l" indent="0" marL="0">
+              <a:buNone/>
+            </a:pPr>
+            <a:r>
+              <a:rPr lang="en-US" sz="1800" b="1" dirty="0">
                 <a:solidFill>
                   <a:srgbClr val="7B8C82"/>
                 </a:solidFill>
@@ -3938,7 +3873,7 @@
               </a:rPr>
               <a:t>Пациент</a:t>
             </a:r>
-            <a:endParaRPr lang="en-US" sz="1500" dirty="0"/>
+            <a:endParaRPr lang="en-US" sz="1800" dirty="0"/>
           </a:p>
         </p:txBody>
       </p:sp>
@@ -3950,26 +3885,26 @@
         </p:nvSpPr>
         <p:spPr>
           <a:xfrm>
-            <a:off x="6224215" y="4465365"/>
-            <a:ext cx="2822593" cy="252412"/>
-          </a:xfrm>
-          <a:prstGeom prst="rect">
-            <a:avLst/>
-          </a:prstGeom>
-          <a:noFill/>
-          <a:ln/>
-        </p:spPr>
-        <p:txBody>
-          <a:bodyPr wrap="square" lIns="25400" tIns="25400" rIns="25400" bIns="25400" rtlCol="0" anchor="t">
-            <a:normAutofit/>
-          </a:bodyPr>
-          <a:lstStyle/>
-          <a:p>
-            <a:pPr algn="l" indent="0" marL="0">
-              <a:buNone/>
-            </a:pPr>
-            <a:r>
-              <a:rPr lang="en-US" sz="1500" b="1" dirty="0">
+            <a:off x="6224215" y="4441552"/>
+            <a:ext cx="2822593" cy="300038"/>
+          </a:xfrm>
+          <a:prstGeom prst="rect">
+            <a:avLst/>
+          </a:prstGeom>
+          <a:noFill/>
+          <a:ln/>
+        </p:spPr>
+        <p:txBody>
+          <a:bodyPr wrap="square" lIns="25400" tIns="25400" rIns="25400" bIns="25400" rtlCol="0" anchor="t">
+            <a:normAutofit/>
+          </a:bodyPr>
+          <a:lstStyle/>
+          <a:p>
+            <a:pPr algn="l" indent="0" marL="0">
+              <a:buNone/>
+            </a:pPr>
+            <a:r>
+              <a:rPr lang="en-US" sz="1800" b="1" dirty="0">
                 <a:solidFill>
                   <a:srgbClr val="7B8C82"/>
                 </a:solidFill>
@@ -3979,7 +3914,7 @@
               </a:rPr>
               <a:t>Диагноз</a:t>
             </a:r>
-            <a:endParaRPr lang="en-US" sz="1500" dirty="0"/>
+            <a:endParaRPr lang="en-US" sz="1800" dirty="0"/>
           </a:p>
         </p:txBody>
       </p:sp>
@@ -3991,26 +3926,26 @@
         </p:nvSpPr>
         <p:spPr>
           <a:xfrm>
-            <a:off x="9334500" y="4465365"/>
-            <a:ext cx="2822516" cy="252412"/>
-          </a:xfrm>
-          <a:prstGeom prst="rect">
-            <a:avLst/>
-          </a:prstGeom>
-          <a:noFill/>
-          <a:ln/>
-        </p:spPr>
-        <p:txBody>
-          <a:bodyPr wrap="square" lIns="25400" tIns="25400" rIns="25400" bIns="25400" rtlCol="0" anchor="t">
-            <a:normAutofit/>
-          </a:bodyPr>
-          <a:lstStyle/>
-          <a:p>
-            <a:pPr algn="l" indent="0" marL="0">
-              <a:buNone/>
-            </a:pPr>
-            <a:r>
-              <a:rPr lang="en-US" sz="1500" b="1" dirty="0">
+            <a:off x="9334500" y="4441552"/>
+            <a:ext cx="2822516" cy="300038"/>
+          </a:xfrm>
+          <a:prstGeom prst="rect">
+            <a:avLst/>
+          </a:prstGeom>
+          <a:noFill/>
+          <a:ln/>
+        </p:spPr>
+        <p:txBody>
+          <a:bodyPr wrap="square" lIns="25400" tIns="25400" rIns="25400" bIns="25400" rtlCol="0" anchor="t">
+            <a:normAutofit/>
+          </a:bodyPr>
+          <a:lstStyle/>
+          <a:p>
+            <a:pPr algn="l" indent="0" marL="0">
+              <a:buNone/>
+            </a:pPr>
+            <a:r>
+              <a:rPr lang="en-US" sz="1800" b="1" dirty="0">
                 <a:solidFill>
                   <a:srgbClr val="7B8C82"/>
                 </a:solidFill>
@@ -4020,7 +3955,7 @@
               </a:rPr>
               <a:t>Состояние</a:t>
             </a:r>
-            <a:endParaRPr lang="en-US" sz="1500" dirty="0"/>
+            <a:endParaRPr lang="en-US" sz="1800" dirty="0"/>
           </a:p>
         </p:txBody>
       </p:sp>
@@ -4032,26 +3967,26 @@
         </p:nvSpPr>
         <p:spPr>
           <a:xfrm>
-            <a:off x="12444710" y="4465365"/>
-            <a:ext cx="4744810" cy="252412"/>
-          </a:xfrm>
-          <a:prstGeom prst="rect">
-            <a:avLst/>
-          </a:prstGeom>
-          <a:noFill/>
-          <a:ln/>
-        </p:spPr>
-        <p:txBody>
-          <a:bodyPr wrap="square" lIns="25400" tIns="25400" rIns="25400" bIns="25400" rtlCol="0" anchor="t">
-            <a:normAutofit/>
-          </a:bodyPr>
-          <a:lstStyle/>
-          <a:p>
-            <a:pPr algn="l" indent="0" marL="0">
-              <a:buNone/>
-            </a:pPr>
-            <a:r>
-              <a:rPr lang="en-US" sz="1500" b="1" dirty="0">
+            <a:off x="12444710" y="4441552"/>
+            <a:ext cx="4744810" cy="300038"/>
+          </a:xfrm>
+          <a:prstGeom prst="rect">
+            <a:avLst/>
+          </a:prstGeom>
+          <a:noFill/>
+          <a:ln/>
+        </p:spPr>
+        <p:txBody>
+          <a:bodyPr wrap="square" lIns="25400" tIns="25400" rIns="25400" bIns="25400" rtlCol="0" anchor="t">
+            <a:normAutofit/>
+          </a:bodyPr>
+          <a:lstStyle/>
+          <a:p>
+            <a:pPr algn="l" indent="0" marL="0">
+              <a:buNone/>
+            </a:pPr>
+            <a:r>
+              <a:rPr lang="en-US" sz="1800" b="1" dirty="0">
                 <a:solidFill>
                   <a:srgbClr val="7B8C82"/>
                 </a:solidFill>
@@ -4061,7 +3996,7 @@
               </a:rPr>
               <a:t>Что произошло</a:t>
             </a:r>
-            <a:endParaRPr lang="en-US" sz="1500" dirty="0"/>
+            <a:endParaRPr lang="en-US" sz="1800" dirty="0"/>
           </a:p>
         </p:txBody>
       </p:sp>
@@ -4073,7 +4008,7 @@
         </p:nvSpPr>
         <p:spPr>
           <a:xfrm>
-            <a:off x="1057275" y="4879702"/>
+            <a:off x="1057275" y="4903515"/>
             <a:ext cx="16173450" cy="1070521"/>
           </a:xfrm>
           <a:prstGeom prst="rect">
@@ -4097,7 +4032,7 @@
         </p:nvSpPr>
         <p:spPr>
           <a:xfrm>
-            <a:off x="1057275" y="5940698"/>
+            <a:off x="1057275" y="5964510"/>
             <a:ext cx="16173450" cy="9525"/>
           </a:xfrm>
           <a:prstGeom prst="rect">
@@ -4121,7 +4056,7 @@
         </p:nvSpPr>
         <p:spPr>
           <a:xfrm>
-            <a:off x="1400175" y="5272088"/>
+            <a:off x="1400175" y="5295900"/>
             <a:ext cx="4439934" cy="314325"/>
           </a:xfrm>
           <a:prstGeom prst="rect">
@@ -4162,7 +4097,7 @@
         </p:nvSpPr>
         <p:spPr>
           <a:xfrm>
-            <a:off x="6224215" y="5279231"/>
+            <a:off x="6224215" y="5303044"/>
             <a:ext cx="2822593" cy="300038"/>
           </a:xfrm>
           <a:prstGeom prst="rect">
@@ -4203,7 +4138,7 @@
         </p:nvSpPr>
         <p:spPr>
           <a:xfrm>
-            <a:off x="9334500" y="5245894"/>
+            <a:off x="9334500" y="5269706"/>
             <a:ext cx="1239441" cy="323850"/>
           </a:xfrm>
           <a:prstGeom prst="roundRect">
@@ -4229,7 +4164,7 @@
         </p:nvSpPr>
         <p:spPr>
           <a:xfrm>
-            <a:off x="9486900" y="5303044"/>
+            <a:off x="9486900" y="5326856"/>
             <a:ext cx="1010841" cy="247650"/>
           </a:xfrm>
           <a:prstGeom prst="rect">
@@ -4270,7 +4205,7 @@
         </p:nvSpPr>
         <p:spPr>
           <a:xfrm>
-            <a:off x="12444710" y="5127352"/>
+            <a:off x="12444710" y="5151165"/>
             <a:ext cx="4744810" cy="603796"/>
           </a:xfrm>
           <a:prstGeom prst="rect">
@@ -4314,7 +4249,7 @@
         </p:nvSpPr>
         <p:spPr>
           <a:xfrm>
-            <a:off x="1057275" y="7011219"/>
+            <a:off x="1057275" y="7035031"/>
             <a:ext cx="16173450" cy="9525"/>
           </a:xfrm>
           <a:prstGeom prst="rect">
@@ -4338,7 +4273,7 @@
         </p:nvSpPr>
         <p:spPr>
           <a:xfrm>
-            <a:off x="1400175" y="6342608"/>
+            <a:off x="1400175" y="6366421"/>
             <a:ext cx="4439934" cy="314325"/>
           </a:xfrm>
           <a:prstGeom prst="rect">
@@ -4379,7 +4314,7 @@
         </p:nvSpPr>
         <p:spPr>
           <a:xfrm>
-            <a:off x="6224215" y="6349752"/>
+            <a:off x="6224215" y="6373564"/>
             <a:ext cx="2822593" cy="300038"/>
           </a:xfrm>
           <a:prstGeom prst="rect">
@@ -4420,7 +4355,7 @@
         </p:nvSpPr>
         <p:spPr>
           <a:xfrm>
-            <a:off x="9334500" y="6316414"/>
+            <a:off x="9334500" y="6340227"/>
             <a:ext cx="1196429" cy="323850"/>
           </a:xfrm>
           <a:prstGeom prst="roundRect">
@@ -4446,7 +4381,7 @@
         </p:nvSpPr>
         <p:spPr>
           <a:xfrm>
-            <a:off x="9486900" y="6373564"/>
+            <a:off x="9486900" y="6397377"/>
             <a:ext cx="967829" cy="247650"/>
           </a:xfrm>
           <a:prstGeom prst="rect">
@@ -4487,7 +4422,7 @@
         </p:nvSpPr>
         <p:spPr>
           <a:xfrm>
-            <a:off x="12444710" y="6197873"/>
+            <a:off x="12444710" y="6221685"/>
             <a:ext cx="4744810" cy="603796"/>
           </a:xfrm>
           <a:prstGeom prst="rect">
@@ -4531,7 +4466,7 @@
         </p:nvSpPr>
         <p:spPr>
           <a:xfrm>
-            <a:off x="1400175" y="7268394"/>
+            <a:off x="1400175" y="7292206"/>
             <a:ext cx="4439934" cy="314325"/>
           </a:xfrm>
           <a:prstGeom prst="rect">
@@ -4572,7 +4507,7 @@
         </p:nvSpPr>
         <p:spPr>
           <a:xfrm>
-            <a:off x="6224215" y="7275537"/>
+            <a:off x="6224215" y="7299350"/>
             <a:ext cx="2822593" cy="300038"/>
           </a:xfrm>
           <a:prstGeom prst="rect">
@@ -4613,7 +4548,7 @@
         </p:nvSpPr>
         <p:spPr>
           <a:xfrm>
-            <a:off x="9334500" y="7242200"/>
+            <a:off x="9334500" y="7266012"/>
             <a:ext cx="1253133" cy="323850"/>
           </a:xfrm>
           <a:prstGeom prst="roundRect">
@@ -4639,7 +4574,7 @@
         </p:nvSpPr>
         <p:spPr>
           <a:xfrm>
-            <a:off x="9486900" y="7299350"/>
+            <a:off x="9486900" y="7323162"/>
             <a:ext cx="1024533" cy="247650"/>
           </a:xfrm>
           <a:prstGeom prst="rect">
@@ -4680,7 +4615,7 @@
         </p:nvSpPr>
         <p:spPr>
           <a:xfrm>
-            <a:off x="12444710" y="7280300"/>
+            <a:off x="12444710" y="7304112"/>
             <a:ext cx="4744810" cy="290513"/>
           </a:xfrm>
           <a:prstGeom prst="rect">
@@ -5725,7 +5660,7 @@
         </p:nvSpPr>
         <p:spPr>
           <a:xfrm>
-            <a:off x="1047750" y="2447032"/>
+            <a:off x="1047750" y="2273722"/>
             <a:ext cx="2955727" cy="414338"/>
           </a:xfrm>
           <a:prstGeom prst="roundRect">
@@ -5753,7 +5688,7 @@
         </p:nvSpPr>
         <p:spPr>
           <a:xfrm>
-            <a:off x="1219200" y="2523232"/>
+            <a:off x="1219200" y="2349922"/>
             <a:ext cx="2701498" cy="300038"/>
           </a:xfrm>
           <a:prstGeom prst="rect">
@@ -5794,7 +5729,7 @@
         </p:nvSpPr>
         <p:spPr>
           <a:xfrm>
-            <a:off x="1047750" y="3109020"/>
+            <a:off x="1047750" y="2935709"/>
             <a:ext cx="17811750" cy="658118"/>
           </a:xfrm>
           <a:prstGeom prst="rect">
@@ -5838,7 +5773,7 @@
         </p:nvSpPr>
         <p:spPr>
           <a:xfrm>
-            <a:off x="1047750" y="4300538"/>
+            <a:off x="1047750" y="4127227"/>
             <a:ext cx="3562350" cy="295275"/>
           </a:xfrm>
           <a:prstGeom prst="rect">
@@ -5879,7 +5814,7 @@
         </p:nvSpPr>
         <p:spPr>
           <a:xfrm>
-            <a:off x="1047750" y="4691063"/>
+            <a:off x="1047750" y="4517752"/>
             <a:ext cx="3562350" cy="323850"/>
           </a:xfrm>
           <a:prstGeom prst="rect">
@@ -5920,7 +5855,7 @@
         </p:nvSpPr>
         <p:spPr>
           <a:xfrm>
-            <a:off x="1047750" y="5053013"/>
+            <a:off x="1047750" y="4879702"/>
             <a:ext cx="3335655" cy="598140"/>
           </a:xfrm>
           <a:prstGeom prst="rect">
@@ -5964,7 +5899,7 @@
         </p:nvSpPr>
         <p:spPr>
           <a:xfrm>
-            <a:off x="4286250" y="4300538"/>
+            <a:off x="4286250" y="4127227"/>
             <a:ext cx="3562350" cy="295275"/>
           </a:xfrm>
           <a:prstGeom prst="rect">
@@ -6005,7 +5940,7 @@
         </p:nvSpPr>
         <p:spPr>
           <a:xfrm>
-            <a:off x="4286250" y="4691063"/>
+            <a:off x="4286250" y="4517752"/>
             <a:ext cx="3562350" cy="323850"/>
           </a:xfrm>
           <a:prstGeom prst="rect">
@@ -6046,7 +5981,7 @@
         </p:nvSpPr>
         <p:spPr>
           <a:xfrm>
-            <a:off x="4286250" y="5053013"/>
+            <a:off x="4286250" y="4879702"/>
             <a:ext cx="3335655" cy="598140"/>
           </a:xfrm>
           <a:prstGeom prst="rect">
@@ -6090,7 +6025,7 @@
         </p:nvSpPr>
         <p:spPr>
           <a:xfrm>
-            <a:off x="7524750" y="4300538"/>
+            <a:off x="7524750" y="4127227"/>
             <a:ext cx="3562350" cy="295275"/>
           </a:xfrm>
           <a:prstGeom prst="rect">
@@ -6131,7 +6066,7 @@
         </p:nvSpPr>
         <p:spPr>
           <a:xfrm>
-            <a:off x="7524750" y="4691063"/>
+            <a:off x="7524750" y="4517752"/>
             <a:ext cx="3562350" cy="323850"/>
           </a:xfrm>
           <a:prstGeom prst="rect">
@@ -6172,7 +6107,7 @@
         </p:nvSpPr>
         <p:spPr>
           <a:xfrm>
-            <a:off x="7524750" y="5053013"/>
+            <a:off x="7524750" y="4879702"/>
             <a:ext cx="3335655" cy="598140"/>
           </a:xfrm>
           <a:prstGeom prst="rect">
@@ -6216,7 +6151,7 @@
         </p:nvSpPr>
         <p:spPr>
           <a:xfrm>
-            <a:off x="10763250" y="4300538"/>
+            <a:off x="10763250" y="4127227"/>
             <a:ext cx="3562350" cy="295275"/>
           </a:xfrm>
           <a:prstGeom prst="rect">
@@ -6257,7 +6192,7 @@
         </p:nvSpPr>
         <p:spPr>
           <a:xfrm>
-            <a:off x="10763250" y="4691063"/>
+            <a:off x="10763250" y="4517752"/>
             <a:ext cx="3562350" cy="323850"/>
           </a:xfrm>
           <a:prstGeom prst="rect">
@@ -6298,7 +6233,7 @@
         </p:nvSpPr>
         <p:spPr>
           <a:xfrm>
-            <a:off x="10763250" y="5053013"/>
+            <a:off x="10763250" y="4879702"/>
             <a:ext cx="3562350" cy="318120"/>
           </a:xfrm>
           <a:prstGeom prst="rect">
@@ -6342,7 +6277,7 @@
         </p:nvSpPr>
         <p:spPr>
           <a:xfrm>
-            <a:off x="14001750" y="4300538"/>
+            <a:off x="14001750" y="4127227"/>
             <a:ext cx="3562350" cy="295275"/>
           </a:xfrm>
           <a:prstGeom prst="rect">
@@ -6383,7 +6318,7 @@
         </p:nvSpPr>
         <p:spPr>
           <a:xfrm>
-            <a:off x="14001750" y="4691063"/>
+            <a:off x="14001750" y="4517752"/>
             <a:ext cx="3562350" cy="323850"/>
           </a:xfrm>
           <a:prstGeom prst="rect">
@@ -6424,7 +6359,7 @@
         </p:nvSpPr>
         <p:spPr>
           <a:xfrm>
-            <a:off x="14001750" y="5053013"/>
+            <a:off x="14001750" y="4879702"/>
             <a:ext cx="3562350" cy="318120"/>
           </a:xfrm>
           <a:prstGeom prst="rect">
@@ -6468,7 +6403,7 @@
         </p:nvSpPr>
         <p:spPr>
           <a:xfrm>
-            <a:off x="1047750" y="5936903"/>
+            <a:off x="1047750" y="5763592"/>
             <a:ext cx="16192500" cy="38100"/>
           </a:xfrm>
           <a:prstGeom prst="roundRect">
@@ -6506,12 +6441,12 @@
         </p:nvSpPr>
         <p:spPr>
           <a:xfrm>
-            <a:off x="1047750" y="6508403"/>
-            <a:ext cx="7943850" cy="1331565"/>
+            <a:off x="1047750" y="6335092"/>
+            <a:ext cx="7943850" cy="1678186"/>
           </a:xfrm>
           <a:prstGeom prst="roundRect">
             <a:avLst>
-              <a:gd name="adj" fmla="val 12876"/>
+              <a:gd name="adj" fmla="val 10216"/>
             </a:avLst>
           </a:prstGeom>
           <a:solidFill>
@@ -6537,7 +6472,7 @@
         </p:nvSpPr>
         <p:spPr>
           <a:xfrm>
-            <a:off x="1438275" y="6841778"/>
+            <a:off x="1438275" y="6668467"/>
             <a:ext cx="7879080" cy="333375"/>
           </a:xfrm>
           <a:prstGeom prst="rect">
@@ -6578,7 +6513,7 @@
         </p:nvSpPr>
         <p:spPr>
           <a:xfrm>
-            <a:off x="1438275" y="7213253"/>
+            <a:off x="1438275" y="7039942"/>
             <a:ext cx="7879080" cy="331440"/>
           </a:xfrm>
           <a:prstGeom prst="rect">
@@ -6622,12 +6557,12 @@
         </p:nvSpPr>
         <p:spPr>
           <a:xfrm>
-            <a:off x="9296400" y="6508403"/>
-            <a:ext cx="7943850" cy="1331565"/>
+            <a:off x="9296400" y="6335092"/>
+            <a:ext cx="7943850" cy="1678186"/>
           </a:xfrm>
           <a:prstGeom prst="roundRect">
             <a:avLst>
-              <a:gd name="adj" fmla="val 12876"/>
+              <a:gd name="adj" fmla="val 10216"/>
             </a:avLst>
           </a:prstGeom>
           <a:solidFill>
@@ -6653,7 +6588,7 @@
         </p:nvSpPr>
         <p:spPr>
           <a:xfrm>
-            <a:off x="9686925" y="6841778"/>
+            <a:off x="9686925" y="6668467"/>
             <a:ext cx="7879080" cy="333375"/>
           </a:xfrm>
           <a:prstGeom prst="rect">
@@ -6680,7 +6615,7 @@
                 <a:ea typeface="Arial" pitchFamily="34" charset="-122"/>
                 <a:cs typeface="Arial" pitchFamily="34" charset="-120"/>
               </a:rPr>
-              <a:t>Аналитика без ИИ</a:t>
+              <a:t>Искусственный интеллект — поэтапно</a:t>
             </a:r>
             <a:endParaRPr lang="en-US" sz="2025" dirty="0"/>
           </a:p>
@@ -6694,8 +6629,8 @@
         </p:nvSpPr>
         <p:spPr>
           <a:xfrm>
-            <a:off x="9686925" y="7213253"/>
-            <a:ext cx="7879080" cy="331440"/>
+            <a:off x="9686925" y="7039942"/>
+            <a:ext cx="7377684" cy="678061"/>
           </a:xfrm>
           <a:prstGeom prst="rect">
             <a:avLst/>
@@ -6711,12 +6646,12 @@
           <a:p>
             <a:pPr algn="l" indent="0" marL="0">
               <a:lnSpc>
-                <a:spcPct val="123200"/>
+                <a:spcPct val="122182"/>
               </a:lnSpc>
               <a:buNone/>
             </a:pPr>
             <a:r>
-              <a:rPr lang="en-US" sz="1650" dirty="0">
+              <a:rPr lang="en-US" sz="1800" dirty="0">
                 <a:solidFill>
                   <a:srgbClr val="CFE7DB"/>
                 </a:solidFill>
@@ -6724,9 +6659,9 @@
                 <a:ea typeface="Arial" pitchFamily="34" charset="-122"/>
                 <a:cs typeface="Arial" pitchFamily="34" charset="-120"/>
               </a:rPr>
-              <a:t>ПО с ИИ автоматически получает высший класс риска</a:t>
-            </a:r>
-            <a:endParaRPr lang="en-US" sz="1650" dirty="0"/>
+              <a:t>Первая версия — прозрачные правила (класс 2а); клинический ИИ выводим второй волной</a:t>
+            </a:r>
+            <a:endParaRPr lang="en-US" sz="1800" dirty="0"/>
           </a:p>
         </p:txBody>
       </p:sp>
@@ -6770,7 +6705,7 @@
         </p:nvSpPr>
         <p:spPr>
           <a:xfrm>
-            <a:off x="1047750" y="1823293"/>
+            <a:off x="1047750" y="1670447"/>
             <a:ext cx="2241575" cy="414338"/>
           </a:xfrm>
           <a:prstGeom prst="roundRect">
@@ -6796,7 +6731,7 @@
         </p:nvSpPr>
         <p:spPr>
           <a:xfrm>
-            <a:off x="1219200" y="1899493"/>
+            <a:off x="1219200" y="1746647"/>
             <a:ext cx="1974875" cy="300038"/>
           </a:xfrm>
           <a:prstGeom prst="rect">
@@ -6837,7 +6772,7 @@
         </p:nvSpPr>
         <p:spPr>
           <a:xfrm>
-            <a:off x="1047750" y="2466231"/>
+            <a:off x="1047750" y="2313384"/>
             <a:ext cx="17811750" cy="658118"/>
           </a:xfrm>
           <a:prstGeom prst="rect">
@@ -6881,7 +6816,7 @@
         </p:nvSpPr>
         <p:spPr>
           <a:xfrm>
-            <a:off x="1047750" y="3581549"/>
+            <a:off x="1047750" y="3428702"/>
             <a:ext cx="16192500" cy="924818"/>
           </a:xfrm>
           <a:prstGeom prst="roundRect">
@@ -6912,7 +6847,7 @@
         </p:nvSpPr>
         <p:spPr>
           <a:xfrm>
-            <a:off x="1438275" y="3876824"/>
+            <a:off x="1438275" y="3723977"/>
             <a:ext cx="8308658" cy="372368"/>
           </a:xfrm>
           <a:prstGeom prst="rect">
@@ -6956,7 +6891,7 @@
         </p:nvSpPr>
         <p:spPr>
           <a:xfrm>
-            <a:off x="9296400" y="3883968"/>
+            <a:off x="9296400" y="3731121"/>
             <a:ext cx="8308658" cy="358080"/>
           </a:xfrm>
           <a:prstGeom prst="rect">
@@ -7000,7 +6935,7 @@
         </p:nvSpPr>
         <p:spPr>
           <a:xfrm>
-            <a:off x="1047750" y="4696867"/>
+            <a:off x="1047750" y="4544020"/>
             <a:ext cx="16192500" cy="1230511"/>
           </a:xfrm>
           <a:prstGeom prst="roundRect">
@@ -7031,7 +6966,7 @@
         </p:nvSpPr>
         <p:spPr>
           <a:xfrm>
-            <a:off x="1438275" y="5144988"/>
+            <a:off x="1438275" y="4992142"/>
             <a:ext cx="8308658" cy="372368"/>
           </a:xfrm>
           <a:prstGeom prst="rect">
@@ -7075,7 +7010,7 @@
         </p:nvSpPr>
         <p:spPr>
           <a:xfrm>
-            <a:off x="9296400" y="4992142"/>
+            <a:off x="9296400" y="4839295"/>
             <a:ext cx="7779925" cy="678061"/>
           </a:xfrm>
           <a:prstGeom prst="rect">
@@ -7119,12 +7054,12 @@
         </p:nvSpPr>
         <p:spPr>
           <a:xfrm>
-            <a:off x="1047750" y="6117878"/>
-            <a:ext cx="16192500" cy="924818"/>
+            <a:off x="1047750" y="5965031"/>
+            <a:ext cx="16192500" cy="1230511"/>
           </a:xfrm>
           <a:prstGeom prst="roundRect">
             <a:avLst>
-              <a:gd name="adj" fmla="val 16479"/>
+              <a:gd name="adj" fmla="val 12385"/>
             </a:avLst>
           </a:prstGeom>
           <a:solidFill>
@@ -7180,7 +7115,7 @@
                 <a:ea typeface="Arial" pitchFamily="34" charset="-122"/>
                 <a:cs typeface="Arial" pitchFamily="34" charset="-120"/>
               </a:rPr>
-              <a:t>Поликлиники не готовы платить за мониторинг</a:t>
+              <a:t>Поликлиники не станут закупать браслеты</a:t>
             </a:r>
             <a:endParaRPr lang="en-US" sz="1950" dirty="0"/>
           </a:p>
@@ -7194,8 +7129,8 @@
         </p:nvSpPr>
         <p:spPr>
           <a:xfrm>
-            <a:off x="9296400" y="6420296"/>
-            <a:ext cx="8308658" cy="358080"/>
+            <a:off x="9296400" y="6260306"/>
+            <a:ext cx="7779925" cy="678061"/>
           </a:xfrm>
           <a:prstGeom prst="rect">
             <a:avLst/>
@@ -7224,7 +7159,7 @@
                 <a:ea typeface="Arial" pitchFamily="34" charset="-122"/>
                 <a:cs typeface="Arial" pitchFamily="34" charset="-120"/>
               </a:rPr>
-              <a:t>Проверка 2–3 разговорами до заказа; иначе разворот в розницу</a:t>
+              <a:t>Наблюдение бесплатно; барьер железа снимает рассрочка 640 ₸/мес и обязанность по приказу ДСМ-39</a:t>
             </a:r>
             <a:endParaRPr lang="en-US" sz="1800" dirty="0"/>
           </a:p>
@@ -7238,7 +7173,7 @@
         </p:nvSpPr>
         <p:spPr>
           <a:xfrm>
-            <a:off x="1047750" y="7233196"/>
+            <a:off x="1047750" y="7386042"/>
             <a:ext cx="16192500" cy="1230511"/>
           </a:xfrm>
           <a:prstGeom prst="roundRect">
@@ -7269,7 +7204,7 @@
         </p:nvSpPr>
         <p:spPr>
           <a:xfrm>
-            <a:off x="1438275" y="7681317"/>
+            <a:off x="1438275" y="7834164"/>
             <a:ext cx="8308658" cy="372368"/>
           </a:xfrm>
           <a:prstGeom prst="rect">
@@ -7313,7 +7248,7 @@
         </p:nvSpPr>
         <p:spPr>
           <a:xfrm>
-            <a:off x="9296400" y="7528471"/>
+            <a:off x="9296400" y="7681317"/>
             <a:ext cx="7779925" cy="678061"/>
           </a:xfrm>
           <a:prstGeom prst="rect">
@@ -7790,8 +7725,8 @@
         </p:nvSpPr>
         <p:spPr>
           <a:xfrm>
-            <a:off x="1047750" y="2079427"/>
-            <a:ext cx="2573313" cy="414338"/>
+            <a:off x="1047750" y="2127052"/>
+            <a:ext cx="2168054" cy="414338"/>
           </a:xfrm>
           <a:prstGeom prst="roundRect">
             <a:avLst>
@@ -7816,8 +7751,8 @@
         </p:nvSpPr>
         <p:spPr>
           <a:xfrm>
-            <a:off x="1219200" y="2155627"/>
-            <a:ext cx="2307612" cy="300038"/>
+            <a:off x="1219200" y="2203252"/>
+            <a:ext cx="1901354" cy="300038"/>
           </a:xfrm>
           <a:prstGeom prst="rect">
             <a:avLst/>
@@ -7857,7 +7792,7 @@
         </p:nvSpPr>
         <p:spPr>
           <a:xfrm>
-            <a:off x="1047750" y="2741414"/>
+            <a:off x="1047750" y="2789039"/>
             <a:ext cx="7946708" cy="1437084"/>
           </a:xfrm>
           <a:prstGeom prst="rect">
@@ -7887,7 +7822,7 @@
                 <a:ea typeface="Arial" pitchFamily="34" charset="-122"/>
                 <a:cs typeface="Arial" pitchFamily="34" charset="-120"/>
               </a:rPr>
-              <a:t>Продаём не браслет, а дистанционное наблюдение врача</a:t>
+              <a:t>Врач рядом каждый день, а не 15 минут в месяц</a:t>
             </a:r>
             <a:endParaRPr lang="en-US" sz="5100" dirty="0"/>
           </a:p>
@@ -7901,8 +7836,8 @@
         </p:nvSpPr>
         <p:spPr>
           <a:xfrm>
-            <a:off x="1047750" y="4464248"/>
-            <a:ext cx="5839312" cy="1752600"/>
+            <a:off x="1047750" y="4511873"/>
+            <a:ext cx="5839312" cy="1323975"/>
           </a:xfrm>
           <a:prstGeom prst="rect">
             <a:avLst/>
@@ -7931,7 +7866,7 @@
                 <a:ea typeface="Arial" pitchFamily="34" charset="-122"/>
                 <a:cs typeface="Arial" pitchFamily="34" charset="-120"/>
               </a:rPr>
-              <a:t>Устройство идёт с минимальной наценкой. Деньги приходят от мониторинга и подписок, а не от железа.</a:t>
+              <a:t>Датчик на руке → данные в медкарте → врач замечает ухудшение за несколько дней до обострения.</a:t>
             </a:r>
             <a:endParaRPr lang="en-US" sz="2250" dirty="0"/>
           </a:p>
@@ -7945,7 +7880,7 @@
         </p:nvSpPr>
         <p:spPr>
           <a:xfrm>
-            <a:off x="1047750" y="6674048"/>
+            <a:off x="1047750" y="6293048"/>
             <a:ext cx="114300" cy="114300"/>
           </a:xfrm>
           <a:prstGeom prst="ellipse">
@@ -7969,8 +7904,8 @@
         </p:nvSpPr>
         <p:spPr>
           <a:xfrm>
-            <a:off x="1314450" y="6559748"/>
-            <a:ext cx="7805738" cy="371475"/>
+            <a:off x="1314450" y="6178748"/>
+            <a:ext cx="7672007" cy="704850"/>
           </a:xfrm>
           <a:prstGeom prst="rect">
             <a:avLst/>
@@ -7999,7 +7934,7 @@
                 <a:ea typeface="Arial" pitchFamily="34" charset="-122"/>
                 <a:cs typeface="Arial" pitchFamily="34" charset="-120"/>
               </a:rPr>
-              <a:t>Контрактное производство браслета без экрана</a:t>
+              <a:t>У Damumed уже есть приложение, медкарта и рабочее место врача — не хватает датчика</a:t>
             </a:r>
             <a:endParaRPr lang="en-US" sz="1875" dirty="0"/>
           </a:p>
@@ -8013,7 +7948,7 @@
         </p:nvSpPr>
         <p:spPr>
           <a:xfrm>
-            <a:off x="1047750" y="7159823"/>
+            <a:off x="1047750" y="7112198"/>
             <a:ext cx="114300" cy="114300"/>
           </a:xfrm>
           <a:prstGeom prst="ellipse">
@@ -8037,7 +7972,7 @@
         </p:nvSpPr>
         <p:spPr>
           <a:xfrm>
-            <a:off x="1314450" y="7045523"/>
+            <a:off x="1314450" y="6997898"/>
             <a:ext cx="7672007" cy="714375"/>
           </a:xfrm>
           <a:prstGeom prst="rect">
@@ -8115,7 +8050,7 @@
         </p:nvSpPr>
         <p:spPr>
           <a:xfrm>
-            <a:off x="1047750" y="7988498"/>
+            <a:off x="1047750" y="7940873"/>
             <a:ext cx="114300" cy="114300"/>
           </a:xfrm>
           <a:prstGeom prst="ellipse">
@@ -8139,7 +8074,7 @@
         </p:nvSpPr>
         <p:spPr>
           <a:xfrm>
-            <a:off x="1314450" y="7874198"/>
+            <a:off x="1314450" y="7826573"/>
             <a:ext cx="8188166" cy="371475"/>
           </a:xfrm>
           <a:prstGeom prst="rect">
@@ -9298,7 +9233,7 @@
         </p:nvSpPr>
         <p:spPr>
           <a:xfrm>
-            <a:off x="1047750" y="2013645"/>
+            <a:off x="1047750" y="2006501"/>
             <a:ext cx="2169021" cy="414338"/>
           </a:xfrm>
           <a:prstGeom prst="roundRect">
@@ -9324,7 +9259,7 @@
         </p:nvSpPr>
         <p:spPr>
           <a:xfrm>
-            <a:off x="1219200" y="2089845"/>
+            <a:off x="1219200" y="2082701"/>
             <a:ext cx="1902321" cy="300038"/>
           </a:xfrm>
           <a:prstGeom prst="rect">
@@ -9365,7 +9300,7 @@
         </p:nvSpPr>
         <p:spPr>
           <a:xfrm>
-            <a:off x="1047750" y="2656582"/>
+            <a:off x="1047750" y="2649438"/>
             <a:ext cx="8118932" cy="1278136"/>
           </a:xfrm>
           <a:prstGeom prst="rect">
@@ -9409,7 +9344,7 @@
         </p:nvSpPr>
         <p:spPr>
           <a:xfrm>
-            <a:off x="1047750" y="4522887"/>
+            <a:off x="1047750" y="4515743"/>
             <a:ext cx="3771900" cy="347663"/>
           </a:xfrm>
           <a:prstGeom prst="rect">
@@ -9450,7 +9385,7 @@
         </p:nvSpPr>
         <p:spPr>
           <a:xfrm>
-            <a:off x="4705350" y="4430018"/>
+            <a:off x="4705350" y="4422874"/>
             <a:ext cx="2564829" cy="495300"/>
           </a:xfrm>
           <a:prstGeom prst="roundRect">
@@ -9476,7 +9411,7 @@
         </p:nvSpPr>
         <p:spPr>
           <a:xfrm>
-            <a:off x="12477750" y="4503837"/>
+            <a:off x="12477750" y="4496693"/>
             <a:ext cx="2095500" cy="385763"/>
           </a:xfrm>
           <a:prstGeom prst="rect">
@@ -9517,7 +9452,7 @@
         </p:nvSpPr>
         <p:spPr>
           <a:xfrm>
-            <a:off x="1047750" y="5203924"/>
+            <a:off x="1047750" y="5196780"/>
             <a:ext cx="3771900" cy="357188"/>
           </a:xfrm>
           <a:prstGeom prst="rect">
@@ -9558,7 +9493,7 @@
         </p:nvSpPr>
         <p:spPr>
           <a:xfrm>
-            <a:off x="4705350" y="5115818"/>
+            <a:off x="4705350" y="5108674"/>
             <a:ext cx="2866579" cy="495300"/>
           </a:xfrm>
           <a:prstGeom prst="roundRect">
@@ -9584,7 +9519,7 @@
         </p:nvSpPr>
         <p:spPr>
           <a:xfrm>
-            <a:off x="12477750" y="5192018"/>
+            <a:off x="12477750" y="5184874"/>
             <a:ext cx="2095500" cy="381000"/>
           </a:xfrm>
           <a:prstGeom prst="rect">
@@ -9625,7 +9560,7 @@
         </p:nvSpPr>
         <p:spPr>
           <a:xfrm>
-            <a:off x="1047750" y="5889724"/>
+            <a:off x="1047750" y="5882580"/>
             <a:ext cx="3771900" cy="357188"/>
           </a:xfrm>
           <a:prstGeom prst="rect">
@@ -9666,7 +9601,7 @@
         </p:nvSpPr>
         <p:spPr>
           <a:xfrm>
-            <a:off x="4705350" y="5801618"/>
+            <a:off x="4705350" y="5794474"/>
             <a:ext cx="3771900" cy="495300"/>
           </a:xfrm>
           <a:prstGeom prst="roundRect">
@@ -9692,7 +9627,7 @@
         </p:nvSpPr>
         <p:spPr>
           <a:xfrm>
-            <a:off x="12477750" y="5877818"/>
+            <a:off x="12477750" y="5870674"/>
             <a:ext cx="2095500" cy="381000"/>
           </a:xfrm>
           <a:prstGeom prst="rect">
@@ -9733,7 +9668,7 @@
         </p:nvSpPr>
         <p:spPr>
           <a:xfrm>
-            <a:off x="1047750" y="6575524"/>
+            <a:off x="1047750" y="6568380"/>
             <a:ext cx="3771900" cy="357188"/>
           </a:xfrm>
           <a:prstGeom prst="rect">
@@ -9774,7 +9709,7 @@
         </p:nvSpPr>
         <p:spPr>
           <a:xfrm>
-            <a:off x="4705350" y="6487418"/>
+            <a:off x="4705350" y="6480274"/>
             <a:ext cx="3847281" cy="495300"/>
           </a:xfrm>
           <a:prstGeom prst="roundRect">
@@ -9800,7 +9735,7 @@
         </p:nvSpPr>
         <p:spPr>
           <a:xfrm>
-            <a:off x="12477750" y="6563618"/>
+            <a:off x="12477750" y="6556474"/>
             <a:ext cx="2095500" cy="381000"/>
           </a:xfrm>
           <a:prstGeom prst="rect">
@@ -9841,7 +9776,7 @@
         </p:nvSpPr>
         <p:spPr>
           <a:xfrm>
-            <a:off x="1047750" y="7261324"/>
+            <a:off x="1047750" y="7254180"/>
             <a:ext cx="3771900" cy="357188"/>
           </a:xfrm>
           <a:prstGeom prst="rect">
@@ -9882,7 +9817,7 @@
         </p:nvSpPr>
         <p:spPr>
           <a:xfrm>
-            <a:off x="4705350" y="7173218"/>
+            <a:off x="4705350" y="7166074"/>
             <a:ext cx="5959599" cy="495300"/>
           </a:xfrm>
           <a:prstGeom prst="roundRect">
@@ -9908,7 +9843,7 @@
         </p:nvSpPr>
         <p:spPr>
           <a:xfrm>
-            <a:off x="12477750" y="7249418"/>
+            <a:off x="12477750" y="7242274"/>
             <a:ext cx="2095500" cy="381000"/>
           </a:xfrm>
           <a:prstGeom prst="rect">
@@ -9949,26 +9884,26 @@
         </p:nvSpPr>
         <p:spPr>
           <a:xfrm>
-            <a:off x="1047750" y="8011418"/>
-            <a:ext cx="17811750" cy="300038"/>
-          </a:xfrm>
-          <a:prstGeom prst="rect">
-            <a:avLst/>
-          </a:prstGeom>
-          <a:noFill/>
-          <a:ln/>
-        </p:spPr>
-        <p:txBody>
-          <a:bodyPr wrap="square" lIns="25400" tIns="25400" rIns="25400" bIns="25400" rtlCol="0" anchor="t">
-            <a:normAutofit/>
-          </a:bodyPr>
-          <a:lstStyle/>
-          <a:p>
-            <a:pPr algn="l" indent="0" marL="0">
-              <a:buNone/>
-            </a:pPr>
-            <a:r>
-              <a:rPr lang="en-US" sz="1725" dirty="0">
+            <a:off x="1047750" y="8004274"/>
+            <a:ext cx="17811750" cy="314325"/>
+          </a:xfrm>
+          <a:prstGeom prst="rect">
+            <a:avLst/>
+          </a:prstGeom>
+          <a:noFill/>
+          <a:ln/>
+        </p:spPr>
+        <p:txBody>
+          <a:bodyPr wrap="square" lIns="25400" tIns="25400" rIns="25400" bIns="25400" rtlCol="0" anchor="t">
+            <a:normAutofit/>
+          </a:bodyPr>
+          <a:lstStyle/>
+          <a:p>
+            <a:pPr algn="l" indent="0" marL="0">
+              <a:buNone/>
+            </a:pPr>
+            <a:r>
+              <a:rPr lang="en-US" sz="1800" dirty="0">
                 <a:solidFill>
                   <a:srgbClr val="7B8C82"/>
                 </a:solidFill>
@@ -9978,7 +9913,7 @@
               </a:rPr>
               <a:t>Розничные цены, Kaspi, проверено 31 августа 2026 · на треть ниже Xiaomi Band 10</a:t>
             </a:r>
-            <a:endParaRPr lang="en-US" sz="1725" dirty="0"/>
+            <a:endParaRPr lang="en-US" sz="1800" dirty="0"/>
           </a:p>
         </p:txBody>
       </p:sp>
@@ -10022,7 +9957,7 @@
         </p:nvSpPr>
         <p:spPr>
           <a:xfrm>
-            <a:off x="1047750" y="2223641"/>
+            <a:off x="1047750" y="2209354"/>
             <a:ext cx="17811750" cy="658118"/>
           </a:xfrm>
           <a:prstGeom prst="rect">
@@ -10052,7 +9987,7 @@
                 <a:ea typeface="Arial" pitchFamily="34" charset="-122"/>
                 <a:cs typeface="Arial" pitchFamily="34" charset="-120"/>
               </a:rPr>
-              <a:t>Четыре цены, ни одной случайной</a:t>
+              <a:t>Две линии дохода, они не пересекаются</a:t>
             </a:r>
             <a:endParaRPr lang="en-US" sz="4650" dirty="0"/>
           </a:p>
@@ -10066,12 +10001,12 @@
         </p:nvSpPr>
         <p:spPr>
           <a:xfrm>
-            <a:off x="1047750" y="3377059"/>
-            <a:ext cx="7943850" cy="2190750"/>
+            <a:off x="1047750" y="3362771"/>
+            <a:ext cx="7943850" cy="2205038"/>
           </a:xfrm>
           <a:prstGeom prst="roundRect">
             <a:avLst>
-              <a:gd name="adj" fmla="val 8696"/>
+              <a:gd name="adj" fmla="val 8639"/>
             </a:avLst>
           </a:prstGeom>
           <a:solidFill>
@@ -10097,7 +10032,7 @@
         </p:nvSpPr>
         <p:spPr>
           <a:xfrm>
-            <a:off x="1476375" y="3767584"/>
+            <a:off x="1476375" y="3753296"/>
             <a:ext cx="7795260" cy="314325"/>
           </a:xfrm>
           <a:prstGeom prst="rect">
@@ -10124,7 +10059,7 @@
                 <a:ea typeface="Arial" pitchFamily="34" charset="-122"/>
                 <a:cs typeface="Arial" pitchFamily="34" charset="-120"/>
               </a:rPr>
-              <a:t>Браслет в рознице</a:t>
+              <a:t>Человек · браслет</a:t>
             </a:r>
             <a:endParaRPr lang="en-US" sz="1800" dirty="0"/>
           </a:p>
@@ -10138,7 +10073,7 @@
         </p:nvSpPr>
         <p:spPr>
           <a:xfrm>
-            <a:off x="1476375" y="4158109"/>
+            <a:off x="1476375" y="4143821"/>
             <a:ext cx="7795260" cy="700088"/>
           </a:xfrm>
           <a:prstGeom prst="rect">
@@ -10179,26 +10114,26 @@
         </p:nvSpPr>
         <p:spPr>
           <a:xfrm>
-            <a:off x="1476375" y="4915346"/>
-            <a:ext cx="7795260" cy="300038"/>
-          </a:xfrm>
-          <a:prstGeom prst="rect">
-            <a:avLst/>
-          </a:prstGeom>
-          <a:noFill/>
-          <a:ln/>
-        </p:spPr>
-        <p:txBody>
-          <a:bodyPr wrap="square" lIns="25400" tIns="25400" rIns="25400" bIns="25400" rtlCol="0" anchor="t">
-            <a:normAutofit/>
-          </a:bodyPr>
-          <a:lstStyle/>
-          <a:p>
-            <a:pPr algn="l" indent="0" marL="0">
-              <a:buNone/>
-            </a:pPr>
-            <a:r>
-              <a:rPr lang="en-US" sz="1725" dirty="0">
+            <a:off x="1476375" y="4901059"/>
+            <a:ext cx="7795260" cy="314325"/>
+          </a:xfrm>
+          <a:prstGeom prst="rect">
+            <a:avLst/>
+          </a:prstGeom>
+          <a:noFill/>
+          <a:ln/>
+        </p:spPr>
+        <p:txBody>
+          <a:bodyPr wrap="square" lIns="25400" tIns="25400" rIns="25400" bIns="25400" rtlCol="0" anchor="t">
+            <a:normAutofit/>
+          </a:bodyPr>
+          <a:lstStyle/>
+          <a:p>
+            <a:pPr algn="l" indent="0" marL="0">
+              <a:buNone/>
+            </a:pPr>
+            <a:r>
+              <a:rPr lang="en-US" sz="1800" dirty="0">
                 <a:solidFill>
                   <a:srgbClr val="BEDCCB"/>
                 </a:solidFill>
@@ -10206,9 +10141,9 @@
                 <a:ea typeface="Arial" pitchFamily="34" charset="-122"/>
                 <a:cs typeface="Arial" pitchFamily="34" charset="-120"/>
               </a:rPr>
-              <a:t>в рассрочку на год — 1 250 ₸/мес</a:t>
-            </a:r>
-            <a:endParaRPr lang="en-US" sz="1725" dirty="0"/>
+              <a:t>один раз, в рассрочку — 1 250 ₸/мес</a:t>
+            </a:r>
+            <a:endParaRPr lang="en-US" sz="1800" dirty="0"/>
           </a:p>
         </p:txBody>
       </p:sp>
@@ -10220,12 +10155,12 @@
         </p:nvSpPr>
         <p:spPr>
           <a:xfrm>
-            <a:off x="9296400" y="3377059"/>
-            <a:ext cx="7943850" cy="2190750"/>
+            <a:off x="9296400" y="3362771"/>
+            <a:ext cx="7943850" cy="2205038"/>
           </a:xfrm>
           <a:prstGeom prst="roundRect">
             <a:avLst>
-              <a:gd name="adj" fmla="val 8696"/>
+              <a:gd name="adj" fmla="val 8639"/>
             </a:avLst>
           </a:prstGeom>
           <a:solidFill>
@@ -10251,7 +10186,7 @@
         </p:nvSpPr>
         <p:spPr>
           <a:xfrm>
-            <a:off x="9725025" y="3767584"/>
+            <a:off x="9725025" y="3753296"/>
             <a:ext cx="7795260" cy="314325"/>
           </a:xfrm>
           <a:prstGeom prst="rect">
@@ -10278,7 +10213,7 @@
                 <a:ea typeface="Arial" pitchFamily="34" charset="-122"/>
                 <a:cs typeface="Arial" pitchFamily="34" charset="-120"/>
               </a:rPr>
-              <a:t>Подписка в приложении</a:t>
+              <a:t>Человек · подписка</a:t>
             </a:r>
             <a:endParaRPr lang="en-US" sz="1800" dirty="0"/>
           </a:p>
@@ -10292,7 +10227,7 @@
         </p:nvSpPr>
         <p:spPr>
           <a:xfrm>
-            <a:off x="9725025" y="4158109"/>
+            <a:off x="9725025" y="4143821"/>
             <a:ext cx="7795260" cy="700088"/>
           </a:xfrm>
           <a:prstGeom prst="rect">
@@ -10347,26 +10282,26 @@
         </p:nvSpPr>
         <p:spPr>
           <a:xfrm>
-            <a:off x="9725025" y="4915346"/>
-            <a:ext cx="7795260" cy="300038"/>
-          </a:xfrm>
-          <a:prstGeom prst="rect">
-            <a:avLst/>
-          </a:prstGeom>
-          <a:noFill/>
-          <a:ln/>
-        </p:spPr>
-        <p:txBody>
-          <a:bodyPr wrap="square" lIns="25400" tIns="25400" rIns="25400" bIns="25400" rtlCol="0" anchor="t">
-            <a:normAutofit/>
-          </a:bodyPr>
-          <a:lstStyle/>
-          <a:p>
-            <a:pPr algn="l" indent="0" marL="0">
-              <a:buNone/>
-            </a:pPr>
-            <a:r>
-              <a:rPr lang="en-US" sz="1725" dirty="0">
+            <a:off x="9725025" y="4901059"/>
+            <a:ext cx="7795260" cy="314325"/>
+          </a:xfrm>
+          <a:prstGeom prst="rect">
+            <a:avLst/>
+          </a:prstGeom>
+          <a:noFill/>
+          <a:ln/>
+        </p:spPr>
+        <p:txBody>
+          <a:bodyPr wrap="square" lIns="25400" tIns="25400" rIns="25400" bIns="25400" rtlCol="0" anchor="t">
+            <a:normAutofit/>
+          </a:bodyPr>
+          <a:lstStyle/>
+          <a:p>
+            <a:pPr algn="l" indent="0" marL="0">
+              <a:buNone/>
+            </a:pPr>
+            <a:r>
+              <a:rPr lang="en-US" sz="1800" dirty="0">
                 <a:solidFill>
                   <a:srgbClr val="BEDCCB"/>
                 </a:solidFill>
@@ -10374,9 +10309,9 @@
                 <a:ea typeface="Arial" pitchFamily="34" charset="-122"/>
                 <a:cs typeface="Arial" pitchFamily="34" charset="-120"/>
               </a:rPr>
-              <a:t>ниже любой психологической планки</a:t>
-            </a:r>
-            <a:endParaRPr lang="en-US" sz="1725" dirty="0"/>
+              <a:t>по желанию; базовые функции бесплатны</a:t>
+            </a:r>
+            <a:endParaRPr lang="en-US" sz="1800" dirty="0"/>
           </a:p>
         </p:txBody>
       </p:sp>
@@ -10389,11 +10324,165 @@
         <p:spPr>
           <a:xfrm>
             <a:off x="1047750" y="5872609"/>
-            <a:ext cx="7943850" cy="2190750"/>
+            <a:ext cx="7943850" cy="2205038"/>
           </a:xfrm>
           <a:prstGeom prst="roundRect">
             <a:avLst>
-              <a:gd name="adj" fmla="val 8696"/>
+              <a:gd name="adj" fmla="val 8639"/>
+            </a:avLst>
+          </a:prstGeom>
+          <a:solidFill>
+            <a:srgbClr val="0E4C36"/>
+          </a:solidFill>
+          <a:ln w="9525">
+            <a:solidFill>
+              <a:srgbClr val="3ECF8E"/>
+            </a:solidFill>
+            <a:prstDash val="solid"/>
+          </a:ln>
+        </p:spPr>
+        <p:txBody>
+          <a:bodyPr/>
+          <a:p/>
+        </p:txBody>
+      </p:sp>
+      <p:sp>
+        <p:nvSpPr>
+          <p:cNvPr id="12" name="Text 10"/>
+          <p:cNvSpPr/>
+          <p:nvPr/>
+        </p:nvSpPr>
+        <p:spPr>
+          <a:xfrm>
+            <a:off x="1476375" y="6263134"/>
+            <a:ext cx="7795260" cy="314325"/>
+          </a:xfrm>
+          <a:prstGeom prst="rect">
+            <a:avLst/>
+          </a:prstGeom>
+          <a:noFill/>
+          <a:ln/>
+        </p:spPr>
+        <p:txBody>
+          <a:bodyPr wrap="square" lIns="25400" tIns="25400" rIns="25400" bIns="25400" rtlCol="0" anchor="t">
+            <a:normAutofit/>
+          </a:bodyPr>
+          <a:lstStyle/>
+          <a:p>
+            <a:pPr algn="l" indent="0" marL="0">
+              <a:buNone/>
+            </a:pPr>
+            <a:r>
+              <a:rPr lang="en-US" sz="1800" dirty="0">
+                <a:solidFill>
+                  <a:srgbClr val="8FBBA3"/>
+                </a:solidFill>
+                <a:latin typeface="Arial" pitchFamily="34" charset="0"/>
+                <a:ea typeface="Arial" pitchFamily="34" charset="-122"/>
+                <a:cs typeface="Arial" pitchFamily="34" charset="-120"/>
+              </a:rPr>
+              <a:t>Поликлинике · модуль наблюдения</a:t>
+            </a:r>
+            <a:endParaRPr lang="en-US" sz="1800" dirty="0"/>
+          </a:p>
+        </p:txBody>
+      </p:sp>
+      <p:sp>
+        <p:nvSpPr>
+          <p:cNvPr id="13" name="Text 11"/>
+          <p:cNvSpPr/>
+          <p:nvPr/>
+        </p:nvSpPr>
+        <p:spPr>
+          <a:xfrm>
+            <a:off x="1476375" y="6653659"/>
+            <a:ext cx="7795260" cy="700088"/>
+          </a:xfrm>
+          <a:prstGeom prst="rect">
+            <a:avLst/>
+          </a:prstGeom>
+          <a:noFill/>
+          <a:ln/>
+        </p:spPr>
+        <p:txBody>
+          <a:bodyPr wrap="square" lIns="25400" tIns="25400" rIns="25400" bIns="25400" rtlCol="0" anchor="t">
+            <a:normAutofit/>
+          </a:bodyPr>
+          <a:lstStyle/>
+          <a:p>
+            <a:pPr algn="l" indent="0" marL="0">
+              <a:buNone/>
+            </a:pPr>
+            <a:r>
+              <a:rPr lang="en-US" sz="4500" b="1" dirty="0">
+                <a:solidFill>
+                  <a:srgbClr val="3ECF8E"/>
+                </a:solidFill>
+                <a:latin typeface="Arial" pitchFamily="34" charset="0"/>
+                <a:ea typeface="Arial" pitchFamily="34" charset="-122"/>
+                <a:cs typeface="Arial" pitchFamily="34" charset="-120"/>
+              </a:rPr>
+              <a:t>0 ₸</a:t>
+            </a:r>
+            <a:endParaRPr lang="en-US" sz="4500" dirty="0"/>
+          </a:p>
+        </p:txBody>
+      </p:sp>
+      <p:sp>
+        <p:nvSpPr>
+          <p:cNvPr id="14" name="Text 12"/>
+          <p:cNvSpPr/>
+          <p:nvPr/>
+        </p:nvSpPr>
+        <p:spPr>
+          <a:xfrm>
+            <a:off x="1476375" y="7410896"/>
+            <a:ext cx="7795260" cy="314325"/>
+          </a:xfrm>
+          <a:prstGeom prst="rect">
+            <a:avLst/>
+          </a:prstGeom>
+          <a:noFill/>
+          <a:ln/>
+        </p:spPr>
+        <p:txBody>
+          <a:bodyPr wrap="square" lIns="25400" tIns="25400" rIns="25400" bIns="25400" rtlCol="0" anchor="t">
+            <a:normAutofit/>
+          </a:bodyPr>
+          <a:lstStyle/>
+          <a:p>
+            <a:pPr algn="l" indent="0" marL="0">
+              <a:buNone/>
+            </a:pPr>
+            <a:r>
+              <a:rPr lang="en-US" sz="1800" dirty="0">
+                <a:solidFill>
+                  <a:srgbClr val="BEDCCB"/>
+                </a:solidFill>
+                <a:latin typeface="Arial" pitchFamily="34" charset="0"/>
+                <a:ea typeface="Arial" pitchFamily="34" charset="-122"/>
+                <a:cs typeface="Arial" pitchFamily="34" charset="-120"/>
+              </a:rPr>
+              <a:t>входит в действующую аренду МИС Damumed</a:t>
+            </a:r>
+            <a:endParaRPr lang="en-US" sz="1800" dirty="0"/>
+          </a:p>
+        </p:txBody>
+      </p:sp>
+      <p:sp>
+        <p:nvSpPr>
+          <p:cNvPr id="15" name="Shape 13"/>
+          <p:cNvSpPr/>
+          <p:nvPr/>
+        </p:nvSpPr>
+        <p:spPr>
+          <a:xfrm>
+            <a:off x="9296400" y="5872609"/>
+            <a:ext cx="7943850" cy="2205038"/>
+          </a:xfrm>
+          <a:prstGeom prst="roundRect">
+            <a:avLst>
+              <a:gd name="adj" fmla="val 8639"/>
             </a:avLst>
           </a:prstGeom>
           <a:solidFill>
@@ -10413,160 +10502,6 @@
       </p:sp>
       <p:sp>
         <p:nvSpPr>
-          <p:cNvPr id="12" name="Text 10"/>
-          <p:cNvSpPr/>
-          <p:nvPr/>
-        </p:nvSpPr>
-        <p:spPr>
-          <a:xfrm>
-            <a:off x="1476375" y="6263134"/>
-            <a:ext cx="7795260" cy="314325"/>
-          </a:xfrm>
-          <a:prstGeom prst="rect">
-            <a:avLst/>
-          </a:prstGeom>
-          <a:noFill/>
-          <a:ln/>
-        </p:spPr>
-        <p:txBody>
-          <a:bodyPr wrap="square" lIns="25400" tIns="25400" rIns="25400" bIns="25400" rtlCol="0" anchor="t">
-            <a:normAutofit/>
-          </a:bodyPr>
-          <a:lstStyle/>
-          <a:p>
-            <a:pPr algn="l" indent="0" marL="0">
-              <a:buNone/>
-            </a:pPr>
-            <a:r>
-              <a:rPr lang="en-US" sz="1800" dirty="0">
-                <a:solidFill>
-                  <a:srgbClr val="8FBBA3"/>
-                </a:solidFill>
-                <a:latin typeface="Arial" pitchFamily="34" charset="0"/>
-                <a:ea typeface="Arial" pitchFamily="34" charset="-122"/>
-                <a:cs typeface="Arial" pitchFamily="34" charset="-120"/>
-              </a:rPr>
-              <a:t>Браслет поликлинике</a:t>
-            </a:r>
-            <a:endParaRPr lang="en-US" sz="1800" dirty="0"/>
-          </a:p>
-        </p:txBody>
-      </p:sp>
-      <p:sp>
-        <p:nvSpPr>
-          <p:cNvPr id="13" name="Text 11"/>
-          <p:cNvSpPr/>
-          <p:nvPr/>
-        </p:nvSpPr>
-        <p:spPr>
-          <a:xfrm>
-            <a:off x="1476375" y="6653659"/>
-            <a:ext cx="7795260" cy="700088"/>
-          </a:xfrm>
-          <a:prstGeom prst="rect">
-            <a:avLst/>
-          </a:prstGeom>
-          <a:noFill/>
-          <a:ln/>
-        </p:spPr>
-        <p:txBody>
-          <a:bodyPr wrap="square" lIns="25400" tIns="25400" rIns="25400" bIns="25400" rtlCol="0" anchor="t">
-            <a:normAutofit/>
-          </a:bodyPr>
-          <a:lstStyle/>
-          <a:p>
-            <a:pPr algn="l" indent="0" marL="0">
-              <a:buNone/>
-            </a:pPr>
-            <a:r>
-              <a:rPr lang="en-US" sz="4500" b="1" dirty="0">
-                <a:solidFill>
-                  <a:srgbClr val="FFFFFF"/>
-                </a:solidFill>
-                <a:latin typeface="Arial" pitchFamily="34" charset="0"/>
-                <a:ea typeface="Arial" pitchFamily="34" charset="-122"/>
-                <a:cs typeface="Arial" pitchFamily="34" charset="-120"/>
-              </a:rPr>
-              <a:t>6 900 ₸</a:t>
-            </a:r>
-            <a:endParaRPr lang="en-US" sz="4500" dirty="0"/>
-          </a:p>
-        </p:txBody>
-      </p:sp>
-      <p:sp>
-        <p:nvSpPr>
-          <p:cNvPr id="14" name="Text 12"/>
-          <p:cNvSpPr/>
-          <p:nvPr/>
-        </p:nvSpPr>
-        <p:spPr>
-          <a:xfrm>
-            <a:off x="1476375" y="7410896"/>
-            <a:ext cx="7795260" cy="300038"/>
-          </a:xfrm>
-          <a:prstGeom prst="rect">
-            <a:avLst/>
-          </a:prstGeom>
-          <a:noFill/>
-          <a:ln/>
-        </p:spPr>
-        <p:txBody>
-          <a:bodyPr wrap="square" lIns="25400" tIns="25400" rIns="25400" bIns="25400" rtlCol="0" anchor="t">
-            <a:normAutofit/>
-          </a:bodyPr>
-          <a:lstStyle/>
-          <a:p>
-            <a:pPr algn="l" indent="0" marL="0">
-              <a:buNone/>
-            </a:pPr>
-            <a:r>
-              <a:rPr lang="en-US" sz="1725" dirty="0">
-                <a:solidFill>
-                  <a:srgbClr val="BEDCCB"/>
-                </a:solidFill>
-                <a:latin typeface="Arial" pitchFamily="34" charset="0"/>
-                <a:ea typeface="Arial" pitchFamily="34" charset="-122"/>
-                <a:cs typeface="Arial" pitchFamily="34" charset="-120"/>
-              </a:rPr>
-              <a:t>оснащение участка без сложных процедур</a:t>
-            </a:r>
-            <a:endParaRPr lang="en-US" sz="1725" dirty="0"/>
-          </a:p>
-        </p:txBody>
-      </p:sp>
-      <p:sp>
-        <p:nvSpPr>
-          <p:cNvPr id="15" name="Shape 13"/>
-          <p:cNvSpPr/>
-          <p:nvPr/>
-        </p:nvSpPr>
-        <p:spPr>
-          <a:xfrm>
-            <a:off x="9296400" y="5872609"/>
-            <a:ext cx="7943850" cy="2190750"/>
-          </a:xfrm>
-          <a:prstGeom prst="roundRect">
-            <a:avLst>
-              <a:gd name="adj" fmla="val 8696"/>
-            </a:avLst>
-          </a:prstGeom>
-          <a:solidFill>
-            <a:srgbClr val="0E4C36"/>
-          </a:solidFill>
-          <a:ln w="9525">
-            <a:solidFill>
-              <a:srgbClr val="1C6B4C"/>
-            </a:solidFill>
-            <a:prstDash val="solid"/>
-          </a:ln>
-        </p:spPr>
-        <p:txBody>
-          <a:bodyPr/>
-          <a:p/>
-        </p:txBody>
-      </p:sp>
-      <p:sp>
-        <p:nvSpPr>
           <p:cNvPr id="16" name="Text 14"/>
           <p:cNvSpPr/>
           <p:nvPr/>
@@ -10600,7 +10535,7 @@
                 <a:ea typeface="Arial" pitchFamily="34" charset="-122"/>
                 <a:cs typeface="Arial" pitchFamily="34" charset="-120"/>
               </a:rPr>
-              <a:t>Модуль наблюдения — в аренде МИС</a:t>
+              <a:t>Поликлинике · браслеты</a:t>
             </a:r>
             <a:endParaRPr lang="en-US" sz="1800" dirty="0"/>
           </a:p>
@@ -10641,13 +10576,40 @@
                 <a:ea typeface="Arial" pitchFamily="34" charset="-122"/>
                 <a:cs typeface="Arial" pitchFamily="34" charset="-120"/>
               </a:rPr>
-              <a:t>0 ₸ — доплаты нет</a:t>
-            </a:r>
-            <a:pPr algn="l" indent="0" marL="0">
-              <a:buNone/>
-            </a:pPr>
-            <a:r>
-              <a:rPr lang="en-US" sz="2400" b="1" dirty="0">
+              <a:t>6 900 ₸</a:t>
+            </a:r>
+            <a:endParaRPr lang="en-US" sz="4500" dirty="0"/>
+          </a:p>
+        </p:txBody>
+      </p:sp>
+      <p:sp>
+        <p:nvSpPr>
+          <p:cNvPr id="18" name="Text 16"/>
+          <p:cNvSpPr/>
+          <p:nvPr/>
+        </p:nvSpPr>
+        <p:spPr>
+          <a:xfrm>
+            <a:off x="9725025" y="7410896"/>
+            <a:ext cx="7795260" cy="314325"/>
+          </a:xfrm>
+          <a:prstGeom prst="rect">
+            <a:avLst/>
+          </a:prstGeom>
+          <a:noFill/>
+          <a:ln/>
+        </p:spPr>
+        <p:txBody>
+          <a:bodyPr wrap="square" lIns="25400" tIns="25400" rIns="25400" bIns="25400" rtlCol="0" anchor="t">
+            <a:normAutofit/>
+          </a:bodyPr>
+          <a:lstStyle/>
+          <a:p>
+            <a:pPr algn="l" indent="0" marL="0">
+              <a:buNone/>
+            </a:pPr>
+            <a:r>
+              <a:rPr lang="en-US" sz="1800" dirty="0">
                 <a:solidFill>
                   <a:srgbClr val="BEDCCB"/>
                 </a:solidFill>
@@ -10655,50 +10617,9 @@
                 <a:ea typeface="Arial" pitchFamily="34" charset="-122"/>
                 <a:cs typeface="Arial" pitchFamily="34" charset="-120"/>
               </a:rPr>
-              <a:t/>
-            </a:r>
-            <a:endParaRPr lang="en-US" sz="4500" dirty="0"/>
-          </a:p>
-        </p:txBody>
-      </p:sp>
-      <p:sp>
-        <p:nvSpPr>
-          <p:cNvPr id="18" name="Text 16"/>
-          <p:cNvSpPr/>
-          <p:nvPr/>
-        </p:nvSpPr>
-        <p:spPr>
-          <a:xfrm>
-            <a:off x="9725025" y="7410896"/>
-            <a:ext cx="7795260" cy="300038"/>
-          </a:xfrm>
-          <a:prstGeom prst="rect">
-            <a:avLst/>
-          </a:prstGeom>
-          <a:noFill/>
-          <a:ln/>
-        </p:spPr>
-        <p:txBody>
-          <a:bodyPr wrap="square" lIns="25400" tIns="25400" rIns="25400" bIns="25400" rtlCol="0" anchor="t">
-            <a:normAutofit/>
-          </a:bodyPr>
-          <a:lstStyle/>
-          <a:p>
-            <a:pPr algn="l" indent="0" marL="0">
-              <a:buNone/>
-            </a:pPr>
-            <a:r>
-              <a:rPr lang="en-US" sz="1725" dirty="0">
-                <a:solidFill>
-                  <a:srgbClr val="BEDCCB"/>
-                </a:solidFill>
-                <a:latin typeface="Arial" pitchFamily="34" charset="0"/>
-                <a:ea typeface="Arial" pitchFamily="34" charset="-122"/>
-                <a:cs typeface="Arial" pitchFamily="34" charset="-120"/>
-              </a:rPr>
-              <a:t>менее трети подушевого норматива</a:t>
-            </a:r>
-            <a:endParaRPr lang="en-US" sz="1725" dirty="0"/>
+              <a:t>закуп; или рассрочка — 640 ₸/мес</a:t>
+            </a:r>
+            <a:endParaRPr lang="en-US" sz="1800" dirty="0"/>
           </a:p>
         </p:txBody>
       </p:sp>
@@ -11534,7 +11455,7 @@
             <a:r>
               <a:rPr lang="en-US" sz="1950" b="1" dirty="0">
                 <a:solidFill>
-                  <a:srgbClr val="C0453C"/>
+                  <a:srgbClr val="0E7A50"/>
                 </a:solidFill>
                 <a:latin typeface="Courier New" pitchFamily="34" charset="0"/>
                 <a:ea typeface="Courier New" pitchFamily="34" charset="-122"/>
@@ -11847,7 +11768,7 @@
                 <a:ea typeface="Arial" pitchFamily="34" charset="-122"/>
                 <a:cs typeface="Arial" pitchFamily="34" charset="-120"/>
               </a:rPr>
-              <a:t>уровень I на партии 10 000 — осторожный вход, либо уровень II на партии 20 000 — ставка на охват.</a:t>
+              <a:t>Базовый на партии 10 000 — осторожный вход, либо Массовый на 20 000 — ставка на охват: +56 млн против +20.</a:t>
             </a:r>
             <a:endParaRPr lang="en-US" sz="1875" dirty="0"/>
           </a:p>
@@ -11893,7 +11814,7 @@
         </p:nvSpPr>
         <p:spPr>
           <a:xfrm>
-            <a:off x="1047750" y="2249835"/>
+            <a:off x="1047750" y="2078385"/>
             <a:ext cx="2783830" cy="414338"/>
           </a:xfrm>
           <a:prstGeom prst="roundRect">
@@ -11919,7 +11840,7 @@
         </p:nvSpPr>
         <p:spPr>
           <a:xfrm>
-            <a:off x="1219200" y="2326035"/>
+            <a:off x="1219200" y="2154585"/>
             <a:ext cx="2524445" cy="300038"/>
           </a:xfrm>
           <a:prstGeom prst="rect">
@@ -11960,7 +11881,7 @@
         </p:nvSpPr>
         <p:spPr>
           <a:xfrm>
-            <a:off x="1047750" y="2892772"/>
+            <a:off x="1047750" y="2721322"/>
             <a:ext cx="17811750" cy="658118"/>
           </a:xfrm>
           <a:prstGeom prst="rect">
@@ -12004,12 +11925,12 @@
         </p:nvSpPr>
         <p:spPr>
           <a:xfrm>
-            <a:off x="1047750" y="4046190"/>
-            <a:ext cx="3848100" cy="2081212"/>
+            <a:off x="1047750" y="3874740"/>
+            <a:ext cx="3848100" cy="2400300"/>
           </a:xfrm>
           <a:prstGeom prst="roundRect">
             <a:avLst>
-              <a:gd name="adj" fmla="val 8238"/>
+              <a:gd name="adj" fmla="val 7143"/>
             </a:avLst>
           </a:prstGeom>
           <a:solidFill>
@@ -12035,26 +11956,26 @@
         </p:nvSpPr>
         <p:spPr>
           <a:xfrm>
-            <a:off x="1400175" y="4417665"/>
-            <a:ext cx="3457575" cy="300038"/>
-          </a:xfrm>
-          <a:prstGeom prst="rect">
-            <a:avLst/>
-          </a:prstGeom>
-          <a:noFill/>
-          <a:ln/>
-        </p:spPr>
-        <p:txBody>
-          <a:bodyPr wrap="square" lIns="25400" tIns="25400" rIns="25400" bIns="25400" rtlCol="0" anchor="t">
-            <a:normAutofit/>
-          </a:bodyPr>
-          <a:lstStyle/>
-          <a:p>
-            <a:pPr algn="l" indent="0" marL="0">
-              <a:buNone/>
-            </a:pPr>
-            <a:r>
-              <a:rPr lang="en-US" sz="1725" dirty="0">
+            <a:off x="1400175" y="4246215"/>
+            <a:ext cx="3457575" cy="314325"/>
+          </a:xfrm>
+          <a:prstGeom prst="rect">
+            <a:avLst/>
+          </a:prstGeom>
+          <a:noFill/>
+          <a:ln/>
+        </p:spPr>
+        <p:txBody>
+          <a:bodyPr wrap="square" lIns="25400" tIns="25400" rIns="25400" bIns="25400" rtlCol="0" anchor="t">
+            <a:normAutofit/>
+          </a:bodyPr>
+          <a:lstStyle/>
+          <a:p>
+            <a:pPr algn="l" indent="0" marL="0">
+              <a:buNone/>
+            </a:pPr>
+            <a:r>
+              <a:rPr lang="en-US" sz="1800" dirty="0">
                 <a:solidFill>
                   <a:srgbClr val="7B8C82"/>
                 </a:solidFill>
@@ -12064,7 +11985,7 @@
               </a:rPr>
               <a:t>Себестоимость на складе</a:t>
             </a:r>
-            <a:endParaRPr lang="en-US" sz="1725" dirty="0"/>
+            <a:endParaRPr lang="en-US" sz="1800" dirty="0"/>
           </a:p>
         </p:txBody>
       </p:sp>
@@ -12076,7 +11997,7 @@
         </p:nvSpPr>
         <p:spPr>
           <a:xfrm>
-            <a:off x="1400175" y="4812953"/>
+            <a:off x="1400175" y="4655790"/>
             <a:ext cx="3457575" cy="676275"/>
           </a:xfrm>
           <a:prstGeom prst="rect">
@@ -12117,12 +12038,12 @@
         </p:nvSpPr>
         <p:spPr>
           <a:xfrm>
-            <a:off x="5162550" y="4046190"/>
-            <a:ext cx="3848100" cy="2081212"/>
+            <a:off x="5162550" y="3874740"/>
+            <a:ext cx="3848100" cy="2400300"/>
           </a:xfrm>
           <a:prstGeom prst="roundRect">
             <a:avLst>
-              <a:gd name="adj" fmla="val 8238"/>
+              <a:gd name="adj" fmla="val 7143"/>
             </a:avLst>
           </a:prstGeom>
           <a:solidFill>
@@ -12148,26 +12069,26 @@
         </p:nvSpPr>
         <p:spPr>
           <a:xfrm>
-            <a:off x="5514975" y="4417665"/>
-            <a:ext cx="3457575" cy="300038"/>
-          </a:xfrm>
-          <a:prstGeom prst="rect">
-            <a:avLst/>
-          </a:prstGeom>
-          <a:noFill/>
-          <a:ln/>
-        </p:spPr>
-        <p:txBody>
-          <a:bodyPr wrap="square" lIns="25400" tIns="25400" rIns="25400" bIns="25400" rtlCol="0" anchor="t">
-            <a:normAutofit/>
-          </a:bodyPr>
-          <a:lstStyle/>
-          <a:p>
-            <a:pPr algn="l" indent="0" marL="0">
-              <a:buNone/>
-            </a:pPr>
-            <a:r>
-              <a:rPr lang="en-US" sz="1725" dirty="0">
+            <a:off x="5514975" y="4246215"/>
+            <a:ext cx="3457575" cy="314325"/>
+          </a:xfrm>
+          <a:prstGeom prst="rect">
+            <a:avLst/>
+          </a:prstGeom>
+          <a:noFill/>
+          <a:ln/>
+        </p:spPr>
+        <p:txBody>
+          <a:bodyPr wrap="square" lIns="25400" tIns="25400" rIns="25400" bIns="25400" rtlCol="0" anchor="t">
+            <a:normAutofit/>
+          </a:bodyPr>
+          <a:lstStyle/>
+          <a:p>
+            <a:pPr algn="l" indent="0" marL="0">
+              <a:buNone/>
+            </a:pPr>
+            <a:r>
+              <a:rPr lang="en-US" sz="1800" dirty="0">
                 <a:solidFill>
                   <a:srgbClr val="7B8C82"/>
                 </a:solidFill>
@@ -12177,7 +12098,7 @@
               </a:rPr>
               <a:t>Вложения</a:t>
             </a:r>
-            <a:endParaRPr lang="en-US" sz="1725" dirty="0"/>
+            <a:endParaRPr lang="en-US" sz="1800" dirty="0"/>
           </a:p>
         </p:txBody>
       </p:sp>
@@ -12189,7 +12110,7 @@
         </p:nvSpPr>
         <p:spPr>
           <a:xfrm>
-            <a:off x="5514975" y="4812953"/>
+            <a:off x="5514975" y="4655790"/>
             <a:ext cx="3457575" cy="676275"/>
           </a:xfrm>
           <a:prstGeom prst="rect">
@@ -12244,26 +12165,26 @@
         </p:nvSpPr>
         <p:spPr>
           <a:xfrm>
-            <a:off x="5514975" y="5527328"/>
-            <a:ext cx="3457575" cy="266700"/>
-          </a:xfrm>
-          <a:prstGeom prst="rect">
-            <a:avLst/>
-          </a:prstGeom>
-          <a:noFill/>
-          <a:ln/>
-        </p:spPr>
-        <p:txBody>
-          <a:bodyPr wrap="square" lIns="25400" tIns="25400" rIns="25400" bIns="25400" rtlCol="0" anchor="t">
-            <a:normAutofit/>
-          </a:bodyPr>
-          <a:lstStyle/>
-          <a:p>
-            <a:pPr algn="l" indent="0" marL="0">
-              <a:buNone/>
-            </a:pPr>
-            <a:r>
-              <a:rPr lang="en-US" sz="1500" dirty="0">
+            <a:off x="5514975" y="5370165"/>
+            <a:ext cx="3457575" cy="314325"/>
+          </a:xfrm>
+          <a:prstGeom prst="rect">
+            <a:avLst/>
+          </a:prstGeom>
+          <a:noFill/>
+          <a:ln/>
+        </p:spPr>
+        <p:txBody>
+          <a:bodyPr wrap="square" lIns="25400" tIns="25400" rIns="25400" bIns="25400" rtlCol="0" anchor="t">
+            <a:normAutofit/>
+          </a:bodyPr>
+          <a:lstStyle/>
+          <a:p>
+            <a:pPr algn="l" indent="0" marL="0">
+              <a:buNone/>
+            </a:pPr>
+            <a:r>
+              <a:rPr lang="en-US" sz="1800" dirty="0">
                 <a:solidFill>
                   <a:srgbClr val="7B8C82"/>
                 </a:solidFill>
@@ -12273,7 +12194,7 @@
               </a:rPr>
               <a:t>партия 40 + регистрация 18</a:t>
             </a:r>
-            <a:endParaRPr lang="en-US" sz="1500" dirty="0"/>
+            <a:endParaRPr lang="en-US" sz="1800" dirty="0"/>
           </a:p>
         </p:txBody>
       </p:sp>
@@ -12285,12 +12206,12 @@
         </p:nvSpPr>
         <p:spPr>
           <a:xfrm>
-            <a:off x="9277350" y="4046190"/>
-            <a:ext cx="3848100" cy="2081212"/>
+            <a:off x="9277350" y="3874740"/>
+            <a:ext cx="3848100" cy="2400300"/>
           </a:xfrm>
           <a:prstGeom prst="roundRect">
             <a:avLst>
-              <a:gd name="adj" fmla="val 8238"/>
+              <a:gd name="adj" fmla="val 7143"/>
             </a:avLst>
           </a:prstGeom>
           <a:solidFill>
@@ -12316,26 +12237,26 @@
         </p:nvSpPr>
         <p:spPr>
           <a:xfrm>
-            <a:off x="9629775" y="4417665"/>
-            <a:ext cx="3457575" cy="300038"/>
-          </a:xfrm>
-          <a:prstGeom prst="rect">
-            <a:avLst/>
-          </a:prstGeom>
-          <a:noFill/>
-          <a:ln/>
-        </p:spPr>
-        <p:txBody>
-          <a:bodyPr wrap="square" lIns="25400" tIns="25400" rIns="25400" bIns="25400" rtlCol="0" anchor="t">
-            <a:normAutofit/>
-          </a:bodyPr>
-          <a:lstStyle/>
-          <a:p>
-            <a:pPr algn="l" indent="0" marL="0">
-              <a:buNone/>
-            </a:pPr>
-            <a:r>
-              <a:rPr lang="en-US" sz="1725" dirty="0">
+            <a:off x="9629775" y="4246215"/>
+            <a:ext cx="3457575" cy="314325"/>
+          </a:xfrm>
+          <a:prstGeom prst="rect">
+            <a:avLst/>
+          </a:prstGeom>
+          <a:noFill/>
+          <a:ln/>
+        </p:spPr>
+        <p:txBody>
+          <a:bodyPr wrap="square" lIns="25400" tIns="25400" rIns="25400" bIns="25400" rtlCol="0" anchor="t">
+            <a:normAutofit/>
+          </a:bodyPr>
+          <a:lstStyle/>
+          <a:p>
+            <a:pPr algn="l" indent="0" marL="0">
+              <a:buNone/>
+            </a:pPr>
+            <a:r>
+              <a:rPr lang="en-US" sz="1800" dirty="0">
                 <a:solidFill>
                   <a:srgbClr val="7B8C82"/>
                 </a:solidFill>
@@ -12345,7 +12266,7 @@
               </a:rPr>
               <a:t>Маржа в рознице</a:t>
             </a:r>
-            <a:endParaRPr lang="en-US" sz="1725" dirty="0"/>
+            <a:endParaRPr lang="en-US" sz="1800" dirty="0"/>
           </a:p>
         </p:txBody>
       </p:sp>
@@ -12357,7 +12278,7 @@
         </p:nvSpPr>
         <p:spPr>
           <a:xfrm>
-            <a:off x="9629775" y="4812953"/>
+            <a:off x="9629775" y="4655790"/>
             <a:ext cx="3457575" cy="676275"/>
           </a:xfrm>
           <a:prstGeom prst="rect">
@@ -12398,26 +12319,26 @@
         </p:nvSpPr>
         <p:spPr>
           <a:xfrm>
-            <a:off x="9629775" y="5527328"/>
-            <a:ext cx="3457575" cy="266700"/>
-          </a:xfrm>
-          <a:prstGeom prst="rect">
-            <a:avLst/>
-          </a:prstGeom>
-          <a:noFill/>
-          <a:ln/>
-        </p:spPr>
-        <p:txBody>
-          <a:bodyPr wrap="square" lIns="25400" tIns="25400" rIns="25400" bIns="25400" rtlCol="0" anchor="t">
-            <a:normAutofit/>
-          </a:bodyPr>
-          <a:lstStyle/>
-          <a:p>
-            <a:pPr algn="l" indent="0" marL="0">
-              <a:buNone/>
-            </a:pPr>
-            <a:r>
-              <a:rPr lang="en-US" sz="1500" dirty="0">
+            <a:off x="9629775" y="5370165"/>
+            <a:ext cx="3457575" cy="314325"/>
+          </a:xfrm>
+          <a:prstGeom prst="rect">
+            <a:avLst/>
+          </a:prstGeom>
+          <a:noFill/>
+          <a:ln/>
+        </p:spPr>
+        <p:txBody>
+          <a:bodyPr wrap="square" lIns="25400" tIns="25400" rIns="25400" bIns="25400" rtlCol="0" anchor="t">
+            <a:normAutofit/>
+          </a:bodyPr>
+          <a:lstStyle/>
+          <a:p>
+            <a:pPr algn="l" indent="0" marL="0">
+              <a:buNone/>
+            </a:pPr>
+            <a:r>
+              <a:rPr lang="en-US" sz="1800" dirty="0">
                 <a:solidFill>
                   <a:srgbClr val="7B8C82"/>
                 </a:solidFill>
@@ -12427,7 +12348,7 @@
               </a:rPr>
               <a:t>за вычетом комиссии Kaspi</a:t>
             </a:r>
-            <a:endParaRPr lang="en-US" sz="1500" dirty="0"/>
+            <a:endParaRPr lang="en-US" sz="1800" dirty="0"/>
           </a:p>
         </p:txBody>
       </p:sp>
@@ -12439,12 +12360,12 @@
         </p:nvSpPr>
         <p:spPr>
           <a:xfrm>
-            <a:off x="13392150" y="4046190"/>
-            <a:ext cx="3848100" cy="2081212"/>
+            <a:off x="13392150" y="3874740"/>
+            <a:ext cx="3848100" cy="2400300"/>
           </a:xfrm>
           <a:prstGeom prst="roundRect">
             <a:avLst>
-              <a:gd name="adj" fmla="val 8238"/>
+              <a:gd name="adj" fmla="val 7143"/>
             </a:avLst>
           </a:prstGeom>
           <a:solidFill>
@@ -12465,26 +12386,26 @@
         </p:nvSpPr>
         <p:spPr>
           <a:xfrm>
-            <a:off x="13735050" y="4408140"/>
-            <a:ext cx="3478530" cy="300038"/>
-          </a:xfrm>
-          <a:prstGeom prst="rect">
-            <a:avLst/>
-          </a:prstGeom>
-          <a:noFill/>
-          <a:ln/>
-        </p:spPr>
-        <p:txBody>
-          <a:bodyPr wrap="square" lIns="25400" tIns="25400" rIns="25400" bIns="25400" rtlCol="0" anchor="t">
-            <a:normAutofit/>
-          </a:bodyPr>
-          <a:lstStyle/>
-          <a:p>
-            <a:pPr algn="l" indent="0" marL="0">
-              <a:buNone/>
-            </a:pPr>
-            <a:r>
-              <a:rPr lang="en-US" sz="1725" dirty="0">
+            <a:off x="13735050" y="4236690"/>
+            <a:ext cx="3478530" cy="314325"/>
+          </a:xfrm>
+          <a:prstGeom prst="rect">
+            <a:avLst/>
+          </a:prstGeom>
+          <a:noFill/>
+          <a:ln/>
+        </p:spPr>
+        <p:txBody>
+          <a:bodyPr wrap="square" lIns="25400" tIns="25400" rIns="25400" bIns="25400" rtlCol="0" anchor="t">
+            <a:normAutofit/>
+          </a:bodyPr>
+          <a:lstStyle/>
+          <a:p>
+            <a:pPr algn="l" indent="0" marL="0">
+              <a:buNone/>
+            </a:pPr>
+            <a:r>
+              <a:rPr lang="en-US" sz="1800" dirty="0">
                 <a:solidFill>
                   <a:srgbClr val="BEDCCB"/>
                 </a:solidFill>
@@ -12494,7 +12415,7 @@
               </a:rPr>
               <a:t>Выручка сервиса</a:t>
             </a:r>
-            <a:endParaRPr lang="en-US" sz="1725" dirty="0"/>
+            <a:endParaRPr lang="en-US" sz="1800" dirty="0"/>
           </a:p>
         </p:txBody>
       </p:sp>
@@ -12506,7 +12427,7 @@
         </p:nvSpPr>
         <p:spPr>
           <a:xfrm>
-            <a:off x="13735050" y="4803428"/>
+            <a:off x="13735050" y="4646265"/>
             <a:ext cx="3478530" cy="676275"/>
           </a:xfrm>
           <a:prstGeom prst="rect">
@@ -12561,26 +12482,26 @@
         </p:nvSpPr>
         <p:spPr>
           <a:xfrm>
-            <a:off x="13735050" y="5517803"/>
-            <a:ext cx="3478530" cy="266700"/>
-          </a:xfrm>
-          <a:prstGeom prst="rect">
-            <a:avLst/>
-          </a:prstGeom>
-          <a:noFill/>
-          <a:ln/>
-        </p:spPr>
-        <p:txBody>
-          <a:bodyPr wrap="square" lIns="25400" tIns="25400" rIns="25400" bIns="25400" rtlCol="0" anchor="t">
-            <a:normAutofit/>
-          </a:bodyPr>
-          <a:lstStyle/>
-          <a:p>
-            <a:pPr algn="l" indent="0" marL="0">
-              <a:buNone/>
-            </a:pPr>
-            <a:r>
-              <a:rPr lang="en-US" sz="1500" dirty="0">
+            <a:off x="13735050" y="5360640"/>
+            <a:ext cx="3257169" cy="590550"/>
+          </a:xfrm>
+          <a:prstGeom prst="rect">
+            <a:avLst/>
+          </a:prstGeom>
+          <a:noFill/>
+          <a:ln/>
+        </p:spPr>
+        <p:txBody>
+          <a:bodyPr wrap="square" lIns="25400" tIns="25400" rIns="25400" bIns="25400" rtlCol="0" anchor="t">
+            <a:normAutofit/>
+          </a:bodyPr>
+          <a:lstStyle/>
+          <a:p>
+            <a:pPr algn="l" indent="0" marL="0">
+              <a:buNone/>
+            </a:pPr>
+            <a:r>
+              <a:rPr lang="en-US" sz="1800" dirty="0">
                 <a:solidFill>
                   <a:srgbClr val="CFE7DB"/>
                 </a:solidFill>
@@ -12590,7 +12511,7 @@
               </a:rPr>
               <a:t>не заканчивается с партией</a:t>
             </a:r>
-            <a:endParaRPr lang="en-US" sz="1500" dirty="0"/>
+            <a:endParaRPr lang="en-US" sz="1800" dirty="0"/>
           </a:p>
         </p:txBody>
       </p:sp>
@@ -12602,7 +12523,7 @@
         </p:nvSpPr>
         <p:spPr>
           <a:xfrm>
-            <a:off x="1047750" y="6546503"/>
+            <a:off x="1047750" y="6694140"/>
             <a:ext cx="16192500" cy="1085850"/>
           </a:xfrm>
           <a:prstGeom prst="roundRect">
@@ -12633,7 +12554,7 @@
         </p:nvSpPr>
         <p:spPr>
           <a:xfrm>
-            <a:off x="1438275" y="6941790"/>
+            <a:off x="1438275" y="7089428"/>
             <a:ext cx="3129089" cy="333375"/>
           </a:xfrm>
           <a:prstGeom prst="rect">
@@ -12674,7 +12595,7 @@
         </p:nvSpPr>
         <p:spPr>
           <a:xfrm>
-            <a:off x="4435301" y="6879878"/>
+            <a:off x="4435301" y="7027515"/>
             <a:ext cx="10333137" cy="419100"/>
           </a:xfrm>
           <a:prstGeom prst="rect">
@@ -12698,7 +12619,7 @@
         </p:nvSpPr>
         <p:spPr>
           <a:xfrm>
-            <a:off x="4606751" y="6879878"/>
+            <a:off x="4606751" y="7027515"/>
             <a:ext cx="10471681" cy="457200"/>
           </a:xfrm>
           <a:prstGeom prst="rect">
@@ -12717,7 +12638,7 @@
               <a:buNone/>
             </a:pPr>
             <a:r>
-              <a:rPr lang="en-US" sz="1500" b="1" dirty="0">
+              <a:rPr lang="en-US" sz="1800" b="1" dirty="0">
                 <a:solidFill>
                   <a:srgbClr val="FFFFFF"/>
                 </a:solidFill>
@@ -12727,7 +12648,7 @@
               </a:rPr>
               <a:t>Завод $7,5 — 3 488 ₸</a:t>
             </a:r>
-            <a:endParaRPr lang="en-US" sz="1500" dirty="0"/>
+            <a:endParaRPr lang="en-US" sz="1800" dirty="0"/>
           </a:p>
         </p:txBody>
       </p:sp>
@@ -12739,7 +12660,7 @@
         </p:nvSpPr>
         <p:spPr>
           <a:xfrm>
-            <a:off x="14768438" y="6879878"/>
+            <a:off x="14768438" y="7027515"/>
             <a:ext cx="857027" cy="419100"/>
           </a:xfrm>
           <a:prstGeom prst="rect">
@@ -12763,7 +12684,7 @@
         </p:nvSpPr>
         <p:spPr>
           <a:xfrm>
-            <a:off x="15625465" y="6879878"/>
+            <a:off x="15625465" y="7027515"/>
             <a:ext cx="612130" cy="419100"/>
           </a:xfrm>
           <a:prstGeom prst="rect">
@@ -12787,7 +12708,7 @@
         </p:nvSpPr>
         <p:spPr>
           <a:xfrm>
-            <a:off x="16237595" y="6879878"/>
+            <a:off x="16237595" y="7027515"/>
             <a:ext cx="612130" cy="419100"/>
           </a:xfrm>
           <a:prstGeom prst="rect">
@@ -12811,26 +12732,26 @@
         </p:nvSpPr>
         <p:spPr>
           <a:xfrm>
-            <a:off x="1047750" y="7784753"/>
-            <a:ext cx="17811750" cy="290513"/>
-          </a:xfrm>
-          <a:prstGeom prst="rect">
-            <a:avLst/>
-          </a:prstGeom>
-          <a:noFill/>
-          <a:ln/>
-        </p:spPr>
-        <p:txBody>
-          <a:bodyPr wrap="square" lIns="25400" tIns="25400" rIns="25400" bIns="25400" rtlCol="0" anchor="t">
-            <a:normAutofit/>
-          </a:bodyPr>
-          <a:lstStyle/>
-          <a:p>
-            <a:pPr algn="l" indent="0" marL="0">
-              <a:buNone/>
-            </a:pPr>
-            <a:r>
-              <a:rPr lang="en-US" sz="1650" dirty="0">
+            <a:off x="1047750" y="7932390"/>
+            <a:ext cx="17811750" cy="314325"/>
+          </a:xfrm>
+          <a:prstGeom prst="rect">
+            <a:avLst/>
+          </a:prstGeom>
+          <a:noFill/>
+          <a:ln/>
+        </p:spPr>
+        <p:txBody>
+          <a:bodyPr wrap="square" lIns="25400" tIns="25400" rIns="25400" bIns="25400" rtlCol="0" anchor="t">
+            <a:normAutofit/>
+          </a:bodyPr>
+          <a:lstStyle/>
+          <a:p>
+            <a:pPr algn="l" indent="0" marL="0">
+              <a:buNone/>
+            </a:pPr>
+            <a:r>
+              <a:rPr lang="en-US" sz="1800" dirty="0">
                 <a:solidFill>
                   <a:srgbClr val="7B8C82"/>
                 </a:solidFill>
@@ -12840,7 +12761,7 @@
               </a:rPr>
               <a:t>Завод · упаковка 279 ₸ · логистика 186 ₸ · пошлина 73 ₸</a:t>
             </a:r>
-            <a:endParaRPr lang="en-US" sz="1650" dirty="0"/>
+            <a:endParaRPr lang="en-US" sz="1800" dirty="0"/>
           </a:p>
         </p:txBody>
       </p:sp>
@@ -12884,7 +12805,7 @@
         </p:nvSpPr>
         <p:spPr>
           <a:xfrm>
-            <a:off x="1047750" y="1658317"/>
+            <a:off x="1047750" y="1636886"/>
             <a:ext cx="17811750" cy="658118"/>
           </a:xfrm>
           <a:prstGeom prst="rect">
@@ -12928,7 +12849,7 @@
         </p:nvSpPr>
         <p:spPr>
           <a:xfrm>
-            <a:off x="1047750" y="2811735"/>
+            <a:off x="1047750" y="2790304"/>
             <a:ext cx="5194250" cy="2864123"/>
           </a:xfrm>
           <a:prstGeom prst="roundRect">
@@ -12959,7 +12880,7 @@
         </p:nvSpPr>
         <p:spPr>
           <a:xfrm>
-            <a:off x="1495425" y="3240360"/>
+            <a:off x="1495425" y="3218929"/>
             <a:ext cx="4728790" cy="871538"/>
           </a:xfrm>
           <a:prstGeom prst="rect">
@@ -13000,7 +12921,7 @@
         </p:nvSpPr>
         <p:spPr>
           <a:xfrm>
-            <a:off x="1495425" y="4207148"/>
+            <a:off x="1495425" y="4185717"/>
             <a:ext cx="4427867" cy="1078185"/>
           </a:xfrm>
           <a:prstGeom prst="rect">
@@ -13044,7 +12965,7 @@
         </p:nvSpPr>
         <p:spPr>
           <a:xfrm>
-            <a:off x="6546800" y="2811735"/>
+            <a:off x="6546800" y="2790304"/>
             <a:ext cx="5194325" cy="2864123"/>
           </a:xfrm>
           <a:prstGeom prst="roundRect">
@@ -13075,7 +12996,7 @@
         </p:nvSpPr>
         <p:spPr>
           <a:xfrm>
-            <a:off x="6994475" y="3240360"/>
+            <a:off x="6994475" y="3218929"/>
             <a:ext cx="4728872" cy="871538"/>
           </a:xfrm>
           <a:prstGeom prst="rect">
@@ -13116,7 +13037,7 @@
         </p:nvSpPr>
         <p:spPr>
           <a:xfrm>
-            <a:off x="6994475" y="4207148"/>
+            <a:off x="6994475" y="4185717"/>
             <a:ext cx="4427944" cy="731490"/>
           </a:xfrm>
           <a:prstGeom prst="rect">
@@ -13160,7 +13081,7 @@
         </p:nvSpPr>
         <p:spPr>
           <a:xfrm>
-            <a:off x="12045925" y="2811735"/>
+            <a:off x="12045925" y="2790304"/>
             <a:ext cx="5194250" cy="2864123"/>
           </a:xfrm>
           <a:prstGeom prst="roundRect">
@@ -13191,7 +13112,7 @@
         </p:nvSpPr>
         <p:spPr>
           <a:xfrm>
-            <a:off x="12493600" y="3240360"/>
+            <a:off x="12493600" y="3218929"/>
             <a:ext cx="4728790" cy="871538"/>
           </a:xfrm>
           <a:prstGeom prst="rect">
@@ -13232,7 +13153,7 @@
         </p:nvSpPr>
         <p:spPr>
           <a:xfrm>
-            <a:off x="12493600" y="4207148"/>
+            <a:off x="12493600" y="4185717"/>
             <a:ext cx="4427867" cy="731490"/>
           </a:xfrm>
           <a:prstGeom prst="rect">
@@ -13276,7 +13197,7 @@
         </p:nvSpPr>
         <p:spPr>
           <a:xfrm>
-            <a:off x="1047750" y="8247608"/>
+            <a:off x="1047750" y="8226177"/>
             <a:ext cx="16192500" cy="19050"/>
           </a:xfrm>
           <a:prstGeom prst="rect">
@@ -13302,7 +13223,7 @@
         </p:nvSpPr>
         <p:spPr>
           <a:xfrm>
-            <a:off x="1047750" y="7947571"/>
+            <a:off x="1047750" y="7926139"/>
             <a:ext cx="1026096" cy="300038"/>
           </a:xfrm>
           <a:custGeom>
@@ -13352,7 +13273,7 @@
         </p:nvSpPr>
         <p:spPr>
           <a:xfrm>
-            <a:off x="2130996" y="7687568"/>
+            <a:off x="2130996" y="7666137"/>
             <a:ext cx="1026170" cy="560040"/>
           </a:xfrm>
           <a:custGeom>
@@ -13402,7 +13323,7 @@
         </p:nvSpPr>
         <p:spPr>
           <a:xfrm>
-            <a:off x="3214315" y="7407548"/>
+            <a:off x="3214315" y="7386117"/>
             <a:ext cx="1026096" cy="840060"/>
           </a:xfrm>
           <a:custGeom>
@@ -13452,7 +13373,7 @@
         </p:nvSpPr>
         <p:spPr>
           <a:xfrm>
-            <a:off x="4297561" y="7047458"/>
+            <a:off x="4297561" y="7026027"/>
             <a:ext cx="1026170" cy="1200150"/>
           </a:xfrm>
           <a:custGeom>
@@ -13502,7 +13423,7 @@
         </p:nvSpPr>
         <p:spPr>
           <a:xfrm>
-            <a:off x="5380881" y="6687443"/>
+            <a:off x="5380881" y="6666012"/>
             <a:ext cx="1026170" cy="1560165"/>
           </a:xfrm>
           <a:custGeom>
@@ -13552,7 +13473,7 @@
         </p:nvSpPr>
         <p:spPr>
           <a:xfrm>
-            <a:off x="6464201" y="6847433"/>
+            <a:off x="6464201" y="6826002"/>
             <a:ext cx="1026170" cy="1400175"/>
           </a:xfrm>
           <a:custGeom>
@@ -13602,7 +13523,7 @@
         </p:nvSpPr>
         <p:spPr>
           <a:xfrm>
-            <a:off x="7547521" y="7247483"/>
+            <a:off x="7547521" y="7226052"/>
             <a:ext cx="1026170" cy="1000125"/>
           </a:xfrm>
           <a:custGeom>
@@ -13652,7 +13573,7 @@
         </p:nvSpPr>
         <p:spPr>
           <a:xfrm>
-            <a:off x="8630841" y="7647533"/>
+            <a:off x="8630841" y="7626102"/>
             <a:ext cx="1026170" cy="600075"/>
           </a:xfrm>
           <a:custGeom>
@@ -13702,7 +13623,7 @@
         </p:nvSpPr>
         <p:spPr>
           <a:xfrm>
-            <a:off x="9714161" y="8047583"/>
+            <a:off x="9714161" y="8026152"/>
             <a:ext cx="1026170" cy="200025"/>
           </a:xfrm>
           <a:custGeom>
@@ -13752,7 +13673,7 @@
         </p:nvSpPr>
         <p:spPr>
           <a:xfrm>
-            <a:off x="10797480" y="8007623"/>
+            <a:off x="10797480" y="7986192"/>
             <a:ext cx="1026170" cy="239985"/>
           </a:xfrm>
           <a:custGeom>
@@ -13802,7 +13723,7 @@
         </p:nvSpPr>
         <p:spPr>
           <a:xfrm>
-            <a:off x="11880800" y="7767563"/>
+            <a:off x="11880800" y="7746132"/>
             <a:ext cx="1026170" cy="480045"/>
           </a:xfrm>
           <a:custGeom>
@@ -13852,7 +13773,7 @@
         </p:nvSpPr>
         <p:spPr>
           <a:xfrm>
-            <a:off x="12964120" y="7527578"/>
+            <a:off x="12964120" y="7506146"/>
             <a:ext cx="1026170" cy="720030"/>
           </a:xfrm>
           <a:custGeom>
@@ -13902,7 +13823,7 @@
         </p:nvSpPr>
         <p:spPr>
           <a:xfrm>
-            <a:off x="14047440" y="7287518"/>
+            <a:off x="14047440" y="7266087"/>
             <a:ext cx="1026170" cy="960090"/>
           </a:xfrm>
           <a:custGeom>
@@ -13952,7 +13873,7 @@
         </p:nvSpPr>
         <p:spPr>
           <a:xfrm>
-            <a:off x="15130760" y="7047458"/>
+            <a:off x="15130760" y="7026027"/>
             <a:ext cx="1026170" cy="1200150"/>
           </a:xfrm>
           <a:custGeom>
@@ -14002,7 +13923,7 @@
         </p:nvSpPr>
         <p:spPr>
           <a:xfrm>
-            <a:off x="16214080" y="6767438"/>
+            <a:off x="16214080" y="6746007"/>
             <a:ext cx="1026170" cy="1480170"/>
           </a:xfrm>
           <a:custGeom>
@@ -14052,26 +13973,26 @@
         </p:nvSpPr>
         <p:spPr>
           <a:xfrm>
-            <a:off x="1047750" y="8400008"/>
-            <a:ext cx="648891" cy="266700"/>
-          </a:xfrm>
-          <a:prstGeom prst="rect">
-            <a:avLst/>
-          </a:prstGeom>
-          <a:noFill/>
-          <a:ln/>
-        </p:spPr>
-        <p:txBody>
-          <a:bodyPr wrap="square" lIns="25400" tIns="25400" rIns="25400" bIns="25400" rtlCol="0" anchor="t">
-            <a:normAutofit/>
-          </a:bodyPr>
-          <a:lstStyle/>
-          <a:p>
-            <a:pPr algn="l" indent="0" marL="0">
-              <a:buNone/>
-            </a:pPr>
-            <a:r>
-              <a:rPr lang="en-US" sz="1500" dirty="0">
+            <a:off x="1047750" y="8378577"/>
+            <a:ext cx="763414" cy="309563"/>
+          </a:xfrm>
+          <a:prstGeom prst="rect">
+            <a:avLst/>
+          </a:prstGeom>
+          <a:noFill/>
+          <a:ln/>
+        </p:spPr>
+        <p:txBody>
+          <a:bodyPr wrap="square" lIns="25400" tIns="25400" rIns="25400" bIns="25400" rtlCol="0" anchor="t">
+            <a:normAutofit/>
+          </a:bodyPr>
+          <a:lstStyle/>
+          <a:p>
+            <a:pPr algn="l" indent="0" marL="0">
+              <a:buNone/>
+            </a:pPr>
+            <a:r>
+              <a:rPr lang="en-US" sz="1800" dirty="0">
                 <a:solidFill>
                   <a:srgbClr val="8FBBA3"/>
                 </a:solidFill>
@@ -14081,7 +14002,7 @@
               </a:rPr>
               <a:t>мес 1</a:t>
             </a:r>
-            <a:endParaRPr lang="en-US" sz="1500" dirty="0"/>
+            <a:endParaRPr lang="en-US" sz="1800" dirty="0"/>
           </a:p>
         </p:txBody>
       </p:sp>
@@ -14093,26 +14014,26 @@
         </p:nvSpPr>
         <p:spPr>
           <a:xfrm>
-            <a:off x="7883947" y="8400008"/>
-            <a:ext cx="2646387" cy="266700"/>
-          </a:xfrm>
-          <a:prstGeom prst="rect">
-            <a:avLst/>
-          </a:prstGeom>
-          <a:noFill/>
-          <a:ln/>
-        </p:spPr>
-        <p:txBody>
-          <a:bodyPr wrap="square" lIns="25400" tIns="25400" rIns="25400" bIns="25400" rtlCol="0" anchor="t">
-            <a:normAutofit/>
-          </a:bodyPr>
-          <a:lstStyle/>
-          <a:p>
-            <a:pPr algn="l" indent="0" marL="0">
-              <a:buNone/>
-            </a:pPr>
-            <a:r>
-              <a:rPr lang="en-US" sz="1500" dirty="0">
+            <a:off x="7631906" y="8378577"/>
+            <a:ext cx="3175665" cy="309563"/>
+          </a:xfrm>
+          <a:prstGeom prst="rect">
+            <a:avLst/>
+          </a:prstGeom>
+          <a:noFill/>
+          <a:ln/>
+        </p:spPr>
+        <p:txBody>
+          <a:bodyPr wrap="square" lIns="25400" tIns="25400" rIns="25400" bIns="25400" rtlCol="0" anchor="t">
+            <a:normAutofit/>
+          </a:bodyPr>
+          <a:lstStyle/>
+          <a:p>
+            <a:pPr algn="l" indent="0" marL="0">
+              <a:buNone/>
+            </a:pPr>
+            <a:r>
+              <a:rPr lang="en-US" sz="1800" dirty="0">
                 <a:solidFill>
                   <a:srgbClr val="8FBBA3"/>
                 </a:solidFill>
@@ -14122,7 +14043,7 @@
               </a:rPr>
               <a:t>старт продаж · мес 16</a:t>
             </a:r>
-            <a:endParaRPr lang="en-US" sz="1500" dirty="0"/>
+            <a:endParaRPr lang="en-US" sz="1800" dirty="0"/>
           </a:p>
         </p:txBody>
       </p:sp>
@@ -14134,26 +14055,26 @@
         </p:nvSpPr>
         <p:spPr>
           <a:xfrm>
-            <a:off x="16553259" y="8400008"/>
-            <a:ext cx="763191" cy="266700"/>
-          </a:xfrm>
-          <a:prstGeom prst="rect">
-            <a:avLst/>
-          </a:prstGeom>
-          <a:noFill/>
-          <a:ln/>
-        </p:spPr>
-        <p:txBody>
-          <a:bodyPr wrap="square" lIns="25400" tIns="25400" rIns="25400" bIns="25400" rtlCol="0" anchor="t">
-            <a:normAutofit/>
-          </a:bodyPr>
-          <a:lstStyle/>
-          <a:p>
-            <a:pPr algn="l" indent="0" marL="0">
-              <a:buNone/>
-            </a:pPr>
-            <a:r>
-              <a:rPr lang="en-US" sz="1500" dirty="0">
+            <a:off x="16415817" y="8378577"/>
+            <a:ext cx="900633" cy="309563"/>
+          </a:xfrm>
+          <a:prstGeom prst="rect">
+            <a:avLst/>
+          </a:prstGeom>
+          <a:noFill/>
+          <a:ln/>
+        </p:spPr>
+        <p:txBody>
+          <a:bodyPr wrap="square" lIns="25400" tIns="25400" rIns="25400" bIns="25400" rtlCol="0" anchor="t">
+            <a:normAutofit/>
+          </a:bodyPr>
+          <a:lstStyle/>
+          <a:p>
+            <a:pPr algn="l" indent="0" marL="0">
+              <a:buNone/>
+            </a:pPr>
+            <a:r>
+              <a:rPr lang="en-US" sz="1800" dirty="0">
                 <a:solidFill>
                   <a:srgbClr val="8FBBA3"/>
                 </a:solidFill>
@@ -14163,7 +14084,7 @@
               </a:rPr>
               <a:t>мес 36</a:t>
             </a:r>
-            <a:endParaRPr lang="en-US" sz="1500" dirty="0"/>
+            <a:endParaRPr lang="en-US" sz="1800" dirty="0"/>
           </a:p>
         </p:txBody>
       </p:sp>

--- a/files/damumed-band-prezentaciya.pptx
+++ b/files/damumed-band-prezentaciya.pptx
@@ -2235,7 +2235,7 @@
           <a:p>
             <a:pPr algn="l" indent="0" marL="0">
               <a:lnSpc>
-                <a:spcPct val="85333"/>
+                <a:spcPct val="81720"/>
               </a:lnSpc>
               <a:buNone/>
             </a:pPr>
@@ -2244,9 +2244,9 @@
                 <a:solidFill>
                   <a:srgbClr val="F2F7F4"/>
                 </a:solidFill>
-                <a:latin typeface="Arial" pitchFamily="34" charset="0"/>
-                <a:ea typeface="Arial" pitchFamily="34" charset="-122"/>
-                <a:cs typeface="Arial" pitchFamily="34" charset="-120"/>
+                <a:latin typeface="Golos Text" pitchFamily="34" charset="0"/>
+                <a:ea typeface="Golos Text" pitchFamily="34" charset="-122"/>
+                <a:cs typeface="Golos Text" pitchFamily="34" charset="-120"/>
               </a:rPr>
               <a:t>Damumed Band</a:t>
             </a:r>
@@ -2279,7 +2279,7 @@
           <a:p>
             <a:pPr algn="l" indent="0" marL="0">
               <a:lnSpc>
-                <a:spcPct val="126410"/>
+                <a:spcPct val="120244"/>
               </a:lnSpc>
               <a:buNone/>
             </a:pPr>
@@ -2288,9 +2288,9 @@
                 <a:solidFill>
                   <a:srgbClr val="BEDCCB"/>
                 </a:solidFill>
-                <a:latin typeface="Arial" pitchFamily="34" charset="0"/>
-                <a:ea typeface="Arial" pitchFamily="34" charset="-122"/>
-                <a:cs typeface="Arial" pitchFamily="34" charset="-120"/>
+                <a:latin typeface="Golos Text" pitchFamily="34" charset="0"/>
+                <a:ea typeface="Golos Text" pitchFamily="34" charset="-122"/>
+                <a:cs typeface="Golos Text" pitchFamily="34" charset="-120"/>
               </a:rPr>
               <a:t>Браслет для контроля здоровья под собственным брендом</a:t>
             </a:r>
@@ -2319,10 +2319,6 @@
           </a:solidFill>
           <a:ln/>
         </p:spPr>
-        <p:txBody>
-          <a:bodyPr/>
-          <a:p/>
-        </p:txBody>
       </p:sp>
       <p:sp>
         <p:nvSpPr>
@@ -2349,7 +2345,7 @@
           <a:p>
             <a:pPr algn="l" indent="0" marL="0">
               <a:lnSpc>
-                <a:spcPct val="130000"/>
+                <a:spcPct val="125806"/>
               </a:lnSpc>
               <a:buNone/>
             </a:pPr>
@@ -2358,9 +2354,9 @@
                 <a:solidFill>
                   <a:srgbClr val="8FBBA3"/>
                 </a:solidFill>
-                <a:latin typeface="Arial" pitchFamily="34" charset="0"/>
-                <a:ea typeface="Arial" pitchFamily="34" charset="-122"/>
-                <a:cs typeface="Arial" pitchFamily="34" charset="-120"/>
+                <a:latin typeface="Golos Text" pitchFamily="34" charset="0"/>
+                <a:ea typeface="Golos Text" pitchFamily="34" charset="-122"/>
+                <a:cs typeface="Golos Text" pitchFamily="34" charset="-120"/>
               </a:rPr>
               <a:t>Первое в Казахстане носимое медицинское изделие, встроенное в медкарту и рабочее место врача — по цене ниже фитнес-браслета</a:t>
             </a:r>
@@ -2431,12 +2427,12 @@
         </p:nvSpPr>
         <p:spPr>
           <a:xfrm>
-            <a:off x="1047750" y="2202210"/>
-            <a:ext cx="3379143" cy="414338"/>
+            <a:off x="1047750" y="2195066"/>
+            <a:ext cx="3569940" cy="428625"/>
           </a:xfrm>
           <a:prstGeom prst="roundRect">
             <a:avLst>
-              <a:gd name="adj" fmla="val 22988"/>
+              <a:gd name="adj" fmla="val 22222"/>
             </a:avLst>
           </a:prstGeom>
           <a:solidFill>
@@ -2444,10 +2440,6 @@
           </a:solidFill>
           <a:ln/>
         </p:spPr>
-        <p:txBody>
-          <a:bodyPr/>
-          <a:p/>
-        </p:txBody>
       </p:sp>
       <p:sp>
         <p:nvSpPr>
@@ -2457,8 +2449,8 @@
         </p:nvSpPr>
         <p:spPr>
           <a:xfrm>
-            <a:off x="1219200" y="2278410"/>
-            <a:ext cx="3137617" cy="300038"/>
+            <a:off x="1219200" y="2271266"/>
+            <a:ext cx="3334138" cy="314325"/>
           </a:xfrm>
           <a:prstGeom prst="rect">
             <a:avLst/>
@@ -2480,9 +2472,9 @@
                 <a:solidFill>
                   <a:srgbClr val="0E7A50"/>
                 </a:solidFill>
-                <a:latin typeface="Arial" pitchFamily="34" charset="0"/>
-                <a:ea typeface="Arial" pitchFamily="34" charset="-122"/>
-                <a:cs typeface="Arial" pitchFamily="34" charset="-120"/>
+                <a:latin typeface="Golos Text" pitchFamily="34" charset="0"/>
+                <a:ea typeface="Golos Text" pitchFamily="34" charset="-122"/>
+                <a:cs typeface="Golos Text" pitchFamily="34" charset="-120"/>
               </a:rPr>
               <a:t>Раздел 05 · Целевые группы</a:t>
             </a:r>
@@ -2498,7 +2490,7 @@
         </p:nvSpPr>
         <p:spPr>
           <a:xfrm>
-            <a:off x="1047750" y="2845147"/>
+            <a:off x="1047750" y="2852291"/>
             <a:ext cx="17811750" cy="658118"/>
           </a:xfrm>
           <a:prstGeom prst="rect">
@@ -2515,7 +2507,7 @@
           <a:p>
             <a:pPr algn="l" indent="0" marL="0">
               <a:lnSpc>
-                <a:spcPct val="91690"/>
+                <a:spcPct val="87383"/>
               </a:lnSpc>
               <a:buNone/>
             </a:pPr>
@@ -2524,9 +2516,9 @@
                 <a:solidFill>
                   <a:srgbClr val="16232B"/>
                 </a:solidFill>
-                <a:latin typeface="Arial" pitchFamily="34" charset="0"/>
-                <a:ea typeface="Arial" pitchFamily="34" charset="-122"/>
-                <a:cs typeface="Arial" pitchFamily="34" charset="-120"/>
+                <a:latin typeface="Golos Text" pitchFamily="34" charset="0"/>
+                <a:ea typeface="Golos Text" pitchFamily="34" charset="-122"/>
+                <a:cs typeface="Golos Text" pitchFamily="34" charset="-120"/>
               </a:rPr>
               <a:t>Пациенты на диспансерном учёте</a:t>
             </a:r>
@@ -2543,7 +2535,7 @@
         <p:spPr>
           <a:xfrm>
             <a:off x="1047750" y="4079528"/>
-            <a:ext cx="4400550" cy="333375"/>
+            <a:ext cx="4400550" cy="347663"/>
           </a:xfrm>
           <a:prstGeom prst="rect">
             <a:avLst/>
@@ -2565,9 +2557,9 @@
                 <a:solidFill>
                   <a:srgbClr val="0B3D2C"/>
                 </a:solidFill>
-                <a:latin typeface="Arial" pitchFamily="34" charset="0"/>
-                <a:ea typeface="Arial" pitchFamily="34" charset="-122"/>
-                <a:cs typeface="Arial" pitchFamily="34" charset="-120"/>
+                <a:latin typeface="Golos Text" pitchFamily="34" charset="0"/>
+                <a:ea typeface="Golos Text" pitchFamily="34" charset="-122"/>
+                <a:cs typeface="Golos Text" pitchFamily="34" charset="-120"/>
               </a:rPr>
               <a:t>Гипертония</a:t>
             </a:r>
@@ -2583,7 +2575,7 @@
         </p:nvSpPr>
         <p:spPr>
           <a:xfrm>
-            <a:off x="5295900" y="3960465"/>
+            <a:off x="5295900" y="3967609"/>
             <a:ext cx="7600950" cy="533400"/>
           </a:xfrm>
           <a:prstGeom prst="roundRect">
@@ -2596,10 +2588,6 @@
           </a:solidFill>
           <a:ln/>
         </p:spPr>
-        <p:txBody>
-          <a:bodyPr/>
-          <a:p/>
-        </p:txBody>
       </p:sp>
       <p:sp>
         <p:nvSpPr>
@@ -2610,7 +2598,7 @@
         <p:spPr>
           <a:xfrm>
             <a:off x="13144500" y="4074765"/>
-            <a:ext cx="2409825" cy="342900"/>
+            <a:ext cx="2409825" cy="357188"/>
           </a:xfrm>
           <a:prstGeom prst="rect">
             <a:avLst/>
@@ -2632,9 +2620,9 @@
                 <a:solidFill>
                   <a:srgbClr val="0E7A50"/>
                 </a:solidFill>
-                <a:latin typeface="Courier New" pitchFamily="34" charset="0"/>
-                <a:ea typeface="Courier New" pitchFamily="34" charset="-122"/>
-                <a:cs typeface="Courier New" pitchFamily="34" charset="-120"/>
+                <a:latin typeface="Spline Sans Mono" pitchFamily="34" charset="0"/>
+                <a:ea typeface="Spline Sans Mono" pitchFamily="34" charset="-122"/>
+                <a:cs typeface="Spline Sans Mono" pitchFamily="34" charset="-120"/>
               </a:rPr>
               <a:t>1 776 876</a:t>
             </a:r>
@@ -2650,7 +2638,7 @@
         </p:nvSpPr>
         <p:spPr>
           <a:xfrm>
-            <a:off x="1047750" y="4815334"/>
+            <a:off x="1047750" y="4822478"/>
             <a:ext cx="4400550" cy="347663"/>
           </a:xfrm>
           <a:prstGeom prst="rect">
@@ -2673,9 +2661,9 @@
                 <a:solidFill>
                   <a:srgbClr val="42504A"/>
                 </a:solidFill>
-                <a:latin typeface="Arial" pitchFamily="34" charset="0"/>
-                <a:ea typeface="Arial" pitchFamily="34" charset="-122"/>
-                <a:cs typeface="Arial" pitchFamily="34" charset="-120"/>
+                <a:latin typeface="Golos Text" pitchFamily="34" charset="0"/>
+                <a:ea typeface="Golos Text" pitchFamily="34" charset="-122"/>
+                <a:cs typeface="Golos Text" pitchFamily="34" charset="-120"/>
               </a:rPr>
               <a:t>Диабет 2 типа</a:t>
             </a:r>
@@ -2691,7 +2679,7 @@
         </p:nvSpPr>
         <p:spPr>
           <a:xfrm>
-            <a:off x="5295900" y="4703415"/>
+            <a:off x="5295900" y="4710559"/>
             <a:ext cx="2128242" cy="533400"/>
           </a:xfrm>
           <a:prstGeom prst="roundRect">
@@ -2704,10 +2692,6 @@
           </a:solidFill>
           <a:ln/>
         </p:spPr>
-        <p:txBody>
-          <a:bodyPr/>
-          <a:p/>
-        </p:txBody>
       </p:sp>
       <p:sp>
         <p:nvSpPr>
@@ -2717,7 +2701,7 @@
         </p:nvSpPr>
         <p:spPr>
           <a:xfrm>
-            <a:off x="13144500" y="4810571"/>
+            <a:off x="13144500" y="4817715"/>
             <a:ext cx="2409825" cy="357188"/>
           </a:xfrm>
           <a:prstGeom prst="rect">
@@ -2740,9 +2724,9 @@
                 <a:solidFill>
                   <a:srgbClr val="42504A"/>
                 </a:solidFill>
-                <a:latin typeface="Courier New" pitchFamily="34" charset="0"/>
-                <a:ea typeface="Courier New" pitchFamily="34" charset="-122"/>
-                <a:cs typeface="Courier New" pitchFamily="34" charset="-120"/>
+                <a:latin typeface="Spline Sans Mono" pitchFamily="34" charset="0"/>
+                <a:ea typeface="Spline Sans Mono" pitchFamily="34" charset="-122"/>
+                <a:cs typeface="Spline Sans Mono" pitchFamily="34" charset="-120"/>
               </a:rPr>
               <a:t>492 335</a:t>
             </a:r>
@@ -2758,7 +2742,7 @@
         </p:nvSpPr>
         <p:spPr>
           <a:xfrm>
-            <a:off x="1047750" y="5558284"/>
+            <a:off x="1047750" y="5565428"/>
             <a:ext cx="4400550" cy="347663"/>
           </a:xfrm>
           <a:prstGeom prst="rect">
@@ -2781,9 +2765,9 @@
                 <a:solidFill>
                   <a:srgbClr val="42504A"/>
                 </a:solidFill>
-                <a:latin typeface="Arial" pitchFamily="34" charset="0"/>
-                <a:ea typeface="Arial" pitchFamily="34" charset="-122"/>
-                <a:cs typeface="Arial" pitchFamily="34" charset="-120"/>
+                <a:latin typeface="Golos Text" pitchFamily="34" charset="0"/>
+                <a:ea typeface="Golos Text" pitchFamily="34" charset="-122"/>
+                <a:cs typeface="Golos Text" pitchFamily="34" charset="-120"/>
               </a:rPr>
               <a:t>Астма</a:t>
             </a:r>
@@ -2799,7 +2783,7 @@
         </p:nvSpPr>
         <p:spPr>
           <a:xfrm>
-            <a:off x="5295900" y="5446365"/>
+            <a:off x="5295900" y="5453509"/>
             <a:ext cx="532061" cy="533400"/>
           </a:xfrm>
           <a:prstGeom prst="roundRect">
@@ -2812,10 +2796,6 @@
           </a:solidFill>
           <a:ln/>
         </p:spPr>
-        <p:txBody>
-          <a:bodyPr/>
-          <a:p/>
-        </p:txBody>
       </p:sp>
       <p:sp>
         <p:nvSpPr>
@@ -2825,7 +2805,7 @@
         </p:nvSpPr>
         <p:spPr>
           <a:xfrm>
-            <a:off x="13144500" y="5553521"/>
+            <a:off x="13144500" y="5560665"/>
             <a:ext cx="2409825" cy="357188"/>
           </a:xfrm>
           <a:prstGeom prst="rect">
@@ -2848,9 +2828,9 @@
                 <a:solidFill>
                   <a:srgbClr val="42504A"/>
                 </a:solidFill>
-                <a:latin typeface="Courier New" pitchFamily="34" charset="0"/>
-                <a:ea typeface="Courier New" pitchFamily="34" charset="-122"/>
-                <a:cs typeface="Courier New" pitchFamily="34" charset="-120"/>
+                <a:latin typeface="Spline Sans Mono" pitchFamily="34" charset="0"/>
+                <a:ea typeface="Spline Sans Mono" pitchFamily="34" charset="-122"/>
+                <a:cs typeface="Spline Sans Mono" pitchFamily="34" charset="-120"/>
               </a:rPr>
               <a:t>110 000</a:t>
             </a:r>
@@ -2866,7 +2846,7 @@
         </p:nvSpPr>
         <p:spPr>
           <a:xfrm>
-            <a:off x="1047750" y="6301234"/>
+            <a:off x="1047750" y="6308378"/>
             <a:ext cx="4400550" cy="347663"/>
           </a:xfrm>
           <a:prstGeom prst="rect">
@@ -2889,9 +2869,9 @@
                 <a:solidFill>
                   <a:srgbClr val="42504A"/>
                 </a:solidFill>
-                <a:latin typeface="Arial" pitchFamily="34" charset="0"/>
-                <a:ea typeface="Arial" pitchFamily="34" charset="-122"/>
-                <a:cs typeface="Arial" pitchFamily="34" charset="-120"/>
+                <a:latin typeface="Golos Text" pitchFamily="34" charset="0"/>
+                <a:ea typeface="Golos Text" pitchFamily="34" charset="-122"/>
+                <a:cs typeface="Golos Text" pitchFamily="34" charset="-120"/>
               </a:rPr>
               <a:t>Лёгочная болезнь (ХОБЛ)</a:t>
             </a:r>
@@ -2907,7 +2887,7 @@
         </p:nvSpPr>
         <p:spPr>
           <a:xfrm>
-            <a:off x="5295900" y="6189315"/>
+            <a:off x="5295900" y="6196459"/>
             <a:ext cx="380033" cy="533400"/>
           </a:xfrm>
           <a:prstGeom prst="roundRect">
@@ -2920,10 +2900,6 @@
           </a:solidFill>
           <a:ln/>
         </p:spPr>
-        <p:txBody>
-          <a:bodyPr/>
-          <a:p/>
-        </p:txBody>
       </p:sp>
       <p:sp>
         <p:nvSpPr>
@@ -2933,7 +2909,7 @@
         </p:nvSpPr>
         <p:spPr>
           <a:xfrm>
-            <a:off x="13144500" y="6296471"/>
+            <a:off x="13144500" y="6303615"/>
             <a:ext cx="2409825" cy="357188"/>
           </a:xfrm>
           <a:prstGeom prst="rect">
@@ -2956,9 +2932,9 @@
                 <a:solidFill>
                   <a:srgbClr val="42504A"/>
                 </a:solidFill>
-                <a:latin typeface="Courier New" pitchFamily="34" charset="0"/>
-                <a:ea typeface="Courier New" pitchFamily="34" charset="-122"/>
-                <a:cs typeface="Courier New" pitchFamily="34" charset="-120"/>
+                <a:latin typeface="Spline Sans Mono" pitchFamily="34" charset="0"/>
+                <a:ea typeface="Spline Sans Mono" pitchFamily="34" charset="-122"/>
+                <a:cs typeface="Spline Sans Mono" pitchFamily="34" charset="-120"/>
               </a:rPr>
               <a:t>70 000</a:t>
             </a:r>
@@ -2974,7 +2950,7 @@
         </p:nvSpPr>
         <p:spPr>
           <a:xfrm>
-            <a:off x="1047750" y="7044184"/>
+            <a:off x="1047750" y="7051328"/>
             <a:ext cx="4400550" cy="347663"/>
           </a:xfrm>
           <a:prstGeom prst="rect">
@@ -2997,9 +2973,9 @@
                 <a:solidFill>
                   <a:srgbClr val="42504A"/>
                 </a:solidFill>
-                <a:latin typeface="Arial" pitchFamily="34" charset="0"/>
-                <a:ea typeface="Arial" pitchFamily="34" charset="-122"/>
-                <a:cs typeface="Arial" pitchFamily="34" charset="-120"/>
+                <a:latin typeface="Golos Text" pitchFamily="34" charset="0"/>
+                <a:ea typeface="Golos Text" pitchFamily="34" charset="-122"/>
+                <a:cs typeface="Golos Text" pitchFamily="34" charset="-120"/>
               </a:rPr>
               <a:t>Сердечная недостаточность</a:t>
             </a:r>
@@ -3015,7 +2991,7 @@
         </p:nvSpPr>
         <p:spPr>
           <a:xfrm>
-            <a:off x="5295900" y="6932265"/>
+            <a:off x="5295900" y="6939409"/>
             <a:ext cx="228005" cy="533400"/>
           </a:xfrm>
           <a:prstGeom prst="roundRect">
@@ -3028,10 +3004,6 @@
           </a:solidFill>
           <a:ln/>
         </p:spPr>
-        <p:txBody>
-          <a:bodyPr/>
-          <a:p/>
-        </p:txBody>
       </p:sp>
       <p:sp>
         <p:nvSpPr>
@@ -3041,7 +3013,7 @@
         </p:nvSpPr>
         <p:spPr>
           <a:xfrm>
-            <a:off x="13144500" y="7039421"/>
+            <a:off x="13144500" y="7046565"/>
             <a:ext cx="2409825" cy="357188"/>
           </a:xfrm>
           <a:prstGeom prst="rect">
@@ -3064,9 +3036,9 @@
                 <a:solidFill>
                   <a:srgbClr val="42504A"/>
                 </a:solidFill>
-                <a:latin typeface="Courier New" pitchFamily="34" charset="0"/>
-                <a:ea typeface="Courier New" pitchFamily="34" charset="-122"/>
-                <a:cs typeface="Courier New" pitchFamily="34" charset="-120"/>
+                <a:latin typeface="Spline Sans Mono" pitchFamily="34" charset="0"/>
+                <a:ea typeface="Spline Sans Mono" pitchFamily="34" charset="-122"/>
+                <a:cs typeface="Spline Sans Mono" pitchFamily="34" charset="-120"/>
               </a:rPr>
               <a:t>37 485</a:t>
             </a:r>
@@ -3082,7 +3054,7 @@
         </p:nvSpPr>
         <p:spPr>
           <a:xfrm>
-            <a:off x="1047750" y="7808565"/>
+            <a:off x="1047750" y="7815709"/>
             <a:ext cx="17811750" cy="314325"/>
           </a:xfrm>
           <a:prstGeom prst="rect">
@@ -3105,9 +3077,9 @@
                 <a:solidFill>
                   <a:srgbClr val="7B8C82"/>
                 </a:solidFill>
-                <a:latin typeface="Arial" pitchFamily="34" charset="0"/>
-                <a:ea typeface="Arial" pitchFamily="34" charset="-122"/>
-                <a:cs typeface="Arial" pitchFamily="34" charset="-120"/>
+                <a:latin typeface="Golos Text" pitchFamily="34" charset="0"/>
+                <a:ea typeface="Golos Text" pitchFamily="34" charset="-122"/>
+                <a:cs typeface="Golos Text" pitchFamily="34" charset="-120"/>
               </a:rPr>
               <a:t>Данные Минздрава и НЦОЗ · численность целевых групп, человек</a:t>
             </a:r>
@@ -3155,12 +3127,12 @@
         </p:nvSpPr>
         <p:spPr>
           <a:xfrm>
-            <a:off x="1047750" y="2607246"/>
-            <a:ext cx="2960191" cy="414338"/>
+            <a:off x="1047750" y="2578671"/>
+            <a:ext cx="3133651" cy="428625"/>
           </a:xfrm>
           <a:prstGeom prst="roundRect">
             <a:avLst>
-              <a:gd name="adj" fmla="val 22988"/>
+              <a:gd name="adj" fmla="val 22222"/>
             </a:avLst>
           </a:prstGeom>
           <a:solidFill>
@@ -3170,10 +3142,6 @@
           </a:solidFill>
           <a:ln/>
         </p:spPr>
-        <p:txBody>
-          <a:bodyPr/>
-          <a:p/>
-        </p:txBody>
       </p:sp>
       <p:sp>
         <p:nvSpPr>
@@ -3183,8 +3151,8 @@
         </p:nvSpPr>
         <p:spPr>
           <a:xfrm>
-            <a:off x="1219200" y="2683446"/>
-            <a:ext cx="2706097" cy="300038"/>
+            <a:off x="1219200" y="2654871"/>
+            <a:ext cx="2884760" cy="314325"/>
           </a:xfrm>
           <a:prstGeom prst="rect">
             <a:avLst/>
@@ -3206,11 +3174,11 @@
                 <a:solidFill>
                   <a:srgbClr val="BEDCCB"/>
                 </a:solidFill>
-                <a:latin typeface="Arial" pitchFamily="34" charset="0"/>
-                <a:ea typeface="Arial" pitchFamily="34" charset="-122"/>
-                <a:cs typeface="Arial" pitchFamily="34" charset="-120"/>
-              </a:rPr>
-              <a:t>Раздел 06 · Мобильное приложение</a:t>
+                <a:latin typeface="Golos Text" pitchFamily="34" charset="0"/>
+                <a:ea typeface="Golos Text" pitchFamily="34" charset="-122"/>
+                <a:cs typeface="Golos Text" pitchFamily="34" charset="-120"/>
+              </a:rPr>
+              <a:t>Раздел 06 · Приложение</a:t>
             </a:r>
             <a:endParaRPr lang="en-US" sz="1800" dirty="0"/>
           </a:p>
@@ -3224,7 +3192,7 @@
         </p:nvSpPr>
         <p:spPr>
           <a:xfrm>
-            <a:off x="1047750" y="3269233"/>
+            <a:off x="1047750" y="3254946"/>
             <a:ext cx="8364891" cy="1330375"/>
           </a:xfrm>
           <a:prstGeom prst="rect">
@@ -3241,7 +3209,7 @@
           <a:p>
             <a:pPr algn="l" indent="0" marL="0">
               <a:lnSpc>
-                <a:spcPct val="92299"/>
+                <a:spcPct val="88680"/>
               </a:lnSpc>
               <a:buNone/>
             </a:pPr>
@@ -3250,9 +3218,9 @@
                 <a:solidFill>
                   <a:srgbClr val="F2F7F4"/>
                 </a:solidFill>
-                <a:latin typeface="Arial" pitchFamily="34" charset="0"/>
-                <a:ea typeface="Arial" pitchFamily="34" charset="-122"/>
-                <a:cs typeface="Arial" pitchFamily="34" charset="-120"/>
+                <a:latin typeface="Golos Text" pitchFamily="34" charset="0"/>
+                <a:ea typeface="Golos Text" pitchFamily="34" charset="-122"/>
+                <a:cs typeface="Golos Text" pitchFamily="34" charset="-120"/>
               </a:rPr>
               <a:t>Продукт целиком живёт в приложении</a:t>
             </a:r>
@@ -3268,8 +3236,8 @@
         </p:nvSpPr>
         <p:spPr>
           <a:xfrm>
-            <a:off x="1047750" y="4980608"/>
-            <a:ext cx="8933378" cy="333375"/>
+            <a:off x="1047750" y="4966320"/>
+            <a:ext cx="8933378" cy="347663"/>
           </a:xfrm>
           <a:prstGeom prst="rect">
             <a:avLst/>
@@ -3291,9 +3259,9 @@
                 <a:solidFill>
                   <a:srgbClr val="3ECF8E"/>
                 </a:solidFill>
-                <a:latin typeface="Arial" pitchFamily="34" charset="0"/>
-                <a:ea typeface="Arial" pitchFamily="34" charset="-122"/>
-                <a:cs typeface="Arial" pitchFamily="34" charset="-120"/>
+                <a:latin typeface="Golos Text" pitchFamily="34" charset="0"/>
+                <a:ea typeface="Golos Text" pitchFamily="34" charset="-122"/>
+                <a:cs typeface="Golos Text" pitchFamily="34" charset="-120"/>
               </a:rPr>
               <a:t>Личный коридор, а не норма</a:t>
             </a:r>
@@ -3326,7 +3294,7 @@
           <a:p>
             <a:pPr algn="l" indent="0" marL="0">
               <a:lnSpc>
-                <a:spcPct val="122182"/>
+                <a:spcPct val="115862"/>
               </a:lnSpc>
               <a:buNone/>
             </a:pPr>
@@ -3335,9 +3303,9 @@
                 <a:solidFill>
                   <a:srgbClr val="CFE7DB"/>
                 </a:solidFill>
-                <a:latin typeface="Arial" pitchFamily="34" charset="0"/>
-                <a:ea typeface="Arial" pitchFamily="34" charset="-122"/>
-                <a:cs typeface="Arial" pitchFamily="34" charset="-120"/>
+                <a:latin typeface="Golos Text" pitchFamily="34" charset="0"/>
+                <a:ea typeface="Golos Text" pitchFamily="34" charset="-122"/>
+                <a:cs typeface="Golos Text" pitchFamily="34" charset="-120"/>
               </a:rPr>
               <a:t>«выше вашего обычного», а не «пульс 68»</a:t>
             </a:r>
@@ -3354,7 +3322,7 @@
         <p:spPr>
           <a:xfrm>
             <a:off x="1047750" y="5843513"/>
-            <a:ext cx="8933378" cy="333375"/>
+            <a:ext cx="8933378" cy="347663"/>
           </a:xfrm>
           <a:prstGeom prst="rect">
             <a:avLst/>
@@ -3376,9 +3344,9 @@
                 <a:solidFill>
                   <a:srgbClr val="3ECF8E"/>
                 </a:solidFill>
-                <a:latin typeface="Arial" pitchFamily="34" charset="0"/>
-                <a:ea typeface="Arial" pitchFamily="34" charset="-122"/>
-                <a:cs typeface="Arial" pitchFamily="34" charset="-120"/>
+                <a:latin typeface="Golos Text" pitchFamily="34" charset="0"/>
+                <a:ea typeface="Golos Text" pitchFamily="34" charset="-122"/>
+                <a:cs typeface="Golos Text" pitchFamily="34" charset="-120"/>
               </a:rPr>
               <a:t>Три уровня раскрытия</a:t>
             </a:r>
@@ -3394,7 +3362,7 @@
         </p:nvSpPr>
         <p:spPr>
           <a:xfrm>
-            <a:off x="1047750" y="6176888"/>
+            <a:off x="1047750" y="6191176"/>
             <a:ext cx="8933378" cy="358080"/>
           </a:xfrm>
           <a:prstGeom prst="rect">
@@ -3411,7 +3379,7 @@
           <a:p>
             <a:pPr algn="l" indent="0" marL="0">
               <a:lnSpc>
-                <a:spcPct val="122182"/>
+                <a:spcPct val="115862"/>
               </a:lnSpc>
               <a:buNone/>
             </a:pPr>
@@ -3420,9 +3388,9 @@
                 <a:solidFill>
                   <a:srgbClr val="CFE7DB"/>
                 </a:solidFill>
-                <a:latin typeface="Arial" pitchFamily="34" charset="0"/>
-                <a:ea typeface="Arial" pitchFamily="34" charset="-122"/>
-                <a:cs typeface="Arial" pitchFamily="34" charset="-120"/>
+                <a:latin typeface="Golos Text" pitchFamily="34" charset="0"/>
+                <a:ea typeface="Golos Text" pitchFamily="34" charset="-122"/>
+                <a:cs typeface="Golos Text" pitchFamily="34" charset="-120"/>
               </a:rPr>
               <a:t>статус → тренд → сырые данные</a:t>
             </a:r>
@@ -3438,8 +3406,8 @@
         </p:nvSpPr>
         <p:spPr>
           <a:xfrm>
-            <a:off x="1047750" y="6706419"/>
-            <a:ext cx="8933378" cy="333375"/>
+            <a:off x="1047750" y="6720706"/>
+            <a:ext cx="8933378" cy="347663"/>
           </a:xfrm>
           <a:prstGeom prst="rect">
             <a:avLst/>
@@ -3461,9 +3429,9 @@
                 <a:solidFill>
                   <a:srgbClr val="3ECF8E"/>
                 </a:solidFill>
-                <a:latin typeface="Arial" pitchFamily="34" charset="0"/>
-                <a:ea typeface="Arial" pitchFamily="34" charset="-122"/>
-                <a:cs typeface="Arial" pitchFamily="34" charset="-120"/>
+                <a:latin typeface="Golos Text" pitchFamily="34" charset="0"/>
+                <a:ea typeface="Golos Text" pitchFamily="34" charset="-122"/>
+                <a:cs typeface="Golos Text" pitchFamily="34" charset="-120"/>
               </a:rPr>
               <a:t>Честная калибровка</a:t>
             </a:r>
@@ -3479,7 +3447,7 @@
         </p:nvSpPr>
         <p:spPr>
           <a:xfrm>
-            <a:off x="1047750" y="7039794"/>
+            <a:off x="1047750" y="7068369"/>
             <a:ext cx="8364891" cy="678061"/>
           </a:xfrm>
           <a:prstGeom prst="rect">
@@ -3496,7 +3464,7 @@
           <a:p>
             <a:pPr algn="l" indent="0" marL="0">
               <a:lnSpc>
-                <a:spcPct val="122182"/>
+                <a:spcPct val="115862"/>
               </a:lnSpc>
               <a:buNone/>
             </a:pPr>
@@ -3505,9 +3473,9 @@
                 <a:solidFill>
                   <a:srgbClr val="CFE7DB"/>
                 </a:solidFill>
-                <a:latin typeface="Arial" pitchFamily="34" charset="0"/>
-                <a:ea typeface="Arial" pitchFamily="34" charset="-122"/>
-                <a:cs typeface="Arial" pitchFamily="34" charset="-120"/>
+                <a:latin typeface="Golos Text" pitchFamily="34" charset="0"/>
+                <a:ea typeface="Golos Text" pitchFamily="34" charset="-122"/>
+                <a:cs typeface="Golos Text" pitchFamily="34" charset="-120"/>
               </a:rPr>
               <a:t>пишем, сколько ночей осталось; ИИ следит за качеством сигнала и готовит врачу черновик заключения</a:t>
             </a:r>
@@ -3540,10 +3508,6 @@
             </a:outerShdw>
           </a:effectLst>
         </p:spPr>
-        <p:txBody>
-          <a:bodyPr/>
-          <a:p/>
-        </p:txBody>
       </p:sp>
       <p:pic>
         <p:nvPicPr>
@@ -3608,7 +3572,7 @@
         </p:nvSpPr>
         <p:spPr>
           <a:xfrm>
-            <a:off x="1047750" y="2461320"/>
+            <a:off x="1047750" y="2444651"/>
             <a:ext cx="17811750" cy="618158"/>
           </a:xfrm>
           <a:prstGeom prst="rect">
@@ -3625,7 +3589,7 @@
           <a:p>
             <a:pPr algn="l" indent="0" marL="0">
               <a:lnSpc>
-                <a:spcPct val="90896"/>
+                <a:spcPct val="87000"/>
               </a:lnSpc>
               <a:buNone/>
             </a:pPr>
@@ -3634,9 +3598,9 @@
                 <a:solidFill>
                   <a:srgbClr val="16232B"/>
                 </a:solidFill>
-                <a:latin typeface="Arial" pitchFamily="34" charset="0"/>
-                <a:ea typeface="Arial" pitchFamily="34" charset="-122"/>
-                <a:cs typeface="Arial" pitchFamily="34" charset="-120"/>
+                <a:latin typeface="Golos Text" pitchFamily="34" charset="0"/>
+                <a:ea typeface="Golos Text" pitchFamily="34" charset="-122"/>
+                <a:cs typeface="Golos Text" pitchFamily="34" charset="-120"/>
               </a:rPr>
               <a:t>Рабочее место врача — не добавить работы</a:t>
             </a:r>
@@ -3652,12 +3616,12 @@
         </p:nvSpPr>
         <p:spPr>
           <a:xfrm>
-            <a:off x="1047750" y="3498577"/>
-            <a:ext cx="16192500" cy="4327029"/>
+            <a:off x="1047750" y="3481908"/>
+            <a:ext cx="16192500" cy="4360366"/>
           </a:xfrm>
           <a:prstGeom prst="roundRect">
             <a:avLst>
-              <a:gd name="adj" fmla="val 4403"/>
+              <a:gd name="adj" fmla="val 4369"/>
             </a:avLst>
           </a:prstGeom>
           <a:solidFill>
@@ -3677,10 +3641,6 @@
             </a:outerShdw>
           </a:effectLst>
         </p:spPr>
-        <p:txBody>
-          <a:bodyPr/>
-          <a:p/>
-        </p:txBody>
       </p:sp>
       <p:sp>
         <p:nvSpPr>
@@ -3690,8 +3650,8 @@
         </p:nvSpPr>
         <p:spPr>
           <a:xfrm>
-            <a:off x="1057275" y="3508102"/>
-            <a:ext cx="16173450" cy="742950"/>
+            <a:off x="1057275" y="3491433"/>
+            <a:ext cx="16173450" cy="752475"/>
           </a:xfrm>
           <a:prstGeom prst="rect">
             <a:avLst/>
@@ -3701,10 +3661,6 @@
           </a:solidFill>
           <a:ln/>
         </p:spPr>
-        <p:txBody>
-          <a:bodyPr/>
-          <a:p/>
-        </p:txBody>
       </p:sp>
       <p:sp>
         <p:nvSpPr>
@@ -3714,8 +3670,8 @@
         </p:nvSpPr>
         <p:spPr>
           <a:xfrm>
-            <a:off x="1400175" y="3736702"/>
-            <a:ext cx="1502785" cy="323850"/>
+            <a:off x="1400175" y="3720033"/>
+            <a:ext cx="1526523" cy="333375"/>
           </a:xfrm>
           <a:prstGeom prst="rect">
             <a:avLst/>
@@ -3737,9 +3693,9 @@
                 <a:solidFill>
                   <a:srgbClr val="FFFFFF"/>
                 </a:solidFill>
-                <a:latin typeface="Arial" pitchFamily="34" charset="0"/>
-                <a:ea typeface="Arial" pitchFamily="34" charset="-122"/>
-                <a:cs typeface="Arial" pitchFamily="34" charset="-120"/>
+                <a:latin typeface="Golos Text" pitchFamily="34" charset="0"/>
+                <a:ea typeface="Golos Text" pitchFamily="34" charset="-122"/>
+                <a:cs typeface="Golos Text" pitchFamily="34" charset="-120"/>
               </a:rPr>
               <a:t>DAMUMED</a:t>
             </a:r>
@@ -3755,7 +3711,7 @@
         </p:nvSpPr>
         <p:spPr>
           <a:xfrm>
-            <a:off x="2956843" y="3741465"/>
+            <a:off x="2978423" y="3729558"/>
             <a:ext cx="7812941" cy="314325"/>
           </a:xfrm>
           <a:prstGeom prst="rect">
@@ -3778,9 +3734,9 @@
                 <a:solidFill>
                   <a:srgbClr val="CFE7DB"/>
                 </a:solidFill>
-                <a:latin typeface="Arial" pitchFamily="34" charset="0"/>
-                <a:ea typeface="Arial" pitchFamily="34" charset="-122"/>
-                <a:cs typeface="Arial" pitchFamily="34" charset="-120"/>
+                <a:latin typeface="Golos Text" pitchFamily="34" charset="0"/>
+                <a:ea typeface="Golos Text" pitchFamily="34" charset="-122"/>
+                <a:cs typeface="Golos Text" pitchFamily="34" charset="-120"/>
               </a:rPr>
               <a:t>Дистанционное наблюдение · 143 пациента · тревог за сутки: 3</a:t>
             </a:r>
@@ -3796,8 +3752,8 @@
         </p:nvSpPr>
         <p:spPr>
           <a:xfrm>
-            <a:off x="1057275" y="4251052"/>
-            <a:ext cx="16173450" cy="652463"/>
+            <a:off x="1057275" y="4243908"/>
+            <a:ext cx="16173450" cy="666750"/>
           </a:xfrm>
           <a:prstGeom prst="rect">
             <a:avLst/>
@@ -3807,10 +3763,6 @@
           </a:solidFill>
           <a:ln/>
         </p:spPr>
-        <p:txBody>
-          <a:bodyPr/>
-          <a:p/>
-        </p:txBody>
       </p:sp>
       <p:sp>
         <p:nvSpPr>
@@ -3820,7 +3772,7 @@
         </p:nvSpPr>
         <p:spPr>
           <a:xfrm>
-            <a:off x="1057275" y="4893990"/>
+            <a:off x="1057275" y="4901133"/>
             <a:ext cx="16173450" cy="9525"/>
           </a:xfrm>
           <a:prstGeom prst="rect">
@@ -3831,10 +3783,6 @@
           </a:solidFill>
           <a:ln/>
         </p:spPr>
-        <p:txBody>
-          <a:bodyPr/>
-          <a:p/>
-        </p:txBody>
       </p:sp>
       <p:sp>
         <p:nvSpPr>
@@ -3844,8 +3792,8 @@
         </p:nvSpPr>
         <p:spPr>
           <a:xfrm>
-            <a:off x="1400175" y="4441552"/>
-            <a:ext cx="4439934" cy="300038"/>
+            <a:off x="1400175" y="4434408"/>
+            <a:ext cx="4439934" cy="314325"/>
           </a:xfrm>
           <a:prstGeom prst="rect">
             <a:avLst/>
@@ -3867,9 +3815,9 @@
                 <a:solidFill>
                   <a:srgbClr val="7B8C82"/>
                 </a:solidFill>
-                <a:latin typeface="Arial" pitchFamily="34" charset="0"/>
-                <a:ea typeface="Arial" pitchFamily="34" charset="-122"/>
-                <a:cs typeface="Arial" pitchFamily="34" charset="-120"/>
+                <a:latin typeface="Golos Text" pitchFamily="34" charset="0"/>
+                <a:ea typeface="Golos Text" pitchFamily="34" charset="-122"/>
+                <a:cs typeface="Golos Text" pitchFamily="34" charset="-120"/>
               </a:rPr>
               <a:t>Пациент</a:t>
             </a:r>
@@ -3885,8 +3833,8 @@
         </p:nvSpPr>
         <p:spPr>
           <a:xfrm>
-            <a:off x="6224215" y="4441552"/>
-            <a:ext cx="2822593" cy="300038"/>
+            <a:off x="6224215" y="4434408"/>
+            <a:ext cx="2822593" cy="314325"/>
           </a:xfrm>
           <a:prstGeom prst="rect">
             <a:avLst/>
@@ -3908,9 +3856,9 @@
                 <a:solidFill>
                   <a:srgbClr val="7B8C82"/>
                 </a:solidFill>
-                <a:latin typeface="Arial" pitchFamily="34" charset="0"/>
-                <a:ea typeface="Arial" pitchFamily="34" charset="-122"/>
-                <a:cs typeface="Arial" pitchFamily="34" charset="-120"/>
+                <a:latin typeface="Golos Text" pitchFamily="34" charset="0"/>
+                <a:ea typeface="Golos Text" pitchFamily="34" charset="-122"/>
+                <a:cs typeface="Golos Text" pitchFamily="34" charset="-120"/>
               </a:rPr>
               <a:t>Диагноз</a:t>
             </a:r>
@@ -3926,8 +3874,8 @@
         </p:nvSpPr>
         <p:spPr>
           <a:xfrm>
-            <a:off x="9334500" y="4441552"/>
-            <a:ext cx="2822516" cy="300038"/>
+            <a:off x="9334500" y="4434408"/>
+            <a:ext cx="2822516" cy="314325"/>
           </a:xfrm>
           <a:prstGeom prst="rect">
             <a:avLst/>
@@ -3949,9 +3897,9 @@
                 <a:solidFill>
                   <a:srgbClr val="7B8C82"/>
                 </a:solidFill>
-                <a:latin typeface="Arial" pitchFamily="34" charset="0"/>
-                <a:ea typeface="Arial" pitchFamily="34" charset="-122"/>
-                <a:cs typeface="Arial" pitchFamily="34" charset="-120"/>
+                <a:latin typeface="Golos Text" pitchFamily="34" charset="0"/>
+                <a:ea typeface="Golos Text" pitchFamily="34" charset="-122"/>
+                <a:cs typeface="Golos Text" pitchFamily="34" charset="-120"/>
               </a:rPr>
               <a:t>Состояние</a:t>
             </a:r>
@@ -3967,8 +3915,8 @@
         </p:nvSpPr>
         <p:spPr>
           <a:xfrm>
-            <a:off x="12444710" y="4441552"/>
-            <a:ext cx="4744810" cy="300038"/>
+            <a:off x="12444710" y="4434408"/>
+            <a:ext cx="4744810" cy="314325"/>
           </a:xfrm>
           <a:prstGeom prst="rect">
             <a:avLst/>
@@ -3990,9 +3938,9 @@
                 <a:solidFill>
                   <a:srgbClr val="7B8C82"/>
                 </a:solidFill>
-                <a:latin typeface="Arial" pitchFamily="34" charset="0"/>
-                <a:ea typeface="Arial" pitchFamily="34" charset="-122"/>
-                <a:cs typeface="Arial" pitchFamily="34" charset="-120"/>
+                <a:latin typeface="Golos Text" pitchFamily="34" charset="0"/>
+                <a:ea typeface="Golos Text" pitchFamily="34" charset="-122"/>
+                <a:cs typeface="Golos Text" pitchFamily="34" charset="-120"/>
               </a:rPr>
               <a:t>Что произошло</a:t>
             </a:r>
@@ -4008,7 +3956,7 @@
         </p:nvSpPr>
         <p:spPr>
           <a:xfrm>
-            <a:off x="1057275" y="4903515"/>
+            <a:off x="1057275" y="4910658"/>
             <a:ext cx="16173450" cy="1070521"/>
           </a:xfrm>
           <a:prstGeom prst="rect">
@@ -4019,10 +3967,6 @@
           </a:solidFill>
           <a:ln/>
         </p:spPr>
-        <p:txBody>
-          <a:bodyPr/>
-          <a:p/>
-        </p:txBody>
       </p:sp>
       <p:sp>
         <p:nvSpPr>
@@ -4032,7 +3976,7 @@
         </p:nvSpPr>
         <p:spPr>
           <a:xfrm>
-            <a:off x="1057275" y="5964510"/>
+            <a:off x="1057275" y="5971654"/>
             <a:ext cx="16173450" cy="9525"/>
           </a:xfrm>
           <a:prstGeom prst="rect">
@@ -4043,10 +3987,6 @@
           </a:solidFill>
           <a:ln/>
         </p:spPr>
-        <p:txBody>
-          <a:bodyPr/>
-          <a:p/>
-        </p:txBody>
       </p:sp>
       <p:sp>
         <p:nvSpPr>
@@ -4056,8 +3996,8 @@
         </p:nvSpPr>
         <p:spPr>
           <a:xfrm>
-            <a:off x="1400175" y="5295900"/>
-            <a:ext cx="4439934" cy="314325"/>
+            <a:off x="1400175" y="5298281"/>
+            <a:ext cx="4439934" cy="323850"/>
           </a:xfrm>
           <a:prstGeom prst="rect">
             <a:avLst/>
@@ -4079,9 +4019,9 @@
                 <a:solidFill>
                   <a:srgbClr val="16232B"/>
                 </a:solidFill>
-                <a:latin typeface="Arial" pitchFamily="34" charset="0"/>
-                <a:ea typeface="Arial" pitchFamily="34" charset="-122"/>
-                <a:cs typeface="Arial" pitchFamily="34" charset="-120"/>
+                <a:latin typeface="Golos Text" pitchFamily="34" charset="0"/>
+                <a:ea typeface="Golos Text" pitchFamily="34" charset="-122"/>
+                <a:cs typeface="Golos Text" pitchFamily="34" charset="-120"/>
               </a:rPr>
               <a:t>Абенова Г. К.</a:t>
             </a:r>
@@ -4097,7 +4037,7 @@
         </p:nvSpPr>
         <p:spPr>
           <a:xfrm>
-            <a:off x="6224215" y="5303044"/>
+            <a:off x="6224215" y="5310187"/>
             <a:ext cx="2822593" cy="300038"/>
           </a:xfrm>
           <a:prstGeom prst="rect">
@@ -4120,9 +4060,9 @@
                 <a:solidFill>
                   <a:srgbClr val="42504A"/>
                 </a:solidFill>
-                <a:latin typeface="Arial" pitchFamily="34" charset="0"/>
-                <a:ea typeface="Arial" pitchFamily="34" charset="-122"/>
-                <a:cs typeface="Arial" pitchFamily="34" charset="-120"/>
+                <a:latin typeface="Golos Text" pitchFamily="34" charset="0"/>
+                <a:ea typeface="Golos Text" pitchFamily="34" charset="-122"/>
+                <a:cs typeface="Golos Text" pitchFamily="34" charset="-120"/>
               </a:rPr>
               <a:t>ХСН IIБ</a:t>
             </a:r>
@@ -4139,7 +4079,7 @@
         <p:spPr>
           <a:xfrm>
             <a:off x="9334500" y="5269706"/>
-            <a:ext cx="1239441" cy="323850"/>
+            <a:ext cx="1321743" cy="342900"/>
           </a:xfrm>
           <a:prstGeom prst="roundRect">
             <a:avLst>
@@ -4151,10 +4091,6 @@
           </a:solidFill>
           <a:ln/>
         </p:spPr>
-        <p:txBody>
-          <a:bodyPr/>
-          <a:p/>
-        </p:txBody>
       </p:sp>
       <p:sp>
         <p:nvSpPr>
@@ -4165,7 +4101,7 @@
         <p:spPr>
           <a:xfrm>
             <a:off x="9486900" y="5326856"/>
-            <a:ext cx="1010841" cy="247650"/>
+            <a:ext cx="1093143" cy="266700"/>
           </a:xfrm>
           <a:prstGeom prst="rect">
             <a:avLst/>
@@ -4187,9 +4123,9 @@
                 <a:solidFill>
                   <a:srgbClr val="C0453C"/>
                 </a:solidFill>
-                <a:latin typeface="Arial" pitchFamily="34" charset="0"/>
-                <a:ea typeface="Arial" pitchFamily="34" charset="-122"/>
-                <a:cs typeface="Arial" pitchFamily="34" charset="-120"/>
+                <a:latin typeface="Golos Text" pitchFamily="34" charset="0"/>
+                <a:ea typeface="Golos Text" pitchFamily="34" charset="-122"/>
+                <a:cs typeface="Golos Text" pitchFamily="34" charset="-120"/>
               </a:rPr>
               <a:t>● Красный</a:t>
             </a:r>
@@ -4205,7 +4141,7 @@
         </p:nvSpPr>
         <p:spPr>
           <a:xfrm>
-            <a:off x="12444710" y="5151165"/>
+            <a:off x="12444710" y="5158308"/>
             <a:ext cx="4744810" cy="603796"/>
           </a:xfrm>
           <a:prstGeom prst="rect">
@@ -4222,7 +4158,7 @@
           <a:p>
             <a:pPr algn="l" indent="0" marL="0">
               <a:lnSpc>
-                <a:spcPct val="118800"/>
+                <a:spcPct val="112075"/>
               </a:lnSpc>
               <a:buNone/>
             </a:pPr>
@@ -4231,9 +4167,9 @@
                 <a:solidFill>
                   <a:srgbClr val="42504A"/>
                 </a:solidFill>
-                <a:latin typeface="Arial" pitchFamily="34" charset="0"/>
-                <a:ea typeface="Arial" pitchFamily="34" charset="-122"/>
-                <a:cs typeface="Arial" pitchFamily="34" charset="-120"/>
+                <a:latin typeface="Golos Text" pitchFamily="34" charset="0"/>
+                <a:ea typeface="Golos Text" pitchFamily="34" charset="-122"/>
+                <a:cs typeface="Golos Text" pitchFamily="34" charset="-120"/>
               </a:rPr>
               <a:t>Вес +2,3 кг за 3 дня, ночной пульс 74 при коридоре 58–66</a:t>
             </a:r>
@@ -4249,7 +4185,7 @@
         </p:nvSpPr>
         <p:spPr>
           <a:xfrm>
-            <a:off x="1057275" y="7035031"/>
+            <a:off x="1057275" y="7042175"/>
             <a:ext cx="16173450" cy="9525"/>
           </a:xfrm>
           <a:prstGeom prst="rect">
@@ -4260,10 +4196,6 @@
           </a:solidFill>
           <a:ln/>
         </p:spPr>
-        <p:txBody>
-          <a:bodyPr/>
-          <a:p/>
-        </p:txBody>
       </p:sp>
       <p:sp>
         <p:nvSpPr>
@@ -4273,8 +4205,8 @@
         </p:nvSpPr>
         <p:spPr>
           <a:xfrm>
-            <a:off x="1400175" y="6366421"/>
-            <a:ext cx="4439934" cy="314325"/>
+            <a:off x="1400175" y="6368802"/>
+            <a:ext cx="4439934" cy="323850"/>
           </a:xfrm>
           <a:prstGeom prst="rect">
             <a:avLst/>
@@ -4296,9 +4228,9 @@
                 <a:solidFill>
                   <a:srgbClr val="16232B"/>
                 </a:solidFill>
-                <a:latin typeface="Arial" pitchFamily="34" charset="0"/>
-                <a:ea typeface="Arial" pitchFamily="34" charset="-122"/>
-                <a:cs typeface="Arial" pitchFamily="34" charset="-120"/>
+                <a:latin typeface="Golos Text" pitchFamily="34" charset="0"/>
+                <a:ea typeface="Golos Text" pitchFamily="34" charset="-122"/>
+                <a:cs typeface="Golos Text" pitchFamily="34" charset="-120"/>
               </a:rPr>
               <a:t>Кимова А. С.</a:t>
             </a:r>
@@ -4314,7 +4246,7 @@
         </p:nvSpPr>
         <p:spPr>
           <a:xfrm>
-            <a:off x="6224215" y="6373564"/>
+            <a:off x="6224215" y="6380708"/>
             <a:ext cx="2822593" cy="300038"/>
           </a:xfrm>
           <a:prstGeom prst="rect">
@@ -4337,9 +4269,9 @@
                 <a:solidFill>
                   <a:srgbClr val="42504A"/>
                 </a:solidFill>
-                <a:latin typeface="Arial" pitchFamily="34" charset="0"/>
-                <a:ea typeface="Arial" pitchFamily="34" charset="-122"/>
-                <a:cs typeface="Arial" pitchFamily="34" charset="-120"/>
+                <a:latin typeface="Golos Text" pitchFamily="34" charset="0"/>
+                <a:ea typeface="Golos Text" pitchFamily="34" charset="-122"/>
+                <a:cs typeface="Golos Text" pitchFamily="34" charset="-120"/>
               </a:rPr>
               <a:t>АГ II, 68 лет</a:t>
             </a:r>
@@ -4356,7 +4288,7 @@
         <p:spPr>
           <a:xfrm>
             <a:off x="9334500" y="6340227"/>
-            <a:ext cx="1196429" cy="323850"/>
+            <a:ext cx="1241971" cy="342900"/>
           </a:xfrm>
           <a:prstGeom prst="roundRect">
             <a:avLst>
@@ -4368,10 +4300,6 @@
           </a:solidFill>
           <a:ln/>
         </p:spPr>
-        <p:txBody>
-          <a:bodyPr/>
-          <a:p/>
-        </p:txBody>
       </p:sp>
       <p:sp>
         <p:nvSpPr>
@@ -4382,7 +4310,7 @@
         <p:spPr>
           <a:xfrm>
             <a:off x="9486900" y="6397377"/>
-            <a:ext cx="967829" cy="247650"/>
+            <a:ext cx="1013371" cy="266700"/>
           </a:xfrm>
           <a:prstGeom prst="rect">
             <a:avLst/>
@@ -4404,9 +4332,9 @@
                 <a:solidFill>
                   <a:srgbClr val="A87718"/>
                 </a:solidFill>
-                <a:latin typeface="Arial" pitchFamily="34" charset="0"/>
-                <a:ea typeface="Arial" pitchFamily="34" charset="-122"/>
-                <a:cs typeface="Arial" pitchFamily="34" charset="-120"/>
+                <a:latin typeface="Golos Text" pitchFamily="34" charset="0"/>
+                <a:ea typeface="Golos Text" pitchFamily="34" charset="-122"/>
+                <a:cs typeface="Golos Text" pitchFamily="34" charset="-120"/>
               </a:rPr>
               <a:t>● Жёлтый</a:t>
             </a:r>
@@ -4422,7 +4350,7 @@
         </p:nvSpPr>
         <p:spPr>
           <a:xfrm>
-            <a:off x="12444710" y="6221685"/>
+            <a:off x="12444710" y="6228829"/>
             <a:ext cx="4744810" cy="603796"/>
           </a:xfrm>
           <a:prstGeom prst="rect">
@@ -4439,7 +4367,7 @@
           <a:p>
             <a:pPr algn="l" indent="0" marL="0">
               <a:lnSpc>
-                <a:spcPct val="118800"/>
+                <a:spcPct val="112075"/>
               </a:lnSpc>
               <a:buNone/>
             </a:pPr>
@@ -4448,9 +4376,9 @@
                 <a:solidFill>
                   <a:srgbClr val="42504A"/>
                 </a:solidFill>
-                <a:latin typeface="Arial" pitchFamily="34" charset="0"/>
-                <a:ea typeface="Arial" pitchFamily="34" charset="-122"/>
-                <a:cs typeface="Arial" pitchFamily="34" charset="-120"/>
+                <a:latin typeface="Golos Text" pitchFamily="34" charset="0"/>
+                <a:ea typeface="Golos Text" pitchFamily="34" charset="-122"/>
+                <a:cs typeface="Golos Text" pitchFamily="34" charset="-120"/>
               </a:rPr>
               <a:t>Два эпизода нерегулярного ритма за неделю</a:t>
             </a:r>
@@ -4466,8 +4394,8 @@
         </p:nvSpPr>
         <p:spPr>
           <a:xfrm>
-            <a:off x="1400175" y="7292206"/>
-            <a:ext cx="4439934" cy="314325"/>
+            <a:off x="1400175" y="7299350"/>
+            <a:ext cx="4439934" cy="323850"/>
           </a:xfrm>
           <a:prstGeom prst="rect">
             <a:avLst/>
@@ -4489,9 +4417,9 @@
                 <a:solidFill>
                   <a:srgbClr val="7B8C82"/>
                 </a:solidFill>
-                <a:latin typeface="Arial" pitchFamily="34" charset="0"/>
-                <a:ea typeface="Arial" pitchFamily="34" charset="-122"/>
-                <a:cs typeface="Arial" pitchFamily="34" charset="-120"/>
+                <a:latin typeface="Golos Text" pitchFamily="34" charset="0"/>
+                <a:ea typeface="Golos Text" pitchFamily="34" charset="-122"/>
+                <a:cs typeface="Golos Text" pitchFamily="34" charset="-120"/>
               </a:rPr>
               <a:t>Остальные 140</a:t>
             </a:r>
@@ -4507,7 +4435,7 @@
         </p:nvSpPr>
         <p:spPr>
           <a:xfrm>
-            <a:off x="6224215" y="7299350"/>
+            <a:off x="6224215" y="7311256"/>
             <a:ext cx="2822593" cy="300038"/>
           </a:xfrm>
           <a:prstGeom prst="rect">
@@ -4530,9 +4458,9 @@
                 <a:solidFill>
                   <a:srgbClr val="7B8C82"/>
                 </a:solidFill>
-                <a:latin typeface="Arial" pitchFamily="34" charset="0"/>
-                <a:ea typeface="Arial" pitchFamily="34" charset="-122"/>
-                <a:cs typeface="Arial" pitchFamily="34" charset="-120"/>
+                <a:latin typeface="Golos Text" pitchFamily="34" charset="0"/>
+                <a:ea typeface="Golos Text" pitchFamily="34" charset="-122"/>
+                <a:cs typeface="Golos Text" pitchFamily="34" charset="-120"/>
               </a:rPr>
               <a:t>ХСН · АГ · СД2</a:t>
             </a:r>
@@ -4548,8 +4476,8 @@
         </p:nvSpPr>
         <p:spPr>
           <a:xfrm>
-            <a:off x="9334500" y="7266012"/>
-            <a:ext cx="1253133" cy="323850"/>
+            <a:off x="9334500" y="7270775"/>
+            <a:ext cx="1308199" cy="342900"/>
           </a:xfrm>
           <a:prstGeom prst="roundRect">
             <a:avLst>
@@ -4561,10 +4489,6 @@
           </a:solidFill>
           <a:ln/>
         </p:spPr>
-        <p:txBody>
-          <a:bodyPr/>
-          <a:p/>
-        </p:txBody>
       </p:sp>
       <p:sp>
         <p:nvSpPr>
@@ -4574,8 +4498,8 @@
         </p:nvSpPr>
         <p:spPr>
           <a:xfrm>
-            <a:off x="9486900" y="7323162"/>
-            <a:ext cx="1024533" cy="247650"/>
+            <a:off x="9486900" y="7327925"/>
+            <a:ext cx="1079599" cy="266700"/>
           </a:xfrm>
           <a:prstGeom prst="rect">
             <a:avLst/>
@@ -4597,9 +4521,9 @@
                 <a:solidFill>
                   <a:srgbClr val="0E7A50"/>
                 </a:solidFill>
-                <a:latin typeface="Arial" pitchFamily="34" charset="0"/>
-                <a:ea typeface="Arial" pitchFamily="34" charset="-122"/>
-                <a:cs typeface="Arial" pitchFamily="34" charset="-120"/>
+                <a:latin typeface="Golos Text" pitchFamily="34" charset="0"/>
+                <a:ea typeface="Golos Text" pitchFamily="34" charset="-122"/>
+                <a:cs typeface="Golos Text" pitchFamily="34" charset="-120"/>
               </a:rPr>
               <a:t>● Зелёный</a:t>
             </a:r>
@@ -4615,7 +4539,7 @@
         </p:nvSpPr>
         <p:spPr>
           <a:xfrm>
-            <a:off x="12444710" y="7304112"/>
+            <a:off x="12444710" y="7316019"/>
             <a:ext cx="4744810" cy="290513"/>
           </a:xfrm>
           <a:prstGeom prst="rect">
@@ -4638,9 +4562,9 @@
                 <a:solidFill>
                   <a:srgbClr val="7B8C82"/>
                 </a:solidFill>
-                <a:latin typeface="Arial" pitchFamily="34" charset="0"/>
-                <a:ea typeface="Arial" pitchFamily="34" charset="-122"/>
-                <a:cs typeface="Arial" pitchFamily="34" charset="-120"/>
+                <a:latin typeface="Golos Text" pitchFamily="34" charset="0"/>
+                <a:ea typeface="Golos Text" pitchFamily="34" charset="-122"/>
+                <a:cs typeface="Golos Text" pitchFamily="34" charset="-120"/>
               </a:rPr>
               <a:t>Без отклонений — не требуют действий</a:t>
             </a:r>
@@ -4688,12 +4612,12 @@
         </p:nvSpPr>
         <p:spPr>
           <a:xfrm>
-            <a:off x="1047750" y="1930747"/>
-            <a:ext cx="3109913" cy="414338"/>
+            <a:off x="1047750" y="1911697"/>
+            <a:ext cx="3303612" cy="428625"/>
           </a:xfrm>
           <a:prstGeom prst="roundRect">
             <a:avLst>
-              <a:gd name="adj" fmla="val 22988"/>
+              <a:gd name="adj" fmla="val 22222"/>
             </a:avLst>
           </a:prstGeom>
           <a:solidFill>
@@ -4701,10 +4625,6 @@
           </a:solidFill>
           <a:ln/>
         </p:spPr>
-        <p:txBody>
-          <a:bodyPr/>
-          <a:p/>
-        </p:txBody>
       </p:sp>
       <p:sp>
         <p:nvSpPr>
@@ -4714,8 +4634,8 @@
         </p:nvSpPr>
         <p:spPr>
           <a:xfrm>
-            <a:off x="1219200" y="2006947"/>
-            <a:ext cx="2860310" cy="300038"/>
+            <a:off x="1219200" y="1987897"/>
+            <a:ext cx="3059821" cy="314325"/>
           </a:xfrm>
           <a:prstGeom prst="rect">
             <a:avLst/>
@@ -4737,9 +4657,9 @@
                 <a:solidFill>
                   <a:srgbClr val="0E7A50"/>
                 </a:solidFill>
-                <a:latin typeface="Arial" pitchFamily="34" charset="0"/>
-                <a:ea typeface="Arial" pitchFamily="34" charset="-122"/>
-                <a:cs typeface="Arial" pitchFamily="34" charset="-120"/>
+                <a:latin typeface="Golos Text" pitchFamily="34" charset="0"/>
+                <a:ea typeface="Golos Text" pitchFamily="34" charset="-122"/>
+                <a:cs typeface="Golos Text" pitchFamily="34" charset="-120"/>
               </a:rPr>
               <a:t>Раздел 07 · Производство</a:t>
             </a:r>
@@ -4755,7 +4675,7 @@
         </p:nvSpPr>
         <p:spPr>
           <a:xfrm>
-            <a:off x="1047750" y="2573685"/>
+            <a:off x="1047750" y="2568922"/>
             <a:ext cx="17811750" cy="658118"/>
           </a:xfrm>
           <a:prstGeom prst="rect">
@@ -4772,7 +4692,7 @@
           <a:p>
             <a:pPr algn="l" indent="0" marL="0">
               <a:lnSpc>
-                <a:spcPct val="91690"/>
+                <a:spcPct val="87383"/>
               </a:lnSpc>
               <a:buNone/>
             </a:pPr>
@@ -4781,9 +4701,9 @@
                 <a:solidFill>
                   <a:srgbClr val="16232B"/>
                 </a:solidFill>
-                <a:latin typeface="Arial" pitchFamily="34" charset="0"/>
-                <a:ea typeface="Arial" pitchFamily="34" charset="-122"/>
-                <a:cs typeface="Arial" pitchFamily="34" charset="-120"/>
+                <a:latin typeface="Golos Text" pitchFamily="34" charset="0"/>
+                <a:ea typeface="Golos Text" pitchFamily="34" charset="-122"/>
+                <a:cs typeface="Golos Text" pitchFamily="34" charset="-120"/>
               </a:rPr>
               <a:t>Решает доступ к данным, не цена</a:t>
             </a:r>
@@ -4799,12 +4719,12 @@
         </p:nvSpPr>
         <p:spPr>
           <a:xfrm>
-            <a:off x="1047750" y="3727103"/>
-            <a:ext cx="5219700" cy="3533775"/>
+            <a:off x="1047750" y="3722340"/>
+            <a:ext cx="5219700" cy="3557588"/>
           </a:xfrm>
           <a:prstGeom prst="roundRect">
             <a:avLst>
-              <a:gd name="adj" fmla="val 5391"/>
+              <a:gd name="adj" fmla="val 5355"/>
             </a:avLst>
           </a:prstGeom>
           <a:solidFill>
@@ -4812,10 +4732,6 @@
           </a:solidFill>
           <a:ln/>
         </p:spPr>
-        <p:txBody>
-          <a:bodyPr/>
-          <a:p/>
-        </p:txBody>
       </p:sp>
       <p:sp>
         <p:nvSpPr>
@@ -4825,8 +4741,8 @@
         </p:nvSpPr>
         <p:spPr>
           <a:xfrm>
-            <a:off x="1485900" y="4146203"/>
-            <a:ext cx="4777740" cy="476250"/>
+            <a:off x="1485900" y="4141440"/>
+            <a:ext cx="4777740" cy="495300"/>
           </a:xfrm>
           <a:prstGeom prst="rect">
             <a:avLst/>
@@ -4848,9 +4764,9 @@
                 <a:solidFill>
                   <a:srgbClr val="FFFFFF"/>
                 </a:solidFill>
-                <a:latin typeface="Arial" pitchFamily="34" charset="0"/>
-                <a:ea typeface="Arial" pitchFamily="34" charset="-122"/>
-                <a:cs typeface="Arial" pitchFamily="34" charset="-120"/>
+                <a:latin typeface="Golos Text" pitchFamily="34" charset="0"/>
+                <a:ea typeface="Golos Text" pitchFamily="34" charset="-122"/>
+                <a:cs typeface="Golos Text" pitchFamily="34" charset="-120"/>
               </a:rPr>
               <a:t>J-Style</a:t>
             </a:r>
@@ -4866,7 +4782,7 @@
         </p:nvSpPr>
         <p:spPr>
           <a:xfrm>
-            <a:off x="1485900" y="4622453"/>
+            <a:off x="1485900" y="4636740"/>
             <a:ext cx="4777740" cy="314325"/>
           </a:xfrm>
           <a:prstGeom prst="rect">
@@ -4889,9 +4805,9 @@
                 <a:solidFill>
                   <a:srgbClr val="8FBBA3"/>
                 </a:solidFill>
-                <a:latin typeface="Arial" pitchFamily="34" charset="0"/>
-                <a:ea typeface="Arial" pitchFamily="34" charset="-122"/>
-                <a:cs typeface="Arial" pitchFamily="34" charset="-120"/>
+                <a:latin typeface="Golos Text" pitchFamily="34" charset="0"/>
+                <a:ea typeface="Golos Text" pitchFamily="34" charset="-122"/>
+                <a:cs typeface="Golos Text" pitchFamily="34" charset="-120"/>
               </a:rPr>
               <a:t>Shenzhen Youhong Medical</a:t>
             </a:r>
@@ -4907,8 +4823,8 @@
         </p:nvSpPr>
         <p:spPr>
           <a:xfrm>
-            <a:off x="1485900" y="5146328"/>
-            <a:ext cx="4777740" cy="304800"/>
+            <a:off x="1485900" y="5160615"/>
+            <a:ext cx="4777740" cy="300038"/>
           </a:xfrm>
           <a:prstGeom prst="rect">
             <a:avLst/>
@@ -4930,9 +4846,9 @@
                 <a:solidFill>
                   <a:srgbClr val="CFE7DB"/>
                 </a:solidFill>
-                <a:latin typeface="Arial" pitchFamily="34" charset="0"/>
-                <a:ea typeface="Arial" pitchFamily="34" charset="-122"/>
-                <a:cs typeface="Arial" pitchFamily="34" charset="-120"/>
+                <a:latin typeface="Golos Text" pitchFamily="34" charset="0"/>
+                <a:ea typeface="Golos Text" pitchFamily="34" charset="-122"/>
+                <a:cs typeface="Golos Text" pitchFamily="34" charset="-120"/>
               </a:rPr>
               <a:t>Мин. партия · </a:t>
             </a:r>
@@ -4944,9 +4860,9 @@
                 <a:solidFill>
                   <a:srgbClr val="FFFFFF"/>
                 </a:solidFill>
-                <a:latin typeface="Arial" pitchFamily="34" charset="0"/>
-                <a:ea typeface="Arial" pitchFamily="34" charset="-122"/>
-                <a:cs typeface="Arial" pitchFamily="34" charset="-120"/>
+                <a:latin typeface="Golos Text" pitchFamily="34" charset="0"/>
+                <a:ea typeface="Golos Text" pitchFamily="34" charset="-122"/>
+                <a:cs typeface="Golos Text" pitchFamily="34" charset="-120"/>
               </a:rPr>
               <a:t>2 000</a:t>
             </a:r>
@@ -4962,8 +4878,8 @@
         </p:nvSpPr>
         <p:spPr>
           <a:xfrm>
-            <a:off x="1485900" y="5527328"/>
-            <a:ext cx="4777740" cy="304800"/>
+            <a:off x="1485900" y="5536853"/>
+            <a:ext cx="4777740" cy="300038"/>
           </a:xfrm>
           <a:prstGeom prst="rect">
             <a:avLst/>
@@ -4985,9 +4901,9 @@
                 <a:solidFill>
                   <a:srgbClr val="CFE7DB"/>
                 </a:solidFill>
-                <a:latin typeface="Arial" pitchFamily="34" charset="0"/>
-                <a:ea typeface="Arial" pitchFamily="34" charset="-122"/>
-                <a:cs typeface="Arial" pitchFamily="34" charset="-120"/>
+                <a:latin typeface="Golos Text" pitchFamily="34" charset="0"/>
+                <a:ea typeface="Golos Text" pitchFamily="34" charset="-122"/>
+                <a:cs typeface="Golos Text" pitchFamily="34" charset="-120"/>
               </a:rPr>
               <a:t>ISO 13485 · </a:t>
             </a:r>
@@ -4999,9 +4915,9 @@
                 <a:solidFill>
                   <a:srgbClr val="3ECF8E"/>
                 </a:solidFill>
-                <a:latin typeface="Arial" pitchFamily="34" charset="0"/>
-                <a:ea typeface="Arial" pitchFamily="34" charset="-122"/>
-                <a:cs typeface="Arial" pitchFamily="34" charset="-120"/>
+                <a:latin typeface="Golos Text" pitchFamily="34" charset="0"/>
+                <a:ea typeface="Golos Text" pitchFamily="34" charset="-122"/>
+                <a:cs typeface="Golos Text" pitchFamily="34" charset="-120"/>
               </a:rPr>
               <a:t>✓</a:t>
             </a:r>
@@ -5017,7 +4933,7 @@
         </p:nvSpPr>
         <p:spPr>
           <a:xfrm>
-            <a:off x="1485900" y="5908328"/>
+            <a:off x="1485900" y="5913090"/>
             <a:ext cx="4777740" cy="300038"/>
           </a:xfrm>
           <a:prstGeom prst="rect">
@@ -5040,9 +4956,9 @@
                 <a:solidFill>
                   <a:srgbClr val="CFE7DB"/>
                 </a:solidFill>
-                <a:latin typeface="Arial" pitchFamily="34" charset="0"/>
-                <a:ea typeface="Arial" pitchFamily="34" charset="-122"/>
-                <a:cs typeface="Arial" pitchFamily="34" charset="-120"/>
+                <a:latin typeface="Golos Text" pitchFamily="34" charset="0"/>
+                <a:ea typeface="Golos Text" pitchFamily="34" charset="-122"/>
+                <a:cs typeface="Golos Text" pitchFamily="34" charset="-120"/>
               </a:rPr>
               <a:t>Полный доступ к данным</a:t>
             </a:r>
@@ -5058,12 +4974,12 @@
         </p:nvSpPr>
         <p:spPr>
           <a:xfrm>
-            <a:off x="1485900" y="6398865"/>
-            <a:ext cx="4343400" cy="442913"/>
+            <a:off x="1485900" y="6403628"/>
+            <a:ext cx="4343400" cy="457200"/>
           </a:xfrm>
           <a:prstGeom prst="roundRect">
             <a:avLst>
-              <a:gd name="adj" fmla="val 21505"/>
+              <a:gd name="adj" fmla="val 20833"/>
             </a:avLst>
           </a:prstGeom>
           <a:solidFill>
@@ -5071,10 +4987,6 @@
           </a:solidFill>
           <a:ln/>
         </p:spPr>
-        <p:txBody>
-          <a:bodyPr/>
-          <a:p/>
-        </p:txBody>
       </p:sp>
       <p:sp>
         <p:nvSpPr>
@@ -5084,8 +4996,8 @@
         </p:nvSpPr>
         <p:spPr>
           <a:xfrm>
-            <a:off x="1573149" y="6513165"/>
-            <a:ext cx="4168902" cy="252413"/>
+            <a:off x="1573149" y="6517928"/>
+            <a:ext cx="4168902" cy="266700"/>
           </a:xfrm>
           <a:prstGeom prst="rect">
             <a:avLst/>
@@ -5107,9 +5019,9 @@
                 <a:solidFill>
                   <a:srgbClr val="FFFFFF"/>
                 </a:solidFill>
-                <a:latin typeface="Arial" pitchFamily="34" charset="0"/>
-                <a:ea typeface="Arial" pitchFamily="34" charset="-122"/>
-                <a:cs typeface="Arial" pitchFamily="34" charset="-120"/>
+                <a:latin typeface="Golos Text" pitchFamily="34" charset="0"/>
+                <a:ea typeface="Golos Text" pitchFamily="34" charset="-122"/>
+                <a:cs typeface="Golos Text" pitchFamily="34" charset="-120"/>
               </a:rPr>
               <a:t>Готов к медицинской регистрации</a:t>
             </a:r>
@@ -5125,12 +5037,12 @@
         </p:nvSpPr>
         <p:spPr>
           <a:xfrm>
-            <a:off x="6534150" y="3727103"/>
-            <a:ext cx="5219700" cy="3533775"/>
+            <a:off x="6534150" y="3722340"/>
+            <a:ext cx="5219700" cy="3557588"/>
           </a:xfrm>
           <a:prstGeom prst="roundRect">
             <a:avLst>
-              <a:gd name="adj" fmla="val 5391"/>
+              <a:gd name="adj" fmla="val 5355"/>
             </a:avLst>
           </a:prstGeom>
           <a:solidFill>
@@ -5143,10 +5055,6 @@
             <a:prstDash val="solid"/>
           </a:ln>
         </p:spPr>
-        <p:txBody>
-          <a:bodyPr/>
-          <a:p/>
-        </p:txBody>
       </p:sp>
       <p:sp>
         <p:nvSpPr>
@@ -5156,8 +5064,8 @@
         </p:nvSpPr>
         <p:spPr>
           <a:xfrm>
-            <a:off x="6981825" y="4155728"/>
-            <a:ext cx="4756785" cy="476250"/>
+            <a:off x="6981825" y="4150965"/>
+            <a:ext cx="4756785" cy="495300"/>
           </a:xfrm>
           <a:prstGeom prst="rect">
             <a:avLst/>
@@ -5179,9 +5087,9 @@
                 <a:solidFill>
                   <a:srgbClr val="16232B"/>
                 </a:solidFill>
-                <a:latin typeface="Arial" pitchFamily="34" charset="0"/>
-                <a:ea typeface="Arial" pitchFamily="34" charset="-122"/>
-                <a:cs typeface="Arial" pitchFamily="34" charset="-120"/>
+                <a:latin typeface="Golos Text" pitchFamily="34" charset="0"/>
+                <a:ea typeface="Golos Text" pitchFamily="34" charset="-122"/>
+                <a:cs typeface="Golos Text" pitchFamily="34" charset="-120"/>
               </a:rPr>
               <a:t>Eternity</a:t>
             </a:r>
@@ -5197,7 +5105,7 @@
         </p:nvSpPr>
         <p:spPr>
           <a:xfrm>
-            <a:off x="6981825" y="4631978"/>
+            <a:off x="6981825" y="4646265"/>
             <a:ext cx="4756785" cy="314325"/>
           </a:xfrm>
           <a:prstGeom prst="rect">
@@ -5220,9 +5128,9 @@
                 <a:solidFill>
                   <a:srgbClr val="7B8C82"/>
                 </a:solidFill>
-                <a:latin typeface="Arial" pitchFamily="34" charset="0"/>
-                <a:ea typeface="Arial" pitchFamily="34" charset="-122"/>
-                <a:cs typeface="Arial" pitchFamily="34" charset="-120"/>
+                <a:latin typeface="Golos Text" pitchFamily="34" charset="0"/>
+                <a:ea typeface="Golos Text" pitchFamily="34" charset="-122"/>
+                <a:cs typeface="Golos Text" pitchFamily="34" charset="-120"/>
               </a:rPr>
               <a:t>Guangdong</a:t>
             </a:r>
@@ -5238,8 +5146,8 @@
         </p:nvSpPr>
         <p:spPr>
           <a:xfrm>
-            <a:off x="6981825" y="5155853"/>
-            <a:ext cx="4756785" cy="304800"/>
+            <a:off x="6981825" y="5170140"/>
+            <a:ext cx="4756785" cy="300038"/>
           </a:xfrm>
           <a:prstGeom prst="rect">
             <a:avLst/>
@@ -5261,9 +5169,9 @@
                 <a:solidFill>
                   <a:srgbClr val="42504A"/>
                 </a:solidFill>
-                <a:latin typeface="Arial" pitchFamily="34" charset="0"/>
-                <a:ea typeface="Arial" pitchFamily="34" charset="-122"/>
-                <a:cs typeface="Arial" pitchFamily="34" charset="-120"/>
+                <a:latin typeface="Golos Text" pitchFamily="34" charset="0"/>
+                <a:ea typeface="Golos Text" pitchFamily="34" charset="-122"/>
+                <a:cs typeface="Golos Text" pitchFamily="34" charset="-120"/>
               </a:rPr>
               <a:t>Мин. партия · </a:t>
             </a:r>
@@ -5275,9 +5183,9 @@
                 <a:solidFill>
                   <a:srgbClr val="16232B"/>
                 </a:solidFill>
-                <a:latin typeface="Arial" pitchFamily="34" charset="0"/>
-                <a:ea typeface="Arial" pitchFamily="34" charset="-122"/>
-                <a:cs typeface="Arial" pitchFamily="34" charset="-120"/>
+                <a:latin typeface="Golos Text" pitchFamily="34" charset="0"/>
+                <a:ea typeface="Golos Text" pitchFamily="34" charset="-122"/>
+                <a:cs typeface="Golos Text" pitchFamily="34" charset="-120"/>
               </a:rPr>
               <a:t>500</a:t>
             </a:r>
@@ -5293,7 +5201,7 @@
         </p:nvSpPr>
         <p:spPr>
           <a:xfrm>
-            <a:off x="6981825" y="5536853"/>
+            <a:off x="6981825" y="5546378"/>
             <a:ext cx="4756785" cy="300038"/>
           </a:xfrm>
           <a:prstGeom prst="rect">
@@ -5316,9 +5224,9 @@
                 <a:solidFill>
                   <a:srgbClr val="42504A"/>
                 </a:solidFill>
-                <a:latin typeface="Arial" pitchFamily="34" charset="0"/>
-                <a:ea typeface="Arial" pitchFamily="34" charset="-122"/>
-                <a:cs typeface="Arial" pitchFamily="34" charset="-120"/>
+                <a:latin typeface="Golos Text" pitchFamily="34" charset="0"/>
+                <a:ea typeface="Golos Text" pitchFamily="34" charset="-122"/>
+                <a:cs typeface="Golos Text" pitchFamily="34" charset="-120"/>
               </a:rPr>
               <a:t>Система качества · не подтверждена</a:t>
             </a:r>
@@ -5334,7 +5242,7 @@
         </p:nvSpPr>
         <p:spPr>
           <a:xfrm>
-            <a:off x="6981825" y="5913090"/>
+            <a:off x="6981825" y="5922615"/>
             <a:ext cx="4756785" cy="300038"/>
           </a:xfrm>
           <a:prstGeom prst="rect">
@@ -5357,9 +5265,9 @@
                 <a:solidFill>
                   <a:srgbClr val="42504A"/>
                 </a:solidFill>
-                <a:latin typeface="Arial" pitchFamily="34" charset="0"/>
-                <a:ea typeface="Arial" pitchFamily="34" charset="-122"/>
-                <a:cs typeface="Arial" pitchFamily="34" charset="-120"/>
+                <a:latin typeface="Golos Text" pitchFamily="34" charset="0"/>
+                <a:ea typeface="Golos Text" pitchFamily="34" charset="-122"/>
+                <a:cs typeface="Golos Text" pitchFamily="34" charset="-120"/>
               </a:rPr>
               <a:t>Самая низкая цена</a:t>
             </a:r>
@@ -5375,12 +5283,12 @@
         </p:nvSpPr>
         <p:spPr>
           <a:xfrm>
-            <a:off x="12020550" y="3727103"/>
-            <a:ext cx="5219700" cy="3533775"/>
+            <a:off x="12020550" y="3722340"/>
+            <a:ext cx="5219700" cy="3557588"/>
           </a:xfrm>
           <a:prstGeom prst="roundRect">
             <a:avLst>
-              <a:gd name="adj" fmla="val 5391"/>
+              <a:gd name="adj" fmla="val 5355"/>
             </a:avLst>
           </a:prstGeom>
           <a:solidFill>
@@ -5393,10 +5301,6 @@
             <a:prstDash val="solid"/>
           </a:ln>
         </p:spPr>
-        <p:txBody>
-          <a:bodyPr/>
-          <a:p/>
-        </p:txBody>
       </p:sp>
       <p:sp>
         <p:nvSpPr>
@@ -5406,8 +5310,8 @@
         </p:nvSpPr>
         <p:spPr>
           <a:xfrm>
-            <a:off x="12468225" y="4155728"/>
-            <a:ext cx="4756785" cy="476250"/>
+            <a:off x="12468225" y="4150965"/>
+            <a:ext cx="4756785" cy="495300"/>
           </a:xfrm>
           <a:prstGeom prst="rect">
             <a:avLst/>
@@ -5429,9 +5333,9 @@
                 <a:solidFill>
                   <a:srgbClr val="16232B"/>
                 </a:solidFill>
-                <a:latin typeface="Arial" pitchFamily="34" charset="0"/>
-                <a:ea typeface="Arial" pitchFamily="34" charset="-122"/>
-                <a:cs typeface="Arial" pitchFamily="34" charset="-120"/>
+                <a:latin typeface="Golos Text" pitchFamily="34" charset="0"/>
+                <a:ea typeface="Golos Text" pitchFamily="34" charset="-122"/>
+                <a:cs typeface="Golos Text" pitchFamily="34" charset="-120"/>
               </a:rPr>
               <a:t>Wonlex</a:t>
             </a:r>
@@ -5447,8 +5351,8 @@
         </p:nvSpPr>
         <p:spPr>
           <a:xfrm>
-            <a:off x="12468225" y="4841528"/>
-            <a:ext cx="4756785" cy="304800"/>
+            <a:off x="12468225" y="4855815"/>
+            <a:ext cx="4756785" cy="300038"/>
           </a:xfrm>
           <a:prstGeom prst="rect">
             <a:avLst/>
@@ -5470,9 +5374,9 @@
                 <a:solidFill>
                   <a:srgbClr val="42504A"/>
                 </a:solidFill>
-                <a:latin typeface="Arial" pitchFamily="34" charset="0"/>
-                <a:ea typeface="Arial" pitchFamily="34" charset="-122"/>
-                <a:cs typeface="Arial" pitchFamily="34" charset="-120"/>
+                <a:latin typeface="Golos Text" pitchFamily="34" charset="0"/>
+                <a:ea typeface="Golos Text" pitchFamily="34" charset="-122"/>
+                <a:cs typeface="Golos Text" pitchFamily="34" charset="-120"/>
               </a:rPr>
               <a:t>Мин. партия · </a:t>
             </a:r>
@@ -5484,9 +5388,9 @@
                 <a:solidFill>
                   <a:srgbClr val="16232B"/>
                 </a:solidFill>
-                <a:latin typeface="Arial" pitchFamily="34" charset="0"/>
-                <a:ea typeface="Arial" pitchFamily="34" charset="-122"/>
-                <a:cs typeface="Arial" pitchFamily="34" charset="-120"/>
+                <a:latin typeface="Golos Text" pitchFamily="34" charset="0"/>
+                <a:ea typeface="Golos Text" pitchFamily="34" charset="-122"/>
+                <a:cs typeface="Golos Text" pitchFamily="34" charset="-120"/>
               </a:rPr>
               <a:t>1 000</a:t>
             </a:r>
@@ -5502,7 +5406,7 @@
         </p:nvSpPr>
         <p:spPr>
           <a:xfrm>
-            <a:off x="12468225" y="5222528"/>
+            <a:off x="12468225" y="5232053"/>
             <a:ext cx="4756785" cy="300038"/>
           </a:xfrm>
           <a:prstGeom prst="rect">
@@ -5525,9 +5429,9 @@
                 <a:solidFill>
                   <a:srgbClr val="42504A"/>
                 </a:solidFill>
-                <a:latin typeface="Arial" pitchFamily="34" charset="0"/>
-                <a:ea typeface="Arial" pitchFamily="34" charset="-122"/>
-                <a:cs typeface="Arial" pitchFamily="34" charset="-120"/>
+                <a:latin typeface="Golos Text" pitchFamily="34" charset="0"/>
+                <a:ea typeface="Golos Text" pitchFamily="34" charset="-122"/>
+                <a:cs typeface="Golos Text" pitchFamily="34" charset="-120"/>
               </a:rPr>
               <a:t>Лучшая начинка</a:t>
             </a:r>
@@ -5543,7 +5447,7 @@
         </p:nvSpPr>
         <p:spPr>
           <a:xfrm>
-            <a:off x="12468225" y="5598765"/>
+            <a:off x="12468225" y="5608290"/>
             <a:ext cx="4756785" cy="300038"/>
           </a:xfrm>
           <a:prstGeom prst="rect">
@@ -5566,9 +5470,9 @@
                 <a:solidFill>
                   <a:srgbClr val="42504A"/>
                 </a:solidFill>
-                <a:latin typeface="Arial" pitchFamily="34" charset="0"/>
-                <a:ea typeface="Arial" pitchFamily="34" charset="-122"/>
-                <a:cs typeface="Arial" pitchFamily="34" charset="-120"/>
+                <a:latin typeface="Golos Text" pitchFamily="34" charset="0"/>
+                <a:ea typeface="Golos Text" pitchFamily="34" charset="-122"/>
+                <a:cs typeface="Golos Text" pitchFamily="34" charset="-120"/>
               </a:rPr>
               <a:t>Нет сертификатов</a:t>
             </a:r>
@@ -5584,7 +5488,7 @@
         </p:nvSpPr>
         <p:spPr>
           <a:xfrm>
-            <a:off x="1047750" y="7641878"/>
+            <a:off x="1047750" y="7660928"/>
             <a:ext cx="13906738" cy="752475"/>
           </a:xfrm>
           <a:prstGeom prst="rect">
@@ -5601,7 +5505,7 @@
           <a:p>
             <a:pPr algn="l" indent="0" marL="0">
               <a:lnSpc>
-                <a:spcPct val="129310"/>
+                <a:spcPct val="125000"/>
               </a:lnSpc>
               <a:buNone/>
             </a:pPr>
@@ -5610,9 +5514,9 @@
                 <a:solidFill>
                   <a:srgbClr val="42504A"/>
                 </a:solidFill>
-                <a:latin typeface="Arial" pitchFamily="34" charset="0"/>
-                <a:ea typeface="Arial" pitchFamily="34" charset="-122"/>
-                <a:cs typeface="Arial" pitchFamily="34" charset="-120"/>
+                <a:latin typeface="Golos Text" pitchFamily="34" charset="0"/>
+                <a:ea typeface="Golos Text" pitchFamily="34" charset="-122"/>
+                <a:cs typeface="Golos Text" pitchFamily="34" charset="-120"/>
               </a:rPr>
               <a:t>Ключевое условие контракта: устройство отдаёт данные напрямую в Damumed, без облака производителя. Образцы — 4–6 недель, серия — 8–12 недель после утверждения.</a:t>
             </a:r>
@@ -5660,12 +5564,12 @@
         </p:nvSpPr>
         <p:spPr>
           <a:xfrm>
-            <a:off x="1047750" y="2273722"/>
-            <a:ext cx="2955727" cy="414338"/>
+            <a:off x="1047750" y="2247528"/>
+            <a:ext cx="3150468" cy="428625"/>
           </a:xfrm>
           <a:prstGeom prst="roundRect">
             <a:avLst>
-              <a:gd name="adj" fmla="val 22988"/>
+              <a:gd name="adj" fmla="val 22222"/>
             </a:avLst>
           </a:prstGeom>
           <a:solidFill>
@@ -5675,10 +5579,6 @@
           </a:solidFill>
           <a:ln/>
         </p:spPr>
-        <p:txBody>
-          <a:bodyPr/>
-          <a:p/>
-        </p:txBody>
       </p:sp>
       <p:sp>
         <p:nvSpPr>
@@ -5688,8 +5588,8 @@
         </p:nvSpPr>
         <p:spPr>
           <a:xfrm>
-            <a:off x="1219200" y="2349922"/>
-            <a:ext cx="2701498" cy="300038"/>
+            <a:off x="1219200" y="2323728"/>
+            <a:ext cx="2902082" cy="314325"/>
           </a:xfrm>
           <a:prstGeom prst="rect">
             <a:avLst/>
@@ -5711,9 +5611,9 @@
                 <a:solidFill>
                   <a:srgbClr val="BEDCCB"/>
                 </a:solidFill>
-                <a:latin typeface="Arial" pitchFamily="34" charset="0"/>
-                <a:ea typeface="Arial" pitchFamily="34" charset="-122"/>
-                <a:cs typeface="Arial" pitchFamily="34" charset="-120"/>
+                <a:latin typeface="Golos Text" pitchFamily="34" charset="0"/>
+                <a:ea typeface="Golos Text" pitchFamily="34" charset="-122"/>
+                <a:cs typeface="Golos Text" pitchFamily="34" charset="-120"/>
               </a:rPr>
               <a:t>Раздел 08 · Регистрация</a:t>
             </a:r>
@@ -5729,7 +5629,7 @@
         </p:nvSpPr>
         <p:spPr>
           <a:xfrm>
-            <a:off x="1047750" y="2935709"/>
+            <a:off x="1047750" y="2923803"/>
             <a:ext cx="17811750" cy="658118"/>
           </a:xfrm>
           <a:prstGeom prst="rect">
@@ -5746,7 +5646,7 @@
           <a:p>
             <a:pPr algn="l" indent="0" marL="0">
               <a:lnSpc>
-                <a:spcPct val="91690"/>
+                <a:spcPct val="87383"/>
               </a:lnSpc>
               <a:buNone/>
             </a:pPr>
@@ -5755,9 +5655,9 @@
                 <a:solidFill>
                   <a:srgbClr val="F2F7F4"/>
                 </a:solidFill>
-                <a:latin typeface="Arial" pitchFamily="34" charset="0"/>
-                <a:ea typeface="Arial" pitchFamily="34" charset="-122"/>
-                <a:cs typeface="Arial" pitchFamily="34" charset="-120"/>
+                <a:latin typeface="Golos Text" pitchFamily="34" charset="0"/>
+                <a:ea typeface="Golos Text" pitchFamily="34" charset="-122"/>
+                <a:cs typeface="Golos Text" pitchFamily="34" charset="-120"/>
               </a:rPr>
               <a:t>Класс риска 2а · 14–18 месяцев</a:t>
             </a:r>
@@ -5773,8 +5673,8 @@
         </p:nvSpPr>
         <p:spPr>
           <a:xfrm>
-            <a:off x="1047750" y="4127227"/>
-            <a:ext cx="3562350" cy="295275"/>
+            <a:off x="1047750" y="4115321"/>
+            <a:ext cx="3562350" cy="309563"/>
           </a:xfrm>
           <a:prstGeom prst="rect">
             <a:avLst/>
@@ -5796,9 +5696,9 @@
                 <a:solidFill>
                   <a:srgbClr val="3ECF8E"/>
                 </a:solidFill>
-                <a:latin typeface="Courier New" pitchFamily="34" charset="0"/>
-                <a:ea typeface="Courier New" pitchFamily="34" charset="-122"/>
-                <a:cs typeface="Courier New" pitchFamily="34" charset="-120"/>
+                <a:latin typeface="Spline Sans Mono" pitchFamily="34" charset="0"/>
+                <a:ea typeface="Spline Sans Mono" pitchFamily="34" charset="-122"/>
+                <a:cs typeface="Spline Sans Mono" pitchFamily="34" charset="-120"/>
               </a:rPr>
               <a:t>Мес 0–2</a:t>
             </a:r>
@@ -5814,8 +5714,8 @@
         </p:nvSpPr>
         <p:spPr>
           <a:xfrm>
-            <a:off x="1047750" y="4517752"/>
-            <a:ext cx="3562350" cy="323850"/>
+            <a:off x="1047750" y="4520133"/>
+            <a:ext cx="3562350" cy="333375"/>
           </a:xfrm>
           <a:prstGeom prst="rect">
             <a:avLst/>
@@ -5837,9 +5737,9 @@
                 <a:solidFill>
                   <a:srgbClr val="FFFFFF"/>
                 </a:solidFill>
-                <a:latin typeface="Arial" pitchFamily="34" charset="0"/>
-                <a:ea typeface="Arial" pitchFamily="34" charset="-122"/>
-                <a:cs typeface="Arial" pitchFamily="34" charset="-120"/>
+                <a:latin typeface="Golos Text" pitchFamily="34" charset="0"/>
+                <a:ea typeface="Golos Text" pitchFamily="34" charset="-122"/>
+                <a:cs typeface="Golos Text" pitchFamily="34" charset="-120"/>
               </a:rPr>
               <a:t>Завод и контракт</a:t>
             </a:r>
@@ -5855,7 +5755,7 @@
         </p:nvSpPr>
         <p:spPr>
           <a:xfrm>
-            <a:off x="1047750" y="4879702"/>
+            <a:off x="1047750" y="4891608"/>
             <a:ext cx="3335655" cy="598140"/>
           </a:xfrm>
           <a:prstGeom prst="rect">
@@ -5872,7 +5772,7 @@
           <a:p>
             <a:pPr algn="l" indent="0" marL="0">
               <a:lnSpc>
-                <a:spcPct val="122500"/>
+                <a:spcPct val="117600"/>
               </a:lnSpc>
               <a:buNone/>
             </a:pPr>
@@ -5881,9 +5781,9 @@
                 <a:solidFill>
                   <a:srgbClr val="8FBBA3"/>
                 </a:solidFill>
-                <a:latin typeface="Arial" pitchFamily="34" charset="0"/>
-                <a:ea typeface="Arial" pitchFamily="34" charset="-122"/>
-                <a:cs typeface="Arial" pitchFamily="34" charset="-120"/>
+                <a:latin typeface="Golos Text" pitchFamily="34" charset="0"/>
+                <a:ea typeface="Golos Text" pitchFamily="34" charset="-122"/>
+                <a:cs typeface="Golos Text" pitchFamily="34" charset="-120"/>
               </a:rPr>
               <a:t>образцы, проверка доступа к данным</a:t>
             </a:r>
@@ -5899,8 +5799,8 @@
         </p:nvSpPr>
         <p:spPr>
           <a:xfrm>
-            <a:off x="4286250" y="4127227"/>
-            <a:ext cx="3562350" cy="295275"/>
+            <a:off x="4286250" y="4115321"/>
+            <a:ext cx="3562350" cy="309563"/>
           </a:xfrm>
           <a:prstGeom prst="rect">
             <a:avLst/>
@@ -5922,9 +5822,9 @@
                 <a:solidFill>
                   <a:srgbClr val="3ECF8E"/>
                 </a:solidFill>
-                <a:latin typeface="Courier New" pitchFamily="34" charset="0"/>
-                <a:ea typeface="Courier New" pitchFamily="34" charset="-122"/>
-                <a:cs typeface="Courier New" pitchFamily="34" charset="-120"/>
+                <a:latin typeface="Spline Sans Mono" pitchFamily="34" charset="0"/>
+                <a:ea typeface="Spline Sans Mono" pitchFamily="34" charset="-122"/>
+                <a:cs typeface="Spline Sans Mono" pitchFamily="34" charset="-120"/>
               </a:rPr>
               <a:t>Мес 2–5</a:t>
             </a:r>
@@ -5940,8 +5840,8 @@
         </p:nvSpPr>
         <p:spPr>
           <a:xfrm>
-            <a:off x="4286250" y="4517752"/>
-            <a:ext cx="3562350" cy="323850"/>
+            <a:off x="4286250" y="4520133"/>
+            <a:ext cx="3562350" cy="333375"/>
           </a:xfrm>
           <a:prstGeom prst="rect">
             <a:avLst/>
@@ -5963,9 +5863,9 @@
                 <a:solidFill>
                   <a:srgbClr val="FFFFFF"/>
                 </a:solidFill>
-                <a:latin typeface="Arial" pitchFamily="34" charset="0"/>
-                <a:ea typeface="Arial" pitchFamily="34" charset="-122"/>
-                <a:cs typeface="Arial" pitchFamily="34" charset="-120"/>
+                <a:latin typeface="Golos Text" pitchFamily="34" charset="0"/>
+                <a:ea typeface="Golos Text" pitchFamily="34" charset="-122"/>
+                <a:cs typeface="Golos Text" pitchFamily="34" charset="-120"/>
               </a:rPr>
               <a:t>Первая партия</a:t>
             </a:r>
@@ -5981,7 +5881,7 @@
         </p:nvSpPr>
         <p:spPr>
           <a:xfrm>
-            <a:off x="4286250" y="4879702"/>
+            <a:off x="4286250" y="4891608"/>
             <a:ext cx="3335655" cy="598140"/>
           </a:xfrm>
           <a:prstGeom prst="rect">
@@ -5998,7 +5898,7 @@
           <a:p>
             <a:pPr algn="l" indent="0" marL="0">
               <a:lnSpc>
-                <a:spcPct val="122500"/>
+                <a:spcPct val="117600"/>
               </a:lnSpc>
               <a:buNone/>
             </a:pPr>
@@ -6007,9 +5907,9 @@
                 <a:solidFill>
                   <a:srgbClr val="8FBBA3"/>
                 </a:solidFill>
-                <a:latin typeface="Arial" pitchFamily="34" charset="0"/>
-                <a:ea typeface="Arial" pitchFamily="34" charset="-122"/>
-                <a:cs typeface="Arial" pitchFamily="34" charset="-120"/>
+                <a:latin typeface="Golos Text" pitchFamily="34" charset="0"/>
+                <a:ea typeface="Golos Text" pitchFamily="34" charset="-122"/>
+                <a:cs typeface="Golos Text" pitchFamily="34" charset="-120"/>
               </a:rPr>
               <a:t>серия, маркировка на двух языках</a:t>
             </a:r>
@@ -6025,8 +5925,8 @@
         </p:nvSpPr>
         <p:spPr>
           <a:xfrm>
-            <a:off x="7524750" y="4127227"/>
-            <a:ext cx="3562350" cy="295275"/>
+            <a:off x="7524750" y="4115321"/>
+            <a:ext cx="3562350" cy="309563"/>
           </a:xfrm>
           <a:prstGeom prst="rect">
             <a:avLst/>
@@ -6048,9 +5948,9 @@
                 <a:solidFill>
                   <a:srgbClr val="3ECF8E"/>
                 </a:solidFill>
-                <a:latin typeface="Courier New" pitchFamily="34" charset="0"/>
-                <a:ea typeface="Courier New" pitchFamily="34" charset="-122"/>
-                <a:cs typeface="Courier New" pitchFamily="34" charset="-120"/>
+                <a:latin typeface="Spline Sans Mono" pitchFamily="34" charset="0"/>
+                <a:ea typeface="Spline Sans Mono" pitchFamily="34" charset="-122"/>
+                <a:cs typeface="Spline Sans Mono" pitchFamily="34" charset="-120"/>
               </a:rPr>
               <a:t>Мес 3–9</a:t>
             </a:r>
@@ -6066,8 +5966,8 @@
         </p:nvSpPr>
         <p:spPr>
           <a:xfrm>
-            <a:off x="7524750" y="4517752"/>
-            <a:ext cx="3562350" cy="323850"/>
+            <a:off x="7524750" y="4520133"/>
+            <a:ext cx="3562350" cy="333375"/>
           </a:xfrm>
           <a:prstGeom prst="rect">
             <a:avLst/>
@@ -6089,9 +5989,9 @@
                 <a:solidFill>
                   <a:srgbClr val="FFFFFF"/>
                 </a:solidFill>
-                <a:latin typeface="Arial" pitchFamily="34" charset="0"/>
-                <a:ea typeface="Arial" pitchFamily="34" charset="-122"/>
-                <a:cs typeface="Arial" pitchFamily="34" charset="-120"/>
+                <a:latin typeface="Golos Text" pitchFamily="34" charset="0"/>
+                <a:ea typeface="Golos Text" pitchFamily="34" charset="-122"/>
+                <a:cs typeface="Golos Text" pitchFamily="34" charset="-120"/>
               </a:rPr>
               <a:t>Испытания и досье</a:t>
             </a:r>
@@ -6107,7 +6007,7 @@
         </p:nvSpPr>
         <p:spPr>
           <a:xfrm>
-            <a:off x="7524750" y="4879702"/>
+            <a:off x="7524750" y="4891608"/>
             <a:ext cx="3335655" cy="598140"/>
           </a:xfrm>
           <a:prstGeom prst="rect">
@@ -6124,7 +6024,7 @@
           <a:p>
             <a:pPr algn="l" indent="0" marL="0">
               <a:lnSpc>
-                <a:spcPct val="122500"/>
+                <a:spcPct val="117600"/>
               </a:lnSpc>
               <a:buNone/>
             </a:pPr>
@@ -6133,9 +6033,9 @@
                 <a:solidFill>
                   <a:srgbClr val="8FBBA3"/>
                 </a:solidFill>
-                <a:latin typeface="Arial" pitchFamily="34" charset="0"/>
-                <a:ea typeface="Arial" pitchFamily="34" charset="-122"/>
-                <a:cs typeface="Arial" pitchFamily="34" charset="-120"/>
+                <a:latin typeface="Golos Text" pitchFamily="34" charset="0"/>
+                <a:ea typeface="Golos Text" pitchFamily="34" charset="-122"/>
+                <a:cs typeface="Golos Text" pitchFamily="34" charset="-120"/>
               </a:rPr>
               <a:t>техиспытания, биосовместимость</a:t>
             </a:r>
@@ -6151,8 +6051,8 @@
         </p:nvSpPr>
         <p:spPr>
           <a:xfrm>
-            <a:off x="10763250" y="4127227"/>
-            <a:ext cx="3562350" cy="295275"/>
+            <a:off x="10763250" y="4115321"/>
+            <a:ext cx="3562350" cy="309563"/>
           </a:xfrm>
           <a:prstGeom prst="rect">
             <a:avLst/>
@@ -6174,9 +6074,9 @@
                 <a:solidFill>
                   <a:srgbClr val="3ECF8E"/>
                 </a:solidFill>
-                <a:latin typeface="Courier New" pitchFamily="34" charset="0"/>
-                <a:ea typeface="Courier New" pitchFamily="34" charset="-122"/>
-                <a:cs typeface="Courier New" pitchFamily="34" charset="-120"/>
+                <a:latin typeface="Spline Sans Mono" pitchFamily="34" charset="0"/>
+                <a:ea typeface="Spline Sans Mono" pitchFamily="34" charset="-122"/>
+                <a:cs typeface="Spline Sans Mono" pitchFamily="34" charset="-120"/>
               </a:rPr>
               <a:t>Мес 9–16</a:t>
             </a:r>
@@ -6192,8 +6092,8 @@
         </p:nvSpPr>
         <p:spPr>
           <a:xfrm>
-            <a:off x="10763250" y="4517752"/>
-            <a:ext cx="3562350" cy="323850"/>
+            <a:off x="10763250" y="4520133"/>
+            <a:ext cx="3562350" cy="333375"/>
           </a:xfrm>
           <a:prstGeom prst="rect">
             <a:avLst/>
@@ -6215,9 +6115,9 @@
                 <a:solidFill>
                   <a:srgbClr val="FFFFFF"/>
                 </a:solidFill>
-                <a:latin typeface="Arial" pitchFamily="34" charset="0"/>
-                <a:ea typeface="Arial" pitchFamily="34" charset="-122"/>
-                <a:cs typeface="Arial" pitchFamily="34" charset="-120"/>
+                <a:latin typeface="Golos Text" pitchFamily="34" charset="0"/>
+                <a:ea typeface="Golos Text" pitchFamily="34" charset="-122"/>
+                <a:cs typeface="Golos Text" pitchFamily="34" charset="-120"/>
               </a:rPr>
               <a:t>Экспертиза</a:t>
             </a:r>
@@ -6233,7 +6133,7 @@
         </p:nvSpPr>
         <p:spPr>
           <a:xfrm>
-            <a:off x="10763250" y="4879702"/>
+            <a:off x="10763250" y="4891608"/>
             <a:ext cx="3562350" cy="318120"/>
           </a:xfrm>
           <a:prstGeom prst="rect">
@@ -6250,7 +6150,7 @@
           <a:p>
             <a:pPr algn="l" indent="0" marL="0">
               <a:lnSpc>
-                <a:spcPct val="122500"/>
+                <a:spcPct val="117600"/>
               </a:lnSpc>
               <a:buNone/>
             </a:pPr>
@@ -6259,9 +6159,9 @@
                 <a:solidFill>
                   <a:srgbClr val="8FBBA3"/>
                 </a:solidFill>
-                <a:latin typeface="Arial" pitchFamily="34" charset="0"/>
-                <a:ea typeface="Arial" pitchFamily="34" charset="-122"/>
-                <a:cs typeface="Arial" pitchFamily="34" charset="-120"/>
+                <a:latin typeface="Golos Text" pitchFamily="34" charset="0"/>
+                <a:ea typeface="Golos Text" pitchFamily="34" charset="-122"/>
+                <a:cs typeface="Golos Text" pitchFamily="34" charset="-120"/>
               </a:rPr>
               <a:t>норматив 90 дней по классу 2а</a:t>
             </a:r>
@@ -6277,8 +6177,8 @@
         </p:nvSpPr>
         <p:spPr>
           <a:xfrm>
-            <a:off x="14001750" y="4127227"/>
-            <a:ext cx="3562350" cy="295275"/>
+            <a:off x="14001750" y="4115321"/>
+            <a:ext cx="3562350" cy="309563"/>
           </a:xfrm>
           <a:prstGeom prst="rect">
             <a:avLst/>
@@ -6300,9 +6200,9 @@
                 <a:solidFill>
                   <a:srgbClr val="3ECF8E"/>
                 </a:solidFill>
-                <a:latin typeface="Courier New" pitchFamily="34" charset="0"/>
-                <a:ea typeface="Courier New" pitchFamily="34" charset="-122"/>
-                <a:cs typeface="Courier New" pitchFamily="34" charset="-120"/>
+                <a:latin typeface="Spline Sans Mono" pitchFamily="34" charset="0"/>
+                <a:ea typeface="Spline Sans Mono" pitchFamily="34" charset="-122"/>
+                <a:cs typeface="Spline Sans Mono" pitchFamily="34" charset="-120"/>
               </a:rPr>
               <a:t>Мес 14–18</a:t>
             </a:r>
@@ -6318,8 +6218,8 @@
         </p:nvSpPr>
         <p:spPr>
           <a:xfrm>
-            <a:off x="14001750" y="4517752"/>
-            <a:ext cx="3562350" cy="323850"/>
+            <a:off x="14001750" y="4520133"/>
+            <a:ext cx="3562350" cy="333375"/>
           </a:xfrm>
           <a:prstGeom prst="rect">
             <a:avLst/>
@@ -6341,9 +6241,9 @@
                 <a:solidFill>
                   <a:srgbClr val="FFFFFF"/>
                 </a:solidFill>
-                <a:latin typeface="Arial" pitchFamily="34" charset="0"/>
-                <a:ea typeface="Arial" pitchFamily="34" charset="-122"/>
-                <a:cs typeface="Arial" pitchFamily="34" charset="-120"/>
+                <a:latin typeface="Golos Text" pitchFamily="34" charset="0"/>
+                <a:ea typeface="Golos Text" pitchFamily="34" charset="-122"/>
+                <a:cs typeface="Golos Text" pitchFamily="34" charset="-120"/>
               </a:rPr>
               <a:t>Удостоверение и старт</a:t>
             </a:r>
@@ -6359,7 +6259,7 @@
         </p:nvSpPr>
         <p:spPr>
           <a:xfrm>
-            <a:off x="14001750" y="4879702"/>
+            <a:off x="14001750" y="4891608"/>
             <a:ext cx="3562350" cy="318120"/>
           </a:xfrm>
           <a:prstGeom prst="rect">
@@ -6376,7 +6276,7 @@
           <a:p>
             <a:pPr algn="l" indent="0" marL="0">
               <a:lnSpc>
-                <a:spcPct val="122500"/>
+                <a:spcPct val="117600"/>
               </a:lnSpc>
               <a:buNone/>
             </a:pPr>
@@ -6385,9 +6285,9 @@
                 <a:solidFill>
                   <a:srgbClr val="8FBBA3"/>
                 </a:solidFill>
-                <a:latin typeface="Arial" pitchFamily="34" charset="0"/>
-                <a:ea typeface="Arial" pitchFamily="34" charset="-122"/>
-                <a:cs typeface="Arial" pitchFamily="34" charset="-120"/>
+                <a:latin typeface="Golos Text" pitchFamily="34" charset="0"/>
+                <a:ea typeface="Golos Text" pitchFamily="34" charset="-122"/>
+                <a:cs typeface="Golos Text" pitchFamily="34" charset="-120"/>
               </a:rPr>
               <a:t>удостоверение бессрочно</a:t>
             </a:r>
@@ -6403,7 +6303,7 @@
         </p:nvSpPr>
         <p:spPr>
           <a:xfrm>
-            <a:off x="1047750" y="5763592"/>
+            <a:off x="1047750" y="5775499"/>
             <a:ext cx="16192500" cy="38100"/>
           </a:xfrm>
           <a:prstGeom prst="roundRect">
@@ -6428,10 +6328,6 @@
           </a:gradFill>
           <a:ln/>
         </p:spPr>
-        <p:txBody>
-          <a:bodyPr/>
-          <a:p/>
-        </p:txBody>
       </p:sp>
       <p:sp>
         <p:nvSpPr>
@@ -6441,12 +6337,12 @@
         </p:nvSpPr>
         <p:spPr>
           <a:xfrm>
-            <a:off x="1047750" y="6335092"/>
-            <a:ext cx="7943850" cy="1678186"/>
+            <a:off x="1047750" y="6346999"/>
+            <a:ext cx="7943850" cy="1692473"/>
           </a:xfrm>
           <a:prstGeom prst="roundRect">
             <a:avLst>
-              <a:gd name="adj" fmla="val 10216"/>
+              <a:gd name="adj" fmla="val 10130"/>
             </a:avLst>
           </a:prstGeom>
           <a:solidFill>
@@ -6459,10 +6355,6 @@
             <a:prstDash val="solid"/>
           </a:ln>
         </p:spPr>
-        <p:txBody>
-          <a:bodyPr/>
-          <a:p/>
-        </p:txBody>
       </p:sp>
       <p:sp>
         <p:nvSpPr>
@@ -6472,8 +6364,8 @@
         </p:nvSpPr>
         <p:spPr>
           <a:xfrm>
-            <a:off x="1438275" y="6668467"/>
-            <a:ext cx="7879080" cy="333375"/>
+            <a:off x="1438275" y="6680374"/>
+            <a:ext cx="7879080" cy="347663"/>
           </a:xfrm>
           <a:prstGeom prst="rect">
             <a:avLst/>
@@ -6495,9 +6387,9 @@
                 <a:solidFill>
                   <a:srgbClr val="FFFFFF"/>
                 </a:solidFill>
-                <a:latin typeface="Arial" pitchFamily="34" charset="0"/>
-                <a:ea typeface="Arial" pitchFamily="34" charset="-122"/>
-                <a:cs typeface="Arial" pitchFamily="34" charset="-120"/>
+                <a:latin typeface="Golos Text" pitchFamily="34" charset="0"/>
+                <a:ea typeface="Golos Text" pitchFamily="34" charset="-122"/>
+                <a:cs typeface="Golos Text" pitchFamily="34" charset="-120"/>
               </a:rPr>
               <a:t>Без ЭКГ в первой версии</a:t>
             </a:r>
@@ -6513,7 +6405,7 @@
         </p:nvSpPr>
         <p:spPr>
           <a:xfrm>
-            <a:off x="1438275" y="7039942"/>
+            <a:off x="1438275" y="7066136"/>
             <a:ext cx="7879080" cy="331440"/>
           </a:xfrm>
           <a:prstGeom prst="rect">
@@ -6530,7 +6422,7 @@
           <a:p>
             <a:pPr algn="l" indent="0" marL="0">
               <a:lnSpc>
-                <a:spcPct val="123200"/>
+                <a:spcPct val="116226"/>
               </a:lnSpc>
               <a:buNone/>
             </a:pPr>
@@ -6539,9 +6431,9 @@
                 <a:solidFill>
                   <a:srgbClr val="CFE7DB"/>
                 </a:solidFill>
-                <a:latin typeface="Arial" pitchFamily="34" charset="0"/>
-                <a:ea typeface="Arial" pitchFamily="34" charset="-122"/>
-                <a:cs typeface="Arial" pitchFamily="34" charset="-120"/>
+                <a:latin typeface="Golos Text" pitchFamily="34" charset="0"/>
+                <a:ea typeface="Golos Text" pitchFamily="34" charset="-122"/>
+                <a:cs typeface="Golos Text" pitchFamily="34" charset="-120"/>
               </a:rPr>
               <a:t>ЭКГ поднимает класс до 2б и требует инспекции завода</a:t>
             </a:r>
@@ -6557,12 +6449,12 @@
         </p:nvSpPr>
         <p:spPr>
           <a:xfrm>
-            <a:off x="9296400" y="6335092"/>
-            <a:ext cx="7943850" cy="1678186"/>
+            <a:off x="9296400" y="6346999"/>
+            <a:ext cx="7943850" cy="1692473"/>
           </a:xfrm>
           <a:prstGeom prst="roundRect">
             <a:avLst>
-              <a:gd name="adj" fmla="val 10216"/>
+              <a:gd name="adj" fmla="val 10130"/>
             </a:avLst>
           </a:prstGeom>
           <a:solidFill>
@@ -6575,10 +6467,6 @@
             <a:prstDash val="solid"/>
           </a:ln>
         </p:spPr>
-        <p:txBody>
-          <a:bodyPr/>
-          <a:p/>
-        </p:txBody>
       </p:sp>
       <p:sp>
         <p:nvSpPr>
@@ -6588,8 +6476,8 @@
         </p:nvSpPr>
         <p:spPr>
           <a:xfrm>
-            <a:off x="9686925" y="6668467"/>
-            <a:ext cx="7879080" cy="333375"/>
+            <a:off x="9686925" y="6680374"/>
+            <a:ext cx="7879080" cy="347663"/>
           </a:xfrm>
           <a:prstGeom prst="rect">
             <a:avLst/>
@@ -6611,9 +6499,9 @@
                 <a:solidFill>
                   <a:srgbClr val="FFFFFF"/>
                 </a:solidFill>
-                <a:latin typeface="Arial" pitchFamily="34" charset="0"/>
-                <a:ea typeface="Arial" pitchFamily="34" charset="-122"/>
-                <a:cs typeface="Arial" pitchFamily="34" charset="-120"/>
+                <a:latin typeface="Golos Text" pitchFamily="34" charset="0"/>
+                <a:ea typeface="Golos Text" pitchFamily="34" charset="-122"/>
+                <a:cs typeface="Golos Text" pitchFamily="34" charset="-120"/>
               </a:rPr>
               <a:t>Искусственный интеллект — поэтапно</a:t>
             </a:r>
@@ -6629,7 +6517,7 @@
         </p:nvSpPr>
         <p:spPr>
           <a:xfrm>
-            <a:off x="9686925" y="7039942"/>
+            <a:off x="9686925" y="7066136"/>
             <a:ext cx="7377684" cy="678061"/>
           </a:xfrm>
           <a:prstGeom prst="rect">
@@ -6646,7 +6534,7 @@
           <a:p>
             <a:pPr algn="l" indent="0" marL="0">
               <a:lnSpc>
-                <a:spcPct val="122182"/>
+                <a:spcPct val="115862"/>
               </a:lnSpc>
               <a:buNone/>
             </a:pPr>
@@ -6655,9 +6543,9 @@
                 <a:solidFill>
                   <a:srgbClr val="CFE7DB"/>
                 </a:solidFill>
-                <a:latin typeface="Arial" pitchFamily="34" charset="0"/>
-                <a:ea typeface="Arial" pitchFamily="34" charset="-122"/>
-                <a:cs typeface="Arial" pitchFamily="34" charset="-120"/>
+                <a:latin typeface="Golos Text" pitchFamily="34" charset="0"/>
+                <a:ea typeface="Golos Text" pitchFamily="34" charset="-122"/>
+                <a:cs typeface="Golos Text" pitchFamily="34" charset="-120"/>
               </a:rPr>
               <a:t>Первая версия — прозрачные правила (класс 2а); клинический ИИ выводим второй волной</a:t>
             </a:r>
@@ -6705,12 +6593,12 @@
         </p:nvSpPr>
         <p:spPr>
           <a:xfrm>
-            <a:off x="1047750" y="1670447"/>
-            <a:ext cx="2241575" cy="414338"/>
+            <a:off x="1047750" y="1663303"/>
+            <a:ext cx="2378050" cy="428625"/>
           </a:xfrm>
           <a:prstGeom prst="roundRect">
             <a:avLst>
-              <a:gd name="adj" fmla="val 22988"/>
+              <a:gd name="adj" fmla="val 22222"/>
             </a:avLst>
           </a:prstGeom>
           <a:solidFill>
@@ -6718,10 +6606,6 @@
           </a:solidFill>
           <a:ln/>
         </p:spPr>
-        <p:txBody>
-          <a:bodyPr/>
-          <a:p/>
-        </p:txBody>
       </p:sp>
       <p:sp>
         <p:nvSpPr>
@@ -6731,8 +6615,8 @@
         </p:nvSpPr>
         <p:spPr>
           <a:xfrm>
-            <a:off x="1219200" y="1746647"/>
-            <a:ext cx="1974875" cy="300038"/>
+            <a:off x="1219200" y="1739503"/>
+            <a:ext cx="2111350" cy="314325"/>
           </a:xfrm>
           <a:prstGeom prst="rect">
             <a:avLst/>
@@ -6754,9 +6638,9 @@
                 <a:solidFill>
                   <a:srgbClr val="0E7A50"/>
                 </a:solidFill>
-                <a:latin typeface="Arial" pitchFamily="34" charset="0"/>
-                <a:ea typeface="Arial" pitchFamily="34" charset="-122"/>
-                <a:cs typeface="Arial" pitchFamily="34" charset="-120"/>
+                <a:latin typeface="Golos Text" pitchFamily="34" charset="0"/>
+                <a:ea typeface="Golos Text" pitchFamily="34" charset="-122"/>
+                <a:cs typeface="Golos Text" pitchFamily="34" charset="-120"/>
               </a:rPr>
               <a:t>Раздел 09 · Риски</a:t>
             </a:r>
@@ -6772,7 +6656,7 @@
         </p:nvSpPr>
         <p:spPr>
           <a:xfrm>
-            <a:off x="1047750" y="2313384"/>
+            <a:off x="1047750" y="2320528"/>
             <a:ext cx="17811750" cy="658118"/>
           </a:xfrm>
           <a:prstGeom prst="rect">
@@ -6789,7 +6673,7 @@
           <a:p>
             <a:pPr algn="l" indent="0" marL="0">
               <a:lnSpc>
-                <a:spcPct val="91690"/>
+                <a:spcPct val="87383"/>
               </a:lnSpc>
               <a:buNone/>
             </a:pPr>
@@ -6798,9 +6682,9 @@
                 <a:solidFill>
                   <a:srgbClr val="16232B"/>
                 </a:solidFill>
-                <a:latin typeface="Arial" pitchFamily="34" charset="0"/>
-                <a:ea typeface="Arial" pitchFamily="34" charset="-122"/>
-                <a:cs typeface="Arial" pitchFamily="34" charset="-120"/>
+                <a:latin typeface="Golos Text" pitchFamily="34" charset="0"/>
+                <a:ea typeface="Golos Text" pitchFamily="34" charset="-122"/>
+                <a:cs typeface="Golos Text" pitchFamily="34" charset="-120"/>
               </a:rPr>
               <a:t>Каждый риск закрыт решением</a:t>
             </a:r>
@@ -6816,7 +6700,7 @@
         </p:nvSpPr>
         <p:spPr>
           <a:xfrm>
-            <a:off x="1047750" y="3428702"/>
+            <a:off x="1047750" y="3435846"/>
             <a:ext cx="16192500" cy="924818"/>
           </a:xfrm>
           <a:prstGeom prst="roundRect">
@@ -6834,10 +6718,6 @@
             <a:prstDash val="solid"/>
           </a:ln>
         </p:spPr>
-        <p:txBody>
-          <a:bodyPr/>
-          <a:p/>
-        </p:txBody>
       </p:sp>
       <p:sp>
         <p:nvSpPr>
@@ -6847,7 +6727,7 @@
         </p:nvSpPr>
         <p:spPr>
           <a:xfrm>
-            <a:off x="1438275" y="3723977"/>
+            <a:off x="1438275" y="3731121"/>
             <a:ext cx="8308658" cy="372368"/>
           </a:xfrm>
           <a:prstGeom prst="rect">
@@ -6864,7 +6744,7 @@
           <a:p>
             <a:pPr algn="l" indent="0" marL="0">
               <a:lnSpc>
-                <a:spcPct val="117000"/>
+                <a:spcPct val="113226"/>
               </a:lnSpc>
               <a:buNone/>
             </a:pPr>
@@ -6873,9 +6753,9 @@
                 <a:solidFill>
                   <a:srgbClr val="16232B"/>
                 </a:solidFill>
-                <a:latin typeface="Arial" pitchFamily="34" charset="0"/>
-                <a:ea typeface="Arial" pitchFamily="34" charset="-122"/>
-                <a:cs typeface="Arial" pitchFamily="34" charset="-120"/>
+                <a:latin typeface="Golos Text" pitchFamily="34" charset="0"/>
+                <a:ea typeface="Golos Text" pitchFamily="34" charset="-122"/>
+                <a:cs typeface="Golos Text" pitchFamily="34" charset="-120"/>
               </a:rPr>
               <a:t>Завод не даёт доступ к данным или документацию</a:t>
             </a:r>
@@ -6891,7 +6771,7 @@
         </p:nvSpPr>
         <p:spPr>
           <a:xfrm>
-            <a:off x="9296400" y="3731121"/>
+            <a:off x="9296400" y="3738265"/>
             <a:ext cx="8308658" cy="358080"/>
           </a:xfrm>
           <a:prstGeom prst="rect">
@@ -6908,7 +6788,7 @@
           <a:p>
             <a:pPr algn="l" indent="0" marL="0">
               <a:lnSpc>
-                <a:spcPct val="122182"/>
+                <a:spcPct val="115862"/>
               </a:lnSpc>
               <a:buNone/>
             </a:pPr>
@@ -6917,9 +6797,9 @@
                 <a:solidFill>
                   <a:srgbClr val="42504A"/>
                 </a:solidFill>
-                <a:latin typeface="Arial" pitchFamily="34" charset="0"/>
-                <a:ea typeface="Arial" pitchFamily="34" charset="-122"/>
-                <a:cs typeface="Arial" pitchFamily="34" charset="-120"/>
+                <a:latin typeface="Golos Text" pitchFamily="34" charset="0"/>
+                <a:ea typeface="Golos Text" pitchFamily="34" charset="-122"/>
+                <a:cs typeface="Golos Text" pitchFamily="34" charset="-120"/>
               </a:rPr>
               <a:t>Проверка до предоплаты — условие контракта, а не пожелание</a:t>
             </a:r>
@@ -6935,7 +6815,7 @@
         </p:nvSpPr>
         <p:spPr>
           <a:xfrm>
-            <a:off x="1047750" y="4544020"/>
+            <a:off x="1047750" y="4551164"/>
             <a:ext cx="16192500" cy="1230511"/>
           </a:xfrm>
           <a:prstGeom prst="roundRect">
@@ -6953,10 +6833,6 @@
             <a:prstDash val="solid"/>
           </a:ln>
         </p:spPr>
-        <p:txBody>
-          <a:bodyPr/>
-          <a:p/>
-        </p:txBody>
       </p:sp>
       <p:sp>
         <p:nvSpPr>
@@ -6966,7 +6842,7 @@
         </p:nvSpPr>
         <p:spPr>
           <a:xfrm>
-            <a:off x="1438275" y="4992142"/>
+            <a:off x="1438275" y="4999286"/>
             <a:ext cx="8308658" cy="372368"/>
           </a:xfrm>
           <a:prstGeom prst="rect">
@@ -6983,7 +6859,7 @@
           <a:p>
             <a:pPr algn="l" indent="0" marL="0">
               <a:lnSpc>
-                <a:spcPct val="117000"/>
+                <a:spcPct val="113226"/>
               </a:lnSpc>
               <a:buNone/>
             </a:pPr>
@@ -6992,9 +6868,9 @@
                 <a:solidFill>
                   <a:srgbClr val="16232B"/>
                 </a:solidFill>
-                <a:latin typeface="Arial" pitchFamily="34" charset="0"/>
-                <a:ea typeface="Arial" pitchFamily="34" charset="-122"/>
-                <a:cs typeface="Arial" pitchFamily="34" charset="-120"/>
+                <a:latin typeface="Golos Text" pitchFamily="34" charset="0"/>
+                <a:ea typeface="Golos Text" pitchFamily="34" charset="-122"/>
+                <a:cs typeface="Golos Text" pitchFamily="34" charset="-120"/>
               </a:rPr>
               <a:t>Регистрация затянется дольше 18 месяцев</a:t>
             </a:r>
@@ -7010,7 +6886,7 @@
         </p:nvSpPr>
         <p:spPr>
           <a:xfrm>
-            <a:off x="9296400" y="4839295"/>
+            <a:off x="9296400" y="4846439"/>
             <a:ext cx="7779925" cy="678061"/>
           </a:xfrm>
           <a:prstGeom prst="rect">
@@ -7027,7 +6903,7 @@
           <a:p>
             <a:pPr algn="l" indent="0" marL="0">
               <a:lnSpc>
-                <a:spcPct val="122182"/>
+                <a:spcPct val="115862"/>
               </a:lnSpc>
               <a:buNone/>
             </a:pPr>
@@ -7036,9 +6912,9 @@
                 <a:solidFill>
                   <a:srgbClr val="42504A"/>
                 </a:solidFill>
-                <a:latin typeface="Arial" pitchFamily="34" charset="0"/>
-                <a:ea typeface="Arial" pitchFamily="34" charset="-122"/>
-                <a:cs typeface="Arial" pitchFamily="34" charset="-120"/>
+                <a:latin typeface="Golos Text" pitchFamily="34" charset="0"/>
+                <a:ea typeface="Golos Text" pitchFamily="34" charset="-122"/>
+                <a:cs typeface="Golos Text" pitchFamily="34" charset="-120"/>
               </a:rPr>
               <a:t>Завод с европейским сертификатом открывает ускоренную экспертизу</a:t>
             </a:r>
@@ -7054,7 +6930,7 @@
         </p:nvSpPr>
         <p:spPr>
           <a:xfrm>
-            <a:off x="1047750" y="5965031"/>
+            <a:off x="1047750" y="5972175"/>
             <a:ext cx="16192500" cy="1230511"/>
           </a:xfrm>
           <a:prstGeom prst="roundRect">
@@ -7072,10 +6948,6 @@
             <a:prstDash val="solid"/>
           </a:ln>
         </p:spPr>
-        <p:txBody>
-          <a:bodyPr/>
-          <a:p/>
-        </p:txBody>
       </p:sp>
       <p:sp>
         <p:nvSpPr>
@@ -7085,7 +6957,7 @@
         </p:nvSpPr>
         <p:spPr>
           <a:xfrm>
-            <a:off x="1438275" y="6413153"/>
+            <a:off x="1438275" y="6420296"/>
             <a:ext cx="8308658" cy="372368"/>
           </a:xfrm>
           <a:prstGeom prst="rect">
@@ -7102,7 +6974,7 @@
           <a:p>
             <a:pPr algn="l" indent="0" marL="0">
               <a:lnSpc>
-                <a:spcPct val="117000"/>
+                <a:spcPct val="113226"/>
               </a:lnSpc>
               <a:buNone/>
             </a:pPr>
@@ -7111,9 +6983,9 @@
                 <a:solidFill>
                   <a:srgbClr val="16232B"/>
                 </a:solidFill>
-                <a:latin typeface="Arial" pitchFamily="34" charset="0"/>
-                <a:ea typeface="Arial" pitchFamily="34" charset="-122"/>
-                <a:cs typeface="Arial" pitchFamily="34" charset="-120"/>
+                <a:latin typeface="Golos Text" pitchFamily="34" charset="0"/>
+                <a:ea typeface="Golos Text" pitchFamily="34" charset="-122"/>
+                <a:cs typeface="Golos Text" pitchFamily="34" charset="-120"/>
               </a:rPr>
               <a:t>Поликлиники не станут закупать браслеты</a:t>
             </a:r>
@@ -7129,7 +7001,7 @@
         </p:nvSpPr>
         <p:spPr>
           <a:xfrm>
-            <a:off x="9296400" y="6260306"/>
+            <a:off x="9296400" y="6267450"/>
             <a:ext cx="7779925" cy="678061"/>
           </a:xfrm>
           <a:prstGeom prst="rect">
@@ -7146,7 +7018,7 @@
           <a:p>
             <a:pPr algn="l" indent="0" marL="0">
               <a:lnSpc>
-                <a:spcPct val="122182"/>
+                <a:spcPct val="115862"/>
               </a:lnSpc>
               <a:buNone/>
             </a:pPr>
@@ -7155,9 +7027,9 @@
                 <a:solidFill>
                   <a:srgbClr val="42504A"/>
                 </a:solidFill>
-                <a:latin typeface="Arial" pitchFamily="34" charset="0"/>
-                <a:ea typeface="Arial" pitchFamily="34" charset="-122"/>
-                <a:cs typeface="Arial" pitchFamily="34" charset="-120"/>
+                <a:latin typeface="Golos Text" pitchFamily="34" charset="0"/>
+                <a:ea typeface="Golos Text" pitchFamily="34" charset="-122"/>
+                <a:cs typeface="Golos Text" pitchFamily="34" charset="-120"/>
               </a:rPr>
               <a:t>Наблюдение бесплатно; барьер железа снимает рассрочка 640 ₸/мес и обязанность по приказу ДСМ-39</a:t>
             </a:r>
@@ -7173,7 +7045,7 @@
         </p:nvSpPr>
         <p:spPr>
           <a:xfrm>
-            <a:off x="1047750" y="7386042"/>
+            <a:off x="1047750" y="7393186"/>
             <a:ext cx="16192500" cy="1230511"/>
           </a:xfrm>
           <a:prstGeom prst="roundRect">
@@ -7191,10 +7063,6 @@
             <a:prstDash val="solid"/>
           </a:ln>
         </p:spPr>
-        <p:txBody>
-          <a:bodyPr/>
-          <a:p/>
-        </p:txBody>
       </p:sp>
       <p:sp>
         <p:nvSpPr>
@@ -7204,7 +7072,7 @@
         </p:nvSpPr>
         <p:spPr>
           <a:xfrm>
-            <a:off x="1438275" y="7834164"/>
+            <a:off x="1438275" y="7841307"/>
             <a:ext cx="8308658" cy="372368"/>
           </a:xfrm>
           <a:prstGeom prst="rect">
@@ -7221,7 +7089,7 @@
           <a:p>
             <a:pPr algn="l" indent="0" marL="0">
               <a:lnSpc>
-                <a:spcPct val="117000"/>
+                <a:spcPct val="113226"/>
               </a:lnSpc>
               <a:buNone/>
             </a:pPr>
@@ -7230,9 +7098,9 @@
                 <a:solidFill>
                   <a:srgbClr val="16232B"/>
                 </a:solidFill>
-                <a:latin typeface="Arial" pitchFamily="34" charset="0"/>
-                <a:ea typeface="Arial" pitchFamily="34" charset="-122"/>
-                <a:cs typeface="Arial" pitchFamily="34" charset="-120"/>
+                <a:latin typeface="Golos Text" pitchFamily="34" charset="0"/>
+                <a:ea typeface="Golos Text" pitchFamily="34" charset="-122"/>
+                <a:cs typeface="Golos Text" pitchFamily="34" charset="-120"/>
               </a:rPr>
               <a:t>Закупочная цена окажется выше плана</a:t>
             </a:r>
@@ -7248,7 +7116,7 @@
         </p:nvSpPr>
         <p:spPr>
           <a:xfrm>
-            <a:off x="9296400" y="7681317"/>
+            <a:off x="9296400" y="7688461"/>
             <a:ext cx="7779925" cy="678061"/>
           </a:xfrm>
           <a:prstGeom prst="rect">
@@ -7265,7 +7133,7 @@
           <a:p>
             <a:pPr algn="l" indent="0" marL="0">
               <a:lnSpc>
-                <a:spcPct val="122182"/>
+                <a:spcPct val="115862"/>
               </a:lnSpc>
               <a:buNone/>
             </a:pPr>
@@ -7274,9 +7142,9 @@
                 <a:solidFill>
                   <a:srgbClr val="42504A"/>
                 </a:solidFill>
-                <a:latin typeface="Arial" pitchFamily="34" charset="0"/>
-                <a:ea typeface="Arial" pitchFamily="34" charset="-122"/>
-                <a:cs typeface="Arial" pitchFamily="34" charset="-120"/>
+                <a:latin typeface="Golos Text" pitchFamily="34" charset="0"/>
+                <a:ea typeface="Golos Text" pitchFamily="34" charset="-122"/>
+                <a:cs typeface="Golos Text" pitchFamily="34" charset="-120"/>
               </a:rPr>
               <a:t>Запас цены держит до $11,5; выше — розница 19 990 ₸, всё равно ниже Xiaomi</a:t>
             </a:r>
@@ -7324,8 +7192,8 @@
         </p:nvSpPr>
         <p:spPr>
           <a:xfrm>
-            <a:off x="1047750" y="1583308"/>
-            <a:ext cx="9603038" cy="2653159"/>
+            <a:off x="1047750" y="1569021"/>
+            <a:ext cx="11568790" cy="2653159"/>
           </a:xfrm>
           <a:prstGeom prst="rect">
             <a:avLst/>
@@ -7341,7 +7209,7 @@
           <a:p>
             <a:pPr algn="l" indent="0" marL="0">
               <a:lnSpc>
-                <a:spcPct val="90614"/>
+                <a:spcPct val="86749"/>
               </a:lnSpc>
               <a:buNone/>
             </a:pPr>
@@ -7350,9 +7218,9 @@
                 <a:solidFill>
                   <a:srgbClr val="F2F7F4"/>
                 </a:solidFill>
-                <a:latin typeface="Arial" pitchFamily="34" charset="0"/>
-                <a:ea typeface="Arial" pitchFamily="34" charset="-122"/>
-                <a:cs typeface="Arial" pitchFamily="34" charset="-120"/>
+                <a:latin typeface="Golos Text" pitchFamily="34" charset="0"/>
+                <a:ea typeface="Golos Text" pitchFamily="34" charset="-122"/>
+                <a:cs typeface="Golos Text" pitchFamily="34" charset="-120"/>
               </a:rPr>
               <a:t>Позиция, которую в Казахстане не занял никто</a:t>
             </a:r>
@@ -7368,8 +7236,8 @@
         </p:nvSpPr>
         <p:spPr>
           <a:xfrm>
-            <a:off x="1047750" y="4865117"/>
-            <a:ext cx="5015203" cy="695325"/>
+            <a:off x="1047750" y="4850829"/>
+            <a:ext cx="5015203" cy="723900"/>
           </a:xfrm>
           <a:prstGeom prst="rect">
             <a:avLst/>
@@ -7391,9 +7259,9 @@
                 <a:solidFill>
                   <a:srgbClr val="3ECF8E"/>
                 </a:solidFill>
-                <a:latin typeface="Arial" pitchFamily="34" charset="0"/>
-                <a:ea typeface="Arial" pitchFamily="34" charset="-122"/>
-                <a:cs typeface="Arial" pitchFamily="34" charset="-120"/>
+                <a:latin typeface="Golos Text" pitchFamily="34" charset="0"/>
+                <a:ea typeface="Golos Text" pitchFamily="34" charset="-122"/>
+                <a:cs typeface="Golos Text" pitchFamily="34" charset="-120"/>
               </a:rPr>
               <a:t>Первые</a:t>
             </a:r>
@@ -7409,7 +7277,7 @@
         </p:nvSpPr>
         <p:spPr>
           <a:xfrm>
-            <a:off x="1047750" y="5636642"/>
+            <a:off x="1047750" y="5650929"/>
             <a:ext cx="4696053" cy="704850"/>
           </a:xfrm>
           <a:prstGeom prst="rect">
@@ -7426,7 +7294,7 @@
           <a:p>
             <a:pPr algn="l" indent="0" marL="0">
               <a:lnSpc>
-                <a:spcPct val="120690"/>
+                <a:spcPct val="116667"/>
               </a:lnSpc>
               <a:buNone/>
             </a:pPr>
@@ -7435,9 +7303,9 @@
                 <a:solidFill>
                   <a:srgbClr val="CFE7DB"/>
                 </a:solidFill>
-                <a:latin typeface="Arial" pitchFamily="34" charset="0"/>
-                <a:ea typeface="Arial" pitchFamily="34" charset="-122"/>
-                <a:cs typeface="Arial" pitchFamily="34" charset="-120"/>
+                <a:latin typeface="Golos Text" pitchFamily="34" charset="0"/>
+                <a:ea typeface="Golos Text" pitchFamily="34" charset="-122"/>
+                <a:cs typeface="Golos Text" pitchFamily="34" charset="-120"/>
               </a:rPr>
               <a:t>носимое устройство со статусом медизделия на рынке РК</a:t>
             </a:r>
@@ -7453,8 +7321,8 @@
         </p:nvSpPr>
         <p:spPr>
           <a:xfrm>
-            <a:off x="5911825" y="4865117"/>
-            <a:ext cx="5015203" cy="695325"/>
+            <a:off x="5911825" y="4850829"/>
+            <a:ext cx="5015203" cy="723900"/>
           </a:xfrm>
           <a:prstGeom prst="rect">
             <a:avLst/>
@@ -7476,9 +7344,9 @@
                 <a:solidFill>
                   <a:srgbClr val="3ECF8E"/>
                 </a:solidFill>
-                <a:latin typeface="Arial" pitchFamily="34" charset="0"/>
-                <a:ea typeface="Arial" pitchFamily="34" charset="-122"/>
-                <a:cs typeface="Arial" pitchFamily="34" charset="-120"/>
+                <a:latin typeface="Golos Text" pitchFamily="34" charset="0"/>
+                <a:ea typeface="Golos Text" pitchFamily="34" charset="-122"/>
+                <a:cs typeface="Golos Text" pitchFamily="34" charset="-120"/>
               </a:rPr>
               <a:t>&lt; 2 лет</a:t>
             </a:r>
@@ -7494,7 +7362,7 @@
         </p:nvSpPr>
         <p:spPr>
           <a:xfrm>
-            <a:off x="5911825" y="5636642"/>
+            <a:off x="5911825" y="5650929"/>
             <a:ext cx="4696053" cy="704850"/>
           </a:xfrm>
           <a:prstGeom prst="rect">
@@ -7511,7 +7379,7 @@
           <a:p>
             <a:pPr algn="l" indent="0" marL="0">
               <a:lnSpc>
-                <a:spcPct val="120690"/>
+                <a:spcPct val="116667"/>
               </a:lnSpc>
               <a:buNone/>
             </a:pPr>
@@ -7520,9 +7388,9 @@
                 <a:solidFill>
                   <a:srgbClr val="CFE7DB"/>
                 </a:solidFill>
-                <a:latin typeface="Arial" pitchFamily="34" charset="0"/>
-                <a:ea typeface="Arial" pitchFamily="34" charset="-122"/>
-                <a:cs typeface="Arial" pitchFamily="34" charset="-120"/>
+                <a:latin typeface="Golos Text" pitchFamily="34" charset="0"/>
+                <a:ea typeface="Golos Text" pitchFamily="34" charset="-122"/>
+                <a:cs typeface="Golos Text" pitchFamily="34" charset="-120"/>
               </a:rPr>
               <a:t>окупаемость первой партии от подписания контракта</a:t>
             </a:r>
@@ -7538,8 +7406,8 @@
         </p:nvSpPr>
         <p:spPr>
           <a:xfrm>
-            <a:off x="10775900" y="4865117"/>
-            <a:ext cx="5015203" cy="695325"/>
+            <a:off x="10775900" y="4850829"/>
+            <a:ext cx="5015203" cy="723900"/>
           </a:xfrm>
           <a:prstGeom prst="rect">
             <a:avLst/>
@@ -7561,9 +7429,9 @@
                 <a:solidFill>
                   <a:srgbClr val="3ECF8E"/>
                 </a:solidFill>
-                <a:latin typeface="Arial" pitchFamily="34" charset="0"/>
-                <a:ea typeface="Arial" pitchFamily="34" charset="-122"/>
-                <a:cs typeface="Arial" pitchFamily="34" charset="-120"/>
+                <a:latin typeface="Golos Text" pitchFamily="34" charset="0"/>
+                <a:ea typeface="Golos Text" pitchFamily="34" charset="-122"/>
+                <a:cs typeface="Golos Text" pitchFamily="34" charset="-120"/>
               </a:rPr>
               <a:t>Барьер</a:t>
             </a:r>
@@ -7579,7 +7447,7 @@
         </p:nvSpPr>
         <p:spPr>
           <a:xfrm>
-            <a:off x="10775900" y="5636642"/>
+            <a:off x="10775900" y="5650929"/>
             <a:ext cx="4696053" cy="704850"/>
           </a:xfrm>
           <a:prstGeom prst="rect">
@@ -7596,7 +7464,7 @@
           <a:p>
             <a:pPr algn="l" indent="0" marL="0">
               <a:lnSpc>
-                <a:spcPct val="120690"/>
+                <a:spcPct val="116667"/>
               </a:lnSpc>
               <a:buNone/>
             </a:pPr>
@@ -7605,9 +7473,9 @@
                 <a:solidFill>
                   <a:srgbClr val="CFE7DB"/>
                 </a:solidFill>
-                <a:latin typeface="Arial" pitchFamily="34" charset="0"/>
-                <a:ea typeface="Arial" pitchFamily="34" charset="-122"/>
-                <a:cs typeface="Arial" pitchFamily="34" charset="-120"/>
+                <a:latin typeface="Golos Text" pitchFamily="34" charset="0"/>
+                <a:ea typeface="Golos Text" pitchFamily="34" charset="-122"/>
+                <a:cs typeface="Golos Text" pitchFamily="34" charset="-120"/>
               </a:rPr>
               <a:t>удостоверение и интеграция с МИС — 18 месяцев для любого конкурента</a:t>
             </a:r>
@@ -7623,7 +7491,7 @@
         </p:nvSpPr>
         <p:spPr>
           <a:xfrm>
-            <a:off x="1047750" y="7065392"/>
+            <a:off x="1047750" y="7079679"/>
             <a:ext cx="7920930" cy="9525"/>
           </a:xfrm>
           <a:prstGeom prst="rect">
@@ -7636,10 +7504,6 @@
           </a:solidFill>
           <a:ln/>
         </p:spPr>
-        <p:txBody>
-          <a:bodyPr/>
-          <a:p/>
-        </p:txBody>
       </p:sp>
       <p:sp>
         <p:nvSpPr>
@@ -7649,7 +7513,7 @@
         </p:nvSpPr>
         <p:spPr>
           <a:xfrm>
-            <a:off x="1047750" y="7417817"/>
+            <a:off x="1047750" y="7432104"/>
             <a:ext cx="8158558" cy="1323975"/>
           </a:xfrm>
           <a:prstGeom prst="rect">
@@ -7666,7 +7530,7 @@
           <a:p>
             <a:pPr algn="l" indent="0" marL="0">
               <a:lnSpc>
-                <a:spcPct val="130435"/>
+                <a:spcPct val="125000"/>
               </a:lnSpc>
               <a:buNone/>
             </a:pPr>
@@ -7675,11 +7539,11 @@
                 <a:solidFill>
                   <a:srgbClr val="8FBBA3"/>
                 </a:solidFill>
-                <a:latin typeface="Arial" pitchFamily="34" charset="0"/>
-                <a:ea typeface="Arial" pitchFamily="34" charset="-122"/>
-                <a:cs typeface="Arial" pitchFamily="34" charset="-120"/>
-              </a:rPr>
-              <a:t>Damumed Band — дистанционное наблюдение за цену, которая не требует раздумий, и повторная выручка, которая не заканчивается вместе с партией.</a:t>
+                <a:latin typeface="Golos Text" pitchFamily="34" charset="0"/>
+                <a:ea typeface="Golos Text" pitchFamily="34" charset="-122"/>
+                <a:cs typeface="Golos Text" pitchFamily="34" charset="-120"/>
+              </a:rPr>
+              <a:t>Damumed Band — медицинский надзор за цену, которая не требует раздумий, и повторная выручка, которая не заканчивается вместе с партией.</a:t>
             </a:r>
             <a:endParaRPr lang="en-US" sz="2250" dirty="0"/>
           </a:p>
@@ -7725,12 +7589,12 @@
         </p:nvSpPr>
         <p:spPr>
           <a:xfrm>
-            <a:off x="1047750" y="2127052"/>
-            <a:ext cx="2168054" cy="414338"/>
+            <a:off x="1047750" y="1774924"/>
+            <a:ext cx="2240979" cy="428625"/>
           </a:xfrm>
           <a:prstGeom prst="roundRect">
             <a:avLst>
-              <a:gd name="adj" fmla="val 22988"/>
+              <a:gd name="adj" fmla="val 22222"/>
             </a:avLst>
           </a:prstGeom>
           <a:solidFill>
@@ -7738,10 +7602,6 @@
           </a:solidFill>
           <a:ln/>
         </p:spPr>
-        <p:txBody>
-          <a:bodyPr/>
-          <a:p/>
-        </p:txBody>
       </p:sp>
       <p:sp>
         <p:nvSpPr>
@@ -7751,8 +7611,8 @@
         </p:nvSpPr>
         <p:spPr>
           <a:xfrm>
-            <a:off x="1219200" y="2203252"/>
-            <a:ext cx="1901354" cy="300038"/>
+            <a:off x="1219200" y="1851124"/>
+            <a:ext cx="1974279" cy="314325"/>
           </a:xfrm>
           <a:prstGeom prst="rect">
             <a:avLst/>
@@ -7774,9 +7634,9 @@
                 <a:solidFill>
                   <a:srgbClr val="0E7A50"/>
                 </a:solidFill>
-                <a:latin typeface="Arial" pitchFamily="34" charset="0"/>
-                <a:ea typeface="Arial" pitchFamily="34" charset="-122"/>
-                <a:cs typeface="Arial" pitchFamily="34" charset="-120"/>
+                <a:latin typeface="Golos Text" pitchFamily="34" charset="0"/>
+                <a:ea typeface="Golos Text" pitchFamily="34" charset="-122"/>
+                <a:cs typeface="Golos Text" pitchFamily="34" charset="-120"/>
               </a:rPr>
               <a:t>Раздел 01 · Идея</a:t>
             </a:r>
@@ -7792,8 +7652,8 @@
         </p:nvSpPr>
         <p:spPr>
           <a:xfrm>
-            <a:off x="1047750" y="2789039"/>
-            <a:ext cx="7946708" cy="1437084"/>
+            <a:off x="1047750" y="2451199"/>
+            <a:ext cx="7946708" cy="2136577"/>
           </a:xfrm>
           <a:prstGeom prst="rect">
             <a:avLst/>
@@ -7809,7 +7669,7 @@
           <a:p>
             <a:pPr algn="l" indent="0" marL="0">
               <a:lnSpc>
-                <a:spcPct val="94154"/>
+                <a:spcPct val="90110"/>
               </a:lnSpc>
               <a:buNone/>
             </a:pPr>
@@ -7818,9 +7678,9 @@
                 <a:solidFill>
                   <a:srgbClr val="16232B"/>
                 </a:solidFill>
-                <a:latin typeface="Arial" pitchFamily="34" charset="0"/>
-                <a:ea typeface="Arial" pitchFamily="34" charset="-122"/>
-                <a:cs typeface="Arial" pitchFamily="34" charset="-120"/>
+                <a:latin typeface="Golos Text" pitchFamily="34" charset="0"/>
+                <a:ea typeface="Golos Text" pitchFamily="34" charset="-122"/>
+                <a:cs typeface="Golos Text" pitchFamily="34" charset="-120"/>
               </a:rPr>
               <a:t>Врач рядом каждый день, а не 15 минут в месяц</a:t>
             </a:r>
@@ -7836,7 +7696,7 @@
         </p:nvSpPr>
         <p:spPr>
           <a:xfrm>
-            <a:off x="1047750" y="4511873"/>
+            <a:off x="1047750" y="4873526"/>
             <a:ext cx="5839312" cy="1323975"/>
           </a:xfrm>
           <a:prstGeom prst="rect">
@@ -7853,7 +7713,7 @@
           <a:p>
             <a:pPr algn="l" indent="0" marL="0">
               <a:lnSpc>
-                <a:spcPct val="130435"/>
+                <a:spcPct val="125000"/>
               </a:lnSpc>
               <a:buNone/>
             </a:pPr>
@@ -7862,9 +7722,9 @@
                 <a:solidFill>
                   <a:srgbClr val="42504A"/>
                 </a:solidFill>
-                <a:latin typeface="Arial" pitchFamily="34" charset="0"/>
-                <a:ea typeface="Arial" pitchFamily="34" charset="-122"/>
-                <a:cs typeface="Arial" pitchFamily="34" charset="-120"/>
+                <a:latin typeface="Golos Text" pitchFamily="34" charset="0"/>
+                <a:ea typeface="Golos Text" pitchFamily="34" charset="-122"/>
+                <a:cs typeface="Golos Text" pitchFamily="34" charset="-120"/>
               </a:rPr>
               <a:t>Датчик на руке → данные в медкарте → врач замечает ухудшение за несколько дней до обострения.</a:t>
             </a:r>
@@ -7880,7 +7740,7 @@
         </p:nvSpPr>
         <p:spPr>
           <a:xfrm>
-            <a:off x="1047750" y="6293048"/>
+            <a:off x="1047750" y="6654701"/>
             <a:ext cx="114300" cy="114300"/>
           </a:xfrm>
           <a:prstGeom prst="ellipse">
@@ -7891,10 +7751,6 @@
           </a:solidFill>
           <a:ln/>
         </p:spPr>
-        <p:txBody>
-          <a:bodyPr/>
-          <a:p/>
-        </p:txBody>
       </p:sp>
       <p:sp>
         <p:nvSpPr>
@@ -7904,7 +7760,7 @@
         </p:nvSpPr>
         <p:spPr>
           <a:xfrm>
-            <a:off x="1314450" y="6178748"/>
+            <a:off x="1314450" y="6540401"/>
             <a:ext cx="7672007" cy="704850"/>
           </a:xfrm>
           <a:prstGeom prst="rect">
@@ -7921,7 +7777,7 @@
           <a:p>
             <a:pPr algn="l" indent="0" marL="0">
               <a:lnSpc>
-                <a:spcPct val="120690"/>
+                <a:spcPct val="116667"/>
               </a:lnSpc>
               <a:buNone/>
             </a:pPr>
@@ -7930,9 +7786,9 @@
                 <a:solidFill>
                   <a:srgbClr val="33403A"/>
                 </a:solidFill>
-                <a:latin typeface="Arial" pitchFamily="34" charset="0"/>
-                <a:ea typeface="Arial" pitchFamily="34" charset="-122"/>
-                <a:cs typeface="Arial" pitchFamily="34" charset="-120"/>
+                <a:latin typeface="Golos Text" pitchFamily="34" charset="0"/>
+                <a:ea typeface="Golos Text" pitchFamily="34" charset="-122"/>
+                <a:cs typeface="Golos Text" pitchFamily="34" charset="-120"/>
               </a:rPr>
               <a:t>У Damumed уже есть приложение, медкарта и рабочее место врача — не хватает датчика</a:t>
             </a:r>
@@ -7948,7 +7804,7 @@
         </p:nvSpPr>
         <p:spPr>
           <a:xfrm>
-            <a:off x="1047750" y="7112198"/>
+            <a:off x="1047750" y="7473851"/>
             <a:ext cx="114300" cy="114300"/>
           </a:xfrm>
           <a:prstGeom prst="ellipse">
@@ -7959,10 +7815,6 @@
           </a:solidFill>
           <a:ln/>
         </p:spPr>
-        <p:txBody>
-          <a:bodyPr/>
-          <a:p/>
-        </p:txBody>
       </p:sp>
       <p:sp>
         <p:nvSpPr>
@@ -7972,8 +7824,8 @@
         </p:nvSpPr>
         <p:spPr>
           <a:xfrm>
-            <a:off x="1314450" y="6997898"/>
-            <a:ext cx="7672007" cy="714375"/>
+            <a:off x="1314450" y="7359551"/>
+            <a:ext cx="7672007" cy="704850"/>
           </a:xfrm>
           <a:prstGeom prst="rect">
             <a:avLst/>
@@ -7989,7 +7841,7 @@
           <a:p>
             <a:pPr algn="l" indent="0" marL="0">
               <a:lnSpc>
-                <a:spcPct val="120690"/>
+                <a:spcPct val="116667"/>
               </a:lnSpc>
               <a:buNone/>
             </a:pPr>
@@ -7998,15 +7850,15 @@
                 <a:solidFill>
                   <a:srgbClr val="33403A"/>
                 </a:solidFill>
-                <a:latin typeface="Arial" pitchFamily="34" charset="0"/>
-                <a:ea typeface="Arial" pitchFamily="34" charset="-122"/>
-                <a:cs typeface="Arial" pitchFamily="34" charset="-120"/>
+                <a:latin typeface="Golos Text" pitchFamily="34" charset="0"/>
+                <a:ea typeface="Golos Text" pitchFamily="34" charset="-122"/>
+                <a:cs typeface="Golos Text" pitchFamily="34" charset="-120"/>
               </a:rPr>
               <a:t>Регистрируем как </a:t>
             </a:r>
             <a:pPr algn="l" indent="0" marL="0">
               <a:lnSpc>
-                <a:spcPct val="120690"/>
+                <a:spcPct val="116667"/>
               </a:lnSpc>
               <a:buNone/>
             </a:pPr>
@@ -8015,15 +7867,15 @@
                 <a:solidFill>
                   <a:srgbClr val="33403A"/>
                 </a:solidFill>
-                <a:latin typeface="Arial" pitchFamily="34" charset="0"/>
-                <a:ea typeface="Arial" pitchFamily="34" charset="-122"/>
-                <a:cs typeface="Arial" pitchFamily="34" charset="-120"/>
+                <a:latin typeface="Golos Text" pitchFamily="34" charset="0"/>
+                <a:ea typeface="Golos Text" pitchFamily="34" charset="-122"/>
+                <a:cs typeface="Golos Text" pitchFamily="34" charset="-120"/>
               </a:rPr>
               <a:t>медицинское изделие </a:t>
             </a:r>
             <a:pPr algn="l" indent="0" marL="0">
               <a:lnSpc>
-                <a:spcPct val="120690"/>
+                <a:spcPct val="116667"/>
               </a:lnSpc>
               <a:buNone/>
             </a:pPr>
@@ -8032,9 +7884,9 @@
                 <a:solidFill>
                   <a:srgbClr val="33403A"/>
                 </a:solidFill>
-                <a:latin typeface="Arial" pitchFamily="34" charset="0"/>
-                <a:ea typeface="Arial" pitchFamily="34" charset="-122"/>
-                <a:cs typeface="Arial" pitchFamily="34" charset="-120"/>
+                <a:latin typeface="Golos Text" pitchFamily="34" charset="0"/>
+                <a:ea typeface="Golos Text" pitchFamily="34" charset="-122"/>
+                <a:cs typeface="Golos Text" pitchFamily="34" charset="-120"/>
               </a:rPr>
               <a:t>, держатель — Damumed</a:t>
             </a:r>
@@ -8050,7 +7902,7 @@
         </p:nvSpPr>
         <p:spPr>
           <a:xfrm>
-            <a:off x="1047750" y="7940873"/>
+            <a:off x="1047750" y="8293001"/>
             <a:ext cx="114300" cy="114300"/>
           </a:xfrm>
           <a:prstGeom prst="ellipse">
@@ -8061,10 +7913,6 @@
           </a:solidFill>
           <a:ln/>
         </p:spPr>
-        <p:txBody>
-          <a:bodyPr/>
-          <a:p/>
-        </p:txBody>
       </p:sp>
       <p:sp>
         <p:nvSpPr>
@@ -8074,7 +7922,7 @@
         </p:nvSpPr>
         <p:spPr>
           <a:xfrm>
-            <a:off x="1314450" y="7826573"/>
+            <a:off x="1314450" y="8178701"/>
             <a:ext cx="8188166" cy="371475"/>
           </a:xfrm>
           <a:prstGeom prst="rect">
@@ -8091,7 +7939,7 @@
           <a:p>
             <a:pPr algn="l" indent="0" marL="0">
               <a:lnSpc>
-                <a:spcPct val="120690"/>
+                <a:spcPct val="116667"/>
               </a:lnSpc>
               <a:buNone/>
             </a:pPr>
@@ -8100,9 +7948,9 @@
                 <a:solidFill>
                   <a:srgbClr val="33403A"/>
                 </a:solidFill>
-                <a:latin typeface="Arial" pitchFamily="34" charset="0"/>
-                <a:ea typeface="Arial" pitchFamily="34" charset="-122"/>
-                <a:cs typeface="Arial" pitchFamily="34" charset="-120"/>
+                <a:latin typeface="Golos Text" pitchFamily="34" charset="0"/>
+                <a:ea typeface="Golos Text" pitchFamily="34" charset="-122"/>
+                <a:cs typeface="Golos Text" pitchFamily="34" charset="-120"/>
               </a:rPr>
               <a:t>Данные идут в приложение Damumed и на панель врача в МИС</a:t>
             </a:r>
@@ -8135,10 +7983,6 @@
             </a:outerShdw>
           </a:effectLst>
         </p:spPr>
-        <p:txBody>
-          <a:bodyPr/>
-          <a:p/>
-        </p:txBody>
       </p:sp>
       <p:pic>
         <p:nvPicPr>
@@ -8203,12 +8047,12 @@
         </p:nvSpPr>
         <p:spPr>
           <a:xfrm>
-            <a:off x="1047750" y="2162994"/>
-            <a:ext cx="1942802" cy="414338"/>
+            <a:off x="1047750" y="2148706"/>
+            <a:ext cx="2058144" cy="428625"/>
           </a:xfrm>
           <a:prstGeom prst="roundRect">
             <a:avLst>
-              <a:gd name="adj" fmla="val 22988"/>
+              <a:gd name="adj" fmla="val 22222"/>
             </a:avLst>
           </a:prstGeom>
           <a:solidFill>
@@ -8218,10 +8062,6 @@
           </a:solidFill>
           <a:ln/>
         </p:spPr>
-        <p:txBody>
-          <a:bodyPr/>
-          <a:p/>
-        </p:txBody>
       </p:sp>
       <p:sp>
         <p:nvSpPr>
@@ -8231,8 +8071,8 @@
         </p:nvSpPr>
         <p:spPr>
           <a:xfrm>
-            <a:off x="1219200" y="2239194"/>
-            <a:ext cx="1676102" cy="300038"/>
+            <a:off x="1219200" y="2224906"/>
+            <a:ext cx="1791444" cy="314325"/>
           </a:xfrm>
           <a:prstGeom prst="rect">
             <a:avLst/>
@@ -8254,9 +8094,9 @@
                 <a:solidFill>
                   <a:srgbClr val="BEDCCB"/>
                 </a:solidFill>
-                <a:latin typeface="Arial" pitchFamily="34" charset="0"/>
-                <a:ea typeface="Arial" pitchFamily="34" charset="-122"/>
-                <a:cs typeface="Arial" pitchFamily="34" charset="-120"/>
+                <a:latin typeface="Golos Text" pitchFamily="34" charset="0"/>
+                <a:ea typeface="Golos Text" pitchFamily="34" charset="-122"/>
+                <a:cs typeface="Golos Text" pitchFamily="34" charset="-120"/>
               </a:rPr>
               <a:t>Почему сейчас</a:t>
             </a:r>
@@ -8273,7 +8113,7 @@
         <p:spPr>
           <a:xfrm>
             <a:off x="1047750" y="2863081"/>
-            <a:ext cx="11632714" cy="1693813"/>
+            <a:ext cx="13804875" cy="1693813"/>
           </a:xfrm>
           <a:prstGeom prst="rect">
             <a:avLst/>
@@ -8289,7 +8129,7 @@
           <a:p>
             <a:pPr algn="l" indent="0" marL="0">
               <a:lnSpc>
-                <a:spcPct val="92468"/>
+                <a:spcPct val="88244"/>
               </a:lnSpc>
               <a:buNone/>
             </a:pPr>
@@ -8298,9 +8138,9 @@
                 <a:solidFill>
                   <a:srgbClr val="F2F7F4"/>
                 </a:solidFill>
-                <a:latin typeface="Arial" pitchFamily="34" charset="0"/>
-                <a:ea typeface="Arial" pitchFamily="34" charset="-122"/>
-                <a:cs typeface="Arial" pitchFamily="34" charset="-120"/>
+                <a:latin typeface="Golos Text" pitchFamily="34" charset="0"/>
+                <a:ea typeface="Golos Text" pitchFamily="34" charset="-122"/>
+                <a:cs typeface="Golos Text" pitchFamily="34" charset="-120"/>
               </a:rPr>
               <a:t>Норма вступает в силу — предложения на рынке нет</a:t>
             </a:r>
@@ -8317,11 +8157,11 @@
         <p:spPr>
           <a:xfrm>
             <a:off x="1047750" y="5128394"/>
-            <a:ext cx="7943850" cy="2995613"/>
+            <a:ext cx="7943850" cy="3009900"/>
           </a:xfrm>
           <a:prstGeom prst="roundRect">
             <a:avLst>
-              <a:gd name="adj" fmla="val 6359"/>
+              <a:gd name="adj" fmla="val 6329"/>
             </a:avLst>
           </a:prstGeom>
           <a:solidFill>
@@ -8334,10 +8174,6 @@
             <a:prstDash val="solid"/>
           </a:ln>
         </p:spPr>
-        <p:txBody>
-          <a:bodyPr/>
-          <a:p/>
-        </p:txBody>
       </p:sp>
       <p:sp>
         <p:nvSpPr>
@@ -8348,7 +8184,7 @@
         <p:spPr>
           <a:xfrm>
             <a:off x="1495425" y="5557019"/>
-            <a:ext cx="7753350" cy="500063"/>
+            <a:ext cx="7753350" cy="514350"/>
           </a:xfrm>
           <a:prstGeom prst="rect">
             <a:avLst/>
@@ -8370,9 +8206,9 @@
                 <a:solidFill>
                   <a:srgbClr val="3ECF8E"/>
                 </a:solidFill>
-                <a:latin typeface="Arial" pitchFamily="34" charset="0"/>
-                <a:ea typeface="Arial" pitchFamily="34" charset="-122"/>
-                <a:cs typeface="Arial" pitchFamily="34" charset="-120"/>
+                <a:latin typeface="Golos Text" pitchFamily="34" charset="0"/>
+                <a:ea typeface="Golos Text" pitchFamily="34" charset="-122"/>
+                <a:cs typeface="Golos Text" pitchFamily="34" charset="-120"/>
               </a:rPr>
               <a:t>Приказ № ҚР ДСМ-39</a:t>
             </a:r>
@@ -8388,7 +8224,7 @@
         </p:nvSpPr>
         <p:spPr>
           <a:xfrm>
-            <a:off x="1495425" y="6152331"/>
+            <a:off x="1495425" y="6166619"/>
             <a:ext cx="7259955" cy="1195388"/>
           </a:xfrm>
           <a:prstGeom prst="rect">
@@ -8405,7 +8241,7 @@
           <a:p>
             <a:pPr algn="l" indent="0" marL="0">
               <a:lnSpc>
-                <a:spcPct val="130645"/>
+                <a:spcPct val="124615"/>
               </a:lnSpc>
               <a:buNone/>
             </a:pPr>
@@ -8414,9 +8250,9 @@
                 <a:solidFill>
                   <a:srgbClr val="CFE7DB"/>
                 </a:solidFill>
-                <a:latin typeface="Arial" pitchFamily="34" charset="0"/>
-                <a:ea typeface="Arial" pitchFamily="34" charset="-122"/>
-                <a:cs typeface="Arial" pitchFamily="34" charset="-120"/>
+                <a:latin typeface="Golos Text" pitchFamily="34" charset="0"/>
+                <a:ea typeface="Golos Text" pitchFamily="34" charset="-122"/>
+                <a:cs typeface="Golos Text" pitchFamily="34" charset="-120"/>
               </a:rPr>
               <a:t>С 1 сентября 2026 года медорганизации обязаны применять носимые устройства и передавать показатели в цифровые системы.</a:t>
             </a:r>
@@ -8433,11 +8269,11 @@
         <p:spPr>
           <a:xfrm>
             <a:off x="9296400" y="5128394"/>
-            <a:ext cx="7943850" cy="2995613"/>
+            <a:ext cx="7943850" cy="3009900"/>
           </a:xfrm>
           <a:prstGeom prst="roundRect">
             <a:avLst>
-              <a:gd name="adj" fmla="val 6359"/>
+              <a:gd name="adj" fmla="val 6329"/>
             </a:avLst>
           </a:prstGeom>
           <a:solidFill>
@@ -8450,10 +8286,6 @@
             <a:prstDash val="solid"/>
           </a:ln>
         </p:spPr>
-        <p:txBody>
-          <a:bodyPr/>
-          <a:p/>
-        </p:txBody>
       </p:sp>
       <p:sp>
         <p:nvSpPr>
@@ -8464,7 +8296,7 @@
         <p:spPr>
           <a:xfrm>
             <a:off x="9744075" y="5557019"/>
-            <a:ext cx="7753350" cy="500063"/>
+            <a:ext cx="7753350" cy="514350"/>
           </a:xfrm>
           <a:prstGeom prst="rect">
             <a:avLst/>
@@ -8486,9 +8318,9 @@
                 <a:solidFill>
                   <a:srgbClr val="3ECF8E"/>
                 </a:solidFill>
-                <a:latin typeface="Arial" pitchFamily="34" charset="0"/>
-                <a:ea typeface="Arial" pitchFamily="34" charset="-122"/>
-                <a:cs typeface="Arial" pitchFamily="34" charset="-120"/>
+                <a:latin typeface="Golos Text" pitchFamily="34" charset="0"/>
+                <a:ea typeface="Golos Text" pitchFamily="34" charset="-122"/>
+                <a:cs typeface="Golos Text" pitchFamily="34" charset="-120"/>
               </a:rPr>
               <a:t>&gt; 1 млн пациентов</a:t>
             </a:r>
@@ -8504,7 +8336,7 @@
         </p:nvSpPr>
         <p:spPr>
           <a:xfrm>
-            <a:off x="9744075" y="6152331"/>
+            <a:off x="9744075" y="6166619"/>
             <a:ext cx="7259955" cy="1581150"/>
           </a:xfrm>
           <a:prstGeom prst="rect">
@@ -8521,7 +8353,7 @@
           <a:p>
             <a:pPr algn="l" indent="0" marL="0">
               <a:lnSpc>
-                <a:spcPct val="130645"/>
+                <a:spcPct val="124615"/>
               </a:lnSpc>
               <a:buNone/>
             </a:pPr>
@@ -8530,9 +8362,9 @@
                 <a:solidFill>
                   <a:srgbClr val="CFE7DB"/>
                 </a:solidFill>
-                <a:latin typeface="Arial" pitchFamily="34" charset="0"/>
-                <a:ea typeface="Arial" pitchFamily="34" charset="-122"/>
-                <a:cs typeface="Arial" pitchFamily="34" charset="-120"/>
+                <a:latin typeface="Golos Text" pitchFamily="34" charset="0"/>
+                <a:ea typeface="Golos Text" pitchFamily="34" charset="-122"/>
+                <a:cs typeface="Golos Text" pitchFamily="34" charset="-120"/>
               </a:rPr>
               <a:t>Программа управления заболеваниями покрывает наши диагнозы — гипертонию, диабет 2 типа, сердечную недостаточность. Носимых медизделий на рынке РК сегодня нет.</a:t>
             </a:r>
@@ -8581,11 +8413,11 @@
         <p:spPr>
           <a:xfrm>
             <a:off x="1047750" y="952500"/>
-            <a:ext cx="1538808" cy="414338"/>
+            <a:ext cx="1665982" cy="428625"/>
           </a:xfrm>
           <a:prstGeom prst="roundRect">
             <a:avLst>
-              <a:gd name="adj" fmla="val 22988"/>
+              <a:gd name="adj" fmla="val 22222"/>
             </a:avLst>
           </a:prstGeom>
           <a:solidFill>
@@ -8593,10 +8425,6 @@
           </a:solidFill>
           <a:ln/>
         </p:spPr>
-        <p:txBody>
-          <a:bodyPr/>
-          <a:p/>
-        </p:txBody>
       </p:sp>
       <p:sp>
         <p:nvSpPr>
@@ -8607,7 +8435,7 @@
         <p:spPr>
           <a:xfrm>
             <a:off x="1219200" y="1028700"/>
-            <a:ext cx="1272108" cy="300038"/>
+            <a:ext cx="1399282" cy="314325"/>
           </a:xfrm>
           <a:prstGeom prst="rect">
             <a:avLst/>
@@ -8629,9 +8457,9 @@
                 <a:solidFill>
                   <a:srgbClr val="0E7A50"/>
                 </a:solidFill>
-                <a:latin typeface="Arial" pitchFamily="34" charset="0"/>
-                <a:ea typeface="Arial" pitchFamily="34" charset="-122"/>
-                <a:cs typeface="Arial" pitchFamily="34" charset="-120"/>
+                <a:latin typeface="Golos Text" pitchFamily="34" charset="0"/>
+                <a:ea typeface="Golos Text" pitchFamily="34" charset="-122"/>
+                <a:cs typeface="Golos Text" pitchFamily="34" charset="-120"/>
               </a:rPr>
               <a:t>Устройство</a:t>
             </a:r>
@@ -8647,7 +8475,7 @@
         </p:nvSpPr>
         <p:spPr>
           <a:xfrm>
-            <a:off x="1047750" y="1595438"/>
+            <a:off x="1047750" y="1609725"/>
             <a:ext cx="17811750" cy="658118"/>
           </a:xfrm>
           <a:prstGeom prst="rect">
@@ -8664,7 +8492,7 @@
           <a:p>
             <a:pPr algn="l" indent="0" marL="0">
               <a:lnSpc>
-                <a:spcPct val="91690"/>
+                <a:spcPct val="87383"/>
               </a:lnSpc>
               <a:buNone/>
             </a:pPr>
@@ -8673,9 +8501,9 @@
                 <a:solidFill>
                   <a:srgbClr val="16232B"/>
                 </a:solidFill>
-                <a:latin typeface="Arial" pitchFamily="34" charset="0"/>
-                <a:ea typeface="Arial" pitchFamily="34" charset="-122"/>
-                <a:cs typeface="Arial" pitchFamily="34" charset="-120"/>
+                <a:latin typeface="Golos Text" pitchFamily="34" charset="0"/>
+                <a:ea typeface="Golos Text" pitchFamily="34" charset="-122"/>
+                <a:cs typeface="Golos Text" pitchFamily="34" charset="-120"/>
               </a:rPr>
               <a:t>Корпус без экрана, сменный ремешок</a:t>
             </a:r>
@@ -8698,7 +8526,7 @@
         </p:blipFill>
         <p:spPr>
           <a:xfrm>
-            <a:off x="1047750" y="2634555"/>
+            <a:off x="1047750" y="2648843"/>
             <a:ext cx="7924800" cy="4953000"/>
           </a:xfrm>
           <a:prstGeom prst="rect">
@@ -8721,7 +8549,7 @@
         </p:blipFill>
         <p:spPr>
           <a:xfrm>
-            <a:off x="9315450" y="2634555"/>
+            <a:off x="9315450" y="2648843"/>
             <a:ext cx="7924800" cy="4953000"/>
           </a:xfrm>
           <a:prstGeom prst="rect">
@@ -8737,12 +8565,12 @@
         </p:nvSpPr>
         <p:spPr>
           <a:xfrm>
-            <a:off x="1047750" y="7930455"/>
-            <a:ext cx="3876675" cy="1208708"/>
+            <a:off x="1047750" y="7944743"/>
+            <a:ext cx="3876675" cy="1227758"/>
           </a:xfrm>
           <a:prstGeom prst="roundRect">
             <a:avLst>
-              <a:gd name="adj" fmla="val 12609"/>
+              <a:gd name="adj" fmla="val 12413"/>
             </a:avLst>
           </a:prstGeom>
           <a:solidFill>
@@ -8755,10 +8583,6 @@
             <a:prstDash val="solid"/>
           </a:ln>
         </p:spPr>
-        <p:txBody>
-          <a:bodyPr/>
-          <a:p/>
-        </p:txBody>
       </p:sp>
       <p:sp>
         <p:nvSpPr>
@@ -8768,8 +8592,8 @@
         </p:nvSpPr>
         <p:spPr>
           <a:xfrm>
-            <a:off x="1323975" y="8187630"/>
-            <a:ext cx="3656648" cy="366713"/>
+            <a:off x="1323975" y="8201918"/>
+            <a:ext cx="3656648" cy="381000"/>
           </a:xfrm>
           <a:prstGeom prst="rect">
             <a:avLst/>
@@ -8791,9 +8615,9 @@
                 <a:solidFill>
                   <a:srgbClr val="0E7A50"/>
                 </a:solidFill>
-                <a:latin typeface="Arial" pitchFamily="34" charset="0"/>
-                <a:ea typeface="Arial" pitchFamily="34" charset="-122"/>
-                <a:cs typeface="Arial" pitchFamily="34" charset="-120"/>
+                <a:latin typeface="Golos Text" pitchFamily="34" charset="0"/>
+                <a:ea typeface="Golos Text" pitchFamily="34" charset="-122"/>
+                <a:cs typeface="Golos Text" pitchFamily="34" charset="-120"/>
               </a:rPr>
               <a:t>Пульс · ВСР</a:t>
             </a:r>
@@ -8809,7 +8633,7 @@
         </p:nvSpPr>
         <p:spPr>
           <a:xfrm>
-            <a:off x="1323975" y="8573393"/>
+            <a:off x="1323975" y="8601968"/>
             <a:ext cx="3656648" cy="346695"/>
           </a:xfrm>
           <a:prstGeom prst="rect">
@@ -8826,7 +8650,7 @@
           <a:p>
             <a:pPr algn="l" indent="0" marL="0">
               <a:lnSpc>
-                <a:spcPct val="117818"/>
+                <a:spcPct val="111724"/>
               </a:lnSpc>
               <a:buNone/>
             </a:pPr>
@@ -8835,9 +8659,9 @@
                 <a:solidFill>
                   <a:srgbClr val="7B8C82"/>
                 </a:solidFill>
-                <a:latin typeface="Arial" pitchFamily="34" charset="0"/>
-                <a:ea typeface="Arial" pitchFamily="34" charset="-122"/>
-                <a:cs typeface="Arial" pitchFamily="34" charset="-120"/>
+                <a:latin typeface="Golos Text" pitchFamily="34" charset="0"/>
+                <a:ea typeface="Golos Text" pitchFamily="34" charset="-122"/>
+                <a:cs typeface="Golos Text" pitchFamily="34" charset="-120"/>
               </a:rPr>
               <a:t>оптические датчики</a:t>
             </a:r>
@@ -8853,12 +8677,12 @@
         </p:nvSpPr>
         <p:spPr>
           <a:xfrm>
-            <a:off x="5153025" y="7930455"/>
-            <a:ext cx="3876675" cy="1208708"/>
+            <a:off x="5153025" y="7944743"/>
+            <a:ext cx="3876675" cy="1227758"/>
           </a:xfrm>
           <a:prstGeom prst="roundRect">
             <a:avLst>
-              <a:gd name="adj" fmla="val 12609"/>
+              <a:gd name="adj" fmla="val 12413"/>
             </a:avLst>
           </a:prstGeom>
           <a:solidFill>
@@ -8871,10 +8695,6 @@
             <a:prstDash val="solid"/>
           </a:ln>
         </p:spPr>
-        <p:txBody>
-          <a:bodyPr/>
-          <a:p/>
-        </p:txBody>
       </p:sp>
       <p:sp>
         <p:nvSpPr>
@@ -8884,8 +8704,8 @@
         </p:nvSpPr>
         <p:spPr>
           <a:xfrm>
-            <a:off x="5429250" y="8187630"/>
-            <a:ext cx="3656648" cy="366713"/>
+            <a:off x="5429250" y="8201918"/>
+            <a:ext cx="3656648" cy="385763"/>
           </a:xfrm>
           <a:prstGeom prst="rect">
             <a:avLst/>
@@ -8907,9 +8727,9 @@
                 <a:solidFill>
                   <a:srgbClr val="0E7A50"/>
                 </a:solidFill>
-                <a:latin typeface="Arial" pitchFamily="34" charset="0"/>
-                <a:ea typeface="Arial" pitchFamily="34" charset="-122"/>
-                <a:cs typeface="Arial" pitchFamily="34" charset="-120"/>
+                <a:latin typeface="Golos Text" pitchFamily="34" charset="0"/>
+                <a:ea typeface="Golos Text" pitchFamily="34" charset="-122"/>
+                <a:cs typeface="Golos Text" pitchFamily="34" charset="-120"/>
               </a:rPr>
               <a:t>SpO₂ · темп.</a:t>
             </a:r>
@@ -8925,7 +8745,7 @@
         </p:nvSpPr>
         <p:spPr>
           <a:xfrm>
-            <a:off x="5429250" y="8573393"/>
+            <a:off x="5429250" y="8606730"/>
             <a:ext cx="3656648" cy="346695"/>
           </a:xfrm>
           <a:prstGeom prst="rect">
@@ -8942,7 +8762,7 @@
           <a:p>
             <a:pPr algn="l" indent="0" marL="0">
               <a:lnSpc>
-                <a:spcPct val="117818"/>
+                <a:spcPct val="111724"/>
               </a:lnSpc>
               <a:buNone/>
             </a:pPr>
@@ -8951,9 +8771,9 @@
                 <a:solidFill>
                   <a:srgbClr val="7B8C82"/>
                 </a:solidFill>
-                <a:latin typeface="Arial" pitchFamily="34" charset="0"/>
-                <a:ea typeface="Arial" pitchFamily="34" charset="-122"/>
-                <a:cs typeface="Arial" pitchFamily="34" charset="-120"/>
+                <a:latin typeface="Golos Text" pitchFamily="34" charset="0"/>
+                <a:ea typeface="Golos Text" pitchFamily="34" charset="-122"/>
+                <a:cs typeface="Golos Text" pitchFamily="34" charset="-120"/>
               </a:rPr>
               <a:t>кислород и кожа</a:t>
             </a:r>
@@ -8969,12 +8789,12 @@
         </p:nvSpPr>
         <p:spPr>
           <a:xfrm>
-            <a:off x="9258300" y="7930455"/>
-            <a:ext cx="3876675" cy="1208708"/>
+            <a:off x="9258300" y="7944743"/>
+            <a:ext cx="3876675" cy="1227758"/>
           </a:xfrm>
           <a:prstGeom prst="roundRect">
             <a:avLst>
-              <a:gd name="adj" fmla="val 12609"/>
+              <a:gd name="adj" fmla="val 12413"/>
             </a:avLst>
           </a:prstGeom>
           <a:solidFill>
@@ -8987,10 +8807,6 @@
             <a:prstDash val="solid"/>
           </a:ln>
         </p:spPr>
-        <p:txBody>
-          <a:bodyPr/>
-          <a:p/>
-        </p:txBody>
       </p:sp>
       <p:sp>
         <p:nvSpPr>
@@ -9000,8 +8816,8 @@
         </p:nvSpPr>
         <p:spPr>
           <a:xfrm>
-            <a:off x="9534525" y="8187630"/>
-            <a:ext cx="3656648" cy="366713"/>
+            <a:off x="9534525" y="8201918"/>
+            <a:ext cx="3656648" cy="381000"/>
           </a:xfrm>
           <a:prstGeom prst="rect">
             <a:avLst/>
@@ -9023,9 +8839,9 @@
                 <a:solidFill>
                   <a:srgbClr val="0E7A50"/>
                 </a:solidFill>
-                <a:latin typeface="Arial" pitchFamily="34" charset="0"/>
-                <a:ea typeface="Arial" pitchFamily="34" charset="-122"/>
-                <a:cs typeface="Arial" pitchFamily="34" charset="-120"/>
+                <a:latin typeface="Golos Text" pitchFamily="34" charset="0"/>
+                <a:ea typeface="Golos Text" pitchFamily="34" charset="-122"/>
+                <a:cs typeface="Golos Text" pitchFamily="34" charset="-120"/>
               </a:rPr>
               <a:t>IP68</a:t>
             </a:r>
@@ -9041,7 +8857,7 @@
         </p:nvSpPr>
         <p:spPr>
           <a:xfrm>
-            <a:off x="9534525" y="8573393"/>
+            <a:off x="9534525" y="8601968"/>
             <a:ext cx="3656648" cy="346695"/>
           </a:xfrm>
           <a:prstGeom prst="rect">
@@ -9058,7 +8874,7 @@
           <a:p>
             <a:pPr algn="l" indent="0" marL="0">
               <a:lnSpc>
-                <a:spcPct val="117818"/>
+                <a:spcPct val="111724"/>
               </a:lnSpc>
               <a:buNone/>
             </a:pPr>
@@ -9067,9 +8883,9 @@
                 <a:solidFill>
                   <a:srgbClr val="7B8C82"/>
                 </a:solidFill>
-                <a:latin typeface="Arial" pitchFamily="34" charset="0"/>
-                <a:ea typeface="Arial" pitchFamily="34" charset="-122"/>
-                <a:cs typeface="Arial" pitchFamily="34" charset="-120"/>
+                <a:latin typeface="Golos Text" pitchFamily="34" charset="0"/>
+                <a:ea typeface="Golos Text" pitchFamily="34" charset="-122"/>
+                <a:cs typeface="Golos Text" pitchFamily="34" charset="-120"/>
               </a:rPr>
               <a:t>батарея 5–7 дней</a:t>
             </a:r>
@@ -9085,12 +8901,12 @@
         </p:nvSpPr>
         <p:spPr>
           <a:xfrm>
-            <a:off x="13363575" y="7930455"/>
-            <a:ext cx="3876675" cy="1208708"/>
+            <a:off x="13363575" y="7944743"/>
+            <a:ext cx="3876675" cy="1227758"/>
           </a:xfrm>
           <a:prstGeom prst="roundRect">
             <a:avLst>
-              <a:gd name="adj" fmla="val 12609"/>
+              <a:gd name="adj" fmla="val 12413"/>
             </a:avLst>
           </a:prstGeom>
           <a:solidFill>
@@ -9103,10 +8919,6 @@
             <a:prstDash val="solid"/>
           </a:ln>
         </p:spPr>
-        <p:txBody>
-          <a:bodyPr/>
-          <a:p/>
-        </p:txBody>
       </p:sp>
       <p:sp>
         <p:nvSpPr>
@@ -9116,8 +8928,8 @@
         </p:nvSpPr>
         <p:spPr>
           <a:xfrm>
-            <a:off x="13639800" y="8187630"/>
-            <a:ext cx="3656648" cy="366713"/>
+            <a:off x="13639800" y="8201918"/>
+            <a:ext cx="3656648" cy="385763"/>
           </a:xfrm>
           <a:prstGeom prst="rect">
             <a:avLst/>
@@ -9139,9 +8951,9 @@
                 <a:solidFill>
                   <a:srgbClr val="0E7A50"/>
                 </a:solidFill>
-                <a:latin typeface="Arial" pitchFamily="34" charset="0"/>
-                <a:ea typeface="Arial" pitchFamily="34" charset="-122"/>
-                <a:cs typeface="Arial" pitchFamily="34" charset="-120"/>
+                <a:latin typeface="Golos Text" pitchFamily="34" charset="0"/>
+                <a:ea typeface="Golos Text" pitchFamily="34" charset="-122"/>
+                <a:cs typeface="Golos Text" pitchFamily="34" charset="-120"/>
               </a:rPr>
               <a:t>≈ 25 г</a:t>
             </a:r>
@@ -9157,7 +8969,7 @@
         </p:nvSpPr>
         <p:spPr>
           <a:xfrm>
-            <a:off x="13639800" y="8573393"/>
+            <a:off x="13639800" y="8606730"/>
             <a:ext cx="3656648" cy="346695"/>
           </a:xfrm>
           <a:prstGeom prst="rect">
@@ -9174,7 +8986,7 @@
           <a:p>
             <a:pPr algn="l" indent="0" marL="0">
               <a:lnSpc>
-                <a:spcPct val="117818"/>
+                <a:spcPct val="111724"/>
               </a:lnSpc>
               <a:buNone/>
             </a:pPr>
@@ -9183,9 +8995,9 @@
                 <a:solidFill>
                   <a:srgbClr val="7B8C82"/>
                 </a:solidFill>
-                <a:latin typeface="Arial" pitchFamily="34" charset="0"/>
-                <a:ea typeface="Arial" pitchFamily="34" charset="-122"/>
-                <a:cs typeface="Arial" pitchFamily="34" charset="-120"/>
+                <a:latin typeface="Golos Text" pitchFamily="34" charset="0"/>
+                <a:ea typeface="Golos Text" pitchFamily="34" charset="-122"/>
+                <a:cs typeface="Golos Text" pitchFamily="34" charset="-120"/>
               </a:rPr>
               <a:t>алюминий, 40 мм</a:t>
             </a:r>
@@ -9233,12 +9045,12 @@
         </p:nvSpPr>
         <p:spPr>
           <a:xfrm>
-            <a:off x="1047750" y="2006501"/>
-            <a:ext cx="2169021" cy="414338"/>
+            <a:off x="1047750" y="1999357"/>
+            <a:ext cx="2260402" cy="428625"/>
           </a:xfrm>
           <a:prstGeom prst="roundRect">
             <a:avLst>
-              <a:gd name="adj" fmla="val 22988"/>
+              <a:gd name="adj" fmla="val 22222"/>
             </a:avLst>
           </a:prstGeom>
           <a:solidFill>
@@ -9246,10 +9058,6 @@
           </a:solidFill>
           <a:ln/>
         </p:spPr>
-        <p:txBody>
-          <a:bodyPr/>
-          <a:p/>
-        </p:txBody>
       </p:sp>
       <p:sp>
         <p:nvSpPr>
@@ -9259,8 +9067,8 @@
         </p:nvSpPr>
         <p:spPr>
           <a:xfrm>
-            <a:off x="1219200" y="2082701"/>
-            <a:ext cx="1902321" cy="300038"/>
+            <a:off x="1219200" y="2075557"/>
+            <a:ext cx="1993702" cy="314325"/>
           </a:xfrm>
           <a:prstGeom prst="rect">
             <a:avLst/>
@@ -9282,9 +9090,9 @@
                 <a:solidFill>
                   <a:srgbClr val="0E7A50"/>
                 </a:solidFill>
-                <a:latin typeface="Arial" pitchFamily="34" charset="0"/>
-                <a:ea typeface="Arial" pitchFamily="34" charset="-122"/>
-                <a:cs typeface="Arial" pitchFamily="34" charset="-120"/>
+                <a:latin typeface="Golos Text" pitchFamily="34" charset="0"/>
+                <a:ea typeface="Golos Text" pitchFamily="34" charset="-122"/>
+                <a:cs typeface="Golos Text" pitchFamily="34" charset="-120"/>
               </a:rPr>
               <a:t>Раздел 02 · Цена</a:t>
             </a:r>
@@ -9300,8 +9108,8 @@
         </p:nvSpPr>
         <p:spPr>
           <a:xfrm>
-            <a:off x="1047750" y="2649438"/>
-            <a:ext cx="8118932" cy="1278136"/>
+            <a:off x="1047750" y="2656582"/>
+            <a:ext cx="9634923" cy="1278136"/>
           </a:xfrm>
           <a:prstGeom prst="rect">
             <a:avLst/>
@@ -9317,7 +9125,7 @@
           <a:p>
             <a:pPr algn="l" indent="0" marL="0">
               <a:lnSpc>
-                <a:spcPct val="91690"/>
+                <a:spcPct val="87383"/>
               </a:lnSpc>
               <a:buNone/>
             </a:pPr>
@@ -9326,9 +9134,9 @@
                 <a:solidFill>
                   <a:srgbClr val="16232B"/>
                 </a:solidFill>
-                <a:latin typeface="Arial" pitchFamily="34" charset="0"/>
-                <a:ea typeface="Arial" pitchFamily="34" charset="-122"/>
-                <a:cs typeface="Arial" pitchFamily="34" charset="-120"/>
+                <a:latin typeface="Golos Text" pitchFamily="34" charset="0"/>
+                <a:ea typeface="Golos Text" pitchFamily="34" charset="-122"/>
+                <a:cs typeface="Golos Text" pitchFamily="34" charset="-120"/>
               </a:rPr>
               <a:t>Медизделие дешевле фитнес-браслета</a:t>
             </a:r>
@@ -9344,8 +9152,8 @@
         </p:nvSpPr>
         <p:spPr>
           <a:xfrm>
-            <a:off x="1047750" y="4515743"/>
-            <a:ext cx="3771900" cy="347663"/>
+            <a:off x="1047750" y="4518124"/>
+            <a:ext cx="3771900" cy="357188"/>
           </a:xfrm>
           <a:prstGeom prst="rect">
             <a:avLst/>
@@ -9367,9 +9175,9 @@
                 <a:solidFill>
                   <a:srgbClr val="0B3D2C"/>
                 </a:solidFill>
-                <a:latin typeface="Arial" pitchFamily="34" charset="0"/>
-                <a:ea typeface="Arial" pitchFamily="34" charset="-122"/>
-                <a:cs typeface="Arial" pitchFamily="34" charset="-120"/>
+                <a:latin typeface="Golos Text" pitchFamily="34" charset="0"/>
+                <a:ea typeface="Golos Text" pitchFamily="34" charset="-122"/>
+                <a:cs typeface="Golos Text" pitchFamily="34" charset="-120"/>
               </a:rPr>
               <a:t>Damumed Band</a:t>
             </a:r>
@@ -9385,7 +9193,7 @@
         </p:nvSpPr>
         <p:spPr>
           <a:xfrm>
-            <a:off x="4705350" y="4422874"/>
+            <a:off x="4705350" y="4430018"/>
             <a:ext cx="2564829" cy="495300"/>
           </a:xfrm>
           <a:prstGeom prst="roundRect">
@@ -9398,10 +9206,6 @@
           </a:solidFill>
           <a:ln/>
         </p:spPr>
-        <p:txBody>
-          <a:bodyPr/>
-          <a:p/>
-        </p:txBody>
       </p:sp>
       <p:sp>
         <p:nvSpPr>
@@ -9411,8 +9215,8 @@
         </p:nvSpPr>
         <p:spPr>
           <a:xfrm>
-            <a:off x="12477750" y="4496693"/>
-            <a:ext cx="2095500" cy="385763"/>
+            <a:off x="12477750" y="4506218"/>
+            <a:ext cx="2095500" cy="381000"/>
           </a:xfrm>
           <a:prstGeom prst="rect">
             <a:avLst/>
@@ -9434,9 +9238,9 @@
                 <a:solidFill>
                   <a:srgbClr val="0E7A50"/>
                 </a:solidFill>
-                <a:latin typeface="Courier New" pitchFamily="34" charset="0"/>
-                <a:ea typeface="Courier New" pitchFamily="34" charset="-122"/>
-                <a:cs typeface="Courier New" pitchFamily="34" charset="-120"/>
+                <a:latin typeface="Spline Sans Mono" pitchFamily="34" charset="0"/>
+                <a:ea typeface="Spline Sans Mono" pitchFamily="34" charset="-122"/>
+                <a:cs typeface="Spline Sans Mono" pitchFamily="34" charset="-120"/>
               </a:rPr>
               <a:t>14 990 ₸</a:t>
             </a:r>
@@ -9452,7 +9256,7 @@
         </p:nvSpPr>
         <p:spPr>
           <a:xfrm>
-            <a:off x="1047750" y="5196780"/>
+            <a:off x="1047750" y="5203924"/>
             <a:ext cx="3771900" cy="357188"/>
           </a:xfrm>
           <a:prstGeom prst="rect">
@@ -9475,9 +9279,9 @@
                 <a:solidFill>
                   <a:srgbClr val="42504A"/>
                 </a:solidFill>
-                <a:latin typeface="Arial" pitchFamily="34" charset="0"/>
-                <a:ea typeface="Arial" pitchFamily="34" charset="-122"/>
-                <a:cs typeface="Arial" pitchFamily="34" charset="-120"/>
+                <a:latin typeface="Golos Text" pitchFamily="34" charset="0"/>
+                <a:ea typeface="Golos Text" pitchFamily="34" charset="-122"/>
+                <a:cs typeface="Golos Text" pitchFamily="34" charset="-120"/>
               </a:rPr>
               <a:t>Huawei Band 10</a:t>
             </a:r>
@@ -9493,7 +9297,7 @@
         </p:nvSpPr>
         <p:spPr>
           <a:xfrm>
-            <a:off x="4705350" y="5108674"/>
+            <a:off x="4705350" y="5115818"/>
             <a:ext cx="2866579" cy="495300"/>
           </a:xfrm>
           <a:prstGeom prst="roundRect">
@@ -9506,10 +9310,6 @@
           </a:solidFill>
           <a:ln/>
         </p:spPr>
-        <p:txBody>
-          <a:bodyPr/>
-          <a:p/>
-        </p:txBody>
       </p:sp>
       <p:sp>
         <p:nvSpPr>
@@ -9519,7 +9319,7 @@
         </p:nvSpPr>
         <p:spPr>
           <a:xfrm>
-            <a:off x="12477750" y="5184874"/>
+            <a:off x="12477750" y="5192018"/>
             <a:ext cx="2095500" cy="381000"/>
           </a:xfrm>
           <a:prstGeom prst="rect">
@@ -9542,9 +9342,9 @@
                 <a:solidFill>
                   <a:srgbClr val="42504A"/>
                 </a:solidFill>
-                <a:latin typeface="Courier New" pitchFamily="34" charset="0"/>
-                <a:ea typeface="Courier New" pitchFamily="34" charset="-122"/>
-                <a:cs typeface="Courier New" pitchFamily="34" charset="-120"/>
+                <a:latin typeface="Spline Sans Mono" pitchFamily="34" charset="0"/>
+                <a:ea typeface="Spline Sans Mono" pitchFamily="34" charset="-122"/>
+                <a:cs typeface="Spline Sans Mono" pitchFamily="34" charset="-120"/>
               </a:rPr>
               <a:t>16 890 ₸</a:t>
             </a:r>
@@ -9560,7 +9360,7 @@
         </p:nvSpPr>
         <p:spPr>
           <a:xfrm>
-            <a:off x="1047750" y="5882580"/>
+            <a:off x="1047750" y="5889724"/>
             <a:ext cx="3771900" cy="357188"/>
           </a:xfrm>
           <a:prstGeom prst="rect">
@@ -9583,9 +9383,9 @@
                 <a:solidFill>
                   <a:srgbClr val="42504A"/>
                 </a:solidFill>
-                <a:latin typeface="Arial" pitchFamily="34" charset="0"/>
-                <a:ea typeface="Arial" pitchFamily="34" charset="-122"/>
-                <a:cs typeface="Arial" pitchFamily="34" charset="-120"/>
+                <a:latin typeface="Golos Text" pitchFamily="34" charset="0"/>
+                <a:ea typeface="Golos Text" pitchFamily="34" charset="-122"/>
+                <a:cs typeface="Golos Text" pitchFamily="34" charset="-120"/>
               </a:rPr>
               <a:t>Xiaomi Smart Band 10</a:t>
             </a:r>
@@ -9601,7 +9401,7 @@
         </p:nvSpPr>
         <p:spPr>
           <a:xfrm>
-            <a:off x="4705350" y="5794474"/>
+            <a:off x="4705350" y="5801618"/>
             <a:ext cx="3771900" cy="495300"/>
           </a:xfrm>
           <a:prstGeom prst="roundRect">
@@ -9614,10 +9414,6 @@
           </a:solidFill>
           <a:ln/>
         </p:spPr>
-        <p:txBody>
-          <a:bodyPr/>
-          <a:p/>
-        </p:txBody>
       </p:sp>
       <p:sp>
         <p:nvSpPr>
@@ -9627,7 +9423,7 @@
         </p:nvSpPr>
         <p:spPr>
           <a:xfrm>
-            <a:off x="12477750" y="5870674"/>
+            <a:off x="12477750" y="5877818"/>
             <a:ext cx="2095500" cy="381000"/>
           </a:xfrm>
           <a:prstGeom prst="rect">
@@ -9650,9 +9446,9 @@
                 <a:solidFill>
                   <a:srgbClr val="42504A"/>
                 </a:solidFill>
-                <a:latin typeface="Courier New" pitchFamily="34" charset="0"/>
-                <a:ea typeface="Courier New" pitchFamily="34" charset="-122"/>
-                <a:cs typeface="Courier New" pitchFamily="34" charset="-120"/>
+                <a:latin typeface="Spline Sans Mono" pitchFamily="34" charset="0"/>
+                <a:ea typeface="Spline Sans Mono" pitchFamily="34" charset="-122"/>
+                <a:cs typeface="Spline Sans Mono" pitchFamily="34" charset="-120"/>
               </a:rPr>
               <a:t>21 989 ₸</a:t>
             </a:r>
@@ -9668,7 +9464,7 @@
         </p:nvSpPr>
         <p:spPr>
           <a:xfrm>
-            <a:off x="1047750" y="6568380"/>
+            <a:off x="1047750" y="6575524"/>
             <a:ext cx="3771900" cy="357188"/>
           </a:xfrm>
           <a:prstGeom prst="rect">
@@ -9691,9 +9487,9 @@
                 <a:solidFill>
                   <a:srgbClr val="42504A"/>
                 </a:solidFill>
-                <a:latin typeface="Arial" pitchFamily="34" charset="0"/>
-                <a:ea typeface="Arial" pitchFamily="34" charset="-122"/>
-                <a:cs typeface="Arial" pitchFamily="34" charset="-120"/>
+                <a:latin typeface="Golos Text" pitchFamily="34" charset="0"/>
+                <a:ea typeface="Golos Text" pitchFamily="34" charset="-122"/>
+                <a:cs typeface="Golos Text" pitchFamily="34" charset="-120"/>
               </a:rPr>
               <a:t>Samsung Galaxy Fit3</a:t>
             </a:r>
@@ -9709,7 +9505,7 @@
         </p:nvSpPr>
         <p:spPr>
           <a:xfrm>
-            <a:off x="4705350" y="6480274"/>
+            <a:off x="4705350" y="6487418"/>
             <a:ext cx="3847281" cy="495300"/>
           </a:xfrm>
           <a:prstGeom prst="roundRect">
@@ -9722,10 +9518,6 @@
           </a:solidFill>
           <a:ln/>
         </p:spPr>
-        <p:txBody>
-          <a:bodyPr/>
-          <a:p/>
-        </p:txBody>
       </p:sp>
       <p:sp>
         <p:nvSpPr>
@@ -9735,7 +9527,7 @@
         </p:nvSpPr>
         <p:spPr>
           <a:xfrm>
-            <a:off x="12477750" y="6556474"/>
+            <a:off x="12477750" y="6563618"/>
             <a:ext cx="2095500" cy="381000"/>
           </a:xfrm>
           <a:prstGeom prst="rect">
@@ -9758,9 +9550,9 @@
                 <a:solidFill>
                   <a:srgbClr val="42504A"/>
                 </a:solidFill>
-                <a:latin typeface="Courier New" pitchFamily="34" charset="0"/>
-                <a:ea typeface="Courier New" pitchFamily="34" charset="-122"/>
-                <a:cs typeface="Courier New" pitchFamily="34" charset="-120"/>
+                <a:latin typeface="Spline Sans Mono" pitchFamily="34" charset="0"/>
+                <a:ea typeface="Spline Sans Mono" pitchFamily="34" charset="-122"/>
+                <a:cs typeface="Spline Sans Mono" pitchFamily="34" charset="-120"/>
               </a:rPr>
               <a:t>22 299 ₸</a:t>
             </a:r>
@@ -9776,7 +9568,7 @@
         </p:nvSpPr>
         <p:spPr>
           <a:xfrm>
-            <a:off x="1047750" y="7254180"/>
+            <a:off x="1047750" y="7261324"/>
             <a:ext cx="3771900" cy="357188"/>
           </a:xfrm>
           <a:prstGeom prst="rect">
@@ -9799,9 +9591,9 @@
                 <a:solidFill>
                   <a:srgbClr val="42504A"/>
                 </a:solidFill>
-                <a:latin typeface="Arial" pitchFamily="34" charset="0"/>
-                <a:ea typeface="Arial" pitchFamily="34" charset="-122"/>
-                <a:cs typeface="Arial" pitchFamily="34" charset="-120"/>
+                <a:latin typeface="Golos Text" pitchFamily="34" charset="0"/>
+                <a:ea typeface="Golos Text" pitchFamily="34" charset="-122"/>
+                <a:cs typeface="Golos Text" pitchFamily="34" charset="-120"/>
               </a:rPr>
               <a:t>Honor Band 9</a:t>
             </a:r>
@@ -9817,7 +9609,7 @@
         </p:nvSpPr>
         <p:spPr>
           <a:xfrm>
-            <a:off x="4705350" y="7166074"/>
+            <a:off x="4705350" y="7173218"/>
             <a:ext cx="5959599" cy="495300"/>
           </a:xfrm>
           <a:prstGeom prst="roundRect">
@@ -9830,10 +9622,6 @@
           </a:solidFill>
           <a:ln/>
         </p:spPr>
-        <p:txBody>
-          <a:bodyPr/>
-          <a:p/>
-        </p:txBody>
       </p:sp>
       <p:sp>
         <p:nvSpPr>
@@ -9843,7 +9631,7 @@
         </p:nvSpPr>
         <p:spPr>
           <a:xfrm>
-            <a:off x="12477750" y="7242274"/>
+            <a:off x="12477750" y="7249418"/>
             <a:ext cx="2095500" cy="381000"/>
           </a:xfrm>
           <a:prstGeom prst="rect">
@@ -9866,9 +9654,9 @@
                 <a:solidFill>
                   <a:srgbClr val="42504A"/>
                 </a:solidFill>
-                <a:latin typeface="Courier New" pitchFamily="34" charset="0"/>
-                <a:ea typeface="Courier New" pitchFamily="34" charset="-122"/>
-                <a:cs typeface="Courier New" pitchFamily="34" charset="-120"/>
+                <a:latin typeface="Spline Sans Mono" pitchFamily="34" charset="0"/>
+                <a:ea typeface="Spline Sans Mono" pitchFamily="34" charset="-122"/>
+                <a:cs typeface="Spline Sans Mono" pitchFamily="34" charset="-120"/>
               </a:rPr>
               <a:t>34 880 ₸</a:t>
             </a:r>
@@ -9884,7 +9672,7 @@
         </p:nvSpPr>
         <p:spPr>
           <a:xfrm>
-            <a:off x="1047750" y="8004274"/>
+            <a:off x="1047750" y="8011418"/>
             <a:ext cx="17811750" cy="314325"/>
           </a:xfrm>
           <a:prstGeom prst="rect">
@@ -9907,9 +9695,9 @@
                 <a:solidFill>
                   <a:srgbClr val="7B8C82"/>
                 </a:solidFill>
-                <a:latin typeface="Arial" pitchFamily="34" charset="0"/>
-                <a:ea typeface="Arial" pitchFamily="34" charset="-122"/>
-                <a:cs typeface="Arial" pitchFamily="34" charset="-120"/>
+                <a:latin typeface="Golos Text" pitchFamily="34" charset="0"/>
+                <a:ea typeface="Golos Text" pitchFamily="34" charset="-122"/>
+                <a:cs typeface="Golos Text" pitchFamily="34" charset="-120"/>
               </a:rPr>
               <a:t>Розничные цены, Kaspi, проверено 31 августа 2026 · на треть ниже Xiaomi Band 10</a:t>
             </a:r>
@@ -9957,7 +9745,7 @@
         </p:nvSpPr>
         <p:spPr>
           <a:xfrm>
-            <a:off x="1047750" y="2209354"/>
+            <a:off x="1047750" y="2185541"/>
             <a:ext cx="17811750" cy="658118"/>
           </a:xfrm>
           <a:prstGeom prst="rect">
@@ -9974,7 +9762,7 @@
           <a:p>
             <a:pPr algn="l" indent="0" marL="0">
               <a:lnSpc>
-                <a:spcPct val="91690"/>
+                <a:spcPct val="87383"/>
               </a:lnSpc>
               <a:buNone/>
             </a:pPr>
@@ -9983,9 +9771,9 @@
                 <a:solidFill>
                   <a:srgbClr val="F2F7F4"/>
                 </a:solidFill>
-                <a:latin typeface="Arial" pitchFamily="34" charset="0"/>
-                <a:ea typeface="Arial" pitchFamily="34" charset="-122"/>
-                <a:cs typeface="Arial" pitchFamily="34" charset="-120"/>
+                <a:latin typeface="Golos Text" pitchFamily="34" charset="0"/>
+                <a:ea typeface="Golos Text" pitchFamily="34" charset="-122"/>
+                <a:cs typeface="Golos Text" pitchFamily="34" charset="-120"/>
               </a:rPr>
               <a:t>Две линии дохода, они не пересекаются</a:t>
             </a:r>
@@ -10001,12 +9789,12 @@
         </p:nvSpPr>
         <p:spPr>
           <a:xfrm>
-            <a:off x="1047750" y="3362771"/>
-            <a:ext cx="7943850" cy="2205038"/>
+            <a:off x="1047750" y="3338959"/>
+            <a:ext cx="7943850" cy="2228850"/>
           </a:xfrm>
           <a:prstGeom prst="roundRect">
             <a:avLst>
-              <a:gd name="adj" fmla="val 8639"/>
+              <a:gd name="adj" fmla="val 8547"/>
             </a:avLst>
           </a:prstGeom>
           <a:solidFill>
@@ -10019,10 +9807,6 @@
             <a:prstDash val="solid"/>
           </a:ln>
         </p:spPr>
-        <p:txBody>
-          <a:bodyPr/>
-          <a:p/>
-        </p:txBody>
       </p:sp>
       <p:sp>
         <p:nvSpPr>
@@ -10032,7 +9816,7 @@
         </p:nvSpPr>
         <p:spPr>
           <a:xfrm>
-            <a:off x="1476375" y="3753296"/>
+            <a:off x="1476375" y="3729484"/>
             <a:ext cx="7795260" cy="314325"/>
           </a:xfrm>
           <a:prstGeom prst="rect">
@@ -10055,9 +9839,9 @@
                 <a:solidFill>
                   <a:srgbClr val="8FBBA3"/>
                 </a:solidFill>
-                <a:latin typeface="Arial" pitchFamily="34" charset="0"/>
-                <a:ea typeface="Arial" pitchFamily="34" charset="-122"/>
-                <a:cs typeface="Arial" pitchFamily="34" charset="-120"/>
+                <a:latin typeface="Golos Text" pitchFamily="34" charset="0"/>
+                <a:ea typeface="Golos Text" pitchFamily="34" charset="-122"/>
+                <a:cs typeface="Golos Text" pitchFamily="34" charset="-120"/>
               </a:rPr>
               <a:t>Человек · браслет</a:t>
             </a:r>
@@ -10073,8 +9857,8 @@
         </p:nvSpPr>
         <p:spPr>
           <a:xfrm>
-            <a:off x="1476375" y="4143821"/>
-            <a:ext cx="7795260" cy="700088"/>
+            <a:off x="1476375" y="4120009"/>
+            <a:ext cx="7795260" cy="723900"/>
           </a:xfrm>
           <a:prstGeom prst="rect">
             <a:avLst/>
@@ -10096,9 +9880,9 @@
                 <a:solidFill>
                   <a:srgbClr val="FFFFFF"/>
                 </a:solidFill>
-                <a:latin typeface="Arial" pitchFamily="34" charset="0"/>
-                <a:ea typeface="Arial" pitchFamily="34" charset="-122"/>
-                <a:cs typeface="Arial" pitchFamily="34" charset="-120"/>
+                <a:latin typeface="Golos Text" pitchFamily="34" charset="0"/>
+                <a:ea typeface="Golos Text" pitchFamily="34" charset="-122"/>
+                <a:cs typeface="Golos Text" pitchFamily="34" charset="-120"/>
               </a:rPr>
               <a:t>14 990 ₸</a:t>
             </a:r>
@@ -10137,9 +9921,9 @@
                 <a:solidFill>
                   <a:srgbClr val="BEDCCB"/>
                 </a:solidFill>
-                <a:latin typeface="Arial" pitchFamily="34" charset="0"/>
-                <a:ea typeface="Arial" pitchFamily="34" charset="-122"/>
-                <a:cs typeface="Arial" pitchFamily="34" charset="-120"/>
+                <a:latin typeface="Golos Text" pitchFamily="34" charset="0"/>
+                <a:ea typeface="Golos Text" pitchFamily="34" charset="-122"/>
+                <a:cs typeface="Golos Text" pitchFamily="34" charset="-120"/>
               </a:rPr>
               <a:t>один раз, в рассрочку — 1 250 ₸/мес</a:t>
             </a:r>
@@ -10155,12 +9939,12 @@
         </p:nvSpPr>
         <p:spPr>
           <a:xfrm>
-            <a:off x="9296400" y="3362771"/>
-            <a:ext cx="7943850" cy="2205038"/>
+            <a:off x="9296400" y="3338959"/>
+            <a:ext cx="7943850" cy="2228850"/>
           </a:xfrm>
           <a:prstGeom prst="roundRect">
             <a:avLst>
-              <a:gd name="adj" fmla="val 8639"/>
+              <a:gd name="adj" fmla="val 8547"/>
             </a:avLst>
           </a:prstGeom>
           <a:solidFill>
@@ -10173,10 +9957,6 @@
             <a:prstDash val="solid"/>
           </a:ln>
         </p:spPr>
-        <p:txBody>
-          <a:bodyPr/>
-          <a:p/>
-        </p:txBody>
       </p:sp>
       <p:sp>
         <p:nvSpPr>
@@ -10186,7 +9966,7 @@
         </p:nvSpPr>
         <p:spPr>
           <a:xfrm>
-            <a:off x="9725025" y="3753296"/>
+            <a:off x="9725025" y="3729484"/>
             <a:ext cx="7795260" cy="314325"/>
           </a:xfrm>
           <a:prstGeom prst="rect">
@@ -10209,9 +9989,9 @@
                 <a:solidFill>
                   <a:srgbClr val="8FBBA3"/>
                 </a:solidFill>
-                <a:latin typeface="Arial" pitchFamily="34" charset="0"/>
-                <a:ea typeface="Arial" pitchFamily="34" charset="-122"/>
-                <a:cs typeface="Arial" pitchFamily="34" charset="-120"/>
+                <a:latin typeface="Golos Text" pitchFamily="34" charset="0"/>
+                <a:ea typeface="Golos Text" pitchFamily="34" charset="-122"/>
+                <a:cs typeface="Golos Text" pitchFamily="34" charset="-120"/>
               </a:rPr>
               <a:t>Человек · подписка</a:t>
             </a:r>
@@ -10227,8 +10007,8 @@
         </p:nvSpPr>
         <p:spPr>
           <a:xfrm>
-            <a:off x="9725025" y="4143821"/>
-            <a:ext cx="7795260" cy="700088"/>
+            <a:off x="9725025" y="4120009"/>
+            <a:ext cx="7795260" cy="723900"/>
           </a:xfrm>
           <a:prstGeom prst="rect">
             <a:avLst/>
@@ -10250,9 +10030,9 @@
                 <a:solidFill>
                   <a:srgbClr val="FFFFFF"/>
                 </a:solidFill>
-                <a:latin typeface="Arial" pitchFamily="34" charset="0"/>
-                <a:ea typeface="Arial" pitchFamily="34" charset="-122"/>
-                <a:cs typeface="Arial" pitchFamily="34" charset="-120"/>
+                <a:latin typeface="Golos Text" pitchFamily="34" charset="0"/>
+                <a:ea typeface="Golos Text" pitchFamily="34" charset="-122"/>
+                <a:cs typeface="Golos Text" pitchFamily="34" charset="-120"/>
               </a:rPr>
               <a:t>690 ₸</a:t>
             </a:r>
@@ -10264,9 +10044,9 @@
                 <a:solidFill>
                   <a:srgbClr val="BEDCCB"/>
                 </a:solidFill>
-                <a:latin typeface="Arial" pitchFamily="34" charset="0"/>
-                <a:ea typeface="Arial" pitchFamily="34" charset="-122"/>
-                <a:cs typeface="Arial" pitchFamily="34" charset="-120"/>
+                <a:latin typeface="Golos Text" pitchFamily="34" charset="0"/>
+                <a:ea typeface="Golos Text" pitchFamily="34" charset="-122"/>
+                <a:cs typeface="Golos Text" pitchFamily="34" charset="-120"/>
               </a:rPr>
               <a:t>/мес</a:t>
             </a:r>
@@ -10305,9 +10085,9 @@
                 <a:solidFill>
                   <a:srgbClr val="BEDCCB"/>
                 </a:solidFill>
-                <a:latin typeface="Arial" pitchFamily="34" charset="0"/>
-                <a:ea typeface="Arial" pitchFamily="34" charset="-122"/>
-                <a:cs typeface="Arial" pitchFamily="34" charset="-120"/>
+                <a:latin typeface="Golos Text" pitchFamily="34" charset="0"/>
+                <a:ea typeface="Golos Text" pitchFamily="34" charset="-122"/>
+                <a:cs typeface="Golos Text" pitchFamily="34" charset="-120"/>
               </a:rPr>
               <a:t>по желанию; базовые функции бесплатны</a:t>
             </a:r>
@@ -10324,11 +10104,11 @@
         <p:spPr>
           <a:xfrm>
             <a:off x="1047750" y="5872609"/>
-            <a:ext cx="7943850" cy="2205038"/>
+            <a:ext cx="7943850" cy="2228850"/>
           </a:xfrm>
           <a:prstGeom prst="roundRect">
             <a:avLst>
-              <a:gd name="adj" fmla="val 8639"/>
+              <a:gd name="adj" fmla="val 8547"/>
             </a:avLst>
           </a:prstGeom>
           <a:solidFill>
@@ -10341,10 +10121,6 @@
             <a:prstDash val="solid"/>
           </a:ln>
         </p:spPr>
-        <p:txBody>
-          <a:bodyPr/>
-          <a:p/>
-        </p:txBody>
       </p:sp>
       <p:sp>
         <p:nvSpPr>
@@ -10377,9 +10153,9 @@
                 <a:solidFill>
                   <a:srgbClr val="8FBBA3"/>
                 </a:solidFill>
-                <a:latin typeface="Arial" pitchFamily="34" charset="0"/>
-                <a:ea typeface="Arial" pitchFamily="34" charset="-122"/>
-                <a:cs typeface="Arial" pitchFamily="34" charset="-120"/>
+                <a:latin typeface="Golos Text" pitchFamily="34" charset="0"/>
+                <a:ea typeface="Golos Text" pitchFamily="34" charset="-122"/>
+                <a:cs typeface="Golos Text" pitchFamily="34" charset="-120"/>
               </a:rPr>
               <a:t>Поликлинике · модуль наблюдения</a:t>
             </a:r>
@@ -10396,7 +10172,7 @@
         <p:spPr>
           <a:xfrm>
             <a:off x="1476375" y="6653659"/>
-            <a:ext cx="7795260" cy="700088"/>
+            <a:ext cx="7795260" cy="723900"/>
           </a:xfrm>
           <a:prstGeom prst="rect">
             <a:avLst/>
@@ -10418,9 +10194,9 @@
                 <a:solidFill>
                   <a:srgbClr val="3ECF8E"/>
                 </a:solidFill>
-                <a:latin typeface="Arial" pitchFamily="34" charset="0"/>
-                <a:ea typeface="Arial" pitchFamily="34" charset="-122"/>
-                <a:cs typeface="Arial" pitchFamily="34" charset="-120"/>
+                <a:latin typeface="Golos Text" pitchFamily="34" charset="0"/>
+                <a:ea typeface="Golos Text" pitchFamily="34" charset="-122"/>
+                <a:cs typeface="Golos Text" pitchFamily="34" charset="-120"/>
               </a:rPr>
               <a:t>0 ₸</a:t>
             </a:r>
@@ -10436,7 +10212,7 @@
         </p:nvSpPr>
         <p:spPr>
           <a:xfrm>
-            <a:off x="1476375" y="7410896"/>
+            <a:off x="1476375" y="7434709"/>
             <a:ext cx="7795260" cy="314325"/>
           </a:xfrm>
           <a:prstGeom prst="rect">
@@ -10459,9 +10235,9 @@
                 <a:solidFill>
                   <a:srgbClr val="BEDCCB"/>
                 </a:solidFill>
-                <a:latin typeface="Arial" pitchFamily="34" charset="0"/>
-                <a:ea typeface="Arial" pitchFamily="34" charset="-122"/>
-                <a:cs typeface="Arial" pitchFamily="34" charset="-120"/>
+                <a:latin typeface="Golos Text" pitchFamily="34" charset="0"/>
+                <a:ea typeface="Golos Text" pitchFamily="34" charset="-122"/>
+                <a:cs typeface="Golos Text" pitchFamily="34" charset="-120"/>
               </a:rPr>
               <a:t>входит в действующую аренду МИС Damumed</a:t>
             </a:r>
@@ -10478,11 +10254,11 @@
         <p:spPr>
           <a:xfrm>
             <a:off x="9296400" y="5872609"/>
-            <a:ext cx="7943850" cy="2205038"/>
+            <a:ext cx="7943850" cy="2228850"/>
           </a:xfrm>
           <a:prstGeom prst="roundRect">
             <a:avLst>
-              <a:gd name="adj" fmla="val 8639"/>
+              <a:gd name="adj" fmla="val 8547"/>
             </a:avLst>
           </a:prstGeom>
           <a:solidFill>
@@ -10495,10 +10271,6 @@
             <a:prstDash val="solid"/>
           </a:ln>
         </p:spPr>
-        <p:txBody>
-          <a:bodyPr/>
-          <a:p/>
-        </p:txBody>
       </p:sp>
       <p:sp>
         <p:nvSpPr>
@@ -10531,9 +10303,9 @@
                 <a:solidFill>
                   <a:srgbClr val="8FBBA3"/>
                 </a:solidFill>
-                <a:latin typeface="Arial" pitchFamily="34" charset="0"/>
-                <a:ea typeface="Arial" pitchFamily="34" charset="-122"/>
-                <a:cs typeface="Arial" pitchFamily="34" charset="-120"/>
+                <a:latin typeface="Golos Text" pitchFamily="34" charset="0"/>
+                <a:ea typeface="Golos Text" pitchFamily="34" charset="-122"/>
+                <a:cs typeface="Golos Text" pitchFamily="34" charset="-120"/>
               </a:rPr>
               <a:t>Поликлинике · браслеты</a:t>
             </a:r>
@@ -10550,7 +10322,7 @@
         <p:spPr>
           <a:xfrm>
             <a:off x="9725025" y="6653659"/>
-            <a:ext cx="7795260" cy="700088"/>
+            <a:ext cx="7795260" cy="723900"/>
           </a:xfrm>
           <a:prstGeom prst="rect">
             <a:avLst/>
@@ -10572,9 +10344,9 @@
                 <a:solidFill>
                   <a:srgbClr val="FFFFFF"/>
                 </a:solidFill>
-                <a:latin typeface="Arial" pitchFamily="34" charset="0"/>
-                <a:ea typeface="Arial" pitchFamily="34" charset="-122"/>
-                <a:cs typeface="Arial" pitchFamily="34" charset="-120"/>
+                <a:latin typeface="Golos Text" pitchFamily="34" charset="0"/>
+                <a:ea typeface="Golos Text" pitchFamily="34" charset="-122"/>
+                <a:cs typeface="Golos Text" pitchFamily="34" charset="-120"/>
               </a:rPr>
               <a:t>6 900 ₸</a:t>
             </a:r>
@@ -10590,7 +10362,7 @@
         </p:nvSpPr>
         <p:spPr>
           <a:xfrm>
-            <a:off x="9725025" y="7410896"/>
+            <a:off x="9725025" y="7434709"/>
             <a:ext cx="7795260" cy="314325"/>
           </a:xfrm>
           <a:prstGeom prst="rect">
@@ -10613,9 +10385,9 @@
                 <a:solidFill>
                   <a:srgbClr val="BEDCCB"/>
                 </a:solidFill>
-                <a:latin typeface="Arial" pitchFamily="34" charset="0"/>
-                <a:ea typeface="Arial" pitchFamily="34" charset="-122"/>
-                <a:cs typeface="Arial" pitchFamily="34" charset="-120"/>
+                <a:latin typeface="Golos Text" pitchFamily="34" charset="0"/>
+                <a:ea typeface="Golos Text" pitchFamily="34" charset="-122"/>
+                <a:cs typeface="Golos Text" pitchFamily="34" charset="-120"/>
               </a:rPr>
               <a:t>закуп; или рассрочка — 640 ₸/мес</a:t>
             </a:r>
@@ -10663,12 +10435,12 @@
         </p:nvSpPr>
         <p:spPr>
           <a:xfrm>
-            <a:off x="1047750" y="2088803"/>
-            <a:ext cx="3774504" cy="414338"/>
+            <a:off x="1047750" y="2064990"/>
+            <a:ext cx="4004221" cy="428625"/>
           </a:xfrm>
           <a:prstGeom prst="roundRect">
             <a:avLst>
-              <a:gd name="adj" fmla="val 22988"/>
+              <a:gd name="adj" fmla="val 22222"/>
             </a:avLst>
           </a:prstGeom>
           <a:solidFill>
@@ -10676,10 +10448,6 @@
           </a:solidFill>
           <a:ln/>
         </p:spPr>
-        <p:txBody>
-          <a:bodyPr/>
-          <a:p/>
-        </p:txBody>
       </p:sp>
       <p:sp>
         <p:nvSpPr>
@@ -10689,8 +10457,8 @@
         </p:nvSpPr>
         <p:spPr>
           <a:xfrm>
-            <a:off x="1219200" y="2165003"/>
-            <a:ext cx="3544840" cy="300038"/>
+            <a:off x="1219200" y="2141190"/>
+            <a:ext cx="3781447" cy="314325"/>
           </a:xfrm>
           <a:prstGeom prst="rect">
             <a:avLst/>
@@ -10712,9 +10480,9 @@
                 <a:solidFill>
                   <a:srgbClr val="0E7A50"/>
                 </a:solidFill>
-                <a:latin typeface="Arial" pitchFamily="34" charset="0"/>
-                <a:ea typeface="Arial" pitchFamily="34" charset="-122"/>
-                <a:cs typeface="Arial" pitchFamily="34" charset="-120"/>
+                <a:latin typeface="Golos Text" pitchFamily="34" charset="0"/>
+                <a:ea typeface="Golos Text" pitchFamily="34" charset="-122"/>
+                <a:cs typeface="Golos Text" pitchFamily="34" charset="-120"/>
               </a:rPr>
               <a:t>Раздел 03 · Три ценовых уровня</a:t>
             </a:r>
@@ -10730,7 +10498,7 @@
         </p:nvSpPr>
         <p:spPr>
           <a:xfrm>
-            <a:off x="1047750" y="2731740"/>
+            <a:off x="1047750" y="2722215"/>
             <a:ext cx="17811750" cy="618158"/>
           </a:xfrm>
           <a:prstGeom prst="rect">
@@ -10747,7 +10515,7 @@
           <a:p>
             <a:pPr algn="l" indent="0" marL="0">
               <a:lnSpc>
-                <a:spcPct val="90896"/>
+                <a:spcPct val="87000"/>
               </a:lnSpc>
               <a:buNone/>
             </a:pPr>
@@ -10756,9 +10524,9 @@
                 <a:solidFill>
                   <a:srgbClr val="16232B"/>
                 </a:solidFill>
-                <a:latin typeface="Arial" pitchFamily="34" charset="0"/>
-                <a:ea typeface="Arial" pitchFamily="34" charset="-122"/>
-                <a:cs typeface="Arial" pitchFamily="34" charset="-120"/>
+                <a:latin typeface="Golos Text" pitchFamily="34" charset="0"/>
+                <a:ea typeface="Golos Text" pitchFamily="34" charset="-122"/>
+                <a:cs typeface="Golos Text" pitchFamily="34" charset="-120"/>
               </a:rPr>
               <a:t>Цену вниз оплачивает размер партии</a:t>
             </a:r>
@@ -10774,12 +10542,12 @@
         </p:nvSpPr>
         <p:spPr>
           <a:xfrm>
-            <a:off x="1047750" y="3768998"/>
-            <a:ext cx="16192500" cy="3400425"/>
+            <a:off x="1047750" y="3759473"/>
+            <a:ext cx="16192500" cy="3443288"/>
           </a:xfrm>
           <a:prstGeom prst="roundRect">
             <a:avLst>
-              <a:gd name="adj" fmla="val 5602"/>
+              <a:gd name="adj" fmla="val 5533"/>
             </a:avLst>
           </a:prstGeom>
           <a:solidFill>
@@ -10792,10 +10560,6 @@
             <a:prstDash val="solid"/>
           </a:ln>
         </p:spPr>
-        <p:txBody>
-          <a:bodyPr/>
-          <a:p/>
-        </p:txBody>
       </p:sp>
       <p:sp>
         <p:nvSpPr>
@@ -10805,8 +10569,8 @@
         </p:nvSpPr>
         <p:spPr>
           <a:xfrm>
-            <a:off x="1057275" y="3778523"/>
-            <a:ext cx="16173450" cy="719138"/>
+            <a:off x="1057275" y="3768998"/>
+            <a:ext cx="16173450" cy="733425"/>
           </a:xfrm>
           <a:prstGeom prst="rect">
             <a:avLst/>
@@ -10816,10 +10580,6 @@
           </a:solidFill>
           <a:ln/>
         </p:spPr>
-        <p:txBody>
-          <a:bodyPr/>
-          <a:p/>
-        </p:txBody>
       </p:sp>
       <p:sp>
         <p:nvSpPr>
@@ -10829,8 +10589,8 @@
         </p:nvSpPr>
         <p:spPr>
           <a:xfrm>
-            <a:off x="1362075" y="4007123"/>
-            <a:ext cx="3476424" cy="300038"/>
+            <a:off x="1362075" y="3997598"/>
+            <a:ext cx="3476424" cy="314325"/>
           </a:xfrm>
           <a:prstGeom prst="rect">
             <a:avLst/>
@@ -10852,9 +10612,9 @@
                 <a:solidFill>
                   <a:srgbClr val="BEDCCB"/>
                 </a:solidFill>
-                <a:latin typeface="Arial" pitchFamily="34" charset="0"/>
-                <a:ea typeface="Arial" pitchFamily="34" charset="-122"/>
-                <a:cs typeface="Arial" pitchFamily="34" charset="-120"/>
+                <a:latin typeface="Golos Text" pitchFamily="34" charset="0"/>
+                <a:ea typeface="Golos Text" pitchFamily="34" charset="-122"/>
+                <a:cs typeface="Golos Text" pitchFamily="34" charset="-120"/>
               </a:rPr>
               <a:t>Уровень</a:t>
             </a:r>
@@ -10870,8 +10630,8 @@
         </p:nvSpPr>
         <p:spPr>
           <a:xfrm>
-            <a:off x="5214789" y="4007123"/>
-            <a:ext cx="2762196" cy="300038"/>
+            <a:off x="5214789" y="3997598"/>
+            <a:ext cx="2762196" cy="314325"/>
           </a:xfrm>
           <a:prstGeom prst="rect">
             <a:avLst/>
@@ -10893,9 +10653,9 @@
                 <a:solidFill>
                   <a:srgbClr val="BEDCCB"/>
                 </a:solidFill>
-                <a:latin typeface="Arial" pitchFamily="34" charset="0"/>
-                <a:ea typeface="Arial" pitchFamily="34" charset="-122"/>
-                <a:cs typeface="Arial" pitchFamily="34" charset="-120"/>
+                <a:latin typeface="Golos Text" pitchFamily="34" charset="0"/>
+                <a:ea typeface="Golos Text" pitchFamily="34" charset="-122"/>
+                <a:cs typeface="Golos Text" pitchFamily="34" charset="-120"/>
               </a:rPr>
               <a:t>Розница</a:t>
             </a:r>
@@ -10911,8 +10671,8 @@
         </p:nvSpPr>
         <p:spPr>
           <a:xfrm>
-            <a:off x="8266435" y="4007123"/>
-            <a:ext cx="2762119" cy="300038"/>
+            <a:off x="8266435" y="3997598"/>
+            <a:ext cx="2762119" cy="314325"/>
           </a:xfrm>
           <a:prstGeom prst="rect">
             <a:avLst/>
@@ -10934,9 +10694,9 @@
                 <a:solidFill>
                   <a:srgbClr val="BEDCCB"/>
                 </a:solidFill>
-                <a:latin typeface="Arial" pitchFamily="34" charset="0"/>
-                <a:ea typeface="Arial" pitchFamily="34" charset="-122"/>
-                <a:cs typeface="Arial" pitchFamily="34" charset="-120"/>
+                <a:latin typeface="Golos Text" pitchFamily="34" charset="0"/>
+                <a:ea typeface="Golos Text" pitchFamily="34" charset="-122"/>
+                <a:cs typeface="Golos Text" pitchFamily="34" charset="-120"/>
               </a:rPr>
               <a:t>Поликлинике</a:t>
             </a:r>
@@ -10952,8 +10712,8 @@
         </p:nvSpPr>
         <p:spPr>
           <a:xfrm>
-            <a:off x="11318007" y="4007123"/>
-            <a:ext cx="2762119" cy="300038"/>
+            <a:off x="11318007" y="3997598"/>
+            <a:ext cx="2762119" cy="314325"/>
           </a:xfrm>
           <a:prstGeom prst="rect">
             <a:avLst/>
@@ -10975,9 +10735,9 @@
                 <a:solidFill>
                   <a:srgbClr val="BEDCCB"/>
                 </a:solidFill>
-                <a:latin typeface="Arial" pitchFamily="34" charset="0"/>
-                <a:ea typeface="Arial" pitchFamily="34" charset="-122"/>
-                <a:cs typeface="Arial" pitchFamily="34" charset="-120"/>
+                <a:latin typeface="Golos Text" pitchFamily="34" charset="0"/>
+                <a:ea typeface="Golos Text" pitchFamily="34" charset="-122"/>
+                <a:cs typeface="Golos Text" pitchFamily="34" charset="-120"/>
               </a:rPr>
               <a:t>Партия 10 тыс</a:t>
             </a:r>
@@ -10993,8 +10753,8 @@
         </p:nvSpPr>
         <p:spPr>
           <a:xfrm>
-            <a:off x="14369579" y="4007123"/>
-            <a:ext cx="2762119" cy="300038"/>
+            <a:off x="14369579" y="3997598"/>
+            <a:ext cx="2762119" cy="314325"/>
           </a:xfrm>
           <a:prstGeom prst="rect">
             <a:avLst/>
@@ -11016,9 +10776,9 @@
                 <a:solidFill>
                   <a:srgbClr val="BEDCCB"/>
                 </a:solidFill>
-                <a:latin typeface="Arial" pitchFamily="34" charset="0"/>
-                <a:ea typeface="Arial" pitchFamily="34" charset="-122"/>
-                <a:cs typeface="Arial" pitchFamily="34" charset="-120"/>
+                <a:latin typeface="Golos Text" pitchFamily="34" charset="0"/>
+                <a:ea typeface="Golos Text" pitchFamily="34" charset="-122"/>
+                <a:cs typeface="Golos Text" pitchFamily="34" charset="-120"/>
               </a:rPr>
               <a:t>Партия 20 тыс</a:t>
             </a:r>
@@ -11034,8 +10794,8 @@
         </p:nvSpPr>
         <p:spPr>
           <a:xfrm>
-            <a:off x="1057275" y="4497660"/>
-            <a:ext cx="16173450" cy="890588"/>
+            <a:off x="1057275" y="4502423"/>
+            <a:ext cx="16173450" cy="900113"/>
           </a:xfrm>
           <a:prstGeom prst="rect">
             <a:avLst/>
@@ -11045,10 +10805,6 @@
           </a:solidFill>
           <a:ln/>
         </p:spPr>
-        <p:txBody>
-          <a:bodyPr/>
-          <a:p/>
-        </p:txBody>
       </p:sp>
       <p:sp>
         <p:nvSpPr>
@@ -11058,7 +10814,7 @@
         </p:nvSpPr>
         <p:spPr>
           <a:xfrm>
-            <a:off x="1057275" y="5378723"/>
+            <a:off x="1057275" y="5393010"/>
             <a:ext cx="16173450" cy="9525"/>
           </a:xfrm>
           <a:prstGeom prst="rect">
@@ -11069,10 +10825,6 @@
           </a:solidFill>
           <a:ln/>
         </p:spPr>
-        <p:txBody>
-          <a:bodyPr/>
-          <a:p/>
-        </p:txBody>
       </p:sp>
       <p:sp>
         <p:nvSpPr>
@@ -11082,8 +10834,8 @@
         </p:nvSpPr>
         <p:spPr>
           <a:xfrm>
-            <a:off x="1362075" y="4783410"/>
-            <a:ext cx="3476424" cy="347663"/>
+            <a:off x="1362075" y="4788173"/>
+            <a:ext cx="3476424" cy="357188"/>
           </a:xfrm>
           <a:prstGeom prst="rect">
             <a:avLst/>
@@ -11105,9 +10857,9 @@
                 <a:solidFill>
                   <a:srgbClr val="0B3D2C"/>
                 </a:solidFill>
-                <a:latin typeface="Arial" pitchFamily="34" charset="0"/>
-                <a:ea typeface="Arial" pitchFamily="34" charset="-122"/>
-                <a:cs typeface="Arial" pitchFamily="34" charset="-120"/>
+                <a:latin typeface="Golos Text" pitchFamily="34" charset="0"/>
+                <a:ea typeface="Golos Text" pitchFamily="34" charset="-122"/>
+                <a:cs typeface="Golos Text" pitchFamily="34" charset="-120"/>
               </a:rPr>
               <a:t>I. Базовый</a:t>
             </a:r>
@@ -11123,8 +10875,8 @@
         </p:nvSpPr>
         <p:spPr>
           <a:xfrm>
-            <a:off x="5214789" y="4783410"/>
-            <a:ext cx="2762196" cy="347663"/>
+            <a:off x="5214789" y="4788173"/>
+            <a:ext cx="2762196" cy="357188"/>
           </a:xfrm>
           <a:prstGeom prst="rect">
             <a:avLst/>
@@ -11146,9 +10898,9 @@
                 <a:solidFill>
                   <a:srgbClr val="16232B"/>
                 </a:solidFill>
-                <a:latin typeface="Courier New" pitchFamily="34" charset="0"/>
-                <a:ea typeface="Courier New" pitchFamily="34" charset="-122"/>
-                <a:cs typeface="Courier New" pitchFamily="34" charset="-120"/>
+                <a:latin typeface="Spline Sans Mono" pitchFamily="34" charset="0"/>
+                <a:ea typeface="Spline Sans Mono" pitchFamily="34" charset="-122"/>
+                <a:cs typeface="Spline Sans Mono" pitchFamily="34" charset="-120"/>
               </a:rPr>
               <a:t>14 990 ₸</a:t>
             </a:r>
@@ -11164,8 +10916,8 @@
         </p:nvSpPr>
         <p:spPr>
           <a:xfrm>
-            <a:off x="8266435" y="4783410"/>
-            <a:ext cx="2762119" cy="347663"/>
+            <a:off x="8266435" y="4788173"/>
+            <a:ext cx="2762119" cy="357188"/>
           </a:xfrm>
           <a:prstGeom prst="rect">
             <a:avLst/>
@@ -11187,9 +10939,9 @@
                 <a:solidFill>
                   <a:srgbClr val="16232B"/>
                 </a:solidFill>
-                <a:latin typeface="Courier New" pitchFamily="34" charset="0"/>
-                <a:ea typeface="Courier New" pitchFamily="34" charset="-122"/>
-                <a:cs typeface="Courier New" pitchFamily="34" charset="-120"/>
+                <a:latin typeface="Spline Sans Mono" pitchFamily="34" charset="0"/>
+                <a:ea typeface="Spline Sans Mono" pitchFamily="34" charset="-122"/>
+                <a:cs typeface="Spline Sans Mono" pitchFamily="34" charset="-120"/>
               </a:rPr>
               <a:t>6 900 ₸</a:t>
             </a:r>
@@ -11205,8 +10957,8 @@
         </p:nvSpPr>
         <p:spPr>
           <a:xfrm>
-            <a:off x="11318007" y="4783410"/>
-            <a:ext cx="2762119" cy="347663"/>
+            <a:off x="11318007" y="4788173"/>
+            <a:ext cx="2762119" cy="357188"/>
           </a:xfrm>
           <a:prstGeom prst="rect">
             <a:avLst/>
@@ -11228,9 +10980,9 @@
                 <a:solidFill>
                   <a:srgbClr val="0E7A50"/>
                 </a:solidFill>
-                <a:latin typeface="Courier New" pitchFamily="34" charset="0"/>
-                <a:ea typeface="Courier New" pitchFamily="34" charset="-122"/>
-                <a:cs typeface="Courier New" pitchFamily="34" charset="-120"/>
+                <a:latin typeface="Spline Sans Mono" pitchFamily="34" charset="0"/>
+                <a:ea typeface="Spline Sans Mono" pitchFamily="34" charset="-122"/>
+                <a:cs typeface="Spline Sans Mono" pitchFamily="34" charset="-120"/>
               </a:rPr>
               <a:t>+20,0 млн</a:t>
             </a:r>
@@ -11246,8 +10998,8 @@
         </p:nvSpPr>
         <p:spPr>
           <a:xfrm>
-            <a:off x="14369579" y="4783410"/>
-            <a:ext cx="2762119" cy="347663"/>
+            <a:off x="14369579" y="4788173"/>
+            <a:ext cx="2762119" cy="357188"/>
           </a:xfrm>
           <a:prstGeom prst="rect">
             <a:avLst/>
@@ -11269,9 +11021,9 @@
                 <a:solidFill>
                   <a:srgbClr val="0E7A50"/>
                 </a:solidFill>
-                <a:latin typeface="Courier New" pitchFamily="34" charset="0"/>
-                <a:ea typeface="Courier New" pitchFamily="34" charset="-122"/>
-                <a:cs typeface="Courier New" pitchFamily="34" charset="-120"/>
+                <a:latin typeface="Spline Sans Mono" pitchFamily="34" charset="0"/>
+                <a:ea typeface="Spline Sans Mono" pitchFamily="34" charset="-122"/>
+                <a:cs typeface="Spline Sans Mono" pitchFamily="34" charset="-120"/>
               </a:rPr>
               <a:t>+93,9 млн</a:t>
             </a:r>
@@ -11287,7 +11039,7 @@
         </p:nvSpPr>
         <p:spPr>
           <a:xfrm>
-            <a:off x="1057275" y="6269310"/>
+            <a:off x="1057275" y="6293123"/>
             <a:ext cx="16173450" cy="9525"/>
           </a:xfrm>
           <a:prstGeom prst="rect">
@@ -11298,10 +11050,6 @@
           </a:solidFill>
           <a:ln/>
         </p:spPr>
-        <p:txBody>
-          <a:bodyPr/>
-          <a:p/>
-        </p:txBody>
       </p:sp>
       <p:sp>
         <p:nvSpPr>
@@ -11311,8 +11059,8 @@
         </p:nvSpPr>
         <p:spPr>
           <a:xfrm>
-            <a:off x="1362075" y="5673998"/>
-            <a:ext cx="3476424" cy="347663"/>
+            <a:off x="1362075" y="5688285"/>
+            <a:ext cx="3476424" cy="357188"/>
           </a:xfrm>
           <a:prstGeom prst="rect">
             <a:avLst/>
@@ -11334,9 +11082,9 @@
                 <a:solidFill>
                   <a:srgbClr val="16232B"/>
                 </a:solidFill>
-                <a:latin typeface="Arial" pitchFamily="34" charset="0"/>
-                <a:ea typeface="Arial" pitchFamily="34" charset="-122"/>
-                <a:cs typeface="Arial" pitchFamily="34" charset="-120"/>
+                <a:latin typeface="Golos Text" pitchFamily="34" charset="0"/>
+                <a:ea typeface="Golos Text" pitchFamily="34" charset="-122"/>
+                <a:cs typeface="Golos Text" pitchFamily="34" charset="-120"/>
               </a:rPr>
               <a:t>II. Массовый</a:t>
             </a:r>
@@ -11352,8 +11100,8 @@
         </p:nvSpPr>
         <p:spPr>
           <a:xfrm>
-            <a:off x="5214789" y="5673998"/>
-            <a:ext cx="2762196" cy="347663"/>
+            <a:off x="5214789" y="5688285"/>
+            <a:ext cx="2762196" cy="357188"/>
           </a:xfrm>
           <a:prstGeom prst="rect">
             <a:avLst/>
@@ -11375,9 +11123,9 @@
                 <a:solidFill>
                   <a:srgbClr val="16232B"/>
                 </a:solidFill>
-                <a:latin typeface="Courier New" pitchFamily="34" charset="0"/>
-                <a:ea typeface="Courier New" pitchFamily="34" charset="-122"/>
-                <a:cs typeface="Courier New" pitchFamily="34" charset="-120"/>
+                <a:latin typeface="Spline Sans Mono" pitchFamily="34" charset="0"/>
+                <a:ea typeface="Spline Sans Mono" pitchFamily="34" charset="-122"/>
+                <a:cs typeface="Spline Sans Mono" pitchFamily="34" charset="-120"/>
               </a:rPr>
               <a:t>11 990 ₸</a:t>
             </a:r>
@@ -11393,8 +11141,8 @@
         </p:nvSpPr>
         <p:spPr>
           <a:xfrm>
-            <a:off x="8266435" y="5673998"/>
-            <a:ext cx="2762119" cy="347663"/>
+            <a:off x="8266435" y="5688285"/>
+            <a:ext cx="2762119" cy="357188"/>
           </a:xfrm>
           <a:prstGeom prst="rect">
             <a:avLst/>
@@ -11416,9 +11164,9 @@
                 <a:solidFill>
                   <a:srgbClr val="16232B"/>
                 </a:solidFill>
-                <a:latin typeface="Courier New" pitchFamily="34" charset="0"/>
-                <a:ea typeface="Courier New" pitchFamily="34" charset="-122"/>
-                <a:cs typeface="Courier New" pitchFamily="34" charset="-120"/>
+                <a:latin typeface="Spline Sans Mono" pitchFamily="34" charset="0"/>
+                <a:ea typeface="Spline Sans Mono" pitchFamily="34" charset="-122"/>
+                <a:cs typeface="Spline Sans Mono" pitchFamily="34" charset="-120"/>
               </a:rPr>
               <a:t>5 500 ₸</a:t>
             </a:r>
@@ -11434,8 +11182,8 @@
         </p:nvSpPr>
         <p:spPr>
           <a:xfrm>
-            <a:off x="11318007" y="5673998"/>
-            <a:ext cx="2762119" cy="347663"/>
+            <a:off x="11318007" y="5688285"/>
+            <a:ext cx="2762119" cy="357188"/>
           </a:xfrm>
           <a:prstGeom prst="rect">
             <a:avLst/>
@@ -11457,9 +11205,9 @@
                 <a:solidFill>
                   <a:srgbClr val="0E7A50"/>
                 </a:solidFill>
-                <a:latin typeface="Courier New" pitchFamily="34" charset="0"/>
-                <a:ea typeface="Courier New" pitchFamily="34" charset="-122"/>
-                <a:cs typeface="Courier New" pitchFamily="34" charset="-120"/>
+                <a:latin typeface="Spline Sans Mono" pitchFamily="34" charset="0"/>
+                <a:ea typeface="Spline Sans Mono" pitchFamily="34" charset="-122"/>
+                <a:cs typeface="Spline Sans Mono" pitchFamily="34" charset="-120"/>
               </a:rPr>
               <a:t>+1,2 млн</a:t>
             </a:r>
@@ -11475,8 +11223,8 @@
         </p:nvSpPr>
         <p:spPr>
           <a:xfrm>
-            <a:off x="14369579" y="5673998"/>
-            <a:ext cx="2762119" cy="347663"/>
+            <a:off x="14369579" y="5688285"/>
+            <a:ext cx="2762119" cy="357188"/>
           </a:xfrm>
           <a:prstGeom prst="rect">
             <a:avLst/>
@@ -11498,9 +11246,9 @@
                 <a:solidFill>
                   <a:srgbClr val="0E7A50"/>
                 </a:solidFill>
-                <a:latin typeface="Courier New" pitchFamily="34" charset="0"/>
-                <a:ea typeface="Courier New" pitchFamily="34" charset="-122"/>
-                <a:cs typeface="Courier New" pitchFamily="34" charset="-120"/>
+                <a:latin typeface="Spline Sans Mono" pitchFamily="34" charset="0"/>
+                <a:ea typeface="Spline Sans Mono" pitchFamily="34" charset="-122"/>
+                <a:cs typeface="Spline Sans Mono" pitchFamily="34" charset="-120"/>
               </a:rPr>
               <a:t>+56,3 млн</a:t>
             </a:r>
@@ -11516,8 +11264,8 @@
         </p:nvSpPr>
         <p:spPr>
           <a:xfrm>
-            <a:off x="1362075" y="6564585"/>
-            <a:ext cx="3476424" cy="347663"/>
+            <a:off x="1362075" y="6588398"/>
+            <a:ext cx="3476424" cy="357188"/>
           </a:xfrm>
           <a:prstGeom prst="rect">
             <a:avLst/>
@@ -11539,9 +11287,9 @@
                 <a:solidFill>
                   <a:srgbClr val="16232B"/>
                 </a:solidFill>
-                <a:latin typeface="Arial" pitchFamily="34" charset="0"/>
-                <a:ea typeface="Arial" pitchFamily="34" charset="-122"/>
-                <a:cs typeface="Arial" pitchFamily="34" charset="-120"/>
+                <a:latin typeface="Golos Text" pitchFamily="34" charset="0"/>
+                <a:ea typeface="Golos Text" pitchFamily="34" charset="-122"/>
+                <a:cs typeface="Golos Text" pitchFamily="34" charset="-120"/>
               </a:rPr>
               <a:t>III. Доступный</a:t>
             </a:r>
@@ -11557,8 +11305,8 @@
         </p:nvSpPr>
         <p:spPr>
           <a:xfrm>
-            <a:off x="5214789" y="6564585"/>
-            <a:ext cx="2762196" cy="347663"/>
+            <a:off x="5214789" y="6588398"/>
+            <a:ext cx="2762196" cy="357188"/>
           </a:xfrm>
           <a:prstGeom prst="rect">
             <a:avLst/>
@@ -11580,9 +11328,9 @@
                 <a:solidFill>
                   <a:srgbClr val="16232B"/>
                 </a:solidFill>
-                <a:latin typeface="Courier New" pitchFamily="34" charset="0"/>
-                <a:ea typeface="Courier New" pitchFamily="34" charset="-122"/>
-                <a:cs typeface="Courier New" pitchFamily="34" charset="-120"/>
+                <a:latin typeface="Spline Sans Mono" pitchFamily="34" charset="0"/>
+                <a:ea typeface="Spline Sans Mono" pitchFamily="34" charset="-122"/>
+                <a:cs typeface="Spline Sans Mono" pitchFamily="34" charset="-120"/>
               </a:rPr>
               <a:t>9 990 ₸</a:t>
             </a:r>
@@ -11598,8 +11346,8 @@
         </p:nvSpPr>
         <p:spPr>
           <a:xfrm>
-            <a:off x="8266435" y="6564585"/>
-            <a:ext cx="2762119" cy="347663"/>
+            <a:off x="8266435" y="6588398"/>
+            <a:ext cx="2762119" cy="357188"/>
           </a:xfrm>
           <a:prstGeom prst="rect">
             <a:avLst/>
@@ -11621,9 +11369,9 @@
                 <a:solidFill>
                   <a:srgbClr val="16232B"/>
                 </a:solidFill>
-                <a:latin typeface="Courier New" pitchFamily="34" charset="0"/>
-                <a:ea typeface="Courier New" pitchFamily="34" charset="-122"/>
-                <a:cs typeface="Courier New" pitchFamily="34" charset="-120"/>
+                <a:latin typeface="Spline Sans Mono" pitchFamily="34" charset="0"/>
+                <a:ea typeface="Spline Sans Mono" pitchFamily="34" charset="-122"/>
+                <a:cs typeface="Spline Sans Mono" pitchFamily="34" charset="-120"/>
               </a:rPr>
               <a:t>4 500 ₸</a:t>
             </a:r>
@@ -11639,8 +11387,8 @@
         </p:nvSpPr>
         <p:spPr>
           <a:xfrm>
-            <a:off x="11318007" y="6564585"/>
-            <a:ext cx="2762119" cy="347663"/>
+            <a:off x="11318007" y="6588398"/>
+            <a:ext cx="2762119" cy="357188"/>
           </a:xfrm>
           <a:prstGeom prst="rect">
             <a:avLst/>
@@ -11662,9 +11410,9 @@
                 <a:solidFill>
                   <a:srgbClr val="C0453C"/>
                 </a:solidFill>
-                <a:latin typeface="Courier New" pitchFamily="34" charset="0"/>
-                <a:ea typeface="Courier New" pitchFamily="34" charset="-122"/>
-                <a:cs typeface="Courier New" pitchFamily="34" charset="-120"/>
+                <a:latin typeface="Spline Sans Mono" pitchFamily="34" charset="0"/>
+                <a:ea typeface="Spline Sans Mono" pitchFamily="34" charset="-122"/>
+                <a:cs typeface="Spline Sans Mono" pitchFamily="34" charset="-120"/>
               </a:rPr>
               <a:t>−11,7 млн</a:t>
             </a:r>
@@ -11680,8 +11428,8 @@
         </p:nvSpPr>
         <p:spPr>
           <a:xfrm>
-            <a:off x="14369579" y="6564585"/>
-            <a:ext cx="2762119" cy="347663"/>
+            <a:off x="14369579" y="6588398"/>
+            <a:ext cx="2762119" cy="357188"/>
           </a:xfrm>
           <a:prstGeom prst="rect">
             <a:avLst/>
@@ -11703,9 +11451,9 @@
                 <a:solidFill>
                   <a:srgbClr val="0E7A50"/>
                 </a:solidFill>
-                <a:latin typeface="Courier New" pitchFamily="34" charset="0"/>
-                <a:ea typeface="Courier New" pitchFamily="34" charset="-122"/>
-                <a:cs typeface="Courier New" pitchFamily="34" charset="-120"/>
+                <a:latin typeface="Spline Sans Mono" pitchFamily="34" charset="0"/>
+                <a:ea typeface="Spline Sans Mono" pitchFamily="34" charset="-122"/>
+                <a:cs typeface="Spline Sans Mono" pitchFamily="34" charset="-120"/>
               </a:rPr>
               <a:t>+30,7 млн</a:t>
             </a:r>
@@ -11721,8 +11469,8 @@
         </p:nvSpPr>
         <p:spPr>
           <a:xfrm>
-            <a:off x="1047750" y="7474223"/>
-            <a:ext cx="12361545" cy="762000"/>
+            <a:off x="1047750" y="7507560"/>
+            <a:ext cx="12361545" cy="752475"/>
           </a:xfrm>
           <a:prstGeom prst="rect">
             <a:avLst/>
@@ -11738,7 +11486,7 @@
           <a:p>
             <a:pPr algn="l" indent="0" marL="0">
               <a:lnSpc>
-                <a:spcPct val="129310"/>
+                <a:spcPct val="125000"/>
               </a:lnSpc>
               <a:buNone/>
             </a:pPr>
@@ -11747,15 +11495,15 @@
                 <a:solidFill>
                   <a:srgbClr val="0E7A50"/>
                 </a:solidFill>
-                <a:latin typeface="Arial" pitchFamily="34" charset="0"/>
-                <a:ea typeface="Arial" pitchFamily="34" charset="-122"/>
-                <a:cs typeface="Arial" pitchFamily="34" charset="-120"/>
+                <a:latin typeface="Golos Text" pitchFamily="34" charset="0"/>
+                <a:ea typeface="Golos Text" pitchFamily="34" charset="-122"/>
+                <a:cs typeface="Golos Text" pitchFamily="34" charset="-120"/>
               </a:rPr>
               <a:t>Рекомендация: </a:t>
             </a:r>
             <a:pPr algn="l" indent="0" marL="0">
               <a:lnSpc>
-                <a:spcPct val="129310"/>
+                <a:spcPct val="125000"/>
               </a:lnSpc>
               <a:buNone/>
             </a:pPr>
@@ -11764,9 +11512,9 @@
                 <a:solidFill>
                   <a:srgbClr val="42504A"/>
                 </a:solidFill>
-                <a:latin typeface="Arial" pitchFamily="34" charset="0"/>
-                <a:ea typeface="Arial" pitchFamily="34" charset="-122"/>
-                <a:cs typeface="Arial" pitchFamily="34" charset="-120"/>
+                <a:latin typeface="Golos Text" pitchFamily="34" charset="0"/>
+                <a:ea typeface="Golos Text" pitchFamily="34" charset="-122"/>
+                <a:cs typeface="Golos Text" pitchFamily="34" charset="-120"/>
               </a:rPr>
               <a:t>Базовый на партии 10 000 — осторожный вход, либо Массовый на 20 000 — ставка на охват: +56 млн против +20.</a:t>
             </a:r>
@@ -11814,12 +11562,12 @@
         </p:nvSpPr>
         <p:spPr>
           <a:xfrm>
-            <a:off x="1047750" y="2078385"/>
-            <a:ext cx="2783830" cy="414338"/>
+            <a:off x="1047750" y="2054572"/>
+            <a:ext cx="2952527" cy="428625"/>
           </a:xfrm>
           <a:prstGeom prst="roundRect">
             <a:avLst>
-              <a:gd name="adj" fmla="val 22988"/>
+              <a:gd name="adj" fmla="val 22222"/>
             </a:avLst>
           </a:prstGeom>
           <a:solidFill>
@@ -11827,10 +11575,6 @@
           </a:solidFill>
           <a:ln/>
         </p:spPr>
-        <p:txBody>
-          <a:bodyPr/>
-          <a:p/>
-        </p:txBody>
       </p:sp>
       <p:sp>
         <p:nvSpPr>
@@ -11840,8 +11584,8 @@
         </p:nvSpPr>
         <p:spPr>
           <a:xfrm>
-            <a:off x="1219200" y="2154585"/>
-            <a:ext cx="2524445" cy="300038"/>
+            <a:off x="1219200" y="2130772"/>
+            <a:ext cx="2698203" cy="314325"/>
           </a:xfrm>
           <a:prstGeom prst="rect">
             <a:avLst/>
@@ -11863,9 +11607,9 @@
                 <a:solidFill>
                   <a:srgbClr val="0E7A50"/>
                 </a:solidFill>
-                <a:latin typeface="Arial" pitchFamily="34" charset="0"/>
-                <a:ea typeface="Arial" pitchFamily="34" charset="-122"/>
-                <a:cs typeface="Arial" pitchFamily="34" charset="-120"/>
+                <a:latin typeface="Golos Text" pitchFamily="34" charset="0"/>
+                <a:ea typeface="Golos Text" pitchFamily="34" charset="-122"/>
+                <a:cs typeface="Golos Text" pitchFamily="34" charset="-120"/>
               </a:rPr>
               <a:t>Раздел 04 · Экономика</a:t>
             </a:r>
@@ -11881,7 +11625,7 @@
         </p:nvSpPr>
         <p:spPr>
           <a:xfrm>
-            <a:off x="1047750" y="2721322"/>
+            <a:off x="1047750" y="2711797"/>
             <a:ext cx="17811750" cy="658118"/>
           </a:xfrm>
           <a:prstGeom prst="rect">
@@ -11898,7 +11642,7 @@
           <a:p>
             <a:pPr algn="l" indent="0" marL="0">
               <a:lnSpc>
-                <a:spcPct val="91690"/>
+                <a:spcPct val="87383"/>
               </a:lnSpc>
               <a:buNone/>
             </a:pPr>
@@ -11907,9 +11651,9 @@
                 <a:solidFill>
                   <a:srgbClr val="16232B"/>
                 </a:solidFill>
-                <a:latin typeface="Arial" pitchFamily="34" charset="0"/>
-                <a:ea typeface="Arial" pitchFamily="34" charset="-122"/>
-                <a:cs typeface="Arial" pitchFamily="34" charset="-120"/>
+                <a:latin typeface="Golos Text" pitchFamily="34" charset="0"/>
+                <a:ea typeface="Golos Text" pitchFamily="34" charset="-122"/>
+                <a:cs typeface="Golos Text" pitchFamily="34" charset="-120"/>
               </a:rPr>
               <a:t>Низкая цена — потому что софт свой</a:t>
             </a:r>
@@ -11925,12 +11669,12 @@
         </p:nvSpPr>
         <p:spPr>
           <a:xfrm>
-            <a:off x="1047750" y="3874740"/>
-            <a:ext cx="3848100" cy="2400300"/>
+            <a:off x="1047750" y="3865215"/>
+            <a:ext cx="3848100" cy="2433638"/>
           </a:xfrm>
           <a:prstGeom prst="roundRect">
             <a:avLst>
-              <a:gd name="adj" fmla="val 7143"/>
+              <a:gd name="adj" fmla="val 7045"/>
             </a:avLst>
           </a:prstGeom>
           <a:solidFill>
@@ -11943,10 +11687,6 @@
             <a:prstDash val="solid"/>
           </a:ln>
         </p:spPr>
-        <p:txBody>
-          <a:bodyPr/>
-          <a:p/>
-        </p:txBody>
       </p:sp>
       <p:sp>
         <p:nvSpPr>
@@ -11956,7 +11696,7 @@
         </p:nvSpPr>
         <p:spPr>
           <a:xfrm>
-            <a:off x="1400175" y="4246215"/>
+            <a:off x="1400175" y="4236690"/>
             <a:ext cx="3457575" cy="314325"/>
           </a:xfrm>
           <a:prstGeom prst="rect">
@@ -11979,9 +11719,9 @@
                 <a:solidFill>
                   <a:srgbClr val="7B8C82"/>
                 </a:solidFill>
-                <a:latin typeface="Arial" pitchFamily="34" charset="0"/>
-                <a:ea typeface="Arial" pitchFamily="34" charset="-122"/>
-                <a:cs typeface="Arial" pitchFamily="34" charset="-120"/>
+                <a:latin typeface="Golos Text" pitchFamily="34" charset="0"/>
+                <a:ea typeface="Golos Text" pitchFamily="34" charset="-122"/>
+                <a:cs typeface="Golos Text" pitchFamily="34" charset="-120"/>
               </a:rPr>
               <a:t>Себестоимость на складе</a:t>
             </a:r>
@@ -11997,8 +11737,8 @@
         </p:nvSpPr>
         <p:spPr>
           <a:xfrm>
-            <a:off x="1400175" y="4655790"/>
-            <a:ext cx="3457575" cy="676275"/>
+            <a:off x="1400175" y="4646265"/>
+            <a:ext cx="3457575" cy="704850"/>
           </a:xfrm>
           <a:prstGeom prst="rect">
             <a:avLst/>
@@ -12020,9 +11760,9 @@
                 <a:solidFill>
                   <a:srgbClr val="16232B"/>
                 </a:solidFill>
-                <a:latin typeface="Arial" pitchFamily="34" charset="0"/>
-                <a:ea typeface="Arial" pitchFamily="34" charset="-122"/>
-                <a:cs typeface="Arial" pitchFamily="34" charset="-120"/>
+                <a:latin typeface="Golos Text" pitchFamily="34" charset="0"/>
+                <a:ea typeface="Golos Text" pitchFamily="34" charset="-122"/>
+                <a:cs typeface="Golos Text" pitchFamily="34" charset="-120"/>
               </a:rPr>
               <a:t>4 026 ₸</a:t>
             </a:r>
@@ -12038,12 +11778,12 @@
         </p:nvSpPr>
         <p:spPr>
           <a:xfrm>
-            <a:off x="5162550" y="3874740"/>
-            <a:ext cx="3848100" cy="2400300"/>
+            <a:off x="5162550" y="3865215"/>
+            <a:ext cx="3848100" cy="2433638"/>
           </a:xfrm>
           <a:prstGeom prst="roundRect">
             <a:avLst>
-              <a:gd name="adj" fmla="val 7143"/>
+              <a:gd name="adj" fmla="val 7045"/>
             </a:avLst>
           </a:prstGeom>
           <a:solidFill>
@@ -12056,10 +11796,6 @@
             <a:prstDash val="solid"/>
           </a:ln>
         </p:spPr>
-        <p:txBody>
-          <a:bodyPr/>
-          <a:p/>
-        </p:txBody>
       </p:sp>
       <p:sp>
         <p:nvSpPr>
@@ -12069,7 +11805,7 @@
         </p:nvSpPr>
         <p:spPr>
           <a:xfrm>
-            <a:off x="5514975" y="4246215"/>
+            <a:off x="5514975" y="4236690"/>
             <a:ext cx="3457575" cy="314325"/>
           </a:xfrm>
           <a:prstGeom prst="rect">
@@ -12092,9 +11828,9 @@
                 <a:solidFill>
                   <a:srgbClr val="7B8C82"/>
                 </a:solidFill>
-                <a:latin typeface="Arial" pitchFamily="34" charset="0"/>
-                <a:ea typeface="Arial" pitchFamily="34" charset="-122"/>
-                <a:cs typeface="Arial" pitchFamily="34" charset="-120"/>
+                <a:latin typeface="Golos Text" pitchFamily="34" charset="0"/>
+                <a:ea typeface="Golos Text" pitchFamily="34" charset="-122"/>
+                <a:cs typeface="Golos Text" pitchFamily="34" charset="-120"/>
               </a:rPr>
               <a:t>Вложения</a:t>
             </a:r>
@@ -12110,8 +11846,8 @@
         </p:nvSpPr>
         <p:spPr>
           <a:xfrm>
-            <a:off x="5514975" y="4655790"/>
-            <a:ext cx="3457575" cy="676275"/>
+            <a:off x="5514975" y="4646265"/>
+            <a:ext cx="3457575" cy="704850"/>
           </a:xfrm>
           <a:prstGeom prst="rect">
             <a:avLst/>
@@ -12133,9 +11869,9 @@
                 <a:solidFill>
                   <a:srgbClr val="16232B"/>
                 </a:solidFill>
-                <a:latin typeface="Arial" pitchFamily="34" charset="0"/>
-                <a:ea typeface="Arial" pitchFamily="34" charset="-122"/>
-                <a:cs typeface="Arial" pitchFamily="34" charset="-120"/>
+                <a:latin typeface="Golos Text" pitchFamily="34" charset="0"/>
+                <a:ea typeface="Golos Text" pitchFamily="34" charset="-122"/>
+                <a:cs typeface="Golos Text" pitchFamily="34" charset="-120"/>
               </a:rPr>
               <a:t>58 </a:t>
             </a:r>
@@ -12147,9 +11883,9 @@
                 <a:solidFill>
                   <a:srgbClr val="7B8C82"/>
                 </a:solidFill>
-                <a:latin typeface="Arial" pitchFamily="34" charset="0"/>
-                <a:ea typeface="Arial" pitchFamily="34" charset="-122"/>
-                <a:cs typeface="Arial" pitchFamily="34" charset="-120"/>
+                <a:latin typeface="Golos Text" pitchFamily="34" charset="0"/>
+                <a:ea typeface="Golos Text" pitchFamily="34" charset="-122"/>
+                <a:cs typeface="Golos Text" pitchFamily="34" charset="-120"/>
               </a:rPr>
               <a:t>млн ₸</a:t>
             </a:r>
@@ -12165,7 +11901,7 @@
         </p:nvSpPr>
         <p:spPr>
           <a:xfrm>
-            <a:off x="5514975" y="5370165"/>
+            <a:off x="5514975" y="5389215"/>
             <a:ext cx="3457575" cy="314325"/>
           </a:xfrm>
           <a:prstGeom prst="rect">
@@ -12188,9 +11924,9 @@
                 <a:solidFill>
                   <a:srgbClr val="7B8C82"/>
                 </a:solidFill>
-                <a:latin typeface="Arial" pitchFamily="34" charset="0"/>
-                <a:ea typeface="Arial" pitchFamily="34" charset="-122"/>
-                <a:cs typeface="Arial" pitchFamily="34" charset="-120"/>
+                <a:latin typeface="Golos Text" pitchFamily="34" charset="0"/>
+                <a:ea typeface="Golos Text" pitchFamily="34" charset="-122"/>
+                <a:cs typeface="Golos Text" pitchFamily="34" charset="-120"/>
               </a:rPr>
               <a:t>партия 40 + регистрация 18</a:t>
             </a:r>
@@ -12206,12 +11942,12 @@
         </p:nvSpPr>
         <p:spPr>
           <a:xfrm>
-            <a:off x="9277350" y="3874740"/>
-            <a:ext cx="3848100" cy="2400300"/>
+            <a:off x="9277350" y="3865215"/>
+            <a:ext cx="3848100" cy="2433638"/>
           </a:xfrm>
           <a:prstGeom prst="roundRect">
             <a:avLst>
-              <a:gd name="adj" fmla="val 7143"/>
+              <a:gd name="adj" fmla="val 7045"/>
             </a:avLst>
           </a:prstGeom>
           <a:solidFill>
@@ -12224,10 +11960,6 @@
             <a:prstDash val="solid"/>
           </a:ln>
         </p:spPr>
-        <p:txBody>
-          <a:bodyPr/>
-          <a:p/>
-        </p:txBody>
       </p:sp>
       <p:sp>
         <p:nvSpPr>
@@ -12237,7 +11969,7 @@
         </p:nvSpPr>
         <p:spPr>
           <a:xfrm>
-            <a:off x="9629775" y="4246215"/>
+            <a:off x="9629775" y="4236690"/>
             <a:ext cx="3457575" cy="314325"/>
           </a:xfrm>
           <a:prstGeom prst="rect">
@@ -12260,9 +11992,9 @@
                 <a:solidFill>
                   <a:srgbClr val="7B8C82"/>
                 </a:solidFill>
-                <a:latin typeface="Arial" pitchFamily="34" charset="0"/>
-                <a:ea typeface="Arial" pitchFamily="34" charset="-122"/>
-                <a:cs typeface="Arial" pitchFamily="34" charset="-120"/>
+                <a:latin typeface="Golos Text" pitchFamily="34" charset="0"/>
+                <a:ea typeface="Golos Text" pitchFamily="34" charset="-122"/>
+                <a:cs typeface="Golos Text" pitchFamily="34" charset="-120"/>
               </a:rPr>
               <a:t>Маржа в рознице</a:t>
             </a:r>
@@ -12278,8 +12010,8 @@
         </p:nvSpPr>
         <p:spPr>
           <a:xfrm>
-            <a:off x="9629775" y="4655790"/>
-            <a:ext cx="3457575" cy="676275"/>
+            <a:off x="9629775" y="4646265"/>
+            <a:ext cx="3457575" cy="709613"/>
           </a:xfrm>
           <a:prstGeom prst="rect">
             <a:avLst/>
@@ -12301,9 +12033,9 @@
                 <a:solidFill>
                   <a:srgbClr val="0E7A50"/>
                 </a:solidFill>
-                <a:latin typeface="Arial" pitchFamily="34" charset="0"/>
-                <a:ea typeface="Arial" pitchFamily="34" charset="-122"/>
-                <a:cs typeface="Arial" pitchFamily="34" charset="-120"/>
+                <a:latin typeface="Golos Text" pitchFamily="34" charset="0"/>
+                <a:ea typeface="Golos Text" pitchFamily="34" charset="-122"/>
+                <a:cs typeface="Golos Text" pitchFamily="34" charset="-120"/>
               </a:rPr>
               <a:t>≈ 8 900 ₸</a:t>
             </a:r>
@@ -12319,7 +12051,7 @@
         </p:nvSpPr>
         <p:spPr>
           <a:xfrm>
-            <a:off x="9629775" y="5370165"/>
+            <a:off x="9629775" y="5393978"/>
             <a:ext cx="3457575" cy="314325"/>
           </a:xfrm>
           <a:prstGeom prst="rect">
@@ -12342,9 +12074,9 @@
                 <a:solidFill>
                   <a:srgbClr val="7B8C82"/>
                 </a:solidFill>
-                <a:latin typeface="Arial" pitchFamily="34" charset="0"/>
-                <a:ea typeface="Arial" pitchFamily="34" charset="-122"/>
-                <a:cs typeface="Arial" pitchFamily="34" charset="-120"/>
+                <a:latin typeface="Golos Text" pitchFamily="34" charset="0"/>
+                <a:ea typeface="Golos Text" pitchFamily="34" charset="-122"/>
+                <a:cs typeface="Golos Text" pitchFamily="34" charset="-120"/>
               </a:rPr>
               <a:t>за вычетом комиссии Kaspi</a:t>
             </a:r>
@@ -12360,12 +12092,12 @@
         </p:nvSpPr>
         <p:spPr>
           <a:xfrm>
-            <a:off x="13392150" y="3874740"/>
-            <a:ext cx="3848100" cy="2400300"/>
+            <a:off x="13392150" y="3865215"/>
+            <a:ext cx="3848100" cy="2433638"/>
           </a:xfrm>
           <a:prstGeom prst="roundRect">
             <a:avLst>
-              <a:gd name="adj" fmla="val 7143"/>
+              <a:gd name="adj" fmla="val 7045"/>
             </a:avLst>
           </a:prstGeom>
           <a:solidFill>
@@ -12373,10 +12105,6 @@
           </a:solidFill>
           <a:ln/>
         </p:spPr>
-        <p:txBody>
-          <a:bodyPr/>
-          <a:p/>
-        </p:txBody>
       </p:sp>
       <p:sp>
         <p:nvSpPr>
@@ -12386,7 +12114,7 @@
         </p:nvSpPr>
         <p:spPr>
           <a:xfrm>
-            <a:off x="13735050" y="4236690"/>
+            <a:off x="13735050" y="4227165"/>
             <a:ext cx="3478530" cy="314325"/>
           </a:xfrm>
           <a:prstGeom prst="rect">
@@ -12409,9 +12137,9 @@
                 <a:solidFill>
                   <a:srgbClr val="BEDCCB"/>
                 </a:solidFill>
-                <a:latin typeface="Arial" pitchFamily="34" charset="0"/>
-                <a:ea typeface="Arial" pitchFamily="34" charset="-122"/>
-                <a:cs typeface="Arial" pitchFamily="34" charset="-120"/>
+                <a:latin typeface="Golos Text" pitchFamily="34" charset="0"/>
+                <a:ea typeface="Golos Text" pitchFamily="34" charset="-122"/>
+                <a:cs typeface="Golos Text" pitchFamily="34" charset="-120"/>
               </a:rPr>
               <a:t>Выручка сервиса</a:t>
             </a:r>
@@ -12427,8 +12155,8 @@
         </p:nvSpPr>
         <p:spPr>
           <a:xfrm>
-            <a:off x="13735050" y="4646265"/>
-            <a:ext cx="3478530" cy="676275"/>
+            <a:off x="13735050" y="4636740"/>
+            <a:ext cx="3478530" cy="709613"/>
           </a:xfrm>
           <a:prstGeom prst="rect">
             <a:avLst/>
@@ -12450,9 +12178,9 @@
                 <a:solidFill>
                   <a:srgbClr val="FFFFFF"/>
                 </a:solidFill>
-                <a:latin typeface="Arial" pitchFamily="34" charset="0"/>
-                <a:ea typeface="Arial" pitchFamily="34" charset="-122"/>
-                <a:cs typeface="Arial" pitchFamily="34" charset="-120"/>
+                <a:latin typeface="Golos Text" pitchFamily="34" charset="0"/>
+                <a:ea typeface="Golos Text" pitchFamily="34" charset="-122"/>
+                <a:cs typeface="Golos Text" pitchFamily="34" charset="-120"/>
               </a:rPr>
               <a:t>≈ 4 </a:t>
             </a:r>
@@ -12464,9 +12192,9 @@
                 <a:solidFill>
                   <a:srgbClr val="BEDCCB"/>
                 </a:solidFill>
-                <a:latin typeface="Arial" pitchFamily="34" charset="0"/>
-                <a:ea typeface="Arial" pitchFamily="34" charset="-122"/>
-                <a:cs typeface="Arial" pitchFamily="34" charset="-120"/>
+                <a:latin typeface="Golos Text" pitchFamily="34" charset="0"/>
+                <a:ea typeface="Golos Text" pitchFamily="34" charset="-122"/>
+                <a:cs typeface="Golos Text" pitchFamily="34" charset="-120"/>
               </a:rPr>
               <a:t>млн ₸/мес</a:t>
             </a:r>
@@ -12482,7 +12210,7 @@
         </p:nvSpPr>
         <p:spPr>
           <a:xfrm>
-            <a:off x="13735050" y="5360640"/>
+            <a:off x="13735050" y="5384453"/>
             <a:ext cx="3257169" cy="590550"/>
           </a:xfrm>
           <a:prstGeom prst="rect">
@@ -12505,9 +12233,9 @@
                 <a:solidFill>
                   <a:srgbClr val="CFE7DB"/>
                 </a:solidFill>
-                <a:latin typeface="Arial" pitchFamily="34" charset="0"/>
-                <a:ea typeface="Arial" pitchFamily="34" charset="-122"/>
-                <a:cs typeface="Arial" pitchFamily="34" charset="-120"/>
+                <a:latin typeface="Golos Text" pitchFamily="34" charset="0"/>
+                <a:ea typeface="Golos Text" pitchFamily="34" charset="-122"/>
+                <a:cs typeface="Golos Text" pitchFamily="34" charset="-120"/>
               </a:rPr>
               <a:t>не заканчивается с партией</a:t>
             </a:r>
@@ -12523,7 +12251,7 @@
         </p:nvSpPr>
         <p:spPr>
           <a:xfrm>
-            <a:off x="1047750" y="6694140"/>
+            <a:off x="1047750" y="6717953"/>
             <a:ext cx="16192500" cy="1085850"/>
           </a:xfrm>
           <a:prstGeom prst="roundRect">
@@ -12541,10 +12269,6 @@
             <a:prstDash val="solid"/>
           </a:ln>
         </p:spPr>
-        <p:txBody>
-          <a:bodyPr/>
-          <a:p/>
-        </p:txBody>
       </p:sp>
       <p:sp>
         <p:nvSpPr>
@@ -12554,8 +12278,8 @@
         </p:nvSpPr>
         <p:spPr>
           <a:xfrm>
-            <a:off x="1438275" y="7089428"/>
-            <a:ext cx="3129089" cy="333375"/>
+            <a:off x="1438275" y="7106096"/>
+            <a:ext cx="3393237" cy="347663"/>
           </a:xfrm>
           <a:prstGeom prst="rect">
             <a:avLst/>
@@ -12577,9 +12301,9 @@
                 <a:solidFill>
                   <a:srgbClr val="0B3D2C"/>
                 </a:solidFill>
-                <a:latin typeface="Arial" pitchFamily="34" charset="0"/>
-                <a:ea typeface="Arial" pitchFamily="34" charset="-122"/>
-                <a:cs typeface="Arial" pitchFamily="34" charset="-120"/>
+                <a:latin typeface="Golos Text" pitchFamily="34" charset="0"/>
+                <a:ea typeface="Golos Text" pitchFamily="34" charset="-122"/>
+                <a:cs typeface="Golos Text" pitchFamily="34" charset="-120"/>
               </a:rPr>
               <a:t>Себестоимость 4 026 ₸:</a:t>
             </a:r>
@@ -12595,8 +12319,8 @@
         </p:nvSpPr>
         <p:spPr>
           <a:xfrm>
-            <a:off x="4435301" y="7027515"/>
-            <a:ext cx="10333137" cy="419100"/>
+            <a:off x="4675436" y="7051328"/>
+            <a:ext cx="10133781" cy="419100"/>
           </a:xfrm>
           <a:prstGeom prst="rect">
             <a:avLst/>
@@ -12606,10 +12330,6 @@
           </a:solidFill>
           <a:ln/>
         </p:spPr>
-        <p:txBody>
-          <a:bodyPr/>
-          <a:p/>
-        </p:txBody>
       </p:sp>
       <p:sp>
         <p:nvSpPr>
@@ -12619,8 +12339,8 @@
         </p:nvSpPr>
         <p:spPr>
           <a:xfrm>
-            <a:off x="4606751" y="7027515"/>
-            <a:ext cx="10471681" cy="457200"/>
+            <a:off x="4846886" y="7051328"/>
+            <a:ext cx="10266345" cy="457200"/>
           </a:xfrm>
           <a:prstGeom prst="rect">
             <a:avLst/>
@@ -12642,9 +12362,9 @@
                 <a:solidFill>
                   <a:srgbClr val="FFFFFF"/>
                 </a:solidFill>
-                <a:latin typeface="Arial" pitchFamily="34" charset="0"/>
-                <a:ea typeface="Arial" pitchFamily="34" charset="-122"/>
-                <a:cs typeface="Arial" pitchFamily="34" charset="-120"/>
+                <a:latin typeface="Golos Text" pitchFamily="34" charset="0"/>
+                <a:ea typeface="Golos Text" pitchFamily="34" charset="-122"/>
+                <a:cs typeface="Golos Text" pitchFamily="34" charset="-120"/>
               </a:rPr>
               <a:t>Завод $7,5 — 3 488 ₸</a:t>
             </a:r>
@@ -12660,8 +12380,8 @@
         </p:nvSpPr>
         <p:spPr>
           <a:xfrm>
-            <a:off x="14768438" y="7027515"/>
-            <a:ext cx="857027" cy="419100"/>
+            <a:off x="14809217" y="7051328"/>
+            <a:ext cx="840209" cy="419100"/>
           </a:xfrm>
           <a:prstGeom prst="rect">
             <a:avLst/>
@@ -12671,10 +12391,6 @@
           </a:solidFill>
           <a:ln/>
         </p:spPr>
-        <p:txBody>
-          <a:bodyPr/>
-          <a:p/>
-        </p:txBody>
       </p:sp>
       <p:sp>
         <p:nvSpPr>
@@ -12684,8 +12400,8 @@
         </p:nvSpPr>
         <p:spPr>
           <a:xfrm>
-            <a:off x="15625465" y="7027515"/>
-            <a:ext cx="612130" cy="419100"/>
+            <a:off x="15649426" y="7051328"/>
+            <a:ext cx="600149" cy="419100"/>
           </a:xfrm>
           <a:prstGeom prst="rect">
             <a:avLst/>
@@ -12695,10 +12411,6 @@
           </a:solidFill>
           <a:ln/>
         </p:spPr>
-        <p:txBody>
-          <a:bodyPr/>
-          <a:p/>
-        </p:txBody>
       </p:sp>
       <p:sp>
         <p:nvSpPr>
@@ -12708,8 +12420,8 @@
         </p:nvSpPr>
         <p:spPr>
           <a:xfrm>
-            <a:off x="16237595" y="7027515"/>
-            <a:ext cx="612130" cy="419100"/>
+            <a:off x="16249576" y="7051328"/>
+            <a:ext cx="600149" cy="419100"/>
           </a:xfrm>
           <a:prstGeom prst="rect">
             <a:avLst/>
@@ -12719,10 +12431,6 @@
           </a:solidFill>
           <a:ln/>
         </p:spPr>
-        <p:txBody>
-          <a:bodyPr/>
-          <a:p/>
-        </p:txBody>
       </p:sp>
       <p:sp>
         <p:nvSpPr>
@@ -12732,7 +12440,7 @@
         </p:nvSpPr>
         <p:spPr>
           <a:xfrm>
-            <a:off x="1047750" y="7932390"/>
+            <a:off x="1047750" y="7956203"/>
             <a:ext cx="17811750" cy="314325"/>
           </a:xfrm>
           <a:prstGeom prst="rect">
@@ -12755,9 +12463,9 @@
                 <a:solidFill>
                   <a:srgbClr val="7B8C82"/>
                 </a:solidFill>
-                <a:latin typeface="Arial" pitchFamily="34" charset="0"/>
-                <a:ea typeface="Arial" pitchFamily="34" charset="-122"/>
-                <a:cs typeface="Arial" pitchFamily="34" charset="-120"/>
+                <a:latin typeface="Golos Text" pitchFamily="34" charset="0"/>
+                <a:ea typeface="Golos Text" pitchFamily="34" charset="-122"/>
+                <a:cs typeface="Golos Text" pitchFamily="34" charset="-120"/>
               </a:rPr>
               <a:t>Завод · упаковка 279 ₸ · логистика 186 ₸ · пошлина 73 ₸</a:t>
             </a:r>
@@ -12805,7 +12513,7 @@
         </p:nvSpPr>
         <p:spPr>
           <a:xfrm>
-            <a:off x="1047750" y="1636886"/>
+            <a:off x="1047750" y="1620217"/>
             <a:ext cx="17811750" cy="658118"/>
           </a:xfrm>
           <a:prstGeom prst="rect">
@@ -12822,7 +12530,7 @@
           <a:p>
             <a:pPr algn="l" indent="0" marL="0">
               <a:lnSpc>
-                <a:spcPct val="91690"/>
+                <a:spcPct val="87383"/>
               </a:lnSpc>
               <a:buNone/>
             </a:pPr>
@@ -12831,9 +12539,9 @@
                 <a:solidFill>
                   <a:srgbClr val="F2F7F4"/>
                 </a:solidFill>
-                <a:latin typeface="Arial" pitchFamily="34" charset="0"/>
-                <a:ea typeface="Arial" pitchFamily="34" charset="-122"/>
-                <a:cs typeface="Arial" pitchFamily="34" charset="-120"/>
+                <a:latin typeface="Golos Text" pitchFamily="34" charset="0"/>
+                <a:ea typeface="Golos Text" pitchFamily="34" charset="-122"/>
+                <a:cs typeface="Golos Text" pitchFamily="34" charset="-120"/>
               </a:rPr>
               <a:t>Деньги во времени</a:t>
             </a:r>
@@ -12849,12 +12557,12 @@
         </p:nvSpPr>
         <p:spPr>
           <a:xfrm>
-            <a:off x="1047750" y="2790304"/>
-            <a:ext cx="5194250" cy="2864123"/>
+            <a:off x="1047750" y="2773635"/>
+            <a:ext cx="5194250" cy="2897460"/>
           </a:xfrm>
           <a:prstGeom prst="roundRect">
             <a:avLst>
-              <a:gd name="adj" fmla="val 6651"/>
+              <a:gd name="adj" fmla="val 6575"/>
             </a:avLst>
           </a:prstGeom>
           <a:solidFill>
@@ -12867,10 +12575,6 @@
             <a:prstDash val="solid"/>
           </a:ln>
         </p:spPr>
-        <p:txBody>
-          <a:bodyPr/>
-          <a:p/>
-        </p:txBody>
       </p:sp>
       <p:sp>
         <p:nvSpPr>
@@ -12880,8 +12584,8 @@
         </p:nvSpPr>
         <p:spPr>
           <a:xfrm>
-            <a:off x="1495425" y="3218929"/>
-            <a:ext cx="4728790" cy="871538"/>
+            <a:off x="1495425" y="3202260"/>
+            <a:ext cx="4728790" cy="904875"/>
           </a:xfrm>
           <a:prstGeom prst="rect">
             <a:avLst/>
@@ -12903,9 +12607,9 @@
                 <a:solidFill>
                   <a:srgbClr val="3ECF8E"/>
                 </a:solidFill>
-                <a:latin typeface="Arial" pitchFamily="34" charset="0"/>
-                <a:ea typeface="Arial" pitchFamily="34" charset="-122"/>
-                <a:cs typeface="Arial" pitchFamily="34" charset="-120"/>
+                <a:latin typeface="Golos Text" pitchFamily="34" charset="0"/>
+                <a:ea typeface="Golos Text" pitchFamily="34" charset="-122"/>
+                <a:cs typeface="Golos Text" pitchFamily="34" charset="-120"/>
               </a:rPr>
               <a:t>15 мес</a:t>
             </a:r>
@@ -12921,7 +12625,7 @@
         </p:nvSpPr>
         <p:spPr>
           <a:xfrm>
-            <a:off x="1495425" y="4185717"/>
+            <a:off x="1495425" y="4202385"/>
             <a:ext cx="4427867" cy="1078185"/>
           </a:xfrm>
           <a:prstGeom prst="rect">
@@ -12938,7 +12642,7 @@
           <a:p>
             <a:pPr algn="l" indent="0" marL="0">
               <a:lnSpc>
-                <a:spcPct val="121333"/>
+                <a:spcPct val="117419"/>
               </a:lnSpc>
               <a:buNone/>
             </a:pPr>
@@ -12947,9 +12651,9 @@
                 <a:solidFill>
                   <a:srgbClr val="CFE7DB"/>
                 </a:solidFill>
-                <a:latin typeface="Arial" pitchFamily="34" charset="0"/>
-                <a:ea typeface="Arial" pitchFamily="34" charset="-122"/>
-                <a:cs typeface="Arial" pitchFamily="34" charset="-120"/>
+                <a:latin typeface="Golos Text" pitchFamily="34" charset="0"/>
+                <a:ea typeface="Golos Text" pitchFamily="34" charset="-122"/>
+                <a:cs typeface="Golos Text" pitchFamily="34" charset="-120"/>
               </a:rPr>
               <a:t>вложения без выручки: производство, регистрация, разработка</a:t>
             </a:r>
@@ -12965,12 +12669,12 @@
         </p:nvSpPr>
         <p:spPr>
           <a:xfrm>
-            <a:off x="6546800" y="2790304"/>
-            <a:ext cx="5194325" cy="2864123"/>
+            <a:off x="6546800" y="2773635"/>
+            <a:ext cx="5194325" cy="2897460"/>
           </a:xfrm>
           <a:prstGeom prst="roundRect">
             <a:avLst>
-              <a:gd name="adj" fmla="val 6651"/>
+              <a:gd name="adj" fmla="val 6575"/>
             </a:avLst>
           </a:prstGeom>
           <a:solidFill>
@@ -12983,10 +12687,6 @@
             <a:prstDash val="solid"/>
           </a:ln>
         </p:spPr>
-        <p:txBody>
-          <a:bodyPr/>
-          <a:p/>
-        </p:txBody>
       </p:sp>
       <p:sp>
         <p:nvSpPr>
@@ -12996,8 +12696,8 @@
         </p:nvSpPr>
         <p:spPr>
           <a:xfrm>
-            <a:off x="6994475" y="3218929"/>
-            <a:ext cx="4728872" cy="871538"/>
+            <a:off x="6994475" y="3202260"/>
+            <a:ext cx="4728872" cy="904875"/>
           </a:xfrm>
           <a:prstGeom prst="rect">
             <a:avLst/>
@@ -13019,9 +12719,9 @@
                 <a:solidFill>
                   <a:srgbClr val="3ECF8E"/>
                 </a:solidFill>
-                <a:latin typeface="Arial" pitchFamily="34" charset="0"/>
-                <a:ea typeface="Arial" pitchFamily="34" charset="-122"/>
-                <a:cs typeface="Arial" pitchFamily="34" charset="-120"/>
+                <a:latin typeface="Golos Text" pitchFamily="34" charset="0"/>
+                <a:ea typeface="Golos Text" pitchFamily="34" charset="-122"/>
+                <a:cs typeface="Golos Text" pitchFamily="34" charset="-120"/>
               </a:rPr>
               <a:t>21 мес</a:t>
             </a:r>
@@ -13037,7 +12737,7 @@
         </p:nvSpPr>
         <p:spPr>
           <a:xfrm>
-            <a:off x="6994475" y="4185717"/>
+            <a:off x="6994475" y="4202385"/>
             <a:ext cx="4427944" cy="731490"/>
           </a:xfrm>
           <a:prstGeom prst="rect">
@@ -13054,7 +12754,7 @@
           <a:p>
             <a:pPr algn="l" indent="0" marL="0">
               <a:lnSpc>
-                <a:spcPct val="121333"/>
+                <a:spcPct val="117419"/>
               </a:lnSpc>
               <a:buNone/>
             </a:pPr>
@@ -13063,9 +12763,9 @@
                 <a:solidFill>
                   <a:srgbClr val="CFE7DB"/>
                 </a:solidFill>
-                <a:latin typeface="Arial" pitchFamily="34" charset="0"/>
-                <a:ea typeface="Arial" pitchFamily="34" charset="-122"/>
-                <a:cs typeface="Arial" pitchFamily="34" charset="-120"/>
+                <a:latin typeface="Golos Text" pitchFamily="34" charset="0"/>
+                <a:ea typeface="Golos Text" pitchFamily="34" charset="-122"/>
+                <a:cs typeface="Golos Text" pitchFamily="34" charset="-120"/>
               </a:rPr>
               <a:t>выход в ноль от подписания контракта с заводом</a:t>
             </a:r>
@@ -13081,12 +12781,12 @@
         </p:nvSpPr>
         <p:spPr>
           <a:xfrm>
-            <a:off x="12045925" y="2790304"/>
-            <a:ext cx="5194250" cy="2864123"/>
+            <a:off x="12045925" y="2773635"/>
+            <a:ext cx="5194250" cy="2897460"/>
           </a:xfrm>
           <a:prstGeom prst="roundRect">
             <a:avLst>
-              <a:gd name="adj" fmla="val 6651"/>
+              <a:gd name="adj" fmla="val 6575"/>
             </a:avLst>
           </a:prstGeom>
           <a:solidFill>
@@ -13099,10 +12799,6 @@
             <a:prstDash val="solid"/>
           </a:ln>
         </p:spPr>
-        <p:txBody>
-          <a:bodyPr/>
-          <a:p/>
-        </p:txBody>
       </p:sp>
       <p:sp>
         <p:nvSpPr>
@@ -13112,8 +12808,8 @@
         </p:nvSpPr>
         <p:spPr>
           <a:xfrm>
-            <a:off x="12493600" y="3218929"/>
-            <a:ext cx="4728790" cy="871538"/>
+            <a:off x="12493600" y="3202260"/>
+            <a:ext cx="4728790" cy="904875"/>
           </a:xfrm>
           <a:prstGeom prst="rect">
             <a:avLst/>
@@ -13135,9 +12831,9 @@
                 <a:solidFill>
                   <a:srgbClr val="3ECF8E"/>
                 </a:solidFill>
-                <a:latin typeface="Arial" pitchFamily="34" charset="0"/>
-                <a:ea typeface="Arial" pitchFamily="34" charset="-122"/>
-                <a:cs typeface="Arial" pitchFamily="34" charset="-120"/>
+                <a:latin typeface="Golos Text" pitchFamily="34" charset="0"/>
+                <a:ea typeface="Golos Text" pitchFamily="34" charset="-122"/>
+                <a:cs typeface="Golos Text" pitchFamily="34" charset="-120"/>
               </a:rPr>
               <a:t>+20 млн</a:t>
             </a:r>
@@ -13153,7 +12849,7 @@
         </p:nvSpPr>
         <p:spPr>
           <a:xfrm>
-            <a:off x="12493600" y="4185717"/>
+            <a:off x="12493600" y="4202385"/>
             <a:ext cx="4427867" cy="731490"/>
           </a:xfrm>
           <a:prstGeom prst="rect">
@@ -13170,7 +12866,7 @@
           <a:p>
             <a:pPr algn="l" indent="0" marL="0">
               <a:lnSpc>
-                <a:spcPct val="121333"/>
+                <a:spcPct val="117419"/>
               </a:lnSpc>
               <a:buNone/>
             </a:pPr>
@@ -13179,9 +12875,9 @@
                 <a:solidFill>
                   <a:srgbClr val="CFE7DB"/>
                 </a:solidFill>
-                <a:latin typeface="Arial" pitchFamily="34" charset="0"/>
-                <a:ea typeface="Arial" pitchFamily="34" charset="-122"/>
-                <a:cs typeface="Arial" pitchFamily="34" charset="-120"/>
+                <a:latin typeface="Golos Text" pitchFamily="34" charset="0"/>
+                <a:ea typeface="Golos Text" pitchFamily="34" charset="-122"/>
+                <a:cs typeface="Golos Text" pitchFamily="34" charset="-120"/>
               </a:rPr>
               <a:t>результат к 24 мес · при партии 20 тыс — +94 млн ₸</a:t>
             </a:r>
@@ -13197,7 +12893,7 @@
         </p:nvSpPr>
         <p:spPr>
           <a:xfrm>
-            <a:off x="1047750" y="8226177"/>
+            <a:off x="1047750" y="8242846"/>
             <a:ext cx="16192500" cy="19050"/>
           </a:xfrm>
           <a:prstGeom prst="rect">
@@ -13210,10 +12906,6 @@
           </a:solidFill>
           <a:ln/>
         </p:spPr>
-        <p:txBody>
-          <a:bodyPr/>
-          <a:p/>
-        </p:txBody>
       </p:sp>
       <p:sp>
         <p:nvSpPr>
@@ -13223,7 +12915,7 @@
         </p:nvSpPr>
         <p:spPr>
           <a:xfrm>
-            <a:off x="1047750" y="7926139"/>
+            <a:off x="1047750" y="7942808"/>
             <a:ext cx="1026096" cy="300038"/>
           </a:xfrm>
           <a:custGeom>
@@ -13260,10 +12952,6 @@
           </a:solidFill>
           <a:ln/>
         </p:spPr>
-        <p:txBody>
-          <a:bodyPr/>
-          <a:p/>
-        </p:txBody>
       </p:sp>
       <p:sp>
         <p:nvSpPr>
@@ -13273,7 +12961,7 @@
         </p:nvSpPr>
         <p:spPr>
           <a:xfrm>
-            <a:off x="2130996" y="7666137"/>
+            <a:off x="2130996" y="7682805"/>
             <a:ext cx="1026170" cy="560040"/>
           </a:xfrm>
           <a:custGeom>
@@ -13310,10 +12998,6 @@
           </a:solidFill>
           <a:ln/>
         </p:spPr>
-        <p:txBody>
-          <a:bodyPr/>
-          <a:p/>
-        </p:txBody>
       </p:sp>
       <p:sp>
         <p:nvSpPr>
@@ -13323,7 +13007,7 @@
         </p:nvSpPr>
         <p:spPr>
           <a:xfrm>
-            <a:off x="3214315" y="7386117"/>
+            <a:off x="3214315" y="7402785"/>
             <a:ext cx="1026096" cy="840060"/>
           </a:xfrm>
           <a:custGeom>
@@ -13360,10 +13044,6 @@
           </a:solidFill>
           <a:ln/>
         </p:spPr>
-        <p:txBody>
-          <a:bodyPr/>
-          <a:p/>
-        </p:txBody>
       </p:sp>
       <p:sp>
         <p:nvSpPr>
@@ -13373,7 +13053,7 @@
         </p:nvSpPr>
         <p:spPr>
           <a:xfrm>
-            <a:off x="4297561" y="7026027"/>
+            <a:off x="4297561" y="7042696"/>
             <a:ext cx="1026170" cy="1200150"/>
           </a:xfrm>
           <a:custGeom>
@@ -13410,10 +13090,6 @@
           </a:solidFill>
           <a:ln/>
         </p:spPr>
-        <p:txBody>
-          <a:bodyPr/>
-          <a:p/>
-        </p:txBody>
       </p:sp>
       <p:sp>
         <p:nvSpPr>
@@ -13423,7 +13099,7 @@
         </p:nvSpPr>
         <p:spPr>
           <a:xfrm>
-            <a:off x="5380881" y="6666012"/>
+            <a:off x="5380881" y="6682680"/>
             <a:ext cx="1026170" cy="1560165"/>
           </a:xfrm>
           <a:custGeom>
@@ -13460,10 +13136,6 @@
           </a:solidFill>
           <a:ln/>
         </p:spPr>
-        <p:txBody>
-          <a:bodyPr/>
-          <a:p/>
-        </p:txBody>
       </p:sp>
       <p:sp>
         <p:nvSpPr>
@@ -13473,7 +13145,7 @@
         </p:nvSpPr>
         <p:spPr>
           <a:xfrm>
-            <a:off x="6464201" y="6826002"/>
+            <a:off x="6464201" y="6842671"/>
             <a:ext cx="1026170" cy="1400175"/>
           </a:xfrm>
           <a:custGeom>
@@ -13510,10 +13182,6 @@
           </a:solidFill>
           <a:ln/>
         </p:spPr>
-        <p:txBody>
-          <a:bodyPr/>
-          <a:p/>
-        </p:txBody>
       </p:sp>
       <p:sp>
         <p:nvSpPr>
@@ -13523,7 +13191,7 @@
         </p:nvSpPr>
         <p:spPr>
           <a:xfrm>
-            <a:off x="7547521" y="7226052"/>
+            <a:off x="7547521" y="7242721"/>
             <a:ext cx="1026170" cy="1000125"/>
           </a:xfrm>
           <a:custGeom>
@@ -13560,10 +13228,6 @@
           </a:solidFill>
           <a:ln/>
         </p:spPr>
-        <p:txBody>
-          <a:bodyPr/>
-          <a:p/>
-        </p:txBody>
       </p:sp>
       <p:sp>
         <p:nvSpPr>
@@ -13573,7 +13237,7 @@
         </p:nvSpPr>
         <p:spPr>
           <a:xfrm>
-            <a:off x="8630841" y="7626102"/>
+            <a:off x="8630841" y="7642771"/>
             <a:ext cx="1026170" cy="600075"/>
           </a:xfrm>
           <a:custGeom>
@@ -13610,10 +13274,6 @@
           </a:solidFill>
           <a:ln/>
         </p:spPr>
-        <p:txBody>
-          <a:bodyPr/>
-          <a:p/>
-        </p:txBody>
       </p:sp>
       <p:sp>
         <p:nvSpPr>
@@ -13623,7 +13283,7 @@
         </p:nvSpPr>
         <p:spPr>
           <a:xfrm>
-            <a:off x="9714161" y="8026152"/>
+            <a:off x="9714161" y="8042821"/>
             <a:ext cx="1026170" cy="200025"/>
           </a:xfrm>
           <a:custGeom>
@@ -13660,10 +13320,6 @@
           </a:solidFill>
           <a:ln/>
         </p:spPr>
-        <p:txBody>
-          <a:bodyPr/>
-          <a:p/>
-        </p:txBody>
       </p:sp>
       <p:sp>
         <p:nvSpPr>
@@ -13673,7 +13329,7 @@
         </p:nvSpPr>
         <p:spPr>
           <a:xfrm>
-            <a:off x="10797480" y="7986192"/>
+            <a:off x="10797480" y="8002860"/>
             <a:ext cx="1026170" cy="239985"/>
           </a:xfrm>
           <a:custGeom>
@@ -13710,10 +13366,6 @@
           </a:solidFill>
           <a:ln/>
         </p:spPr>
-        <p:txBody>
-          <a:bodyPr/>
-          <a:p/>
-        </p:txBody>
       </p:sp>
       <p:sp>
         <p:nvSpPr>
@@ -13723,7 +13375,7 @@
         </p:nvSpPr>
         <p:spPr>
           <a:xfrm>
-            <a:off x="11880800" y="7746132"/>
+            <a:off x="11880800" y="7762801"/>
             <a:ext cx="1026170" cy="480045"/>
           </a:xfrm>
           <a:custGeom>
@@ -13760,10 +13412,6 @@
           </a:solidFill>
           <a:ln/>
         </p:spPr>
-        <p:txBody>
-          <a:bodyPr/>
-          <a:p/>
-        </p:txBody>
       </p:sp>
       <p:sp>
         <p:nvSpPr>
@@ -13773,7 +13421,7 @@
         </p:nvSpPr>
         <p:spPr>
           <a:xfrm>
-            <a:off x="12964120" y="7506146"/>
+            <a:off x="12964120" y="7522815"/>
             <a:ext cx="1026170" cy="720030"/>
           </a:xfrm>
           <a:custGeom>
@@ -13810,10 +13458,6 @@
           </a:solidFill>
           <a:ln/>
         </p:spPr>
-        <p:txBody>
-          <a:bodyPr/>
-          <a:p/>
-        </p:txBody>
       </p:sp>
       <p:sp>
         <p:nvSpPr>
@@ -13823,7 +13467,7 @@
         </p:nvSpPr>
         <p:spPr>
           <a:xfrm>
-            <a:off x="14047440" y="7266087"/>
+            <a:off x="14047440" y="7282755"/>
             <a:ext cx="1026170" cy="960090"/>
           </a:xfrm>
           <a:custGeom>
@@ -13860,10 +13504,6 @@
           </a:solidFill>
           <a:ln/>
         </p:spPr>
-        <p:txBody>
-          <a:bodyPr/>
-          <a:p/>
-        </p:txBody>
       </p:sp>
       <p:sp>
         <p:nvSpPr>
@@ -13873,7 +13513,7 @@
         </p:nvSpPr>
         <p:spPr>
           <a:xfrm>
-            <a:off x="15130760" y="7026027"/>
+            <a:off x="15130760" y="7042696"/>
             <a:ext cx="1026170" cy="1200150"/>
           </a:xfrm>
           <a:custGeom>
@@ -13910,10 +13550,6 @@
           </a:solidFill>
           <a:ln/>
         </p:spPr>
-        <p:txBody>
-          <a:bodyPr/>
-          <a:p/>
-        </p:txBody>
       </p:sp>
       <p:sp>
         <p:nvSpPr>
@@ -13923,7 +13559,7 @@
         </p:nvSpPr>
         <p:spPr>
           <a:xfrm>
-            <a:off x="16214080" y="6746007"/>
+            <a:off x="16214080" y="6762676"/>
             <a:ext cx="1026170" cy="1480170"/>
           </a:xfrm>
           <a:custGeom>
@@ -13960,10 +13596,6 @@
           </a:solidFill>
           <a:ln/>
         </p:spPr>
-        <p:txBody>
-          <a:bodyPr/>
-          <a:p/>
-        </p:txBody>
       </p:sp>
       <p:sp>
         <p:nvSpPr>
@@ -13973,7 +13605,7 @@
         </p:nvSpPr>
         <p:spPr>
           <a:xfrm>
-            <a:off x="1047750" y="8378577"/>
+            <a:off x="1047750" y="8395246"/>
             <a:ext cx="763414" cy="309563"/>
           </a:xfrm>
           <a:prstGeom prst="rect">
@@ -13996,9 +13628,9 @@
                 <a:solidFill>
                   <a:srgbClr val="8FBBA3"/>
                 </a:solidFill>
-                <a:latin typeface="Courier New" pitchFamily="34" charset="0"/>
-                <a:ea typeface="Courier New" pitchFamily="34" charset="-122"/>
-                <a:cs typeface="Courier New" pitchFamily="34" charset="-120"/>
+                <a:latin typeface="Spline Sans Mono" pitchFamily="34" charset="0"/>
+                <a:ea typeface="Spline Sans Mono" pitchFamily="34" charset="-122"/>
+                <a:cs typeface="Spline Sans Mono" pitchFamily="34" charset="-120"/>
               </a:rPr>
               <a:t>мес 1</a:t>
             </a:r>
@@ -14014,7 +13646,7 @@
         </p:nvSpPr>
         <p:spPr>
           <a:xfrm>
-            <a:off x="7631906" y="8378577"/>
+            <a:off x="7631906" y="8395246"/>
             <a:ext cx="3175665" cy="309563"/>
           </a:xfrm>
           <a:prstGeom prst="rect">
@@ -14037,9 +13669,9 @@
                 <a:solidFill>
                   <a:srgbClr val="8FBBA3"/>
                 </a:solidFill>
-                <a:latin typeface="Courier New" pitchFamily="34" charset="0"/>
-                <a:ea typeface="Courier New" pitchFamily="34" charset="-122"/>
-                <a:cs typeface="Courier New" pitchFamily="34" charset="-120"/>
+                <a:latin typeface="Spline Sans Mono" pitchFamily="34" charset="0"/>
+                <a:ea typeface="Spline Sans Mono" pitchFamily="34" charset="-122"/>
+                <a:cs typeface="Spline Sans Mono" pitchFamily="34" charset="-120"/>
               </a:rPr>
               <a:t>старт продаж · мес 16</a:t>
             </a:r>
@@ -14055,7 +13687,7 @@
         </p:nvSpPr>
         <p:spPr>
           <a:xfrm>
-            <a:off x="16415817" y="8378577"/>
+            <a:off x="16415817" y="8395246"/>
             <a:ext cx="900633" cy="309563"/>
           </a:xfrm>
           <a:prstGeom prst="rect">
@@ -14078,9 +13710,9 @@
                 <a:solidFill>
                   <a:srgbClr val="8FBBA3"/>
                 </a:solidFill>
-                <a:latin typeface="Courier New" pitchFamily="34" charset="0"/>
-                <a:ea typeface="Courier New" pitchFamily="34" charset="-122"/>
-                <a:cs typeface="Courier New" pitchFamily="34" charset="-120"/>
+                <a:latin typeface="Spline Sans Mono" pitchFamily="34" charset="0"/>
+                <a:ea typeface="Spline Sans Mono" pitchFamily="34" charset="-122"/>
+                <a:cs typeface="Spline Sans Mono" pitchFamily="34" charset="-120"/>
               </a:rPr>
               <a:t>мес 36</a:t>
             </a:r>
